--- a/docs/slides/Week8_Recap.pptx
+++ b/docs/slides/Week8_Recap.pptx
@@ -5,17 +5,17 @@
     <p:sldMasterId id="2147485087" r:id="rId1"/>
   </p:sldMasterIdLst>
   <p:notesMasterIdLst>
-    <p:notesMasterId r:id="rId15"/>
+    <p:notesMasterId r:id="rId16"/>
   </p:notesMasterIdLst>
   <p:handoutMasterIdLst>
-    <p:handoutMasterId r:id="rId16"/>
+    <p:handoutMasterId r:id="rId17"/>
   </p:handoutMasterIdLst>
   <p:sldIdLst>
     <p:sldId id="256" r:id="rId2"/>
     <p:sldId id="605" r:id="rId3"/>
-    <p:sldId id="639" r:id="rId4"/>
-    <p:sldId id="640" r:id="rId5"/>
-    <p:sldId id="649" r:id="rId6"/>
+    <p:sldId id="649" r:id="rId4"/>
+    <p:sldId id="639" r:id="rId5"/>
+    <p:sldId id="640" r:id="rId6"/>
     <p:sldId id="641" r:id="rId7"/>
     <p:sldId id="607" r:id="rId8"/>
     <p:sldId id="648" r:id="rId9"/>
@@ -23,7 +23,8 @@
     <p:sldId id="646" r:id="rId11"/>
     <p:sldId id="647" r:id="rId12"/>
     <p:sldId id="602" r:id="rId13"/>
-    <p:sldId id="525" r:id="rId14"/>
+    <p:sldId id="651" r:id="rId14"/>
+    <p:sldId id="525" r:id="rId15"/>
   </p:sldIdLst>
   <p:sldSz cx="9144000" cy="6858000" type="screen4x3"/>
   <p:notesSz cx="7010400" cy="9296400"/>
@@ -185,1362 +186,712 @@
 </p:presentation>
 </file>
 
+<file path=ppt/revisionInfo.xml><?xml version="1.0" encoding="utf-8"?>
+<p1510:revInfo xmlns:a="http://schemas.openxmlformats.org/drawingml/2006/main" xmlns:r="http://schemas.openxmlformats.org/officeDocument/2006/relationships" xmlns:p1510="http://schemas.microsoft.com/office/powerpoint/2015/10/main">
+  <p1510:revLst>
+    <p1510:client id="{7F51D186-7A40-49A6-BFA1-7EEB630AE0AF}" v="111" dt="2026-03-17T03:46:18.937"/>
+  </p1510:revLst>
+</p1510:revInfo>
+</file>
+
 <file path=ppt/changesInfos/changesInfo1.xml><?xml version="1.0" encoding="utf-8"?>
 <pc:chgInfo xmlns:a="http://schemas.openxmlformats.org/drawingml/2006/main" xmlns:r="http://schemas.openxmlformats.org/officeDocument/2006/relationships" xmlns:ac="http://schemas.microsoft.com/office/drawing/2013/main/command" xmlns:pc="http://schemas.microsoft.com/office/powerpoint/2013/main/command">
   <pc:docChgLst>
-    <pc:chgData name="dcszjin@nus.edu.sg" userId="cd05a825-544c-438a-9ba1-08e63db50b47" providerId="ADAL" clId="{6F17B5A8-8938-4206-8B5F-1DF9007C99AC}"/>
+    <pc:chgData name="Zhao Jin" userId="cd05a825-544c-438a-9ba1-08e63db50b47" providerId="ADAL" clId="{5DF3A229-1965-414E-AF54-F4C37AC7DF68}"/>
     <pc:docChg chg="undo custSel addSld delSld modSld sldOrd">
-      <pc:chgData name="dcszjin@nus.edu.sg" userId="cd05a825-544c-438a-9ba1-08e63db50b47" providerId="ADAL" clId="{6F17B5A8-8938-4206-8B5F-1DF9007C99AC}" dt="2021-03-08T06:53:03.979" v="1111" actId="20577"/>
+      <pc:chgData name="Zhao Jin" userId="cd05a825-544c-438a-9ba1-08e63db50b47" providerId="ADAL" clId="{5DF3A229-1965-414E-AF54-F4C37AC7DF68}" dt="2026-03-17T03:46:20.950" v="1844"/>
       <pc:docMkLst>
         <pc:docMk/>
       </pc:docMkLst>
-      <pc:sldChg chg="modSp mod">
-        <pc:chgData name="dcszjin@nus.edu.sg" userId="cd05a825-544c-438a-9ba1-08e63db50b47" providerId="ADAL" clId="{6F17B5A8-8938-4206-8B5F-1DF9007C99AC}" dt="2021-03-01T07:08:40.699" v="1092" actId="1076"/>
-        <pc:sldMkLst>
-          <pc:docMk/>
-          <pc:sldMk cId="0" sldId="256"/>
-        </pc:sldMkLst>
-      </pc:sldChg>
-      <pc:sldChg chg="modSp mod">
-        <pc:chgData name="dcszjin@nus.edu.sg" userId="cd05a825-544c-438a-9ba1-08e63db50b47" providerId="ADAL" clId="{6F17B5A8-8938-4206-8B5F-1DF9007C99AC}" dt="2021-03-01T06:53:46.482" v="1091"/>
-        <pc:sldMkLst>
-          <pc:docMk/>
-          <pc:sldMk cId="4078418712" sldId="525"/>
-        </pc:sldMkLst>
-      </pc:sldChg>
-      <pc:sldChg chg="modSp add del">
-        <pc:chgData name="dcszjin@nus.edu.sg" userId="cd05a825-544c-438a-9ba1-08e63db50b47" providerId="ADAL" clId="{6F17B5A8-8938-4206-8B5F-1DF9007C99AC}" dt="2021-03-01T06:53:41.009" v="1088"/>
-        <pc:sldMkLst>
-          <pc:docMk/>
-          <pc:sldMk cId="1427618944" sldId="553"/>
-        </pc:sldMkLst>
-      </pc:sldChg>
-      <pc:sldChg chg="del">
-        <pc:chgData name="dcszjin@nus.edu.sg" userId="cd05a825-544c-438a-9ba1-08e63db50b47" providerId="ADAL" clId="{6F17B5A8-8938-4206-8B5F-1DF9007C99AC}" dt="2021-03-01T06:25:00.903" v="56" actId="47"/>
-        <pc:sldMkLst>
-          <pc:docMk/>
-          <pc:sldMk cId="1663851036" sldId="559"/>
-        </pc:sldMkLst>
-      </pc:sldChg>
-      <pc:sldChg chg="del">
-        <pc:chgData name="dcszjin@nus.edu.sg" userId="cd05a825-544c-438a-9ba1-08e63db50b47" providerId="ADAL" clId="{6F17B5A8-8938-4206-8B5F-1DF9007C99AC}" dt="2021-03-01T06:25:00.903" v="56" actId="47"/>
-        <pc:sldMkLst>
-          <pc:docMk/>
-          <pc:sldMk cId="1971208294" sldId="560"/>
-        </pc:sldMkLst>
-      </pc:sldChg>
-      <pc:sldChg chg="del">
-        <pc:chgData name="dcszjin@nus.edu.sg" userId="cd05a825-544c-438a-9ba1-08e63db50b47" providerId="ADAL" clId="{6F17B5A8-8938-4206-8B5F-1DF9007C99AC}" dt="2021-03-01T06:25:00.903" v="56" actId="47"/>
-        <pc:sldMkLst>
-          <pc:docMk/>
-          <pc:sldMk cId="894186310" sldId="564"/>
-        </pc:sldMkLst>
-      </pc:sldChg>
-      <pc:sldChg chg="del">
-        <pc:chgData name="dcszjin@nus.edu.sg" userId="cd05a825-544c-438a-9ba1-08e63db50b47" providerId="ADAL" clId="{6F17B5A8-8938-4206-8B5F-1DF9007C99AC}" dt="2021-03-01T06:25:00.903" v="56" actId="47"/>
-        <pc:sldMkLst>
-          <pc:docMk/>
-          <pc:sldMk cId="4156536479" sldId="590"/>
-        </pc:sldMkLst>
-      </pc:sldChg>
-      <pc:sldChg chg="del">
-        <pc:chgData name="dcszjin@nus.edu.sg" userId="cd05a825-544c-438a-9ba1-08e63db50b47" providerId="ADAL" clId="{6F17B5A8-8938-4206-8B5F-1DF9007C99AC}" dt="2021-03-01T06:25:00.903" v="56" actId="47"/>
-        <pc:sldMkLst>
-          <pc:docMk/>
-          <pc:sldMk cId="2217225800" sldId="594"/>
-        </pc:sldMkLst>
-      </pc:sldChg>
-      <pc:sldChg chg="del">
-        <pc:chgData name="dcszjin@nus.edu.sg" userId="cd05a825-544c-438a-9ba1-08e63db50b47" providerId="ADAL" clId="{6F17B5A8-8938-4206-8B5F-1DF9007C99AC}" dt="2021-03-01T06:25:00.903" v="56" actId="47"/>
-        <pc:sldMkLst>
-          <pc:docMk/>
-          <pc:sldMk cId="2419983458" sldId="595"/>
-        </pc:sldMkLst>
-      </pc:sldChg>
-      <pc:sldChg chg="addSp delSp modSp add mod ord delAnim">
-        <pc:chgData name="dcszjin@nus.edu.sg" userId="cd05a825-544c-438a-9ba1-08e63db50b47" providerId="ADAL" clId="{6F17B5A8-8938-4206-8B5F-1DF9007C99AC}" dt="2021-03-01T06:53:44.441" v="1090"/>
-        <pc:sldMkLst>
-          <pc:docMk/>
-          <pc:sldMk cId="1542002799" sldId="602"/>
-        </pc:sldMkLst>
-      </pc:sldChg>
-      <pc:sldChg chg="addSp delSp modSp add del mod addAnim delAnim">
-        <pc:chgData name="dcszjin@nus.edu.sg" userId="cd05a825-544c-438a-9ba1-08e63db50b47" providerId="ADAL" clId="{6F17B5A8-8938-4206-8B5F-1DF9007C99AC}" dt="2021-03-01T07:15:54.669" v="1096" actId="47"/>
-        <pc:sldMkLst>
-          <pc:docMk/>
-          <pc:sldMk cId="600747522" sldId="604"/>
-        </pc:sldMkLst>
-      </pc:sldChg>
-      <pc:sldChg chg="modSp add mod">
-        <pc:chgData name="dcszjin@nus.edu.sg" userId="cd05a825-544c-438a-9ba1-08e63db50b47" providerId="ADAL" clId="{6F17B5A8-8938-4206-8B5F-1DF9007C99AC}" dt="2021-03-01T06:53:31.297" v="1084"/>
+      <pc:sldChg chg="addSp delSp modSp mod addAnim delAnim modAnim">
+        <pc:chgData name="Zhao Jin" userId="cd05a825-544c-438a-9ba1-08e63db50b47" providerId="ADAL" clId="{5DF3A229-1965-414E-AF54-F4C37AC7DF68}" dt="2026-03-17T03:46:20.950" v="1844"/>
         <pc:sldMkLst>
           <pc:docMk/>
           <pc:sldMk cId="2489370454" sldId="605"/>
         </pc:sldMkLst>
-      </pc:sldChg>
-      <pc:sldChg chg="delSp modSp add mod">
-        <pc:chgData name="dcszjin@nus.edu.sg" userId="cd05a825-544c-438a-9ba1-08e63db50b47" providerId="ADAL" clId="{6F17B5A8-8938-4206-8B5F-1DF9007C99AC}" dt="2021-03-01T07:17:37.118" v="1107" actId="478"/>
-        <pc:sldMkLst>
-          <pc:docMk/>
-          <pc:sldMk cId="640598186" sldId="606"/>
-        </pc:sldMkLst>
-      </pc:sldChg>
-      <pc:sldChg chg="addSp delSp modSp add del mod delAnim modAnim">
-        <pc:chgData name="dcszjin@nus.edu.sg" userId="cd05a825-544c-438a-9ba1-08e63db50b47" providerId="ADAL" clId="{6F17B5A8-8938-4206-8B5F-1DF9007C99AC}" dt="2021-03-01T06:37:08.889" v="418" actId="47"/>
-        <pc:sldMkLst>
-          <pc:docMk/>
-          <pc:sldMk cId="4199745321" sldId="619"/>
-        </pc:sldMkLst>
-      </pc:sldChg>
-      <pc:sldChg chg="modSp add">
-        <pc:chgData name="dcszjin@nus.edu.sg" userId="cd05a825-544c-438a-9ba1-08e63db50b47" providerId="ADAL" clId="{6F17B5A8-8938-4206-8B5F-1DF9007C99AC}" dt="2021-03-01T06:53:33.809" v="1085"/>
-        <pc:sldMkLst>
-          <pc:docMk/>
-          <pc:sldMk cId="282410985" sldId="620"/>
-        </pc:sldMkLst>
-      </pc:sldChg>
-      <pc:sldChg chg="add del">
-        <pc:chgData name="dcszjin@nus.edu.sg" userId="cd05a825-544c-438a-9ba1-08e63db50b47" providerId="ADAL" clId="{6F17B5A8-8938-4206-8B5F-1DF9007C99AC}" dt="2021-03-01T06:34:44.863" v="242" actId="47"/>
-        <pc:sldMkLst>
-          <pc:docMk/>
-          <pc:sldMk cId="846468992" sldId="621"/>
-        </pc:sldMkLst>
-      </pc:sldChg>
-      <pc:sldChg chg="addSp modSp add mod">
-        <pc:chgData name="dcszjin@nus.edu.sg" userId="cd05a825-544c-438a-9ba1-08e63db50b47" providerId="ADAL" clId="{6F17B5A8-8938-4206-8B5F-1DF9007C99AC}" dt="2021-03-01T06:53:35.760" v="1086"/>
-        <pc:sldMkLst>
-          <pc:docMk/>
-          <pc:sldMk cId="3503582036" sldId="622"/>
-        </pc:sldMkLst>
-      </pc:sldChg>
-      <pc:sldChg chg="modSp add">
-        <pc:chgData name="dcszjin@nus.edu.sg" userId="cd05a825-544c-438a-9ba1-08e63db50b47" providerId="ADAL" clId="{6F17B5A8-8938-4206-8B5F-1DF9007C99AC}" dt="2021-03-01T06:53:37.536" v="1087"/>
-        <pc:sldMkLst>
-          <pc:docMk/>
-          <pc:sldMk cId="1258830549" sldId="635"/>
-        </pc:sldMkLst>
-      </pc:sldChg>
-      <pc:sldChg chg="delSp modSp add del mod delAnim">
-        <pc:chgData name="dcszjin@nus.edu.sg" userId="cd05a825-544c-438a-9ba1-08e63db50b47" providerId="ADAL" clId="{6F17B5A8-8938-4206-8B5F-1DF9007C99AC}" dt="2021-03-01T06:38:19.926" v="441" actId="47"/>
-        <pc:sldMkLst>
-          <pc:docMk/>
-          <pc:sldMk cId="1364216338" sldId="636"/>
-        </pc:sldMkLst>
-      </pc:sldChg>
-      <pc:sldChg chg="addSp delSp modSp add del mod">
-        <pc:chgData name="dcszjin@nus.edu.sg" userId="cd05a825-544c-438a-9ba1-08e63db50b47" providerId="ADAL" clId="{6F17B5A8-8938-4206-8B5F-1DF9007C99AC}" dt="2021-03-01T06:49:01.783" v="721" actId="47"/>
-        <pc:sldMkLst>
-          <pc:docMk/>
-          <pc:sldMk cId="3364444345" sldId="636"/>
-        </pc:sldMkLst>
-      </pc:sldChg>
-      <pc:sldChg chg="add del">
-        <pc:chgData name="dcszjin@nus.edu.sg" userId="cd05a825-544c-438a-9ba1-08e63db50b47" providerId="ADAL" clId="{6F17B5A8-8938-4206-8B5F-1DF9007C99AC}" dt="2021-03-01T06:41:43.577" v="611"/>
-        <pc:sldMkLst>
-          <pc:docMk/>
-          <pc:sldMk cId="1109647801" sldId="637"/>
-        </pc:sldMkLst>
-      </pc:sldChg>
-      <pc:sldChg chg="addSp modSp add mod">
-        <pc:chgData name="dcszjin@nus.edu.sg" userId="cd05a825-544c-438a-9ba1-08e63db50b47" providerId="ADAL" clId="{6F17B5A8-8938-4206-8B5F-1DF9007C99AC}" dt="2021-03-08T06:53:03.979" v="1111" actId="20577"/>
-        <pc:sldMkLst>
-          <pc:docMk/>
-          <pc:sldMk cId="1235845528" sldId="637"/>
-        </pc:sldMkLst>
-      </pc:sldChg>
-    </pc:docChg>
-  </pc:docChgLst>
-  <pc:docChgLst>
-    <pc:chgData name="Zhao Jin" userId="cd05a825-544c-438a-9ba1-08e63db50b47" providerId="ADAL" clId="{40B02829-7445-394A-990C-032942059FD9}"/>
-    <pc:docChg chg="custSel modSld">
-      <pc:chgData name="Zhao Jin" userId="cd05a825-544c-438a-9ba1-08e63db50b47" providerId="ADAL" clId="{40B02829-7445-394A-990C-032942059FD9}" dt="2021-01-18T05:50:34.611" v="4" actId="478"/>
-      <pc:docMkLst>
-        <pc:docMk/>
-      </pc:docMkLst>
-      <pc:sldChg chg="delSp">
-        <pc:chgData name="Zhao Jin" userId="cd05a825-544c-438a-9ba1-08e63db50b47" providerId="ADAL" clId="{40B02829-7445-394A-990C-032942059FD9}" dt="2021-01-18T05:50:34.611" v="4" actId="478"/>
-        <pc:sldMkLst>
-          <pc:docMk/>
-          <pc:sldMk cId="3871162519" sldId="525"/>
-        </pc:sldMkLst>
-      </pc:sldChg>
-      <pc:sldChg chg="modSp">
-        <pc:chgData name="Zhao Jin" userId="cd05a825-544c-438a-9ba1-08e63db50b47" providerId="ADAL" clId="{40B02829-7445-394A-990C-032942059FD9}" dt="2021-01-18T05:50:03.685" v="3" actId="122"/>
-        <pc:sldMkLst>
-          <pc:docMk/>
-          <pc:sldMk cId="770306953" sldId="526"/>
-        </pc:sldMkLst>
-      </pc:sldChg>
-      <pc:sldChg chg="modAnim">
-        <pc:chgData name="Zhao Jin" userId="cd05a825-544c-438a-9ba1-08e63db50b47" providerId="ADAL" clId="{40B02829-7445-394A-990C-032942059FD9}" dt="2021-01-18T05:49:08.491" v="0"/>
-        <pc:sldMkLst>
-          <pc:docMk/>
-          <pc:sldMk cId="4288789163" sldId="527"/>
-        </pc:sldMkLst>
-      </pc:sldChg>
-    </pc:docChg>
-  </pc:docChgLst>
-  <pc:docChgLst>
-    <pc:chgData name="Zhao Jin" userId="cd05a825-544c-438a-9ba1-08e63db50b47" providerId="ADAL" clId="{6A3951C8-7780-4031-8A2B-7971BC0F9707}"/>
-    <pc:docChg chg="modSld">
-      <pc:chgData name="Zhao Jin" userId="cd05a825-544c-438a-9ba1-08e63db50b47" providerId="ADAL" clId="{6A3951C8-7780-4031-8A2B-7971BC0F9707}" dt="2021-01-27T06:40:05.693" v="157" actId="20577"/>
-      <pc:docMkLst>
-        <pc:docMk/>
-      </pc:docMkLst>
-      <pc:sldChg chg="addSp modSp mod">
-        <pc:chgData name="Zhao Jin" userId="cd05a825-544c-438a-9ba1-08e63db50b47" providerId="ADAL" clId="{6A3951C8-7780-4031-8A2B-7971BC0F9707}" dt="2021-01-27T06:39:09.281" v="89" actId="1036"/>
-        <pc:sldMkLst>
-          <pc:docMk/>
-          <pc:sldMk cId="3949125736" sldId="548"/>
-        </pc:sldMkLst>
-      </pc:sldChg>
-      <pc:sldChg chg="addSp modSp mod">
-        <pc:chgData name="Zhao Jin" userId="cd05a825-544c-438a-9ba1-08e63db50b47" providerId="ADAL" clId="{6A3951C8-7780-4031-8A2B-7971BC0F9707}" dt="2021-01-27T06:40:05.693" v="157" actId="20577"/>
-        <pc:sldMkLst>
-          <pc:docMk/>
-          <pc:sldMk cId="2939077141" sldId="549"/>
-        </pc:sldMkLst>
-      </pc:sldChg>
-    </pc:docChg>
-  </pc:docChgLst>
-  <pc:docChgLst>
-    <pc:chgData name="Zhao Jin" userId="cd05a825-544c-438a-9ba1-08e63db50b47" providerId="ADAL" clId="{5DC527E6-ABEF-4CCC-BFCE-174E57066325}"/>
-    <pc:docChg chg="modSld modMainMaster">
-      <pc:chgData name="Zhao Jin" userId="cd05a825-544c-438a-9ba1-08e63db50b47" providerId="ADAL" clId="{5DC527E6-ABEF-4CCC-BFCE-174E57066325}" dt="2024-02-01T09:43:40.170" v="2"/>
-      <pc:docMkLst>
-        <pc:docMk/>
-      </pc:docMkLst>
-      <pc:sldChg chg="modSp">
-        <pc:chgData name="Zhao Jin" userId="cd05a825-544c-438a-9ba1-08e63db50b47" providerId="ADAL" clId="{5DC527E6-ABEF-4CCC-BFCE-174E57066325}" dt="2024-02-01T09:43:40.170" v="2"/>
-        <pc:sldMkLst>
-          <pc:docMk/>
-          <pc:sldMk cId="4078418712" sldId="525"/>
-        </pc:sldMkLst>
-      </pc:sldChg>
-      <pc:sldChg chg="modSp">
-        <pc:chgData name="Zhao Jin" userId="cd05a825-544c-438a-9ba1-08e63db50b47" providerId="ADAL" clId="{5DC527E6-ABEF-4CCC-BFCE-174E57066325}" dt="2024-02-01T09:43:40.170" v="2"/>
-        <pc:sldMkLst>
-          <pc:docMk/>
-          <pc:sldMk cId="1427618944" sldId="553"/>
-        </pc:sldMkLst>
-      </pc:sldChg>
-      <pc:sldChg chg="modSp">
-        <pc:chgData name="Zhao Jin" userId="cd05a825-544c-438a-9ba1-08e63db50b47" providerId="ADAL" clId="{5DC527E6-ABEF-4CCC-BFCE-174E57066325}" dt="2024-02-01T09:43:40.170" v="2"/>
-        <pc:sldMkLst>
-          <pc:docMk/>
-          <pc:sldMk cId="3737971943" sldId="637"/>
-        </pc:sldMkLst>
-      </pc:sldChg>
-      <pc:sldChg chg="modSp">
-        <pc:chgData name="Zhao Jin" userId="cd05a825-544c-438a-9ba1-08e63db50b47" providerId="ADAL" clId="{5DC527E6-ABEF-4CCC-BFCE-174E57066325}" dt="2024-02-01T09:43:40.170" v="2"/>
-        <pc:sldMkLst>
-          <pc:docMk/>
-          <pc:sldMk cId="1252576829" sldId="639"/>
-        </pc:sldMkLst>
-      </pc:sldChg>
-      <pc:sldChg chg="modSp">
-        <pc:chgData name="Zhao Jin" userId="cd05a825-544c-438a-9ba1-08e63db50b47" providerId="ADAL" clId="{5DC527E6-ABEF-4CCC-BFCE-174E57066325}" dt="2024-02-01T09:43:40.170" v="2"/>
-        <pc:sldMkLst>
-          <pc:docMk/>
-          <pc:sldMk cId="649273319" sldId="640"/>
-        </pc:sldMkLst>
-      </pc:sldChg>
-      <pc:sldChg chg="modSp">
-        <pc:chgData name="Zhao Jin" userId="cd05a825-544c-438a-9ba1-08e63db50b47" providerId="ADAL" clId="{5DC527E6-ABEF-4CCC-BFCE-174E57066325}" dt="2024-02-01T09:43:40.170" v="2"/>
-        <pc:sldMkLst>
-          <pc:docMk/>
-          <pc:sldMk cId="3269496185" sldId="641"/>
-        </pc:sldMkLst>
-      </pc:sldChg>
-      <pc:sldChg chg="modSp">
-        <pc:chgData name="Zhao Jin" userId="cd05a825-544c-438a-9ba1-08e63db50b47" providerId="ADAL" clId="{5DC527E6-ABEF-4CCC-BFCE-174E57066325}" dt="2024-02-01T09:43:40.170" v="2"/>
-        <pc:sldMkLst>
-          <pc:docMk/>
-          <pc:sldMk cId="1179750071" sldId="642"/>
-        </pc:sldMkLst>
-      </pc:sldChg>
-      <pc:sldChg chg="modSp">
-        <pc:chgData name="Zhao Jin" userId="cd05a825-544c-438a-9ba1-08e63db50b47" providerId="ADAL" clId="{5DC527E6-ABEF-4CCC-BFCE-174E57066325}" dt="2024-02-01T09:43:40.170" v="2"/>
-        <pc:sldMkLst>
-          <pc:docMk/>
-          <pc:sldMk cId="723901272" sldId="643"/>
-        </pc:sldMkLst>
-      </pc:sldChg>
-      <pc:sldChg chg="modSp">
-        <pc:chgData name="Zhao Jin" userId="cd05a825-544c-438a-9ba1-08e63db50b47" providerId="ADAL" clId="{5DC527E6-ABEF-4CCC-BFCE-174E57066325}" dt="2024-02-01T09:43:40.170" v="2"/>
-        <pc:sldMkLst>
-          <pc:docMk/>
-          <pc:sldMk cId="1514327557" sldId="644"/>
-        </pc:sldMkLst>
-      </pc:sldChg>
-      <pc:sldChg chg="modSp mod">
-        <pc:chgData name="Zhao Jin" userId="cd05a825-544c-438a-9ba1-08e63db50b47" providerId="ADAL" clId="{5DC527E6-ABEF-4CCC-BFCE-174E57066325}" dt="2024-02-01T09:43:40.170" v="2"/>
-        <pc:sldMkLst>
-          <pc:docMk/>
-          <pc:sldMk cId="1862784809" sldId="645"/>
-        </pc:sldMkLst>
-      </pc:sldChg>
-      <pc:sldMasterChg chg="modSp modSldLayout">
-        <pc:chgData name="Zhao Jin" userId="cd05a825-544c-438a-9ba1-08e63db50b47" providerId="ADAL" clId="{5DC527E6-ABEF-4CCC-BFCE-174E57066325}" dt="2024-02-01T09:43:40.170" v="2"/>
-        <pc:sldMasterMkLst>
-          <pc:docMk/>
-          <pc:sldMasterMk cId="0" sldId="2147485087"/>
-        </pc:sldMasterMkLst>
-        <pc:sldLayoutChg chg="modSp">
-          <pc:chgData name="Zhao Jin" userId="cd05a825-544c-438a-9ba1-08e63db50b47" providerId="ADAL" clId="{5DC527E6-ABEF-4CCC-BFCE-174E57066325}" dt="2024-02-01T09:43:40.170" v="2"/>
-          <pc:sldLayoutMkLst>
-            <pc:docMk/>
-            <pc:sldMasterMk cId="0" sldId="2147485087"/>
-            <pc:sldLayoutMk cId="0" sldId="2147485088"/>
-          </pc:sldLayoutMkLst>
-        </pc:sldLayoutChg>
-        <pc:sldLayoutChg chg="modSp">
-          <pc:chgData name="Zhao Jin" userId="cd05a825-544c-438a-9ba1-08e63db50b47" providerId="ADAL" clId="{5DC527E6-ABEF-4CCC-BFCE-174E57066325}" dt="2024-02-01T09:43:40.170" v="2"/>
-          <pc:sldLayoutMkLst>
-            <pc:docMk/>
-            <pc:sldMasterMk cId="0" sldId="2147485087"/>
-            <pc:sldLayoutMk cId="0" sldId="2147485089"/>
-          </pc:sldLayoutMkLst>
-        </pc:sldLayoutChg>
-        <pc:sldLayoutChg chg="modSp">
-          <pc:chgData name="Zhao Jin" userId="cd05a825-544c-438a-9ba1-08e63db50b47" providerId="ADAL" clId="{5DC527E6-ABEF-4CCC-BFCE-174E57066325}" dt="2024-02-01T09:43:40.170" v="2"/>
-          <pc:sldLayoutMkLst>
-            <pc:docMk/>
-            <pc:sldMasterMk cId="0" sldId="2147485087"/>
-            <pc:sldLayoutMk cId="0" sldId="2147485090"/>
-          </pc:sldLayoutMkLst>
-        </pc:sldLayoutChg>
-        <pc:sldLayoutChg chg="modSp">
-          <pc:chgData name="Zhao Jin" userId="cd05a825-544c-438a-9ba1-08e63db50b47" providerId="ADAL" clId="{5DC527E6-ABEF-4CCC-BFCE-174E57066325}" dt="2024-02-01T09:43:40.170" v="2"/>
-          <pc:sldLayoutMkLst>
-            <pc:docMk/>
-            <pc:sldMasterMk cId="0" sldId="2147485087"/>
-            <pc:sldLayoutMk cId="0" sldId="2147485091"/>
-          </pc:sldLayoutMkLst>
-        </pc:sldLayoutChg>
-        <pc:sldLayoutChg chg="modSp">
-          <pc:chgData name="Zhao Jin" userId="cd05a825-544c-438a-9ba1-08e63db50b47" providerId="ADAL" clId="{5DC527E6-ABEF-4CCC-BFCE-174E57066325}" dt="2024-02-01T09:43:40.170" v="2"/>
-          <pc:sldLayoutMkLst>
-            <pc:docMk/>
-            <pc:sldMasterMk cId="0" sldId="2147485087"/>
-            <pc:sldLayoutMk cId="0" sldId="2147485092"/>
-          </pc:sldLayoutMkLst>
-        </pc:sldLayoutChg>
-        <pc:sldLayoutChg chg="modSp">
-          <pc:chgData name="Zhao Jin" userId="cd05a825-544c-438a-9ba1-08e63db50b47" providerId="ADAL" clId="{5DC527E6-ABEF-4CCC-BFCE-174E57066325}" dt="2024-02-01T09:43:40.170" v="2"/>
-          <pc:sldLayoutMkLst>
-            <pc:docMk/>
-            <pc:sldMasterMk cId="0" sldId="2147485087"/>
-            <pc:sldLayoutMk cId="0" sldId="2147485093"/>
-          </pc:sldLayoutMkLst>
-        </pc:sldLayoutChg>
-        <pc:sldLayoutChg chg="modSp">
-          <pc:chgData name="Zhao Jin" userId="cd05a825-544c-438a-9ba1-08e63db50b47" providerId="ADAL" clId="{5DC527E6-ABEF-4CCC-BFCE-174E57066325}" dt="2024-02-01T09:43:40.170" v="2"/>
-          <pc:sldLayoutMkLst>
-            <pc:docMk/>
-            <pc:sldMasterMk cId="0" sldId="2147485087"/>
-            <pc:sldLayoutMk cId="0" sldId="2147485094"/>
-          </pc:sldLayoutMkLst>
-        </pc:sldLayoutChg>
-        <pc:sldLayoutChg chg="modSp">
-          <pc:chgData name="Zhao Jin" userId="cd05a825-544c-438a-9ba1-08e63db50b47" providerId="ADAL" clId="{5DC527E6-ABEF-4CCC-BFCE-174E57066325}" dt="2024-02-01T09:43:40.170" v="2"/>
-          <pc:sldLayoutMkLst>
-            <pc:docMk/>
-            <pc:sldMasterMk cId="0" sldId="2147485087"/>
-            <pc:sldLayoutMk cId="0" sldId="2147485095"/>
-          </pc:sldLayoutMkLst>
-        </pc:sldLayoutChg>
-        <pc:sldLayoutChg chg="modSp">
-          <pc:chgData name="Zhao Jin" userId="cd05a825-544c-438a-9ba1-08e63db50b47" providerId="ADAL" clId="{5DC527E6-ABEF-4CCC-BFCE-174E57066325}" dt="2024-02-01T09:43:40.170" v="2"/>
-          <pc:sldLayoutMkLst>
-            <pc:docMk/>
-            <pc:sldMasterMk cId="0" sldId="2147485087"/>
-            <pc:sldLayoutMk cId="0" sldId="2147485096"/>
-          </pc:sldLayoutMkLst>
-        </pc:sldLayoutChg>
-        <pc:sldLayoutChg chg="modSp">
-          <pc:chgData name="Zhao Jin" userId="cd05a825-544c-438a-9ba1-08e63db50b47" providerId="ADAL" clId="{5DC527E6-ABEF-4CCC-BFCE-174E57066325}" dt="2024-02-01T09:43:40.170" v="2"/>
-          <pc:sldLayoutMkLst>
-            <pc:docMk/>
-            <pc:sldMasterMk cId="0" sldId="2147485087"/>
-            <pc:sldLayoutMk cId="0" sldId="2147485097"/>
-          </pc:sldLayoutMkLst>
-        </pc:sldLayoutChg>
-        <pc:sldLayoutChg chg="modSp">
-          <pc:chgData name="Zhao Jin" userId="cd05a825-544c-438a-9ba1-08e63db50b47" providerId="ADAL" clId="{5DC527E6-ABEF-4CCC-BFCE-174E57066325}" dt="2024-02-01T09:43:40.170" v="2"/>
-          <pc:sldLayoutMkLst>
-            <pc:docMk/>
-            <pc:sldMasterMk cId="0" sldId="2147485087"/>
-            <pc:sldLayoutMk cId="0" sldId="2147485098"/>
-          </pc:sldLayoutMkLst>
-        </pc:sldLayoutChg>
-      </pc:sldMasterChg>
-    </pc:docChg>
-  </pc:docChgLst>
-  <pc:docChgLst>
-    <pc:chgData name="Zhao Jin" userId="cd05a825-544c-438a-9ba1-08e63db50b47" providerId="ADAL" clId="{867F3690-C100-40EE-A937-14612E9F3314}"/>
-    <pc:docChg chg="undo custSel addSld delSld modSld">
-      <pc:chgData name="Zhao Jin" userId="cd05a825-544c-438a-9ba1-08e63db50b47" providerId="ADAL" clId="{867F3690-C100-40EE-A937-14612E9F3314}" dt="2021-02-15T05:07:12.447" v="312" actId="1076"/>
-      <pc:docMkLst>
-        <pc:docMk/>
-      </pc:docMkLst>
-      <pc:sldChg chg="modSp mod">
-        <pc:chgData name="Zhao Jin" userId="cd05a825-544c-438a-9ba1-08e63db50b47" providerId="ADAL" clId="{867F3690-C100-40EE-A937-14612E9F3314}" dt="2021-02-10T03:53:02.282" v="0" actId="20577"/>
-        <pc:sldMkLst>
-          <pc:docMk/>
-          <pc:sldMk cId="0" sldId="256"/>
-        </pc:sldMkLst>
-      </pc:sldChg>
-      <pc:sldChg chg="modSp del">
-        <pc:chgData name="Zhao Jin" userId="cd05a825-544c-438a-9ba1-08e63db50b47" providerId="ADAL" clId="{867F3690-C100-40EE-A937-14612E9F3314}" dt="2021-02-11T11:12:55.303" v="2" actId="47"/>
-        <pc:sldMkLst>
-          <pc:docMk/>
-          <pc:sldMk cId="2775173622" sldId="524"/>
-        </pc:sldMkLst>
-      </pc:sldChg>
-      <pc:sldChg chg="modSp mod">
-        <pc:chgData name="Zhao Jin" userId="cd05a825-544c-438a-9ba1-08e63db50b47" providerId="ADAL" clId="{867F3690-C100-40EE-A937-14612E9F3314}" dt="2021-02-11T11:16:16.653" v="199" actId="207"/>
-        <pc:sldMkLst>
-          <pc:docMk/>
-          <pc:sldMk cId="4078418712" sldId="525"/>
-        </pc:sldMkLst>
-      </pc:sldChg>
-      <pc:sldChg chg="modSp del">
-        <pc:chgData name="Zhao Jin" userId="cd05a825-544c-438a-9ba1-08e63db50b47" providerId="ADAL" clId="{867F3690-C100-40EE-A937-14612E9F3314}" dt="2021-02-11T11:12:55.303" v="2" actId="47"/>
-        <pc:sldMkLst>
-          <pc:docMk/>
-          <pc:sldMk cId="2882118053" sldId="552"/>
-        </pc:sldMkLst>
-      </pc:sldChg>
-      <pc:sldChg chg="modSp add mod">
-        <pc:chgData name="Zhao Jin" userId="cd05a825-544c-438a-9ba1-08e63db50b47" providerId="ADAL" clId="{867F3690-C100-40EE-A937-14612E9F3314}" dt="2021-02-15T04:57:13.323" v="201"/>
-        <pc:sldMkLst>
-          <pc:docMk/>
-          <pc:sldMk cId="1427618944" sldId="553"/>
-        </pc:sldMkLst>
-      </pc:sldChg>
-      <pc:sldChg chg="modSp del">
-        <pc:chgData name="Zhao Jin" userId="cd05a825-544c-438a-9ba1-08e63db50b47" providerId="ADAL" clId="{867F3690-C100-40EE-A937-14612E9F3314}" dt="2021-02-11T11:12:55.303" v="2" actId="47"/>
-        <pc:sldMkLst>
-          <pc:docMk/>
-          <pc:sldMk cId="2082920116" sldId="553"/>
-        </pc:sldMkLst>
-      </pc:sldChg>
-      <pc:sldChg chg="modSp del">
-        <pc:chgData name="Zhao Jin" userId="cd05a825-544c-438a-9ba1-08e63db50b47" providerId="ADAL" clId="{867F3690-C100-40EE-A937-14612E9F3314}" dt="2021-02-11T11:12:55.303" v="2" actId="47"/>
-        <pc:sldMkLst>
-          <pc:docMk/>
-          <pc:sldMk cId="1659983766" sldId="554"/>
-        </pc:sldMkLst>
-      </pc:sldChg>
-      <pc:sldChg chg="modSp del">
-        <pc:chgData name="Zhao Jin" userId="cd05a825-544c-438a-9ba1-08e63db50b47" providerId="ADAL" clId="{867F3690-C100-40EE-A937-14612E9F3314}" dt="2021-02-11T11:12:55.303" v="2" actId="47"/>
-        <pc:sldMkLst>
-          <pc:docMk/>
-          <pc:sldMk cId="686532275" sldId="558"/>
-        </pc:sldMkLst>
-      </pc:sldChg>
-      <pc:sldChg chg="modSp add del mod">
-        <pc:chgData name="Zhao Jin" userId="cd05a825-544c-438a-9ba1-08e63db50b47" providerId="ADAL" clId="{867F3690-C100-40EE-A937-14612E9F3314}" dt="2021-02-15T04:59:11.851" v="203" actId="207"/>
-        <pc:sldMkLst>
-          <pc:docMk/>
-          <pc:sldMk cId="1663851036" sldId="559"/>
-        </pc:sldMkLst>
-      </pc:sldChg>
-      <pc:sldChg chg="addSp delSp modSp add mod">
-        <pc:chgData name="Zhao Jin" userId="cd05a825-544c-438a-9ba1-08e63db50b47" providerId="ADAL" clId="{867F3690-C100-40EE-A937-14612E9F3314}" dt="2021-02-15T05:07:12.447" v="312" actId="1076"/>
-        <pc:sldMkLst>
-          <pc:docMk/>
-          <pc:sldMk cId="1971208294" sldId="560"/>
-        </pc:sldMkLst>
-      </pc:sldChg>
-      <pc:sldChg chg="modSp del">
-        <pc:chgData name="Zhao Jin" userId="cd05a825-544c-438a-9ba1-08e63db50b47" providerId="ADAL" clId="{867F3690-C100-40EE-A937-14612E9F3314}" dt="2021-02-11T11:12:55.303" v="2" actId="47"/>
-        <pc:sldMkLst>
-          <pc:docMk/>
-          <pc:sldMk cId="1986771488" sldId="561"/>
-        </pc:sldMkLst>
-      </pc:sldChg>
-      <pc:sldChg chg="modSp add mod">
-        <pc:chgData name="Zhao Jin" userId="cd05a825-544c-438a-9ba1-08e63db50b47" providerId="ADAL" clId="{867F3690-C100-40EE-A937-14612E9F3314}" dt="2021-02-11T11:14:08.750" v="27" actId="20577"/>
-        <pc:sldMkLst>
-          <pc:docMk/>
-          <pc:sldMk cId="894186310" sldId="564"/>
-        </pc:sldMkLst>
-      </pc:sldChg>
-      <pc:sldChg chg="modSp del">
-        <pc:chgData name="Zhao Jin" userId="cd05a825-544c-438a-9ba1-08e63db50b47" providerId="ADAL" clId="{867F3690-C100-40EE-A937-14612E9F3314}" dt="2021-02-11T11:12:55.303" v="2" actId="47"/>
-        <pc:sldMkLst>
-          <pc:docMk/>
-          <pc:sldMk cId="1276365520" sldId="564"/>
-        </pc:sldMkLst>
-      </pc:sldChg>
-      <pc:sldChg chg="modSp del">
-        <pc:chgData name="Zhao Jin" userId="cd05a825-544c-438a-9ba1-08e63db50b47" providerId="ADAL" clId="{867F3690-C100-40EE-A937-14612E9F3314}" dt="2021-02-11T11:12:55.303" v="2" actId="47"/>
-        <pc:sldMkLst>
-          <pc:docMk/>
-          <pc:sldMk cId="827193018" sldId="565"/>
-        </pc:sldMkLst>
-      </pc:sldChg>
-      <pc:sldChg chg="modSp del">
-        <pc:chgData name="Zhao Jin" userId="cd05a825-544c-438a-9ba1-08e63db50b47" providerId="ADAL" clId="{867F3690-C100-40EE-A937-14612E9F3314}" dt="2021-02-11T11:12:55.303" v="2" actId="47"/>
-        <pc:sldMkLst>
-          <pc:docMk/>
-          <pc:sldMk cId="3959984611" sldId="566"/>
-        </pc:sldMkLst>
-      </pc:sldChg>
-      <pc:sldChg chg="modSp del">
-        <pc:chgData name="Zhao Jin" userId="cd05a825-544c-438a-9ba1-08e63db50b47" providerId="ADAL" clId="{867F3690-C100-40EE-A937-14612E9F3314}" dt="2021-02-11T11:12:55.303" v="2" actId="47"/>
-        <pc:sldMkLst>
-          <pc:docMk/>
-          <pc:sldMk cId="2879329457" sldId="568"/>
-        </pc:sldMkLst>
-      </pc:sldChg>
-      <pc:sldChg chg="modSp del">
-        <pc:chgData name="Zhao Jin" userId="cd05a825-544c-438a-9ba1-08e63db50b47" providerId="ADAL" clId="{867F3690-C100-40EE-A937-14612E9F3314}" dt="2021-02-11T11:12:55.303" v="2" actId="47"/>
-        <pc:sldMkLst>
-          <pc:docMk/>
-          <pc:sldMk cId="4240540711" sldId="569"/>
-        </pc:sldMkLst>
-      </pc:sldChg>
-      <pc:sldChg chg="delSp modSp add mod delAnim">
-        <pc:chgData name="Zhao Jin" userId="cd05a825-544c-438a-9ba1-08e63db50b47" providerId="ADAL" clId="{867F3690-C100-40EE-A937-14612E9F3314}" dt="2021-02-15T04:58:14.889" v="202" actId="478"/>
-        <pc:sldMkLst>
-          <pc:docMk/>
-          <pc:sldMk cId="4156536479" sldId="590"/>
-        </pc:sldMkLst>
-      </pc:sldChg>
-      <pc:sldChg chg="modSp add mod">
-        <pc:chgData name="Zhao Jin" userId="cd05a825-544c-438a-9ba1-08e63db50b47" providerId="ADAL" clId="{867F3690-C100-40EE-A937-14612E9F3314}" dt="2021-02-11T11:13:35.741" v="11"/>
-        <pc:sldMkLst>
-          <pc:docMk/>
-          <pc:sldMk cId="2217225800" sldId="594"/>
-        </pc:sldMkLst>
-      </pc:sldChg>
-      <pc:sldChg chg="delSp modSp add mod">
-        <pc:chgData name="Zhao Jin" userId="cd05a825-544c-438a-9ba1-08e63db50b47" providerId="ADAL" clId="{867F3690-C100-40EE-A937-14612E9F3314}" dt="2021-02-11T11:13:40.184" v="13" actId="478"/>
-        <pc:sldMkLst>
-          <pc:docMk/>
-          <pc:sldMk cId="2419983458" sldId="595"/>
-        </pc:sldMkLst>
-      </pc:sldChg>
-    </pc:docChg>
-  </pc:docChgLst>
-  <pc:docChgLst>
-    <pc:chgData name="Zhao Jin" userId="cd05a825-544c-438a-9ba1-08e63db50b47" providerId="ADAL" clId="{0A664A9B-0716-4783-80B0-C58E252E0430}"/>
-    <pc:docChg chg="modSld">
-      <pc:chgData name="Zhao Jin" userId="cd05a825-544c-438a-9ba1-08e63db50b47" providerId="ADAL" clId="{0A664A9B-0716-4783-80B0-C58E252E0430}" dt="2025-03-17T06:26:20.353" v="10" actId="1035"/>
-      <pc:docMkLst>
-        <pc:docMk/>
-      </pc:docMkLst>
-      <pc:sldChg chg="modSp mod">
-        <pc:chgData name="Zhao Jin" userId="cd05a825-544c-438a-9ba1-08e63db50b47" providerId="ADAL" clId="{0A664A9B-0716-4783-80B0-C58E252E0430}" dt="2025-03-17T06:26:17.945" v="9" actId="1036"/>
-        <pc:sldMkLst>
-          <pc:docMk/>
-          <pc:sldMk cId="1252576829" sldId="639"/>
-        </pc:sldMkLst>
         <pc:spChg chg="mod">
-          <ac:chgData name="Zhao Jin" userId="cd05a825-544c-438a-9ba1-08e63db50b47" providerId="ADAL" clId="{0A664A9B-0716-4783-80B0-C58E252E0430}" dt="2025-03-17T06:26:17.945" v="9" actId="1036"/>
+          <ac:chgData name="Zhao Jin" userId="cd05a825-544c-438a-9ba1-08e63db50b47" providerId="ADAL" clId="{5DF3A229-1965-414E-AF54-F4C37AC7DF68}" dt="2026-03-16T08:21:01.494" v="167" actId="14100"/>
           <ac:spMkLst>
             <pc:docMk/>
-            <pc:sldMk cId="1252576829" sldId="639"/>
-            <ac:spMk id="2" creationId="{00000000-0000-0000-0000-000000000000}"/>
-          </ac:spMkLst>
-        </pc:spChg>
-      </pc:sldChg>
-      <pc:sldChg chg="modSp mod">
-        <pc:chgData name="Zhao Jin" userId="cd05a825-544c-438a-9ba1-08e63db50b47" providerId="ADAL" clId="{0A664A9B-0716-4783-80B0-C58E252E0430}" dt="2025-03-17T06:26:20.353" v="10" actId="1035"/>
-        <pc:sldMkLst>
-          <pc:docMk/>
-          <pc:sldMk cId="649273319" sldId="640"/>
-        </pc:sldMkLst>
-        <pc:spChg chg="mod">
-          <ac:chgData name="Zhao Jin" userId="cd05a825-544c-438a-9ba1-08e63db50b47" providerId="ADAL" clId="{0A664A9B-0716-4783-80B0-C58E252E0430}" dt="2025-03-17T06:26:20.353" v="10" actId="1035"/>
-          <ac:spMkLst>
-            <pc:docMk/>
-            <pc:sldMk cId="649273319" sldId="640"/>
-            <ac:spMk id="31" creationId="{D35AD087-9200-0479-C7BA-0A670406DA36}"/>
+            <pc:sldMk cId="2489370454" sldId="605"/>
+            <ac:spMk id="7" creationId="{5E9693F0-D44F-0D07-7E86-710BD1F0A306}"/>
           </ac:spMkLst>
         </pc:spChg>
         <pc:spChg chg="mod">
-          <ac:chgData name="Zhao Jin" userId="cd05a825-544c-438a-9ba1-08e63db50b47" providerId="ADAL" clId="{0A664A9B-0716-4783-80B0-C58E252E0430}" dt="2025-03-17T06:25:40.288" v="6" actId="1035"/>
+          <ac:chgData name="Zhao Jin" userId="cd05a825-544c-438a-9ba1-08e63db50b47" providerId="ADAL" clId="{5DF3A229-1965-414E-AF54-F4C37AC7DF68}" dt="2026-03-16T08:20:25.512" v="85"/>
           <ac:spMkLst>
             <pc:docMk/>
-            <pc:sldMk cId="649273319" sldId="640"/>
-            <ac:spMk id="34" creationId="{F16147FF-3A0D-315A-C6DB-897676941485}"/>
+            <pc:sldMk cId="2489370454" sldId="605"/>
+            <ac:spMk id="8" creationId="{564A1DBB-19CA-BCD9-0044-9F6EA849A769}"/>
           </ac:spMkLst>
         </pc:spChg>
+        <pc:spChg chg="mod">
+          <ac:chgData name="Zhao Jin" userId="cd05a825-544c-438a-9ba1-08e63db50b47" providerId="ADAL" clId="{5DF3A229-1965-414E-AF54-F4C37AC7DF68}" dt="2026-03-17T03:45:37.727" v="1839" actId="571"/>
+          <ac:spMkLst>
+            <pc:docMk/>
+            <pc:sldMk cId="2489370454" sldId="605"/>
+            <ac:spMk id="10" creationId="{F3909803-CBA2-AE92-F099-0CA435CE47AC}"/>
+          </ac:spMkLst>
+        </pc:spChg>
+        <pc:spChg chg="mod">
+          <ac:chgData name="Zhao Jin" userId="cd05a825-544c-438a-9ba1-08e63db50b47" providerId="ADAL" clId="{5DF3A229-1965-414E-AF54-F4C37AC7DF68}" dt="2026-03-17T03:45:37.727" v="1839" actId="571"/>
+          <ac:spMkLst>
+            <pc:docMk/>
+            <pc:sldMk cId="2489370454" sldId="605"/>
+            <ac:spMk id="11" creationId="{C2DDC02D-B22D-36C2-3822-74153B569DAD}"/>
+          </ac:spMkLst>
+        </pc:spChg>
+        <pc:spChg chg="mod">
+          <ac:chgData name="Zhao Jin" userId="cd05a825-544c-438a-9ba1-08e63db50b47" providerId="ADAL" clId="{5DF3A229-1965-414E-AF54-F4C37AC7DF68}" dt="2026-03-17T03:45:37.727" v="1839" actId="571"/>
+          <ac:spMkLst>
+            <pc:docMk/>
+            <pc:sldMk cId="2489370454" sldId="605"/>
+            <ac:spMk id="13" creationId="{E0343249-F4F7-016A-0784-C004FC4BC4CA}"/>
+          </ac:spMkLst>
+        </pc:spChg>
+        <pc:spChg chg="mod">
+          <ac:chgData name="Zhao Jin" userId="cd05a825-544c-438a-9ba1-08e63db50b47" providerId="ADAL" clId="{5DF3A229-1965-414E-AF54-F4C37AC7DF68}" dt="2026-03-17T03:45:37.727" v="1839" actId="571"/>
+          <ac:spMkLst>
+            <pc:docMk/>
+            <pc:sldMk cId="2489370454" sldId="605"/>
+            <ac:spMk id="14" creationId="{6BF0495E-0A5E-1CDA-9084-4FFC47B8E7A1}"/>
+          </ac:spMkLst>
+        </pc:spChg>
+        <pc:spChg chg="add mod">
+          <ac:chgData name="Zhao Jin" userId="cd05a825-544c-438a-9ba1-08e63db50b47" providerId="ADAL" clId="{5DF3A229-1965-414E-AF54-F4C37AC7DF68}" dt="2026-03-16T08:23:25.500" v="211"/>
+          <ac:spMkLst>
+            <pc:docMk/>
+            <pc:sldMk cId="2489370454" sldId="605"/>
+            <ac:spMk id="20" creationId="{8F58F1F1-DD6E-4509-04FB-E6F41114C9F7}"/>
+          </ac:spMkLst>
+        </pc:spChg>
+        <pc:spChg chg="mod">
+          <ac:chgData name="Zhao Jin" userId="cd05a825-544c-438a-9ba1-08e63db50b47" providerId="ADAL" clId="{5DF3A229-1965-414E-AF54-F4C37AC7DF68}" dt="2026-03-16T08:23:57.617" v="220"/>
+          <ac:spMkLst>
+            <pc:docMk/>
+            <pc:sldMk cId="2489370454" sldId="605"/>
+            <ac:spMk id="22" creationId="{FD499887-5E59-C01C-B228-5E0E91035C02}"/>
+          </ac:spMkLst>
+        </pc:spChg>
+        <pc:spChg chg="mod">
+          <ac:chgData name="Zhao Jin" userId="cd05a825-544c-438a-9ba1-08e63db50b47" providerId="ADAL" clId="{5DF3A229-1965-414E-AF54-F4C37AC7DF68}" dt="2026-03-16T08:30:04.599" v="310" actId="207"/>
+          <ac:spMkLst>
+            <pc:docMk/>
+            <pc:sldMk cId="2489370454" sldId="605"/>
+            <ac:spMk id="23" creationId="{00000000-0000-0000-0000-000000000000}"/>
+          </ac:spMkLst>
+        </pc:spChg>
+        <pc:spChg chg="mod">
+          <ac:chgData name="Zhao Jin" userId="cd05a825-544c-438a-9ba1-08e63db50b47" providerId="ADAL" clId="{5DF3A229-1965-414E-AF54-F4C37AC7DF68}" dt="2026-03-16T08:29:14.669" v="298" actId="1076"/>
+          <ac:spMkLst>
+            <pc:docMk/>
+            <pc:sldMk cId="2489370454" sldId="605"/>
+            <ac:spMk id="24" creationId="{00000000-0000-0000-0000-000000000000}"/>
+          </ac:spMkLst>
+        </pc:spChg>
+        <pc:spChg chg="mod">
+          <ac:chgData name="Zhao Jin" userId="cd05a825-544c-438a-9ba1-08e63db50b47" providerId="ADAL" clId="{5DF3A229-1965-414E-AF54-F4C37AC7DF68}" dt="2026-03-16T08:23:57.617" v="220"/>
+          <ac:spMkLst>
+            <pc:docMk/>
+            <pc:sldMk cId="2489370454" sldId="605"/>
+            <ac:spMk id="25" creationId="{501F7A7A-47AD-131E-81E8-60A2360681C8}"/>
+          </ac:spMkLst>
+        </pc:spChg>
+        <pc:spChg chg="mod">
+          <ac:chgData name="Zhao Jin" userId="cd05a825-544c-438a-9ba1-08e63db50b47" providerId="ADAL" clId="{5DF3A229-1965-414E-AF54-F4C37AC7DF68}" dt="2026-03-16T08:20:52.501" v="162" actId="14100"/>
+          <ac:spMkLst>
+            <pc:docMk/>
+            <pc:sldMk cId="2489370454" sldId="605"/>
+            <ac:spMk id="29" creationId="{00000000-0000-0000-0000-000000000000}"/>
+          </ac:spMkLst>
+        </pc:spChg>
+        <pc:spChg chg="mod">
+          <ac:chgData name="Zhao Jin" userId="cd05a825-544c-438a-9ba1-08e63db50b47" providerId="ADAL" clId="{5DF3A229-1965-414E-AF54-F4C37AC7DF68}" dt="2026-03-16T08:20:14.700" v="80" actId="20577"/>
+          <ac:spMkLst>
+            <pc:docMk/>
+            <pc:sldMk cId="2489370454" sldId="605"/>
+            <ac:spMk id="31" creationId="{00000000-0000-0000-0000-000000000000}"/>
+          </ac:spMkLst>
+        </pc:spChg>
+        <pc:spChg chg="mod">
+          <ac:chgData name="Zhao Jin" userId="cd05a825-544c-438a-9ba1-08e63db50b47" providerId="ADAL" clId="{5DF3A229-1965-414E-AF54-F4C37AC7DF68}" dt="2026-03-16T08:20:22.467" v="84" actId="20577"/>
+          <ac:spMkLst>
+            <pc:docMk/>
+            <pc:sldMk cId="2489370454" sldId="605"/>
+            <ac:spMk id="32" creationId="{00000000-0000-0000-0000-000000000000}"/>
+          </ac:spMkLst>
+        </pc:spChg>
+        <pc:spChg chg="mod">
+          <ac:chgData name="Zhao Jin" userId="cd05a825-544c-438a-9ba1-08e63db50b47" providerId="ADAL" clId="{5DF3A229-1965-414E-AF54-F4C37AC7DF68}" dt="2026-03-16T08:20:12.831" v="79" actId="20577"/>
+          <ac:spMkLst>
+            <pc:docMk/>
+            <pc:sldMk cId="2489370454" sldId="605"/>
+            <ac:spMk id="33" creationId="{00000000-0000-0000-0000-000000000000}"/>
+          </ac:spMkLst>
+        </pc:spChg>
+        <pc:spChg chg="mod">
+          <ac:chgData name="Zhao Jin" userId="cd05a825-544c-438a-9ba1-08e63db50b47" providerId="ADAL" clId="{5DF3A229-1965-414E-AF54-F4C37AC7DF68}" dt="2026-03-16T08:20:18.471" v="83" actId="20577"/>
+          <ac:spMkLst>
+            <pc:docMk/>
+            <pc:sldMk cId="2489370454" sldId="605"/>
+            <ac:spMk id="34" creationId="{00000000-0000-0000-0000-000000000000}"/>
+          </ac:spMkLst>
+        </pc:spChg>
+        <pc:spChg chg="del">
+          <ac:chgData name="Zhao Jin" userId="cd05a825-544c-438a-9ba1-08e63db50b47" providerId="ADAL" clId="{5DF3A229-1965-414E-AF54-F4C37AC7DF68}" dt="2026-03-16T08:23:35.452" v="215" actId="478"/>
+          <ac:spMkLst>
+            <pc:docMk/>
+            <pc:sldMk cId="2489370454" sldId="605"/>
+            <ac:spMk id="36" creationId="{00000000-0000-0000-0000-000000000000}"/>
+          </ac:spMkLst>
+        </pc:spChg>
+        <pc:spChg chg="del">
+          <ac:chgData name="Zhao Jin" userId="cd05a825-544c-438a-9ba1-08e63db50b47" providerId="ADAL" clId="{5DF3A229-1965-414E-AF54-F4C37AC7DF68}" dt="2026-03-16T08:20:04.312" v="74" actId="478"/>
+          <ac:spMkLst>
+            <pc:docMk/>
+            <pc:sldMk cId="2489370454" sldId="605"/>
+            <ac:spMk id="37" creationId="{00000000-0000-0000-0000-000000000000}"/>
+          </ac:spMkLst>
+        </pc:spChg>
+        <pc:spChg chg="del">
+          <ac:chgData name="Zhao Jin" userId="cd05a825-544c-438a-9ba1-08e63db50b47" providerId="ADAL" clId="{5DF3A229-1965-414E-AF54-F4C37AC7DF68}" dt="2026-03-16T08:22:22.663" v="194" actId="478"/>
+          <ac:spMkLst>
+            <pc:docMk/>
+            <pc:sldMk cId="2489370454" sldId="605"/>
+            <ac:spMk id="43" creationId="{00000000-0000-0000-0000-000000000000}"/>
+          </ac:spMkLst>
+        </pc:spChg>
+        <pc:spChg chg="del">
+          <ac:chgData name="Zhao Jin" userId="cd05a825-544c-438a-9ba1-08e63db50b47" providerId="ADAL" clId="{5DF3A229-1965-414E-AF54-F4C37AC7DF68}" dt="2026-03-16T08:22:22.663" v="194" actId="478"/>
+          <ac:spMkLst>
+            <pc:docMk/>
+            <pc:sldMk cId="2489370454" sldId="605"/>
+            <ac:spMk id="48" creationId="{00000000-0000-0000-0000-000000000000}"/>
+          </ac:spMkLst>
+        </pc:spChg>
+        <pc:spChg chg="mod">
+          <ac:chgData name="Zhao Jin" userId="cd05a825-544c-438a-9ba1-08e63db50b47" providerId="ADAL" clId="{5DF3A229-1965-414E-AF54-F4C37AC7DF68}" dt="2026-03-16T08:23:57.617" v="220"/>
+          <ac:spMkLst>
+            <pc:docMk/>
+            <pc:sldMk cId="2489370454" sldId="605"/>
+            <ac:spMk id="50" creationId="{B476E792-CCEB-AFA9-3FA4-A832E2E11D96}"/>
+          </ac:spMkLst>
+        </pc:spChg>
+        <pc:spChg chg="mod">
+          <ac:chgData name="Zhao Jin" userId="cd05a825-544c-438a-9ba1-08e63db50b47" providerId="ADAL" clId="{5DF3A229-1965-414E-AF54-F4C37AC7DF68}" dt="2026-03-16T08:24:24.347" v="226" actId="20577"/>
+          <ac:spMkLst>
+            <pc:docMk/>
+            <pc:sldMk cId="2489370454" sldId="605"/>
+            <ac:spMk id="51" creationId="{229C8D69-58B2-25D6-5B86-97F0B667532C}"/>
+          </ac:spMkLst>
+        </pc:spChg>
+        <pc:spChg chg="del">
+          <ac:chgData name="Zhao Jin" userId="cd05a825-544c-438a-9ba1-08e63db50b47" providerId="ADAL" clId="{5DF3A229-1965-414E-AF54-F4C37AC7DF68}" dt="2026-03-16T08:22:22.663" v="194" actId="478"/>
+          <ac:spMkLst>
+            <pc:docMk/>
+            <pc:sldMk cId="2489370454" sldId="605"/>
+            <ac:spMk id="52" creationId="{00000000-0000-0000-0000-000000000000}"/>
+          </ac:spMkLst>
+        </pc:spChg>
+        <pc:spChg chg="del">
+          <ac:chgData name="Zhao Jin" userId="cd05a825-544c-438a-9ba1-08e63db50b47" providerId="ADAL" clId="{5DF3A229-1965-414E-AF54-F4C37AC7DF68}" dt="2026-03-16T08:22:22.663" v="194" actId="478"/>
+          <ac:spMkLst>
+            <pc:docMk/>
+            <pc:sldMk cId="2489370454" sldId="605"/>
+            <ac:spMk id="56" creationId="{00000000-0000-0000-0000-000000000000}"/>
+          </ac:spMkLst>
+        </pc:spChg>
+        <pc:spChg chg="mod">
+          <ac:chgData name="Zhao Jin" userId="cd05a825-544c-438a-9ba1-08e63db50b47" providerId="ADAL" clId="{5DF3A229-1965-414E-AF54-F4C37AC7DF68}" dt="2026-03-16T08:23:46.656" v="217" actId="20577"/>
+          <ac:spMkLst>
+            <pc:docMk/>
+            <pc:sldMk cId="2489370454" sldId="605"/>
+            <ac:spMk id="59" creationId="{00000000-0000-0000-0000-000000000000}"/>
+          </ac:spMkLst>
+        </pc:spChg>
+        <pc:spChg chg="mod">
+          <ac:chgData name="Zhao Jin" userId="cd05a825-544c-438a-9ba1-08e63db50b47" providerId="ADAL" clId="{5DF3A229-1965-414E-AF54-F4C37AC7DF68}" dt="2026-03-16T08:23:57.617" v="220"/>
+          <ac:spMkLst>
+            <pc:docMk/>
+            <pc:sldMk cId="2489370454" sldId="605"/>
+            <ac:spMk id="60" creationId="{B965FDA3-31A1-A7C5-5932-E4BC29FDD96F}"/>
+          </ac:spMkLst>
+        </pc:spChg>
+        <pc:spChg chg="mod">
+          <ac:chgData name="Zhao Jin" userId="cd05a825-544c-438a-9ba1-08e63db50b47" providerId="ADAL" clId="{5DF3A229-1965-414E-AF54-F4C37AC7DF68}" dt="2026-03-16T08:23:57.617" v="220"/>
+          <ac:spMkLst>
+            <pc:docMk/>
+            <pc:sldMk cId="2489370454" sldId="605"/>
+            <ac:spMk id="61" creationId="{0FEAF86B-5562-3BC6-185C-A6CDCEA5C6D8}"/>
+          </ac:spMkLst>
+        </pc:spChg>
+        <pc:spChg chg="mod">
+          <ac:chgData name="Zhao Jin" userId="cd05a825-544c-438a-9ba1-08e63db50b47" providerId="ADAL" clId="{5DF3A229-1965-414E-AF54-F4C37AC7DF68}" dt="2026-03-16T08:23:57.617" v="220"/>
+          <ac:spMkLst>
+            <pc:docMk/>
+            <pc:sldMk cId="2489370454" sldId="605"/>
+            <ac:spMk id="63" creationId="{6C686AD4-9FAD-1830-DF74-7229F7BE8D39}"/>
+          </ac:spMkLst>
+        </pc:spChg>
+        <pc:spChg chg="mod">
+          <ac:chgData name="Zhao Jin" userId="cd05a825-544c-438a-9ba1-08e63db50b47" providerId="ADAL" clId="{5DF3A229-1965-414E-AF54-F4C37AC7DF68}" dt="2026-03-16T08:23:57.617" v="220"/>
+          <ac:spMkLst>
+            <pc:docMk/>
+            <pc:sldMk cId="2489370454" sldId="605"/>
+            <ac:spMk id="14336" creationId="{EDC67F6B-1817-0D2E-12B6-4E59C3E51B70}"/>
+          </ac:spMkLst>
+        </pc:spChg>
+        <pc:spChg chg="mod">
+          <ac:chgData name="Zhao Jin" userId="cd05a825-544c-438a-9ba1-08e63db50b47" providerId="ADAL" clId="{5DF3A229-1965-414E-AF54-F4C37AC7DF68}" dt="2026-03-16T08:24:50.191" v="228" actId="20577"/>
+          <ac:spMkLst>
+            <pc:docMk/>
+            <pc:sldMk cId="2489370454" sldId="605"/>
+            <ac:spMk id="14342" creationId="{EB41C8B5-5D32-8ACD-F58D-A9BD4E8341EE}"/>
+          </ac:spMkLst>
+        </pc:spChg>
+        <pc:spChg chg="del mod">
+          <ac:chgData name="Zhao Jin" userId="cd05a825-544c-438a-9ba1-08e63db50b47" providerId="ADAL" clId="{5DF3A229-1965-414E-AF54-F4C37AC7DF68}" dt="2026-03-16T08:28:12.531" v="279" actId="478"/>
+          <ac:spMkLst>
+            <pc:docMk/>
+            <pc:sldMk cId="2489370454" sldId="605"/>
+            <ac:spMk id="14347" creationId="{07282423-EB48-1570-0C41-B7AE4C0D75F6}"/>
+          </ac:spMkLst>
+        </pc:spChg>
+        <pc:spChg chg="mod">
+          <ac:chgData name="Zhao Jin" userId="cd05a825-544c-438a-9ba1-08e63db50b47" providerId="ADAL" clId="{5DF3A229-1965-414E-AF54-F4C37AC7DF68}" dt="2026-03-16T08:28:31.407" v="289" actId="1036"/>
+          <ac:spMkLst>
+            <pc:docMk/>
+            <pc:sldMk cId="2489370454" sldId="605"/>
+            <ac:spMk id="14348" creationId="{4E084167-3C00-8800-8276-C604D44AFCB3}"/>
+          </ac:spMkLst>
+        </pc:spChg>
+        <pc:spChg chg="mod">
+          <ac:chgData name="Zhao Jin" userId="cd05a825-544c-438a-9ba1-08e63db50b47" providerId="ADAL" clId="{5DF3A229-1965-414E-AF54-F4C37AC7DF68}" dt="2026-03-16T08:28:06.770" v="276" actId="14100"/>
+          <ac:spMkLst>
+            <pc:docMk/>
+            <pc:sldMk cId="2489370454" sldId="605"/>
+            <ac:spMk id="14349" creationId="{16D7DB35-3485-7027-61B0-4A2CF7559AA0}"/>
+          </ac:spMkLst>
+        </pc:spChg>
+        <pc:spChg chg="mod">
+          <ac:chgData name="Zhao Jin" userId="cd05a825-544c-438a-9ba1-08e63db50b47" providerId="ADAL" clId="{5DF3A229-1965-414E-AF54-F4C37AC7DF68}" dt="2026-03-16T08:27:53.579" v="262"/>
+          <ac:spMkLst>
+            <pc:docMk/>
+            <pc:sldMk cId="2489370454" sldId="605"/>
+            <ac:spMk id="14350" creationId="{2CCB8156-FB8D-85EC-F85E-633179708445}"/>
+          </ac:spMkLst>
+        </pc:spChg>
+        <pc:spChg chg="del mod topLvl">
+          <ac:chgData name="Zhao Jin" userId="cd05a825-544c-438a-9ba1-08e63db50b47" providerId="ADAL" clId="{5DF3A229-1965-414E-AF54-F4C37AC7DF68}" dt="2026-03-16T08:28:10.301" v="278" actId="478"/>
+          <ac:spMkLst>
+            <pc:docMk/>
+            <pc:sldMk cId="2489370454" sldId="605"/>
+            <ac:spMk id="14353" creationId="{DC316A36-1D91-1FC9-411E-D2CD691C077C}"/>
+          </ac:spMkLst>
+        </pc:spChg>
+        <pc:spChg chg="mod">
+          <ac:chgData name="Zhao Jin" userId="cd05a825-544c-438a-9ba1-08e63db50b47" providerId="ADAL" clId="{5DF3A229-1965-414E-AF54-F4C37AC7DF68}" dt="2026-03-16T08:28:47.884" v="291"/>
+          <ac:spMkLst>
+            <pc:docMk/>
+            <pc:sldMk cId="2489370454" sldId="605"/>
+            <ac:spMk id="14355" creationId="{010F2B22-20DE-E3EE-CF50-438BD8350929}"/>
+          </ac:spMkLst>
+        </pc:spChg>
+        <pc:spChg chg="mod">
+          <ac:chgData name="Zhao Jin" userId="cd05a825-544c-438a-9ba1-08e63db50b47" providerId="ADAL" clId="{5DF3A229-1965-414E-AF54-F4C37AC7DF68}" dt="2026-03-16T08:28:47.884" v="291"/>
+          <ac:spMkLst>
+            <pc:docMk/>
+            <pc:sldMk cId="2489370454" sldId="605"/>
+            <ac:spMk id="14356" creationId="{FD61A1C0-6DAF-F390-D291-EAD8FE3227A8}"/>
+          </ac:spMkLst>
+        </pc:spChg>
+        <pc:spChg chg="mod">
+          <ac:chgData name="Zhao Jin" userId="cd05a825-544c-438a-9ba1-08e63db50b47" providerId="ADAL" clId="{5DF3A229-1965-414E-AF54-F4C37AC7DF68}" dt="2026-03-16T08:28:47.884" v="291"/>
+          <ac:spMkLst>
+            <pc:docMk/>
+            <pc:sldMk cId="2489370454" sldId="605"/>
+            <ac:spMk id="14358" creationId="{810F8D22-6EBF-82B8-8A0E-07883EB7AD50}"/>
+          </ac:spMkLst>
+        </pc:spChg>
+        <pc:spChg chg="mod">
+          <ac:chgData name="Zhao Jin" userId="cd05a825-544c-438a-9ba1-08e63db50b47" providerId="ADAL" clId="{5DF3A229-1965-414E-AF54-F4C37AC7DF68}" dt="2026-03-16T08:28:47.884" v="291"/>
+          <ac:spMkLst>
+            <pc:docMk/>
+            <pc:sldMk cId="2489370454" sldId="605"/>
+            <ac:spMk id="14359" creationId="{36ED3FAE-E8AA-5C1D-19FD-68E02473B278}"/>
+          </ac:spMkLst>
+        </pc:spChg>
+        <pc:spChg chg="add mod">
+          <ac:chgData name="Zhao Jin" userId="cd05a825-544c-438a-9ba1-08e63db50b47" providerId="ADAL" clId="{5DF3A229-1965-414E-AF54-F4C37AC7DF68}" dt="2026-03-16T08:30:09.181" v="311" actId="207"/>
+          <ac:spMkLst>
+            <pc:docMk/>
+            <pc:sldMk cId="2489370454" sldId="605"/>
+            <ac:spMk id="14364" creationId="{AF7B2363-7F88-F3DD-4581-5E387B046DD9}"/>
+          </ac:spMkLst>
+        </pc:spChg>
+        <pc:spChg chg="mod">
+          <ac:chgData name="Zhao Jin" userId="cd05a825-544c-438a-9ba1-08e63db50b47" providerId="ADAL" clId="{5DF3A229-1965-414E-AF54-F4C37AC7DF68}" dt="2026-03-16T08:30:49.879" v="318"/>
+          <ac:spMkLst>
+            <pc:docMk/>
+            <pc:sldMk cId="2489370454" sldId="605"/>
+            <ac:spMk id="14369" creationId="{B1FCD55F-0DC4-A467-16D7-481F9D474DF2}"/>
+          </ac:spMkLst>
+        </pc:spChg>
+        <pc:grpChg chg="add mod ord">
+          <ac:chgData name="Zhao Jin" userId="cd05a825-544c-438a-9ba1-08e63db50b47" providerId="ADAL" clId="{5DF3A229-1965-414E-AF54-F4C37AC7DF68}" dt="2026-03-16T08:21:17.043" v="173" actId="167"/>
+          <ac:grpSpMkLst>
+            <pc:docMk/>
+            <pc:sldMk cId="2489370454" sldId="605"/>
+            <ac:grpSpMk id="5" creationId="{A269618B-B690-689D-FED2-5078E43C3B05}"/>
+          </ac:grpSpMkLst>
+        </pc:grpChg>
+        <pc:grpChg chg="add mod">
+          <ac:chgData name="Zhao Jin" userId="cd05a825-544c-438a-9ba1-08e63db50b47" providerId="ADAL" clId="{5DF3A229-1965-414E-AF54-F4C37AC7DF68}" dt="2026-03-17T03:45:37.727" v="1839" actId="571"/>
+          <ac:grpSpMkLst>
+            <pc:docMk/>
+            <pc:sldMk cId="2489370454" sldId="605"/>
+            <ac:grpSpMk id="9" creationId="{079C5BA5-9068-CA82-9D3C-0E3CDBA41A45}"/>
+          </ac:grpSpMkLst>
+        </pc:grpChg>
+        <pc:grpChg chg="add mod">
+          <ac:chgData name="Zhao Jin" userId="cd05a825-544c-438a-9ba1-08e63db50b47" providerId="ADAL" clId="{5DF3A229-1965-414E-AF54-F4C37AC7DF68}" dt="2026-03-17T03:45:37.727" v="1839" actId="571"/>
+          <ac:grpSpMkLst>
+            <pc:docMk/>
+            <pc:sldMk cId="2489370454" sldId="605"/>
+            <ac:grpSpMk id="12" creationId="{95121482-2111-BEA0-DE61-1EFCE426E5E9}"/>
+          </ac:grpSpMkLst>
+        </pc:grpChg>
+        <pc:grpChg chg="add mod">
+          <ac:chgData name="Zhao Jin" userId="cd05a825-544c-438a-9ba1-08e63db50b47" providerId="ADAL" clId="{5DF3A229-1965-414E-AF54-F4C37AC7DF68}" dt="2026-03-16T08:24:01.974" v="221" actId="1076"/>
+          <ac:grpSpMkLst>
+            <pc:docMk/>
+            <pc:sldMk cId="2489370454" sldId="605"/>
+            <ac:grpSpMk id="21" creationId="{E4168B44-75E3-3D81-5F08-64FD48350161}"/>
+          </ac:grpSpMkLst>
+        </pc:grpChg>
+        <pc:grpChg chg="mod">
+          <ac:chgData name="Zhao Jin" userId="cd05a825-544c-438a-9ba1-08e63db50b47" providerId="ADAL" clId="{5DF3A229-1965-414E-AF54-F4C37AC7DF68}" dt="2026-03-16T08:20:42.853" v="139" actId="1035"/>
+          <ac:grpSpMkLst>
+            <pc:docMk/>
+            <pc:sldMk cId="2489370454" sldId="605"/>
+            <ac:grpSpMk id="28" creationId="{00000000-0000-0000-0000-000000000000}"/>
+          </ac:grpSpMkLst>
+        </pc:grpChg>
+        <pc:grpChg chg="mod">
+          <ac:chgData name="Zhao Jin" userId="cd05a825-544c-438a-9ba1-08e63db50b47" providerId="ADAL" clId="{5DF3A229-1965-414E-AF54-F4C37AC7DF68}" dt="2026-03-16T08:24:01.974" v="221" actId="1076"/>
+          <ac:grpSpMkLst>
+            <pc:docMk/>
+            <pc:sldMk cId="2489370454" sldId="605"/>
+            <ac:grpSpMk id="38" creationId="{ED3CE4A6-F1A8-5C44-9BDD-89B0DB98B332}"/>
+          </ac:grpSpMkLst>
+        </pc:grpChg>
+        <pc:grpChg chg="del">
+          <ac:chgData name="Zhao Jin" userId="cd05a825-544c-438a-9ba1-08e63db50b47" providerId="ADAL" clId="{5DF3A229-1965-414E-AF54-F4C37AC7DF68}" dt="2026-03-16T08:20:08.259" v="76" actId="478"/>
+          <ac:grpSpMkLst>
+            <pc:docMk/>
+            <pc:sldMk cId="2489370454" sldId="605"/>
+            <ac:grpSpMk id="40" creationId="{00000000-0000-0000-0000-000000000000}"/>
+          </ac:grpSpMkLst>
+        </pc:grpChg>
+        <pc:grpChg chg="add del mod">
+          <ac:chgData name="Zhao Jin" userId="cd05a825-544c-438a-9ba1-08e63db50b47" providerId="ADAL" clId="{5DF3A229-1965-414E-AF54-F4C37AC7DF68}" dt="2026-03-16T08:23:55.898" v="219" actId="478"/>
+          <ac:grpSpMkLst>
+            <pc:docMk/>
+            <pc:sldMk cId="2489370454" sldId="605"/>
+            <ac:grpSpMk id="45" creationId="{00000000-0000-0000-0000-000000000000}"/>
+          </ac:grpSpMkLst>
+        </pc:grpChg>
+        <pc:grpChg chg="del">
+          <ac:chgData name="Zhao Jin" userId="cd05a825-544c-438a-9ba1-08e63db50b47" providerId="ADAL" clId="{5DF3A229-1965-414E-AF54-F4C37AC7DF68}" dt="2026-03-16T08:22:22.663" v="194" actId="478"/>
+          <ac:grpSpMkLst>
+            <pc:docMk/>
+            <pc:sldMk cId="2489370454" sldId="605"/>
+            <ac:grpSpMk id="53" creationId="{00000000-0000-0000-0000-000000000000}"/>
+          </ac:grpSpMkLst>
+        </pc:grpChg>
+        <pc:grpChg chg="add del mod">
+          <ac:chgData name="Zhao Jin" userId="cd05a825-544c-438a-9ba1-08e63db50b47" providerId="ADAL" clId="{5DF3A229-1965-414E-AF54-F4C37AC7DF68}" dt="2026-03-16T08:23:45.087" v="216" actId="1076"/>
+          <ac:grpSpMkLst>
+            <pc:docMk/>
+            <pc:sldMk cId="2489370454" sldId="605"/>
+            <ac:grpSpMk id="57" creationId="{00000000-0000-0000-0000-000000000000}"/>
+          </ac:grpSpMkLst>
+        </pc:grpChg>
+        <pc:grpChg chg="mod">
+          <ac:chgData name="Zhao Jin" userId="cd05a825-544c-438a-9ba1-08e63db50b47" providerId="ADAL" clId="{5DF3A229-1965-414E-AF54-F4C37AC7DF68}" dt="2026-03-16T08:24:01.974" v="221" actId="1076"/>
+          <ac:grpSpMkLst>
+            <pc:docMk/>
+            <pc:sldMk cId="2489370454" sldId="605"/>
+            <ac:grpSpMk id="62" creationId="{DC355F01-E83A-3CEF-1F13-28C865BC3166}"/>
+          </ac:grpSpMkLst>
+        </pc:grpChg>
+        <pc:grpChg chg="add del mod">
+          <ac:chgData name="Zhao Jin" userId="cd05a825-544c-438a-9ba1-08e63db50b47" providerId="ADAL" clId="{5DF3A229-1965-414E-AF54-F4C37AC7DF68}" dt="2026-03-16T08:24:48.975" v="227" actId="1076"/>
+          <ac:grpSpMkLst>
+            <pc:docMk/>
+            <pc:sldMk cId="2489370454" sldId="605"/>
+            <ac:grpSpMk id="14340" creationId="{3D501C43-A815-1BE4-F1E2-049596CF55B6}"/>
+          </ac:grpSpMkLst>
+        </pc:grpChg>
+        <pc:grpChg chg="add mod">
+          <ac:chgData name="Zhao Jin" userId="cd05a825-544c-438a-9ba1-08e63db50b47" providerId="ADAL" clId="{5DF3A229-1965-414E-AF54-F4C37AC7DF68}" dt="2026-03-16T08:28:27.239" v="287" actId="1076"/>
+          <ac:grpSpMkLst>
+            <pc:docMk/>
+            <pc:sldMk cId="2489370454" sldId="605"/>
+            <ac:grpSpMk id="14344" creationId="{AC7A4C55-499B-80F4-FD37-32D027CA700D}"/>
+          </ac:grpSpMkLst>
+        </pc:grpChg>
+        <pc:grpChg chg="mod">
+          <ac:chgData name="Zhao Jin" userId="cd05a825-544c-438a-9ba1-08e63db50b47" providerId="ADAL" clId="{5DF3A229-1965-414E-AF54-F4C37AC7DF68}" dt="2026-03-16T08:27:53.579" v="262"/>
+          <ac:grpSpMkLst>
+            <pc:docMk/>
+            <pc:sldMk cId="2489370454" sldId="605"/>
+            <ac:grpSpMk id="14345" creationId="{DD5FB169-40DB-968D-AA75-7F8C0E80F3D0}"/>
+          </ac:grpSpMkLst>
+        </pc:grpChg>
+        <pc:grpChg chg="del mod">
+          <ac:chgData name="Zhao Jin" userId="cd05a825-544c-438a-9ba1-08e63db50b47" providerId="ADAL" clId="{5DF3A229-1965-414E-AF54-F4C37AC7DF68}" dt="2026-03-16T08:28:12.531" v="279" actId="478"/>
+          <ac:grpSpMkLst>
+            <pc:docMk/>
+            <pc:sldMk cId="2489370454" sldId="605"/>
+            <ac:grpSpMk id="14346" creationId="{470C1A4D-EA1E-9ABE-DA54-0B29295A7B2A}"/>
+          </ac:grpSpMkLst>
+        </pc:grpChg>
+        <pc:grpChg chg="add del mod">
+          <ac:chgData name="Zhao Jin" userId="cd05a825-544c-438a-9ba1-08e63db50b47" providerId="ADAL" clId="{5DF3A229-1965-414E-AF54-F4C37AC7DF68}" dt="2026-03-16T08:28:09.501" v="277" actId="478"/>
+          <ac:grpSpMkLst>
+            <pc:docMk/>
+            <pc:sldMk cId="2489370454" sldId="605"/>
+            <ac:grpSpMk id="14351" creationId="{261263EF-8BDB-0940-7A97-0130575BD558}"/>
+          </ac:grpSpMkLst>
+        </pc:grpChg>
+        <pc:grpChg chg="add mod">
+          <ac:chgData name="Zhao Jin" userId="cd05a825-544c-438a-9ba1-08e63db50b47" providerId="ADAL" clId="{5DF3A229-1965-414E-AF54-F4C37AC7DF68}" dt="2026-03-16T08:29:05.829" v="295" actId="1076"/>
+          <ac:grpSpMkLst>
+            <pc:docMk/>
+            <pc:sldMk cId="2489370454" sldId="605"/>
+            <ac:grpSpMk id="14354" creationId="{2C9DA6EE-191D-612F-0DFE-CB1CEA55E827}"/>
+          </ac:grpSpMkLst>
+        </pc:grpChg>
+        <pc:grpChg chg="add mod">
+          <ac:chgData name="Zhao Jin" userId="cd05a825-544c-438a-9ba1-08e63db50b47" providerId="ADAL" clId="{5DF3A229-1965-414E-AF54-F4C37AC7DF68}" dt="2026-03-16T08:29:05.829" v="295" actId="1076"/>
+          <ac:grpSpMkLst>
+            <pc:docMk/>
+            <pc:sldMk cId="2489370454" sldId="605"/>
+            <ac:grpSpMk id="14357" creationId="{E9BA403E-D151-C8FF-1FA4-80D740D6AB9D}"/>
+          </ac:grpSpMkLst>
+        </pc:grpChg>
+        <pc:grpChg chg="add mod">
+          <ac:chgData name="Zhao Jin" userId="cd05a825-544c-438a-9ba1-08e63db50b47" providerId="ADAL" clId="{5DF3A229-1965-414E-AF54-F4C37AC7DF68}" dt="2026-03-16T08:30:53.999" v="319" actId="1076"/>
+          <ac:grpSpMkLst>
+            <pc:docMk/>
+            <pc:sldMk cId="2489370454" sldId="605"/>
+            <ac:grpSpMk id="14367" creationId="{BA59F521-B00E-9F3A-169B-EE12F362C01E}"/>
+          </ac:grpSpMkLst>
+        </pc:grpChg>
+        <pc:cxnChg chg="mod">
+          <ac:chgData name="Zhao Jin" userId="cd05a825-544c-438a-9ba1-08e63db50b47" providerId="ADAL" clId="{5DF3A229-1965-414E-AF54-F4C37AC7DF68}" dt="2026-03-16T08:21:37.131" v="178" actId="14100"/>
+          <ac:cxnSpMkLst>
+            <pc:docMk/>
+            <pc:sldMk cId="2489370454" sldId="605"/>
+            <ac:cxnSpMk id="35" creationId="{00000000-0000-0000-0000-000000000000}"/>
+          </ac:cxnSpMkLst>
+        </pc:cxnChg>
+        <pc:cxnChg chg="mod">
+          <ac:chgData name="Zhao Jin" userId="cd05a825-544c-438a-9ba1-08e63db50b47" providerId="ADAL" clId="{5DF3A229-1965-414E-AF54-F4C37AC7DF68}" dt="2026-03-16T08:22:08.228" v="188" actId="14100"/>
+          <ac:cxnSpMkLst>
+            <pc:docMk/>
+            <pc:sldMk cId="2489370454" sldId="605"/>
+            <ac:cxnSpMk id="49" creationId="{00000000-0000-0000-0000-000000000000}"/>
+          </ac:cxnSpMkLst>
+        </pc:cxnChg>
+        <pc:cxnChg chg="mod">
+          <ac:chgData name="Zhao Jin" userId="cd05a825-544c-438a-9ba1-08e63db50b47" providerId="ADAL" clId="{5DF3A229-1965-414E-AF54-F4C37AC7DF68}" dt="2026-03-16T08:24:01.974" v="221" actId="1076"/>
+          <ac:cxnSpMkLst>
+            <pc:docMk/>
+            <pc:sldMk cId="2489370454" sldId="605"/>
+            <ac:cxnSpMk id="14337" creationId="{45D6BEF7-469E-3A49-C23F-58F66AA9A6BE}"/>
+          </ac:cxnSpMkLst>
+        </pc:cxnChg>
+        <pc:cxnChg chg="mod">
+          <ac:chgData name="Zhao Jin" userId="cd05a825-544c-438a-9ba1-08e63db50b47" providerId="ADAL" clId="{5DF3A229-1965-414E-AF54-F4C37AC7DF68}" dt="2026-03-16T08:24:09.908" v="222" actId="14100"/>
+          <ac:cxnSpMkLst>
+            <pc:docMk/>
+            <pc:sldMk cId="2489370454" sldId="605"/>
+            <ac:cxnSpMk id="14339" creationId="{F42B4CE7-4729-98BF-8BC2-F5DDFA50CB98}"/>
+          </ac:cxnSpMkLst>
+        </pc:cxnChg>
+        <pc:cxnChg chg="del mod topLvl">
+          <ac:chgData name="Zhao Jin" userId="cd05a825-544c-438a-9ba1-08e63db50b47" providerId="ADAL" clId="{5DF3A229-1965-414E-AF54-F4C37AC7DF68}" dt="2026-03-16T08:28:09.501" v="277" actId="478"/>
+          <ac:cxnSpMkLst>
+            <pc:docMk/>
+            <pc:sldMk cId="2489370454" sldId="605"/>
+            <ac:cxnSpMk id="14352" creationId="{408807CC-1190-8F7C-D24D-C84B58A806C5}"/>
+          </ac:cxnSpMkLst>
+        </pc:cxnChg>
+        <pc:cxnChg chg="add mod">
+          <ac:chgData name="Zhao Jin" userId="cd05a825-544c-438a-9ba1-08e63db50b47" providerId="ADAL" clId="{5DF3A229-1965-414E-AF54-F4C37AC7DF68}" dt="2026-03-16T08:29:05.829" v="295" actId="1076"/>
+          <ac:cxnSpMkLst>
+            <pc:docMk/>
+            <pc:sldMk cId="2489370454" sldId="605"/>
+            <ac:cxnSpMk id="14360" creationId="{36FBC77A-66A8-0277-9D94-FAF9F886EFD9}"/>
+          </ac:cxnSpMkLst>
+        </pc:cxnChg>
+        <pc:cxnChg chg="add mod">
+          <ac:chgData name="Zhao Jin" userId="cd05a825-544c-438a-9ba1-08e63db50b47" providerId="ADAL" clId="{5DF3A229-1965-414E-AF54-F4C37AC7DF68}" dt="2026-03-16T08:28:54.084" v="293" actId="14100"/>
+          <ac:cxnSpMkLst>
+            <pc:docMk/>
+            <pc:sldMk cId="2489370454" sldId="605"/>
+            <ac:cxnSpMk id="14361" creationId="{406DFD73-86FE-B08C-FA18-EE9DBA693BC1}"/>
+          </ac:cxnSpMkLst>
+        </pc:cxnChg>
+        <pc:cxnChg chg="add mod">
+          <ac:chgData name="Zhao Jin" userId="cd05a825-544c-438a-9ba1-08e63db50b47" providerId="ADAL" clId="{5DF3A229-1965-414E-AF54-F4C37AC7DF68}" dt="2026-03-16T08:30:44.190" v="316"/>
+          <ac:cxnSpMkLst>
+            <pc:docMk/>
+            <pc:sldMk cId="2489370454" sldId="605"/>
+            <ac:cxnSpMk id="14365" creationId="{97F38EAF-4F8A-FCAD-507D-BAC0A46FE526}"/>
+          </ac:cxnSpMkLst>
+        </pc:cxnChg>
+        <pc:cxnChg chg="add mod">
+          <ac:chgData name="Zhao Jin" userId="cd05a825-544c-438a-9ba1-08e63db50b47" providerId="ADAL" clId="{5DF3A229-1965-414E-AF54-F4C37AC7DF68}" dt="2026-03-16T08:30:46.920" v="317"/>
+          <ac:cxnSpMkLst>
+            <pc:docMk/>
+            <pc:sldMk cId="2489370454" sldId="605"/>
+            <ac:cxnSpMk id="14366" creationId="{7ABDA9A0-6810-37E6-7E11-B24F5786E3F4}"/>
+          </ac:cxnSpMkLst>
+        </pc:cxnChg>
+        <pc:cxnChg chg="mod">
+          <ac:chgData name="Zhao Jin" userId="cd05a825-544c-438a-9ba1-08e63db50b47" providerId="ADAL" clId="{5DF3A229-1965-414E-AF54-F4C37AC7DF68}" dt="2026-03-16T08:30:49.879" v="318"/>
+          <ac:cxnSpMkLst>
+            <pc:docMk/>
+            <pc:sldMk cId="2489370454" sldId="605"/>
+            <ac:cxnSpMk id="14368" creationId="{7D2DC098-1C5C-65B0-17CB-3AE5E8C61CF1}"/>
+          </ac:cxnSpMkLst>
+        </pc:cxnChg>
       </pc:sldChg>
-    </pc:docChg>
-  </pc:docChgLst>
-  <pc:docChgLst>
-    <pc:chgData name="Zhao Jin" userId="cd05a825-544c-438a-9ba1-08e63db50b47" providerId="ADAL" clId="{D2C53CB4-D98E-4A4D-AB3B-F903C3FA77B9}"/>
-    <pc:docChg chg="undo custSel addSld delSld modSld">
-      <pc:chgData name="Zhao Jin" userId="cd05a825-544c-438a-9ba1-08e63db50b47" providerId="ADAL" clId="{D2C53CB4-D98E-4A4D-AB3B-F903C3FA77B9}" dt="2021-03-08T05:37:18.936" v="540"/>
-      <pc:docMkLst>
-        <pc:docMk/>
-      </pc:docMkLst>
-      <pc:sldChg chg="modSp mod">
-        <pc:chgData name="Zhao Jin" userId="cd05a825-544c-438a-9ba1-08e63db50b47" providerId="ADAL" clId="{D2C53CB4-D98E-4A4D-AB3B-F903C3FA77B9}" dt="2021-03-01T05:22:09.674" v="0" actId="20577"/>
-        <pc:sldMkLst>
-          <pc:docMk/>
-          <pc:sldMk cId="0" sldId="256"/>
-        </pc:sldMkLst>
-      </pc:sldChg>
-      <pc:sldChg chg="modAnim">
-        <pc:chgData name="Zhao Jin" userId="cd05a825-544c-438a-9ba1-08e63db50b47" providerId="ADAL" clId="{D2C53CB4-D98E-4A4D-AB3B-F903C3FA77B9}" dt="2021-03-08T05:37:18.936" v="540"/>
-        <pc:sldMkLst>
-          <pc:docMk/>
-          <pc:sldMk cId="1427618944" sldId="553"/>
-        </pc:sldMkLst>
-      </pc:sldChg>
-      <pc:sldChg chg="delSp modSp add del mod">
-        <pc:chgData name="Zhao Jin" userId="cd05a825-544c-438a-9ba1-08e63db50b47" providerId="ADAL" clId="{D2C53CB4-D98E-4A4D-AB3B-F903C3FA77B9}" dt="2021-03-08T05:22:34.940" v="208" actId="47"/>
-        <pc:sldMkLst>
-          <pc:docMk/>
-          <pc:sldMk cId="830535321" sldId="603"/>
-        </pc:sldMkLst>
-      </pc:sldChg>
-      <pc:sldChg chg="modSp mod">
-        <pc:chgData name="Zhao Jin" userId="cd05a825-544c-438a-9ba1-08e63db50b47" providerId="ADAL" clId="{D2C53CB4-D98E-4A4D-AB3B-F903C3FA77B9}" dt="2021-03-08T05:28:03.001" v="534" actId="20577"/>
-        <pc:sldMkLst>
-          <pc:docMk/>
-          <pc:sldMk cId="640598186" sldId="606"/>
-        </pc:sldMkLst>
-      </pc:sldChg>
-      <pc:sldChg chg="addSp delSp modSp add mod modAnim">
-        <pc:chgData name="Zhao Jin" userId="cd05a825-544c-438a-9ba1-08e63db50b47" providerId="ADAL" clId="{D2C53CB4-D98E-4A4D-AB3B-F903C3FA77B9}" dt="2021-03-08T05:36:39.052" v="539" actId="20577"/>
-        <pc:sldMkLst>
-          <pc:docMk/>
-          <pc:sldMk cId="3042096305" sldId="638"/>
-        </pc:sldMkLst>
-      </pc:sldChg>
-    </pc:docChg>
-  </pc:docChgLst>
-  <pc:docChgLst>
-    <pc:chgData name="Zhao Jin" userId="cd05a825-544c-438a-9ba1-08e63db50b47" providerId="ADAL" clId="{39F94C1A-1739-2146-9770-28C6D97CD74A}"/>
-    <pc:docChg chg="undo custSel addSld delSld modSld">
-      <pc:chgData name="Zhao Jin" userId="cd05a825-544c-438a-9ba1-08e63db50b47" providerId="ADAL" clId="{39F94C1A-1739-2146-9770-28C6D97CD74A}" dt="2021-01-27T04:54:28.852" v="864" actId="20577"/>
-      <pc:docMkLst>
-        <pc:docMk/>
-      </pc:docMkLst>
-      <pc:sldChg chg="modSp">
-        <pc:chgData name="Zhao Jin" userId="cd05a825-544c-438a-9ba1-08e63db50b47" providerId="ADAL" clId="{39F94C1A-1739-2146-9770-28C6D97CD74A}" dt="2021-01-27T04:29:55.834" v="1" actId="20577"/>
-        <pc:sldMkLst>
-          <pc:docMk/>
-          <pc:sldMk cId="0" sldId="256"/>
-        </pc:sldMkLst>
-      </pc:sldChg>
-      <pc:sldChg chg="addSp delSp modSp add delAnim modAnim">
-        <pc:chgData name="Zhao Jin" userId="cd05a825-544c-438a-9ba1-08e63db50b47" providerId="ADAL" clId="{39F94C1A-1739-2146-9770-28C6D97CD74A}" dt="2021-01-27T04:54:22.999" v="862" actId="20577"/>
-        <pc:sldMkLst>
-          <pc:docMk/>
-          <pc:sldMk cId="1492339910" sldId="485"/>
-        </pc:sldMkLst>
-      </pc:sldChg>
-      <pc:sldChg chg="addSp delSp modSp add modAnim">
-        <pc:chgData name="Zhao Jin" userId="cd05a825-544c-438a-9ba1-08e63db50b47" providerId="ADAL" clId="{39F94C1A-1739-2146-9770-28C6D97CD74A}" dt="2021-01-27T04:54:02.548" v="843" actId="20577"/>
-        <pc:sldMkLst>
-          <pc:docMk/>
-          <pc:sldMk cId="2775173622" sldId="524"/>
-        </pc:sldMkLst>
-      </pc:sldChg>
-      <pc:sldChg chg="add del">
-        <pc:chgData name="Zhao Jin" userId="cd05a825-544c-438a-9ba1-08e63db50b47" providerId="ADAL" clId="{39F94C1A-1739-2146-9770-28C6D97CD74A}" dt="2021-01-27T04:50:24.218" v="666"/>
-        <pc:sldMkLst>
-          <pc:docMk/>
-          <pc:sldMk cId="4023450610" sldId="524"/>
-        </pc:sldMkLst>
-      </pc:sldChg>
-      <pc:sldChg chg="del">
-        <pc:chgData name="Zhao Jin" userId="cd05a825-544c-438a-9ba1-08e63db50b47" providerId="ADAL" clId="{39F94C1A-1739-2146-9770-28C6D97CD74A}" dt="2021-01-27T04:30:02.278" v="7" actId="2696"/>
-        <pc:sldMkLst>
-          <pc:docMk/>
-          <pc:sldMk cId="3871162519" sldId="525"/>
-        </pc:sldMkLst>
-      </pc:sldChg>
-      <pc:sldChg chg="delSp modSp add">
-        <pc:chgData name="Zhao Jin" userId="cd05a825-544c-438a-9ba1-08e63db50b47" providerId="ADAL" clId="{39F94C1A-1739-2146-9770-28C6D97CD74A}" dt="2021-01-27T04:54:28.852" v="864" actId="20577"/>
-        <pc:sldMkLst>
-          <pc:docMk/>
-          <pc:sldMk cId="4078418712" sldId="525"/>
-        </pc:sldMkLst>
-      </pc:sldChg>
-      <pc:sldChg chg="del">
-        <pc:chgData name="Zhao Jin" userId="cd05a825-544c-438a-9ba1-08e63db50b47" providerId="ADAL" clId="{39F94C1A-1739-2146-9770-28C6D97CD74A}" dt="2021-01-27T04:30:02.169" v="2" actId="2696"/>
-        <pc:sldMkLst>
-          <pc:docMk/>
-          <pc:sldMk cId="2543678377" sldId="531"/>
-        </pc:sldMkLst>
-      </pc:sldChg>
-      <pc:sldChg chg="del">
-        <pc:chgData name="Zhao Jin" userId="cd05a825-544c-438a-9ba1-08e63db50b47" providerId="ADAL" clId="{39F94C1A-1739-2146-9770-28C6D97CD74A}" dt="2021-01-27T04:30:02.196" v="3" actId="2696"/>
-        <pc:sldMkLst>
-          <pc:docMk/>
-          <pc:sldMk cId="2025693378" sldId="532"/>
-        </pc:sldMkLst>
-      </pc:sldChg>
-      <pc:sldChg chg="del">
-        <pc:chgData name="Zhao Jin" userId="cd05a825-544c-438a-9ba1-08e63db50b47" providerId="ADAL" clId="{39F94C1A-1739-2146-9770-28C6D97CD74A}" dt="2021-01-27T04:30:02.254" v="5" actId="2696"/>
-        <pc:sldMkLst>
-          <pc:docMk/>
-          <pc:sldMk cId="266706937" sldId="533"/>
-        </pc:sldMkLst>
-      </pc:sldChg>
-      <pc:sldChg chg="del">
-        <pc:chgData name="Zhao Jin" userId="cd05a825-544c-438a-9ba1-08e63db50b47" providerId="ADAL" clId="{39F94C1A-1739-2146-9770-28C6D97CD74A}" dt="2021-01-27T04:30:02.230" v="4" actId="2696"/>
-        <pc:sldMkLst>
-          <pc:docMk/>
-          <pc:sldMk cId="3198948174" sldId="535"/>
-        </pc:sldMkLst>
-      </pc:sldChg>
-      <pc:sldChg chg="del">
-        <pc:chgData name="Zhao Jin" userId="cd05a825-544c-438a-9ba1-08e63db50b47" providerId="ADAL" clId="{39F94C1A-1739-2146-9770-28C6D97CD74A}" dt="2021-01-27T04:30:02.268" v="6" actId="2696"/>
-        <pc:sldMkLst>
-          <pc:docMk/>
-          <pc:sldMk cId="3984392134" sldId="537"/>
-        </pc:sldMkLst>
-      </pc:sldChg>
-      <pc:sldChg chg="modSp add">
-        <pc:chgData name="Zhao Jin" userId="cd05a825-544c-438a-9ba1-08e63db50b47" providerId="ADAL" clId="{39F94C1A-1739-2146-9770-28C6D97CD74A}" dt="2021-01-27T04:54:10.942" v="852" actId="20577"/>
-        <pc:sldMkLst>
-          <pc:docMk/>
-          <pc:sldMk cId="3949125736" sldId="548"/>
-        </pc:sldMkLst>
-      </pc:sldChg>
-      <pc:sldChg chg="modSp add">
-        <pc:chgData name="Zhao Jin" userId="cd05a825-544c-438a-9ba1-08e63db50b47" providerId="ADAL" clId="{39F94C1A-1739-2146-9770-28C6D97CD74A}" dt="2021-01-27T04:54:14.716" v="857" actId="20577"/>
-        <pc:sldMkLst>
-          <pc:docMk/>
-          <pc:sldMk cId="2939077141" sldId="549"/>
-        </pc:sldMkLst>
-      </pc:sldChg>
-    </pc:docChg>
-  </pc:docChgLst>
-  <pc:docChgLst>
-    <pc:chgData name="Zhao Jin" userId="cd05a825-544c-438a-9ba1-08e63db50b47" providerId="ADAL" clId="{FB8F02A0-9B99-4C9E-A1D1-3BF41D9621D7}"/>
-    <pc:docChg chg="undo custSel addSld delSld modSld sldOrd">
-      <pc:chgData name="Zhao Jin" userId="cd05a825-544c-438a-9ba1-08e63db50b47" providerId="ADAL" clId="{FB8F02A0-9B99-4C9E-A1D1-3BF41D9621D7}" dt="2021-02-08T02:21:29.074" v="2208" actId="20577"/>
-      <pc:docMkLst>
-        <pc:docMk/>
-      </pc:docMkLst>
-      <pc:sldChg chg="modSp">
-        <pc:chgData name="Zhao Jin" userId="cd05a825-544c-438a-9ba1-08e63db50b47" providerId="ADAL" clId="{FB8F02A0-9B99-4C9E-A1D1-3BF41D9621D7}" dt="2021-02-03T06:53:35.324" v="0"/>
-        <pc:sldMkLst>
-          <pc:docMk/>
-          <pc:sldMk cId="0" sldId="256"/>
-        </pc:sldMkLst>
-      </pc:sldChg>
-      <pc:sldChg chg="modSp del">
-        <pc:chgData name="Zhao Jin" userId="cd05a825-544c-438a-9ba1-08e63db50b47" providerId="ADAL" clId="{FB8F02A0-9B99-4C9E-A1D1-3BF41D9621D7}" dt="2021-02-03T07:15:04.758" v="547" actId="47"/>
-        <pc:sldMkLst>
-          <pc:docMk/>
-          <pc:sldMk cId="1492339910" sldId="485"/>
-        </pc:sldMkLst>
-      </pc:sldChg>
-      <pc:sldChg chg="addSp modSp add del mod">
-        <pc:chgData name="Zhao Jin" userId="cd05a825-544c-438a-9ba1-08e63db50b47" providerId="ADAL" clId="{FB8F02A0-9B99-4C9E-A1D1-3BF41D9621D7}" dt="2021-02-03T07:45:22.990" v="2123" actId="20577"/>
-        <pc:sldMkLst>
-          <pc:docMk/>
-          <pc:sldMk cId="2775173622" sldId="524"/>
-        </pc:sldMkLst>
-      </pc:sldChg>
-      <pc:sldChg chg="modSp mod">
-        <pc:chgData name="Zhao Jin" userId="cd05a825-544c-438a-9ba1-08e63db50b47" providerId="ADAL" clId="{FB8F02A0-9B99-4C9E-A1D1-3BF41D9621D7}" dt="2021-02-03T09:16:16.308" v="2184" actId="20577"/>
-        <pc:sldMkLst>
-          <pc:docMk/>
-          <pc:sldMk cId="4078418712" sldId="525"/>
-        </pc:sldMkLst>
-      </pc:sldChg>
-      <pc:sldChg chg="modSp del">
-        <pc:chgData name="Zhao Jin" userId="cd05a825-544c-438a-9ba1-08e63db50b47" providerId="ADAL" clId="{FB8F02A0-9B99-4C9E-A1D1-3BF41D9621D7}" dt="2021-02-03T07:02:36.712" v="7" actId="47"/>
-        <pc:sldMkLst>
-          <pc:docMk/>
-          <pc:sldMk cId="3949125736" sldId="548"/>
-        </pc:sldMkLst>
-      </pc:sldChg>
-      <pc:sldChg chg="modSp del">
-        <pc:chgData name="Zhao Jin" userId="cd05a825-544c-438a-9ba1-08e63db50b47" providerId="ADAL" clId="{FB8F02A0-9B99-4C9E-A1D1-3BF41D9621D7}" dt="2021-02-03T07:02:36.889" v="8" actId="47"/>
-        <pc:sldMkLst>
-          <pc:docMk/>
-          <pc:sldMk cId="2939077141" sldId="549"/>
-        </pc:sldMkLst>
-      </pc:sldChg>
-      <pc:sldChg chg="add del">
-        <pc:chgData name="Zhao Jin" userId="cd05a825-544c-438a-9ba1-08e63db50b47" providerId="ADAL" clId="{FB8F02A0-9B99-4C9E-A1D1-3BF41D9621D7}" dt="2021-02-03T07:07:45.930" v="221" actId="47"/>
-        <pc:sldMkLst>
-          <pc:docMk/>
-          <pc:sldMk cId="1352675019" sldId="551"/>
-        </pc:sldMkLst>
-      </pc:sldChg>
-      <pc:sldChg chg="addSp delSp modSp add mod">
-        <pc:chgData name="Zhao Jin" userId="cd05a825-544c-438a-9ba1-08e63db50b47" providerId="ADAL" clId="{FB8F02A0-9B99-4C9E-A1D1-3BF41D9621D7}" dt="2021-02-03T07:41:34.595" v="1864" actId="20578"/>
-        <pc:sldMkLst>
-          <pc:docMk/>
-          <pc:sldMk cId="2882118053" sldId="552"/>
-        </pc:sldMkLst>
-      </pc:sldChg>
-      <pc:sldChg chg="modSp add mod">
-        <pc:chgData name="Zhao Jin" userId="cd05a825-544c-438a-9ba1-08e63db50b47" providerId="ADAL" clId="{FB8F02A0-9B99-4C9E-A1D1-3BF41D9621D7}" dt="2021-02-03T07:20:30.275" v="935"/>
-        <pc:sldMkLst>
-          <pc:docMk/>
-          <pc:sldMk cId="2082920116" sldId="553"/>
-        </pc:sldMkLst>
-      </pc:sldChg>
-      <pc:sldChg chg="addSp delSp modSp add mod modAnim">
-        <pc:chgData name="Zhao Jin" userId="cd05a825-544c-438a-9ba1-08e63db50b47" providerId="ADAL" clId="{FB8F02A0-9B99-4C9E-A1D1-3BF41D9621D7}" dt="2021-02-03T07:42:15.454" v="1867" actId="20577"/>
-        <pc:sldMkLst>
-          <pc:docMk/>
-          <pc:sldMk cId="1659983766" sldId="554"/>
-        </pc:sldMkLst>
-      </pc:sldChg>
-      <pc:sldChg chg="addSp delSp modSp add del mod">
-        <pc:chgData name="Zhao Jin" userId="cd05a825-544c-438a-9ba1-08e63db50b47" providerId="ADAL" clId="{FB8F02A0-9B99-4C9E-A1D1-3BF41D9621D7}" dt="2021-02-03T07:07:06.993" v="219" actId="47"/>
-        <pc:sldMkLst>
-          <pc:docMk/>
-          <pc:sldMk cId="1268238251" sldId="555"/>
-        </pc:sldMkLst>
-      </pc:sldChg>
-      <pc:sldChg chg="modSp add del mod">
-        <pc:chgData name="Zhao Jin" userId="cd05a825-544c-438a-9ba1-08e63db50b47" providerId="ADAL" clId="{FB8F02A0-9B99-4C9E-A1D1-3BF41D9621D7}" dt="2021-02-03T07:42:30.854" v="1869" actId="47"/>
-        <pc:sldMkLst>
-          <pc:docMk/>
-          <pc:sldMk cId="788021743" sldId="557"/>
-        </pc:sldMkLst>
-      </pc:sldChg>
-      <pc:sldChg chg="delSp modSp add mod">
-        <pc:chgData name="Zhao Jin" userId="cd05a825-544c-438a-9ba1-08e63db50b47" providerId="ADAL" clId="{FB8F02A0-9B99-4C9E-A1D1-3BF41D9621D7}" dt="2021-02-08T02:19:37.781" v="2198" actId="478"/>
-        <pc:sldMkLst>
-          <pc:docMk/>
-          <pc:sldMk cId="686532275" sldId="558"/>
-        </pc:sldMkLst>
-      </pc:sldChg>
-      <pc:sldChg chg="delSp modSp add del mod delAnim">
-        <pc:chgData name="Zhao Jin" userId="cd05a825-544c-438a-9ba1-08e63db50b47" providerId="ADAL" clId="{FB8F02A0-9B99-4C9E-A1D1-3BF41D9621D7}" dt="2021-02-03T07:30:13.895" v="1095" actId="47"/>
-        <pc:sldMkLst>
-          <pc:docMk/>
-          <pc:sldMk cId="182578491" sldId="559"/>
-        </pc:sldMkLst>
-      </pc:sldChg>
-      <pc:sldChg chg="modSp add mod">
-        <pc:chgData name="Zhao Jin" userId="cd05a825-544c-438a-9ba1-08e63db50b47" providerId="ADAL" clId="{FB8F02A0-9B99-4C9E-A1D1-3BF41D9621D7}" dt="2021-02-03T07:20:33.509" v="937"/>
-        <pc:sldMkLst>
-          <pc:docMk/>
-          <pc:sldMk cId="1986771488" sldId="561"/>
-        </pc:sldMkLst>
-      </pc:sldChg>
-      <pc:sldChg chg="addSp delSp modSp add del mod delAnim modAnim">
-        <pc:chgData name="Zhao Jin" userId="cd05a825-544c-438a-9ba1-08e63db50b47" providerId="ADAL" clId="{FB8F02A0-9B99-4C9E-A1D1-3BF41D9621D7}" dt="2021-02-03T07:41:57.313" v="1865" actId="47"/>
-        <pc:sldMkLst>
-          <pc:docMk/>
-          <pc:sldMk cId="92291925" sldId="563"/>
-        </pc:sldMkLst>
-      </pc:sldChg>
-      <pc:sldChg chg="addSp modSp add mod modAnim">
-        <pc:chgData name="Zhao Jin" userId="cd05a825-544c-438a-9ba1-08e63db50b47" providerId="ADAL" clId="{FB8F02A0-9B99-4C9E-A1D1-3BF41D9621D7}" dt="2021-02-03T07:20:31.915" v="936"/>
-        <pc:sldMkLst>
-          <pc:docMk/>
-          <pc:sldMk cId="1276365520" sldId="564"/>
-        </pc:sldMkLst>
-      </pc:sldChg>
-      <pc:sldChg chg="delSp modSp add mod">
-        <pc:chgData name="Zhao Jin" userId="cd05a825-544c-438a-9ba1-08e63db50b47" providerId="ADAL" clId="{FB8F02A0-9B99-4C9E-A1D1-3BF41D9621D7}" dt="2021-02-03T07:20:28.829" v="934"/>
-        <pc:sldMkLst>
-          <pc:docMk/>
-          <pc:sldMk cId="827193018" sldId="565"/>
-        </pc:sldMkLst>
-      </pc:sldChg>
-      <pc:sldChg chg="modSp add mod">
-        <pc:chgData name="Zhao Jin" userId="cd05a825-544c-438a-9ba1-08e63db50b47" providerId="ADAL" clId="{FB8F02A0-9B99-4C9E-A1D1-3BF41D9621D7}" dt="2021-02-08T02:21:29.074" v="2208" actId="20577"/>
-        <pc:sldMkLst>
-          <pc:docMk/>
-          <pc:sldMk cId="3959984611" sldId="566"/>
-        </pc:sldMkLst>
-      </pc:sldChg>
-      <pc:sldChg chg="add del">
-        <pc:chgData name="Zhao Jin" userId="cd05a825-544c-438a-9ba1-08e63db50b47" providerId="ADAL" clId="{FB8F02A0-9B99-4C9E-A1D1-3BF41D9621D7}" dt="2021-02-03T07:34:00.322" v="1372" actId="47"/>
-        <pc:sldMkLst>
-          <pc:docMk/>
-          <pc:sldMk cId="243231529" sldId="567"/>
-        </pc:sldMkLst>
-      </pc:sldChg>
-      <pc:sldChg chg="modSp add del mod">
-        <pc:chgData name="Zhao Jin" userId="cd05a825-544c-438a-9ba1-08e63db50b47" providerId="ADAL" clId="{FB8F02A0-9B99-4C9E-A1D1-3BF41D9621D7}" dt="2021-02-03T07:30:57.488" v="1096" actId="47"/>
-        <pc:sldMkLst>
-          <pc:docMk/>
-          <pc:sldMk cId="3003604107" sldId="567"/>
-        </pc:sldMkLst>
-      </pc:sldChg>
-      <pc:sldChg chg="addSp delSp modSp add mod ord">
-        <pc:chgData name="Zhao Jin" userId="cd05a825-544c-438a-9ba1-08e63db50b47" providerId="ADAL" clId="{FB8F02A0-9B99-4C9E-A1D1-3BF41D9621D7}" dt="2021-02-03T07:45:20.173" v="2121" actId="20577"/>
-        <pc:sldMkLst>
-          <pc:docMk/>
-          <pc:sldMk cId="2879329457" sldId="568"/>
-        </pc:sldMkLst>
-      </pc:sldChg>
-      <pc:sldChg chg="modSp add mod">
-        <pc:chgData name="Zhao Jin" userId="cd05a825-544c-438a-9ba1-08e63db50b47" providerId="ADAL" clId="{FB8F02A0-9B99-4C9E-A1D1-3BF41D9621D7}" dt="2021-02-03T07:42:36.973" v="1870"/>
-        <pc:sldMkLst>
-          <pc:docMk/>
-          <pc:sldMk cId="4240540711" sldId="569"/>
-        </pc:sldMkLst>
-      </pc:sldChg>
-    </pc:docChg>
-  </pc:docChgLst>
-  <pc:docChgLst>
-    <pc:chgData name="Zhao Jin" userId="cd05a825-544c-438a-9ba1-08e63db50b47" providerId="ADAL" clId="{42CBC425-D3B9-4B8D-B8E2-D6C35D1DE04B}"/>
-    <pc:docChg chg="undo redo custSel addSld delSld modSld sldOrd">
-      <pc:chgData name="Zhao Jin" userId="cd05a825-544c-438a-9ba1-08e63db50b47" providerId="ADAL" clId="{42CBC425-D3B9-4B8D-B8E2-D6C35D1DE04B}" dt="2024-03-19T03:49:11.589" v="2784" actId="20577"/>
-      <pc:docMkLst>
-        <pc:docMk/>
-      </pc:docMkLst>
-      <pc:sldChg chg="modSp mod">
-        <pc:chgData name="Zhao Jin" userId="cd05a825-544c-438a-9ba1-08e63db50b47" providerId="ADAL" clId="{42CBC425-D3B9-4B8D-B8E2-D6C35D1DE04B}" dt="2024-03-18T06:34:44.229" v="1847" actId="207"/>
-        <pc:sldMkLst>
-          <pc:docMk/>
-          <pc:sldMk cId="4078418712" sldId="525"/>
-        </pc:sldMkLst>
-      </pc:sldChg>
-      <pc:sldChg chg="del">
-        <pc:chgData name="Zhao Jin" userId="cd05a825-544c-438a-9ba1-08e63db50b47" providerId="ADAL" clId="{42CBC425-D3B9-4B8D-B8E2-D6C35D1DE04B}" dt="2024-03-18T05:54:01.478" v="4" actId="2696"/>
-        <pc:sldMkLst>
-          <pc:docMk/>
-          <pc:sldMk cId="1427618944" sldId="553"/>
-        </pc:sldMkLst>
-      </pc:sldChg>
-      <pc:sldChg chg="addSp delSp modSp add mod ord">
-        <pc:chgData name="Zhao Jin" userId="cd05a825-544c-438a-9ba1-08e63db50b47" providerId="ADAL" clId="{42CBC425-D3B9-4B8D-B8E2-D6C35D1DE04B}" dt="2024-03-19T00:58:43.663" v="2770" actId="20577"/>
-        <pc:sldMkLst>
-          <pc:docMk/>
-          <pc:sldMk cId="1542002799" sldId="602"/>
-        </pc:sldMkLst>
-      </pc:sldChg>
-      <pc:sldChg chg="delSp modSp add mod modAnim">
-        <pc:chgData name="Zhao Jin" userId="cd05a825-544c-438a-9ba1-08e63db50b47" providerId="ADAL" clId="{42CBC425-D3B9-4B8D-B8E2-D6C35D1DE04B}" dt="2024-03-18T06:27:24.898" v="1475" actId="478"/>
-        <pc:sldMkLst>
-          <pc:docMk/>
-          <pc:sldMk cId="2489370454" sldId="605"/>
-        </pc:sldMkLst>
-      </pc:sldChg>
-      <pc:sldChg chg="addSp delSp modSp add mod">
-        <pc:chgData name="Zhao Jin" userId="cd05a825-544c-438a-9ba1-08e63db50b47" providerId="ADAL" clId="{42CBC425-D3B9-4B8D-B8E2-D6C35D1DE04B}" dt="2024-03-19T00:56:10.127" v="2766" actId="14100"/>
-        <pc:sldMkLst>
-          <pc:docMk/>
-          <pc:sldMk cId="2649651371" sldId="607"/>
-        </pc:sldMkLst>
-      </pc:sldChg>
-      <pc:sldChg chg="del">
-        <pc:chgData name="Zhao Jin" userId="cd05a825-544c-438a-9ba1-08e63db50b47" providerId="ADAL" clId="{42CBC425-D3B9-4B8D-B8E2-D6C35D1DE04B}" dt="2024-03-18T05:54:01.478" v="4" actId="2696"/>
-        <pc:sldMkLst>
-          <pc:docMk/>
-          <pc:sldMk cId="3737971943" sldId="637"/>
-        </pc:sldMkLst>
-      </pc:sldChg>
-      <pc:sldChg chg="addSp delSp modSp mod modAnim">
-        <pc:chgData name="Zhao Jin" userId="cd05a825-544c-438a-9ba1-08e63db50b47" providerId="ADAL" clId="{42CBC425-D3B9-4B8D-B8E2-D6C35D1DE04B}" dt="2024-03-19T00:50:09.452" v="2658" actId="1076"/>
-        <pc:sldMkLst>
-          <pc:docMk/>
-          <pc:sldMk cId="1252576829" sldId="639"/>
-        </pc:sldMkLst>
-      </pc:sldChg>
-      <pc:sldChg chg="addSp delSp modSp mod modAnim">
-        <pc:chgData name="Zhao Jin" userId="cd05a825-544c-438a-9ba1-08e63db50b47" providerId="ADAL" clId="{42CBC425-D3B9-4B8D-B8E2-D6C35D1DE04B}" dt="2024-03-19T00:55:52.516" v="2760"/>
-        <pc:sldMkLst>
-          <pc:docMk/>
-          <pc:sldMk cId="649273319" sldId="640"/>
-        </pc:sldMkLst>
-      </pc:sldChg>
-      <pc:sldChg chg="addSp delSp modSp mod">
-        <pc:chgData name="Zhao Jin" userId="cd05a825-544c-438a-9ba1-08e63db50b47" providerId="ADAL" clId="{42CBC425-D3B9-4B8D-B8E2-D6C35D1DE04B}" dt="2024-03-19T00:53:48.548" v="2758" actId="20577"/>
-        <pc:sldMkLst>
-          <pc:docMk/>
-          <pc:sldMk cId="3269496185" sldId="641"/>
-        </pc:sldMkLst>
-      </pc:sldChg>
-      <pc:sldChg chg="add del">
-        <pc:chgData name="Zhao Jin" userId="cd05a825-544c-438a-9ba1-08e63db50b47" providerId="ADAL" clId="{42CBC425-D3B9-4B8D-B8E2-D6C35D1DE04B}" dt="2024-03-18T06:13:37.059" v="495" actId="2696"/>
-        <pc:sldMkLst>
-          <pc:docMk/>
-          <pc:sldMk cId="1179750071" sldId="642"/>
-        </pc:sldMkLst>
-      </pc:sldChg>
-      <pc:sldChg chg="del">
-        <pc:chgData name="Zhao Jin" userId="cd05a825-544c-438a-9ba1-08e63db50b47" providerId="ADAL" clId="{42CBC425-D3B9-4B8D-B8E2-D6C35D1DE04B}" dt="2024-03-18T05:54:01.478" v="4" actId="2696"/>
-        <pc:sldMkLst>
-          <pc:docMk/>
-          <pc:sldMk cId="723901272" sldId="643"/>
-        </pc:sldMkLst>
-      </pc:sldChg>
-      <pc:sldChg chg="del">
-        <pc:chgData name="Zhao Jin" userId="cd05a825-544c-438a-9ba1-08e63db50b47" providerId="ADAL" clId="{42CBC425-D3B9-4B8D-B8E2-D6C35D1DE04B}" dt="2024-03-18T05:54:01.478" v="4" actId="2696"/>
-        <pc:sldMkLst>
-          <pc:docMk/>
-          <pc:sldMk cId="1514327557" sldId="644"/>
-        </pc:sldMkLst>
-      </pc:sldChg>
-      <pc:sldChg chg="del">
-        <pc:chgData name="Zhao Jin" userId="cd05a825-544c-438a-9ba1-08e63db50b47" providerId="ADAL" clId="{42CBC425-D3B9-4B8D-B8E2-D6C35D1DE04B}" dt="2024-03-18T05:54:01.478" v="4" actId="2696"/>
-        <pc:sldMkLst>
-          <pc:docMk/>
-          <pc:sldMk cId="1862784809" sldId="645"/>
-        </pc:sldMkLst>
-      </pc:sldChg>
-      <pc:sldChg chg="modSp add mod">
-        <pc:chgData name="Zhao Jin" userId="cd05a825-544c-438a-9ba1-08e63db50b47" providerId="ADAL" clId="{42CBC425-D3B9-4B8D-B8E2-D6C35D1DE04B}" dt="2024-03-19T00:59:41.154" v="2771" actId="404"/>
-        <pc:sldMkLst>
-          <pc:docMk/>
-          <pc:sldMk cId="1288165417" sldId="646"/>
-        </pc:sldMkLst>
-      </pc:sldChg>
-      <pc:sldChg chg="delSp modSp add mod">
-        <pc:chgData name="Zhao Jin" userId="cd05a825-544c-438a-9ba1-08e63db50b47" providerId="ADAL" clId="{42CBC425-D3B9-4B8D-B8E2-D6C35D1DE04B}" dt="2024-03-19T00:36:51.614" v="2236" actId="14100"/>
-        <pc:sldMkLst>
-          <pc:docMk/>
-          <pc:sldMk cId="1235845528" sldId="647"/>
-        </pc:sldMkLst>
-      </pc:sldChg>
-      <pc:sldChg chg="addSp delSp modSp add mod">
-        <pc:chgData name="Zhao Jin" userId="cd05a825-544c-438a-9ba1-08e63db50b47" providerId="ADAL" clId="{42CBC425-D3B9-4B8D-B8E2-D6C35D1DE04B}" dt="2024-03-19T00:29:59.937" v="1866" actId="20577"/>
-        <pc:sldMkLst>
-          <pc:docMk/>
-          <pc:sldMk cId="3770617452" sldId="648"/>
-        </pc:sldMkLst>
-      </pc:sldChg>
-      <pc:sldChg chg="add del">
-        <pc:chgData name="Zhao Jin" userId="cd05a825-544c-438a-9ba1-08e63db50b47" providerId="ADAL" clId="{42CBC425-D3B9-4B8D-B8E2-D6C35D1DE04B}" dt="2024-03-18T06:20:03.873" v="707"/>
-        <pc:sldMkLst>
-          <pc:docMk/>
-          <pc:sldMk cId="2636060289" sldId="649"/>
-        </pc:sldMkLst>
-      </pc:sldChg>
-      <pc:sldChg chg="addSp delSp modSp add mod ord">
-        <pc:chgData name="Zhao Jin" userId="cd05a825-544c-438a-9ba1-08e63db50b47" providerId="ADAL" clId="{42CBC425-D3B9-4B8D-B8E2-D6C35D1DE04B}" dt="2024-03-19T00:55:24.295" v="2759" actId="20577"/>
+      <pc:sldChg chg="addSp delSp modSp mod ord">
+        <pc:chgData name="Zhao Jin" userId="cd05a825-544c-438a-9ba1-08e63db50b47" providerId="ADAL" clId="{5DF3A229-1965-414E-AF54-F4C37AC7DF68}" dt="2026-03-16T08:38:29.115" v="765" actId="20577"/>
         <pc:sldMkLst>
           <pc:docMk/>
           <pc:sldMk cId="3150831465" sldId="649"/>
         </pc:sldMkLst>
+        <pc:spChg chg="mod">
+          <ac:chgData name="Zhao Jin" userId="cd05a825-544c-438a-9ba1-08e63db50b47" providerId="ADAL" clId="{5DF3A229-1965-414E-AF54-F4C37AC7DF68}" dt="2026-03-16T08:38:29.115" v="765" actId="20577"/>
+          <ac:spMkLst>
+            <pc:docMk/>
+            <pc:sldMk cId="3150831465" sldId="649"/>
+            <ac:spMk id="4" creationId="{E1783DF5-5055-11C4-2722-992E62E81F11}"/>
+          </ac:spMkLst>
+        </pc:spChg>
+        <pc:spChg chg="add del mod">
+          <ac:chgData name="Zhao Jin" userId="cd05a825-544c-438a-9ba1-08e63db50b47" providerId="ADAL" clId="{5DF3A229-1965-414E-AF54-F4C37AC7DF68}" dt="2026-03-16T08:37:38.059" v="632" actId="1076"/>
+          <ac:spMkLst>
+            <pc:docMk/>
+            <pc:sldMk cId="3150831465" sldId="649"/>
+            <ac:spMk id="5" creationId="{1F335067-2DF1-C857-A247-B290D4559EF7}"/>
+          </ac:spMkLst>
+        </pc:spChg>
+        <pc:spChg chg="add del mod">
+          <ac:chgData name="Zhao Jin" userId="cd05a825-544c-438a-9ba1-08e63db50b47" providerId="ADAL" clId="{5DF3A229-1965-414E-AF54-F4C37AC7DF68}" dt="2026-03-16T08:33:27.059" v="387" actId="478"/>
+          <ac:spMkLst>
+            <pc:docMk/>
+            <pc:sldMk cId="3150831465" sldId="649"/>
+            <ac:spMk id="7" creationId="{AF102B8B-920B-2D80-C13D-6CFADFDB816A}"/>
+          </ac:spMkLst>
+        </pc:spChg>
       </pc:sldChg>
-      <pc:sldChg chg="delSp modSp add mod">
-        <pc:chgData name="Zhao Jin" userId="cd05a825-544c-438a-9ba1-08e63db50b47" providerId="ADAL" clId="{42CBC425-D3B9-4B8D-B8E2-D6C35D1DE04B}" dt="2024-03-19T03:49:11.589" v="2784" actId="20577"/>
+      <pc:sldChg chg="addSp delSp modSp add mod addAnim delAnim modAnim">
+        <pc:chgData name="Zhao Jin" userId="cd05a825-544c-438a-9ba1-08e63db50b47" providerId="ADAL" clId="{5DF3A229-1965-414E-AF54-F4C37AC7DF68}" dt="2026-03-16T08:52:55.704" v="1836" actId="20577"/>
         <pc:sldMkLst>
           <pc:docMk/>
-          <pc:sldMk cId="571008113" sldId="650"/>
+          <pc:sldMk cId="758105953" sldId="651"/>
+        </pc:sldMkLst>
+        <pc:spChg chg="del">
+          <ac:chgData name="Zhao Jin" userId="cd05a825-544c-438a-9ba1-08e63db50b47" providerId="ADAL" clId="{5DF3A229-1965-414E-AF54-F4C37AC7DF68}" dt="2026-03-16T08:40:02.739" v="782" actId="478"/>
+          <ac:spMkLst>
+            <pc:docMk/>
+            <pc:sldMk cId="758105953" sldId="651"/>
+            <ac:spMk id="4" creationId="{59A243D6-DAE2-D2F2-47F2-322DA929D068}"/>
+          </ac:spMkLst>
+        </pc:spChg>
+        <pc:spChg chg="add del mod">
+          <ac:chgData name="Zhao Jin" userId="cd05a825-544c-438a-9ba1-08e63db50b47" providerId="ADAL" clId="{5DF3A229-1965-414E-AF54-F4C37AC7DF68}" dt="2026-03-16T08:44:33.948" v="1308" actId="478"/>
+          <ac:spMkLst>
+            <pc:docMk/>
+            <pc:sldMk cId="758105953" sldId="651"/>
+            <ac:spMk id="6" creationId="{350CEC4D-E896-2A06-FFF4-478795BED17B}"/>
+          </ac:spMkLst>
+        </pc:spChg>
+        <pc:spChg chg="add mod">
+          <ac:chgData name="Zhao Jin" userId="cd05a825-544c-438a-9ba1-08e63db50b47" providerId="ADAL" clId="{5DF3A229-1965-414E-AF54-F4C37AC7DF68}" dt="2026-03-16T08:52:13.417" v="1770" actId="1036"/>
+          <ac:spMkLst>
+            <pc:docMk/>
+            <pc:sldMk cId="758105953" sldId="651"/>
+            <ac:spMk id="7" creationId="{53D638EA-CF50-265F-9E28-8A0F64937839}"/>
+          </ac:spMkLst>
+        </pc:spChg>
+        <pc:spChg chg="mod">
+          <ac:chgData name="Zhao Jin" userId="cd05a825-544c-438a-9ba1-08e63db50b47" providerId="ADAL" clId="{5DF3A229-1965-414E-AF54-F4C37AC7DF68}" dt="2026-03-16T08:52:05.936" v="1725" actId="20577"/>
+          <ac:spMkLst>
+            <pc:docMk/>
+            <pc:sldMk cId="758105953" sldId="651"/>
+            <ac:spMk id="8" creationId="{E8773C0A-D6C2-4593-4D01-563C21C9F0FF}"/>
+          </ac:spMkLst>
+        </pc:spChg>
+        <pc:spChg chg="add mod">
+          <ac:chgData name="Zhao Jin" userId="cd05a825-544c-438a-9ba1-08e63db50b47" providerId="ADAL" clId="{5DF3A229-1965-414E-AF54-F4C37AC7DF68}" dt="2026-03-16T08:52:11.515" v="1765" actId="1035"/>
+          <ac:spMkLst>
+            <pc:docMk/>
+            <pc:sldMk cId="758105953" sldId="651"/>
+            <ac:spMk id="9" creationId="{106078D8-557F-B9C5-3ECD-D88AD4999143}"/>
+          </ac:spMkLst>
+        </pc:spChg>
+        <pc:spChg chg="add mod">
+          <ac:chgData name="Zhao Jin" userId="cd05a825-544c-438a-9ba1-08e63db50b47" providerId="ADAL" clId="{5DF3A229-1965-414E-AF54-F4C37AC7DF68}" dt="2026-03-16T08:52:17.568" v="1788" actId="1036"/>
+          <ac:spMkLst>
+            <pc:docMk/>
+            <pc:sldMk cId="758105953" sldId="651"/>
+            <ac:spMk id="10" creationId="{BB94FB9B-2950-E606-7424-12B9BB1BF847}"/>
+          </ac:spMkLst>
+        </pc:spChg>
+        <pc:spChg chg="add mod">
+          <ac:chgData name="Zhao Jin" userId="cd05a825-544c-438a-9ba1-08e63db50b47" providerId="ADAL" clId="{5DF3A229-1965-414E-AF54-F4C37AC7DF68}" dt="2026-03-16T08:52:55.704" v="1836" actId="20577"/>
+          <ac:spMkLst>
+            <pc:docMk/>
+            <pc:sldMk cId="758105953" sldId="651"/>
+            <ac:spMk id="11" creationId="{A73ED033-1C08-85EF-F007-C0CA22865A1F}"/>
+          </ac:spMkLst>
+        </pc:spChg>
+        <pc:spChg chg="add mod">
+          <ac:chgData name="Zhao Jin" userId="cd05a825-544c-438a-9ba1-08e63db50b47" providerId="ADAL" clId="{5DF3A229-1965-414E-AF54-F4C37AC7DF68}" dt="2026-03-16T08:52:17.568" v="1788" actId="1036"/>
+          <ac:spMkLst>
+            <pc:docMk/>
+            <pc:sldMk cId="758105953" sldId="651"/>
+            <ac:spMk id="12" creationId="{9785DF0D-7116-144A-D172-BE7B4FFBC25A}"/>
+          </ac:spMkLst>
+        </pc:spChg>
+        <pc:spChg chg="mod">
+          <ac:chgData name="Zhao Jin" userId="cd05a825-544c-438a-9ba1-08e63db50b47" providerId="ADAL" clId="{5DF3A229-1965-414E-AF54-F4C37AC7DF68}" dt="2026-03-16T08:39:53.413" v="780"/>
+          <ac:spMkLst>
+            <pc:docMk/>
+            <pc:sldMk cId="758105953" sldId="651"/>
+            <ac:spMk id="14338" creationId="{6DFF6ACA-2E55-76AF-7393-B8244167D28F}"/>
+          </ac:spMkLst>
+        </pc:spChg>
+      </pc:sldChg>
+      <pc:sldChg chg="add del">
+        <pc:chgData name="Zhao Jin" userId="cd05a825-544c-438a-9ba1-08e63db50b47" providerId="ADAL" clId="{5DF3A229-1965-414E-AF54-F4C37AC7DF68}" dt="2026-03-16T08:27:50.225" v="261"/>
+        <pc:sldMkLst>
+          <pc:docMk/>
+          <pc:sldMk cId="2501250364" sldId="651"/>
         </pc:sldMkLst>
       </pc:sldChg>
-    </pc:docChg>
-  </pc:docChgLst>
-  <pc:docChgLst>
-    <pc:chgData name="Zhao Jin" userId="cd05a825-544c-438a-9ba1-08e63db50b47" providerId="ADAL" clId="{DAF5EBAD-D68B-4913-8181-6560BAA6D225}"/>
-    <pc:docChg chg="custSel modSld">
-      <pc:chgData name="Zhao Jin" userId="cd05a825-544c-438a-9ba1-08e63db50b47" providerId="ADAL" clId="{DAF5EBAD-D68B-4913-8181-6560BAA6D225}" dt="2024-01-31T05:15:06.024" v="2" actId="27636"/>
-      <pc:docMkLst>
-        <pc:docMk/>
-      </pc:docMkLst>
-      <pc:sldChg chg="addSp modSp">
-        <pc:chgData name="Zhao Jin" userId="cd05a825-544c-438a-9ba1-08e63db50b47" providerId="ADAL" clId="{DAF5EBAD-D68B-4913-8181-6560BAA6D225}" dt="2024-01-31T05:13:47.240" v="0"/>
+      <pc:sldChg chg="add del">
+        <pc:chgData name="Zhao Jin" userId="cd05a825-544c-438a-9ba1-08e63db50b47" providerId="ADAL" clId="{5DF3A229-1965-414E-AF54-F4C37AC7DF68}" dt="2026-03-16T08:44:05.663" v="1276"/>
         <pc:sldMkLst>
           <pc:docMk/>
-          <pc:sldMk cId="0" sldId="256"/>
-        </pc:sldMkLst>
-      </pc:sldChg>
-      <pc:sldChg chg="modSp">
-        <pc:chgData name="Zhao Jin" userId="cd05a825-544c-438a-9ba1-08e63db50b47" providerId="ADAL" clId="{DAF5EBAD-D68B-4913-8181-6560BAA6D225}" dt="2024-01-31T05:15:05.984" v="1"/>
-        <pc:sldMkLst>
-          <pc:docMk/>
-          <pc:sldMk cId="4078418712" sldId="525"/>
-        </pc:sldMkLst>
-      </pc:sldChg>
-      <pc:sldChg chg="modSp">
-        <pc:chgData name="Zhao Jin" userId="cd05a825-544c-438a-9ba1-08e63db50b47" providerId="ADAL" clId="{DAF5EBAD-D68B-4913-8181-6560BAA6D225}" dt="2024-01-31T05:15:05.984" v="1"/>
-        <pc:sldMkLst>
-          <pc:docMk/>
-          <pc:sldMk cId="1427618944" sldId="553"/>
-        </pc:sldMkLst>
-      </pc:sldChg>
-      <pc:sldChg chg="modSp">
-        <pc:chgData name="Zhao Jin" userId="cd05a825-544c-438a-9ba1-08e63db50b47" providerId="ADAL" clId="{DAF5EBAD-D68B-4913-8181-6560BAA6D225}" dt="2024-01-31T05:15:05.984" v="1"/>
-        <pc:sldMkLst>
-          <pc:docMk/>
-          <pc:sldMk cId="3737971943" sldId="637"/>
-        </pc:sldMkLst>
-      </pc:sldChg>
-      <pc:sldChg chg="modSp">
-        <pc:chgData name="Zhao Jin" userId="cd05a825-544c-438a-9ba1-08e63db50b47" providerId="ADAL" clId="{DAF5EBAD-D68B-4913-8181-6560BAA6D225}" dt="2024-01-31T05:15:05.984" v="1"/>
-        <pc:sldMkLst>
-          <pc:docMk/>
-          <pc:sldMk cId="1252576829" sldId="639"/>
-        </pc:sldMkLst>
-      </pc:sldChg>
-      <pc:sldChg chg="modSp">
-        <pc:chgData name="Zhao Jin" userId="cd05a825-544c-438a-9ba1-08e63db50b47" providerId="ADAL" clId="{DAF5EBAD-D68B-4913-8181-6560BAA6D225}" dt="2024-01-31T05:15:05.984" v="1"/>
-        <pc:sldMkLst>
-          <pc:docMk/>
-          <pc:sldMk cId="649273319" sldId="640"/>
-        </pc:sldMkLst>
-      </pc:sldChg>
-      <pc:sldChg chg="modSp">
-        <pc:chgData name="Zhao Jin" userId="cd05a825-544c-438a-9ba1-08e63db50b47" providerId="ADAL" clId="{DAF5EBAD-D68B-4913-8181-6560BAA6D225}" dt="2024-01-31T05:15:05.984" v="1"/>
-        <pc:sldMkLst>
-          <pc:docMk/>
-          <pc:sldMk cId="3269496185" sldId="641"/>
-        </pc:sldMkLst>
-      </pc:sldChg>
-      <pc:sldChg chg="modSp">
-        <pc:chgData name="Zhao Jin" userId="cd05a825-544c-438a-9ba1-08e63db50b47" providerId="ADAL" clId="{DAF5EBAD-D68B-4913-8181-6560BAA6D225}" dt="2024-01-31T05:15:05.984" v="1"/>
-        <pc:sldMkLst>
-          <pc:docMk/>
-          <pc:sldMk cId="1179750071" sldId="642"/>
-        </pc:sldMkLst>
-      </pc:sldChg>
-      <pc:sldChg chg="modSp">
-        <pc:chgData name="Zhao Jin" userId="cd05a825-544c-438a-9ba1-08e63db50b47" providerId="ADAL" clId="{DAF5EBAD-D68B-4913-8181-6560BAA6D225}" dt="2024-01-31T05:15:05.984" v="1"/>
-        <pc:sldMkLst>
-          <pc:docMk/>
-          <pc:sldMk cId="723901272" sldId="643"/>
-        </pc:sldMkLst>
-      </pc:sldChg>
-      <pc:sldChg chg="modSp">
-        <pc:chgData name="Zhao Jin" userId="cd05a825-544c-438a-9ba1-08e63db50b47" providerId="ADAL" clId="{DAF5EBAD-D68B-4913-8181-6560BAA6D225}" dt="2024-01-31T05:15:05.984" v="1"/>
-        <pc:sldMkLst>
-          <pc:docMk/>
-          <pc:sldMk cId="1514327557" sldId="644"/>
-        </pc:sldMkLst>
-      </pc:sldChg>
-      <pc:sldChg chg="modSp mod">
-        <pc:chgData name="Zhao Jin" userId="cd05a825-544c-438a-9ba1-08e63db50b47" providerId="ADAL" clId="{DAF5EBAD-D68B-4913-8181-6560BAA6D225}" dt="2024-01-31T05:15:06.024" v="2" actId="27636"/>
-        <pc:sldMkLst>
-          <pc:docMk/>
-          <pc:sldMk cId="1862784809" sldId="645"/>
-        </pc:sldMkLst>
-      </pc:sldChg>
-    </pc:docChg>
-  </pc:docChgLst>
-  <pc:docChgLst>
-    <pc:chgData name="Zhao Jin" userId="cd05a825-544c-438a-9ba1-08e63db50b47" providerId="ADAL" clId="{4B210626-01B8-4C7F-B412-3DD94FD28A35}"/>
-    <pc:docChg chg="undo custSel addSld delSld modSld sldOrd">
-      <pc:chgData name="Zhao Jin" userId="cd05a825-544c-438a-9ba1-08e63db50b47" providerId="ADAL" clId="{4B210626-01B8-4C7F-B412-3DD94FD28A35}" dt="2021-03-11T06:32:04.234" v="1132" actId="20577"/>
-      <pc:docMkLst>
-        <pc:docMk/>
-      </pc:docMkLst>
-      <pc:sldChg chg="modSp">
-        <pc:chgData name="Zhao Jin" userId="cd05a825-544c-438a-9ba1-08e63db50b47" providerId="ADAL" clId="{4B210626-01B8-4C7F-B412-3DD94FD28A35}" dt="2021-03-10T03:37:00.301" v="0"/>
-        <pc:sldMkLst>
-          <pc:docMk/>
-          <pc:sldMk cId="0" sldId="256"/>
-        </pc:sldMkLst>
-      </pc:sldChg>
-      <pc:sldChg chg="modSp mod">
-        <pc:chgData name="Zhao Jin" userId="cd05a825-544c-438a-9ba1-08e63db50b47" providerId="ADAL" clId="{4B210626-01B8-4C7F-B412-3DD94FD28A35}" dt="2021-03-10T04:45:46.418" v="1125" actId="20577"/>
-        <pc:sldMkLst>
-          <pc:docMk/>
-          <pc:sldMk cId="4078418712" sldId="525"/>
-        </pc:sldMkLst>
-      </pc:sldChg>
-      <pc:sldChg chg="modSp add del mod">
-        <pc:chgData name="Zhao Jin" userId="cd05a825-544c-438a-9ba1-08e63db50b47" providerId="ADAL" clId="{4B210626-01B8-4C7F-B412-3DD94FD28A35}" dt="2021-03-10T04:32:15.808" v="855"/>
-        <pc:sldMkLst>
-          <pc:docMk/>
-          <pc:sldMk cId="1427618944" sldId="553"/>
-        </pc:sldMkLst>
-      </pc:sldChg>
-      <pc:sldChg chg="modSp add del mod">
-        <pc:chgData name="Zhao Jin" userId="cd05a825-544c-438a-9ba1-08e63db50b47" providerId="ADAL" clId="{4B210626-01B8-4C7F-B412-3DD94FD28A35}" dt="2021-03-10T04:23:45.868" v="850" actId="47"/>
-        <pc:sldMkLst>
-          <pc:docMk/>
-          <pc:sldMk cId="1094276337" sldId="601"/>
-        </pc:sldMkLst>
-      </pc:sldChg>
-      <pc:sldChg chg="modSp del">
-        <pc:chgData name="Zhao Jin" userId="cd05a825-544c-438a-9ba1-08e63db50b47" providerId="ADAL" clId="{4B210626-01B8-4C7F-B412-3DD94FD28A35}" dt="2021-03-10T04:32:00.072" v="852" actId="47"/>
-        <pc:sldMkLst>
-          <pc:docMk/>
-          <pc:sldMk cId="1542002799" sldId="602"/>
-        </pc:sldMkLst>
-      </pc:sldChg>
-      <pc:sldChg chg="modSp del">
-        <pc:chgData name="Zhao Jin" userId="cd05a825-544c-438a-9ba1-08e63db50b47" providerId="ADAL" clId="{4B210626-01B8-4C7F-B412-3DD94FD28A35}" dt="2021-03-10T04:23:50.623" v="851" actId="47"/>
-        <pc:sldMkLst>
-          <pc:docMk/>
-          <pc:sldMk cId="2489370454" sldId="605"/>
-        </pc:sldMkLst>
-      </pc:sldChg>
-      <pc:sldChg chg="modSp del">
-        <pc:chgData name="Zhao Jin" userId="cd05a825-544c-438a-9ba1-08e63db50b47" providerId="ADAL" clId="{4B210626-01B8-4C7F-B412-3DD94FD28A35}" dt="2021-03-10T04:23:50.623" v="851" actId="47"/>
-        <pc:sldMkLst>
-          <pc:docMk/>
-          <pc:sldMk cId="640598186" sldId="606"/>
-        </pc:sldMkLst>
-      </pc:sldChg>
-      <pc:sldChg chg="modSp del">
-        <pc:chgData name="Zhao Jin" userId="cd05a825-544c-438a-9ba1-08e63db50b47" providerId="ADAL" clId="{4B210626-01B8-4C7F-B412-3DD94FD28A35}" dt="2021-03-10T04:23:50.623" v="851" actId="47"/>
-        <pc:sldMkLst>
-          <pc:docMk/>
-          <pc:sldMk cId="282410985" sldId="620"/>
-        </pc:sldMkLst>
-      </pc:sldChg>
-      <pc:sldChg chg="modSp del">
-        <pc:chgData name="Zhao Jin" userId="cd05a825-544c-438a-9ba1-08e63db50b47" providerId="ADAL" clId="{4B210626-01B8-4C7F-B412-3DD94FD28A35}" dt="2021-03-10T04:32:00.072" v="852" actId="47"/>
-        <pc:sldMkLst>
-          <pc:docMk/>
-          <pc:sldMk cId="3503582036" sldId="622"/>
-        </pc:sldMkLst>
-      </pc:sldChg>
-      <pc:sldChg chg="modSp del">
-        <pc:chgData name="Zhao Jin" userId="cd05a825-544c-438a-9ba1-08e63db50b47" providerId="ADAL" clId="{4B210626-01B8-4C7F-B412-3DD94FD28A35}" dt="2021-03-10T04:32:00.072" v="852" actId="47"/>
-        <pc:sldMkLst>
-          <pc:docMk/>
-          <pc:sldMk cId="1258830549" sldId="635"/>
-        </pc:sldMkLst>
-      </pc:sldChg>
-      <pc:sldChg chg="modSp del">
-        <pc:chgData name="Zhao Jin" userId="cd05a825-544c-438a-9ba1-08e63db50b47" providerId="ADAL" clId="{4B210626-01B8-4C7F-B412-3DD94FD28A35}" dt="2021-03-10T04:32:00.072" v="852" actId="47"/>
-        <pc:sldMkLst>
-          <pc:docMk/>
-          <pc:sldMk cId="1235845528" sldId="637"/>
-        </pc:sldMkLst>
-      </pc:sldChg>
-      <pc:sldChg chg="modSp add mod">
-        <pc:chgData name="Zhao Jin" userId="cd05a825-544c-438a-9ba1-08e63db50b47" providerId="ADAL" clId="{4B210626-01B8-4C7F-B412-3DD94FD28A35}" dt="2021-03-10T04:32:17.288" v="856"/>
-        <pc:sldMkLst>
-          <pc:docMk/>
-          <pc:sldMk cId="3737971943" sldId="637"/>
-        </pc:sldMkLst>
-      </pc:sldChg>
-      <pc:sldChg chg="modSp del">
-        <pc:chgData name="Zhao Jin" userId="cd05a825-544c-438a-9ba1-08e63db50b47" providerId="ADAL" clId="{4B210626-01B8-4C7F-B412-3DD94FD28A35}" dt="2021-03-10T04:23:50.623" v="851" actId="47"/>
-        <pc:sldMkLst>
-          <pc:docMk/>
-          <pc:sldMk cId="3042096305" sldId="638"/>
-        </pc:sldMkLst>
-      </pc:sldChg>
-      <pc:sldChg chg="addSp delSp modSp add mod">
-        <pc:chgData name="Zhao Jin" userId="cd05a825-544c-438a-9ba1-08e63db50b47" providerId="ADAL" clId="{4B210626-01B8-4C7F-B412-3DD94FD28A35}" dt="2021-03-10T04:16:14.178" v="149" actId="1038"/>
-        <pc:sldMkLst>
-          <pc:docMk/>
-          <pc:sldMk cId="1252576829" sldId="639"/>
-        </pc:sldMkLst>
-      </pc:sldChg>
-      <pc:sldChg chg="delSp modSp add mod delAnim">
-        <pc:chgData name="Zhao Jin" userId="cd05a825-544c-438a-9ba1-08e63db50b47" providerId="ADAL" clId="{4B210626-01B8-4C7F-B412-3DD94FD28A35}" dt="2021-03-10T04:16:31.221" v="150" actId="478"/>
-        <pc:sldMkLst>
-          <pc:docMk/>
-          <pc:sldMk cId="649273319" sldId="640"/>
-        </pc:sldMkLst>
-      </pc:sldChg>
-      <pc:sldChg chg="addSp delSp modSp add mod">
-        <pc:chgData name="Zhao Jin" userId="cd05a825-544c-438a-9ba1-08e63db50b47" providerId="ADAL" clId="{4B210626-01B8-4C7F-B412-3DD94FD28A35}" dt="2021-03-10T04:23:35.650" v="848" actId="478"/>
-        <pc:sldMkLst>
-          <pc:docMk/>
-          <pc:sldMk cId="3269496185" sldId="641"/>
-        </pc:sldMkLst>
-      </pc:sldChg>
-      <pc:sldChg chg="addSp delSp modSp add del mod">
-        <pc:chgData name="Zhao Jin" userId="cd05a825-544c-438a-9ba1-08e63db50b47" providerId="ADAL" clId="{4B210626-01B8-4C7F-B412-3DD94FD28A35}" dt="2021-03-10T04:23:45.646" v="849" actId="47"/>
-        <pc:sldMkLst>
-          <pc:docMk/>
-          <pc:sldMk cId="383092526" sldId="642"/>
-        </pc:sldMkLst>
-      </pc:sldChg>
-      <pc:sldChg chg="modSp add mod">
-        <pc:chgData name="Zhao Jin" userId="cd05a825-544c-438a-9ba1-08e63db50b47" providerId="ADAL" clId="{4B210626-01B8-4C7F-B412-3DD94FD28A35}" dt="2021-03-10T04:32:14.385" v="854"/>
-        <pc:sldMkLst>
-          <pc:docMk/>
-          <pc:sldMk cId="1179750071" sldId="642"/>
-        </pc:sldMkLst>
-      </pc:sldChg>
-      <pc:sldChg chg="modSp add mod">
-        <pc:chgData name="Zhao Jin" userId="cd05a825-544c-438a-9ba1-08e63db50b47" providerId="ADAL" clId="{4B210626-01B8-4C7F-B412-3DD94FD28A35}" dt="2021-03-10T04:32:30.121" v="862" actId="20577"/>
-        <pc:sldMkLst>
-          <pc:docMk/>
-          <pc:sldMk cId="723901272" sldId="643"/>
-        </pc:sldMkLst>
-      </pc:sldChg>
-      <pc:sldChg chg="addSp delSp modSp add del mod ord delAnim">
-        <pc:chgData name="Zhao Jin" userId="cd05a825-544c-438a-9ba1-08e63db50b47" providerId="ADAL" clId="{4B210626-01B8-4C7F-B412-3DD94FD28A35}" dt="2021-03-11T06:32:04.234" v="1132" actId="20577"/>
-        <pc:sldMkLst>
-          <pc:docMk/>
-          <pc:sldMk cId="1514327557" sldId="644"/>
-        </pc:sldMkLst>
-      </pc:sldChg>
-      <pc:sldChg chg="addSp delSp modSp add mod addAnim delAnim modAnim">
-        <pc:chgData name="Zhao Jin" userId="cd05a825-544c-438a-9ba1-08e63db50b47" providerId="ADAL" clId="{4B210626-01B8-4C7F-B412-3DD94FD28A35}" dt="2021-03-10T04:44:04.452" v="1034" actId="1036"/>
-        <pc:sldMkLst>
-          <pc:docMk/>
-          <pc:sldMk cId="1862784809" sldId="645"/>
-        </pc:sldMkLst>
-      </pc:sldChg>
-    </pc:docChg>
-  </pc:docChgLst>
-  <pc:docChgLst>
-    <pc:chgData name="Zhao Jin" userId="cd05a825-544c-438a-9ba1-08e63db50b47" providerId="ADAL" clId="{A4A0FEF4-5388-4642-A424-D6144C2A9D07}"/>
-    <pc:docChg chg="undo custSel modSld">
-      <pc:chgData name="Zhao Jin" userId="cd05a825-544c-438a-9ba1-08e63db50b47" providerId="ADAL" clId="{A4A0FEF4-5388-4642-A424-D6144C2A9D07}" dt="2021-01-25T03:36:28.487" v="214" actId="20577"/>
-      <pc:docMkLst>
-        <pc:docMk/>
-      </pc:docMkLst>
-      <pc:sldChg chg="delSp modSp">
-        <pc:chgData name="Zhao Jin" userId="cd05a825-544c-438a-9ba1-08e63db50b47" providerId="ADAL" clId="{A4A0FEF4-5388-4642-A424-D6144C2A9D07}" dt="2021-01-25T03:33:46.226" v="179"/>
-        <pc:sldMkLst>
-          <pc:docMk/>
-          <pc:sldMk cId="2543678377" sldId="531"/>
-        </pc:sldMkLst>
-      </pc:sldChg>
-      <pc:sldChg chg="delSp modSp">
-        <pc:chgData name="Zhao Jin" userId="cd05a825-544c-438a-9ba1-08e63db50b47" providerId="ADAL" clId="{A4A0FEF4-5388-4642-A424-D6144C2A9D07}" dt="2021-01-25T03:33:46.226" v="179"/>
-        <pc:sldMkLst>
-          <pc:docMk/>
-          <pc:sldMk cId="2025693378" sldId="532"/>
-        </pc:sldMkLst>
-      </pc:sldChg>
-      <pc:sldChg chg="delSp modSp">
-        <pc:chgData name="Zhao Jin" userId="cd05a825-544c-438a-9ba1-08e63db50b47" providerId="ADAL" clId="{A4A0FEF4-5388-4642-A424-D6144C2A9D07}" dt="2021-01-25T03:36:13.902" v="213" actId="403"/>
-        <pc:sldMkLst>
-          <pc:docMk/>
-          <pc:sldMk cId="266706937" sldId="533"/>
-        </pc:sldMkLst>
-      </pc:sldChg>
-      <pc:sldChg chg="addSp delSp modSp">
-        <pc:chgData name="Zhao Jin" userId="cd05a825-544c-438a-9ba1-08e63db50b47" providerId="ADAL" clId="{A4A0FEF4-5388-4642-A424-D6144C2A9D07}" dt="2021-01-25T03:36:28.487" v="214" actId="20577"/>
-        <pc:sldMkLst>
-          <pc:docMk/>
-          <pc:sldMk cId="3198948174" sldId="535"/>
-        </pc:sldMkLst>
-      </pc:sldChg>
-    </pc:docChg>
-  </pc:docChgLst>
-  <pc:docChgLst>
-    <pc:chgData name="Zhao Jin" userId="cd05a825-544c-438a-9ba1-08e63db50b47" providerId="ADAL" clId="{C328B041-D897-B548-9F0A-DA2B3CC3BF8E}"/>
-    <pc:docChg chg="undo custSel modSld">
-      <pc:chgData name="Zhao Jin" userId="cd05a825-544c-438a-9ba1-08e63db50b47" providerId="ADAL" clId="{C328B041-D897-B548-9F0A-DA2B3CC3BF8E}" dt="2021-03-08T02:30:29.708" v="502" actId="478"/>
-      <pc:docMkLst>
-        <pc:docMk/>
-      </pc:docMkLst>
-      <pc:sldChg chg="addSp delSp modSp">
-        <pc:chgData name="Zhao Jin" userId="cd05a825-544c-438a-9ba1-08e63db50b47" providerId="ADAL" clId="{C328B041-D897-B548-9F0A-DA2B3CC3BF8E}" dt="2021-03-08T01:59:34.595" v="472" actId="1076"/>
-        <pc:sldMkLst>
-          <pc:docMk/>
-          <pc:sldMk cId="640598186" sldId="606"/>
-        </pc:sldMkLst>
-      </pc:sldChg>
-      <pc:sldChg chg="addSp delSp modSp delAnim modAnim">
-        <pc:chgData name="Zhao Jin" userId="cd05a825-544c-438a-9ba1-08e63db50b47" providerId="ADAL" clId="{C328B041-D897-B548-9F0A-DA2B3CC3BF8E}" dt="2021-03-08T02:29:23.604" v="485"/>
-        <pc:sldMkLst>
-          <pc:docMk/>
-          <pc:sldMk cId="282410985" sldId="620"/>
-        </pc:sldMkLst>
-      </pc:sldChg>
-      <pc:sldChg chg="modAnim">
-        <pc:chgData name="Zhao Jin" userId="cd05a825-544c-438a-9ba1-08e63db50b47" providerId="ADAL" clId="{C328B041-D897-B548-9F0A-DA2B3CC3BF8E}" dt="2021-03-08T02:28:00.489" v="483"/>
-        <pc:sldMkLst>
-          <pc:docMk/>
-          <pc:sldMk cId="3503582036" sldId="622"/>
-        </pc:sldMkLst>
-      </pc:sldChg>
-      <pc:sldChg chg="delSp modSp modAnim">
-        <pc:chgData name="Zhao Jin" userId="cd05a825-544c-438a-9ba1-08e63db50b47" providerId="ADAL" clId="{C328B041-D897-B548-9F0A-DA2B3CC3BF8E}" dt="2021-03-08T02:30:29.708" v="502" actId="478"/>
-        <pc:sldMkLst>
-          <pc:docMk/>
-          <pc:sldMk cId="1258830549" sldId="635"/>
+          <pc:sldMk cId="3789236138" sldId="652"/>
         </pc:sldMkLst>
       </pc:sldChg>
     </pc:docChg>
@@ -2022,7 +1373,7 @@
               <a:pPr>
                 <a:defRPr/>
               </a:pPr>
-              <a:t>3/17/2025</a:t>
+              <a:t>3/17/2026</a:t>
             </a:fld>
             <a:endParaRPr lang="en-US"/>
           </a:p>
@@ -2705,6 +2056,147 @@
   <p:cSld>
     <p:spTree>
       <p:nvGrpSpPr>
+        <p:cNvPr id="1" name="">
+          <a:extLst>
+            <a:ext uri="{FF2B5EF4-FFF2-40B4-BE49-F238E27FC236}">
+              <a16:creationId xmlns:a16="http://schemas.microsoft.com/office/drawing/2014/main" id="{7C5B1314-C457-BECF-FA94-F7B2C06F3D60}"/>
+            </a:ext>
+          </a:extLst>
+        </p:cNvPr>
+        <p:cNvGrpSpPr/>
+        <p:nvPr/>
+      </p:nvGrpSpPr>
+      <p:grpSpPr>
+        <a:xfrm>
+          <a:off x="0" y="0"/>
+          <a:ext cx="0" cy="0"/>
+          <a:chOff x="0" y="0"/>
+          <a:chExt cx="0" cy="0"/>
+        </a:xfrm>
+      </p:grpSpPr>
+      <p:sp>
+        <p:nvSpPr>
+          <p:cNvPr id="64514" name="Rectangle 2">
+            <a:extLst>
+              <a:ext uri="{FF2B5EF4-FFF2-40B4-BE49-F238E27FC236}">
+                <a16:creationId xmlns:a16="http://schemas.microsoft.com/office/drawing/2014/main" id="{8F90BF4E-8F91-B876-4424-5E15225FA334}"/>
+              </a:ext>
+            </a:extLst>
+          </p:cNvPr>
+          <p:cNvSpPr>
+            <a:spLocks noGrp="1" noChangeArrowheads="1"/>
+          </p:cNvSpPr>
+          <p:nvPr>
+            <p:ph type="hdr" sz="quarter"/>
+          </p:nvPr>
+        </p:nvSpPr>
+        <p:spPr bwMode="auto">
+          <a:xfrm>
+            <a:off x="0" y="0"/>
+            <a:ext cx="3038786" cy="465341"/>
+          </a:xfrm>
+          <a:noFill/>
+          <a:ln>
+            <a:miter lim="800000"/>
+            <a:headEnd/>
+            <a:tailEnd/>
+          </a:ln>
+        </p:spPr>
+        <p:txBody>
+          <a:bodyPr wrap="square" numCol="1" anchor="t" anchorCtr="0" compatLnSpc="1">
+            <a:prstTxWarp prst="textNoShape">
+              <a:avLst/>
+            </a:prstTxWarp>
+          </a:bodyPr>
+          <a:lstStyle/>
+          <a:p>
+            <a:r>
+              <a:rPr lang="en-US"/>
+              <a:t>CS1010 Programming Methodology</a:t>
+            </a:r>
+          </a:p>
+        </p:txBody>
+      </p:sp>
+      <p:sp>
+        <p:nvSpPr>
+          <p:cNvPr id="64515" name="Rectangle 2">
+            <a:extLst>
+              <a:ext uri="{FF2B5EF4-FFF2-40B4-BE49-F238E27FC236}">
+                <a16:creationId xmlns:a16="http://schemas.microsoft.com/office/drawing/2014/main" id="{DB2E0315-28DB-2574-D8E3-4F722054467C}"/>
+              </a:ext>
+            </a:extLst>
+          </p:cNvPr>
+          <p:cNvSpPr>
+            <a:spLocks noGrp="1" noRot="1" noChangeAspect="1" noChangeArrowheads="1" noTextEdit="1"/>
+          </p:cNvSpPr>
+          <p:nvPr>
+            <p:ph type="sldImg"/>
+          </p:nvPr>
+        </p:nvSpPr>
+        <p:spPr bwMode="auto">
+          <a:xfrm>
+            <a:off x="1182688" y="696913"/>
+            <a:ext cx="4648200" cy="3486150"/>
+          </a:xfrm>
+          <a:noFill/>
+          <a:ln>
+            <a:solidFill>
+              <a:srgbClr val="000000"/>
+            </a:solidFill>
+            <a:miter lim="800000"/>
+            <a:headEnd/>
+            <a:tailEnd/>
+          </a:ln>
+        </p:spPr>
+      </p:sp>
+      <p:sp>
+        <p:nvSpPr>
+          <p:cNvPr id="64516" name="Rectangle 3">
+            <a:extLst>
+              <a:ext uri="{FF2B5EF4-FFF2-40B4-BE49-F238E27FC236}">
+                <a16:creationId xmlns:a16="http://schemas.microsoft.com/office/drawing/2014/main" id="{9C964762-B886-E336-57A1-9259870D3910}"/>
+              </a:ext>
+            </a:extLst>
+          </p:cNvPr>
+          <p:cNvSpPr>
+            <a:spLocks noGrp="1" noChangeArrowheads="1"/>
+          </p:cNvSpPr>
+          <p:nvPr>
+            <p:ph type="body" idx="1"/>
+          </p:nvPr>
+        </p:nvSpPr>
+        <p:spPr>
+          <a:ln w="9525"/>
+        </p:spPr>
+        <p:txBody>
+          <a:bodyPr/>
+          <a:lstStyle/>
+          <a:p>
+            <a:pPr eaLnBrk="1" hangingPunct="1">
+              <a:defRPr/>
+            </a:pPr>
+            <a:endParaRPr lang="en-US"/>
+          </a:p>
+        </p:txBody>
+      </p:sp>
+    </p:spTree>
+    <p:extLst>
+      <p:ext uri="{BB962C8B-B14F-4D97-AF65-F5344CB8AC3E}">
+        <p14:creationId xmlns:p14="http://schemas.microsoft.com/office/powerpoint/2010/main" val="322056022"/>
+      </p:ext>
+    </p:extLst>
+  </p:cSld>
+  <p:clrMapOvr>
+    <a:masterClrMapping/>
+  </p:clrMapOvr>
+</p:notes>
+</file>
+
+<file path=ppt/notesSlides/notesSlide14.xml><?xml version="1.0" encoding="utf-8"?>
+<p:notes xmlns:a="http://schemas.openxmlformats.org/drawingml/2006/main" xmlns:r="http://schemas.openxmlformats.org/officeDocument/2006/relationships" xmlns:p="http://schemas.openxmlformats.org/presentationml/2006/main">
+  <p:cSld>
+    <p:spTree>
+      <p:nvGrpSpPr>
         <p:cNvPr id="1" name=""/>
         <p:cNvGrpSpPr/>
         <p:nvPr/>
@@ -3033,14 +2525,14 @@
             <a:pPr eaLnBrk="1" hangingPunct="1">
               <a:defRPr/>
             </a:pPr>
-            <a:endParaRPr lang="en-US" dirty="0"/>
+            <a:endParaRPr lang="en-US"/>
           </a:p>
         </p:txBody>
       </p:sp>
     </p:spTree>
     <p:extLst>
       <p:ext uri="{BB962C8B-B14F-4D97-AF65-F5344CB8AC3E}">
-        <p14:creationId xmlns:p14="http://schemas.microsoft.com/office/powerpoint/2010/main" val="2955677042"/>
+        <p14:creationId xmlns:p14="http://schemas.microsoft.com/office/powerpoint/2010/main" val="1401334012"/>
       </p:ext>
     </p:extLst>
   </p:cSld>
@@ -3157,7 +2649,7 @@
     </p:spTree>
     <p:extLst>
       <p:ext uri="{BB962C8B-B14F-4D97-AF65-F5344CB8AC3E}">
-        <p14:creationId xmlns:p14="http://schemas.microsoft.com/office/powerpoint/2010/main" val="234436028"/>
+        <p14:creationId xmlns:p14="http://schemas.microsoft.com/office/powerpoint/2010/main" val="2955677042"/>
       </p:ext>
     </p:extLst>
   </p:cSld>
@@ -3267,14 +2759,14 @@
             <a:pPr eaLnBrk="1" hangingPunct="1">
               <a:defRPr/>
             </a:pPr>
-            <a:endParaRPr lang="en-US"/>
+            <a:endParaRPr lang="en-US" dirty="0"/>
           </a:p>
         </p:txBody>
       </p:sp>
     </p:spTree>
     <p:extLst>
       <p:ext uri="{BB962C8B-B14F-4D97-AF65-F5344CB8AC3E}">
-        <p14:creationId xmlns:p14="http://schemas.microsoft.com/office/powerpoint/2010/main" val="1401334012"/>
+        <p14:creationId xmlns:p14="http://schemas.microsoft.com/office/powerpoint/2010/main" val="234436028"/>
       </p:ext>
     </p:extLst>
   </p:cSld>
@@ -9520,11 +9012,11 @@
               <a:t>i</a:t>
             </a:r>
             <a:r>
-              <a:rPr lang="en-US" sz="2000" b="1" dirty="0">
-                <a:latin typeface="Courier New" panose="02070309020205020404" pitchFamily="49" charset="0"/>
-                <a:cs typeface="Courier New" panose="02070309020205020404" pitchFamily="49" charset="0"/>
-              </a:rPr>
-              <a:t> &lt;= </a:t>
+              <a:rPr lang="en-US" sz="2000" b="1">
+                <a:latin typeface="Courier New" panose="02070309020205020404" pitchFamily="49" charset="0"/>
+                <a:cs typeface="Courier New" panose="02070309020205020404" pitchFamily="49" charset="0"/>
+              </a:rPr>
+              <a:t> &lt; </a:t>
             </a:r>
             <a:r>
               <a:rPr lang="en-US" sz="2000" b="1" dirty="0">
@@ -10836,6 +10328,1251 @@
   <p:cSld>
     <p:spTree>
       <p:nvGrpSpPr>
+        <p:cNvPr id="1" name="">
+          <a:extLst>
+            <a:ext uri="{FF2B5EF4-FFF2-40B4-BE49-F238E27FC236}">
+              <a16:creationId xmlns:a16="http://schemas.microsoft.com/office/drawing/2014/main" id="{EF65DC14-9B28-A9E4-2E7C-D7A69AB59365}"/>
+            </a:ext>
+          </a:extLst>
+        </p:cNvPr>
+        <p:cNvGrpSpPr/>
+        <p:nvPr/>
+      </p:nvGrpSpPr>
+      <p:grpSpPr>
+        <a:xfrm>
+          <a:off x="0" y="0"/>
+          <a:ext cx="0" cy="0"/>
+          <a:chOff x="0" y="0"/>
+          <a:chExt cx="0" cy="0"/>
+        </a:xfrm>
+      </p:grpSpPr>
+      <p:sp>
+        <p:nvSpPr>
+          <p:cNvPr id="14338" name="Rectangle 2">
+            <a:extLst>
+              <a:ext uri="{FF2B5EF4-FFF2-40B4-BE49-F238E27FC236}">
+                <a16:creationId xmlns:a16="http://schemas.microsoft.com/office/drawing/2014/main" id="{6DFF6ACA-2E55-76AF-7393-B8244167D28F}"/>
+              </a:ext>
+            </a:extLst>
+          </p:cNvPr>
+          <p:cNvSpPr>
+            <a:spLocks noGrp="1" noChangeArrowheads="1"/>
+          </p:cNvSpPr>
+          <p:nvPr>
+            <p:ph type="title"/>
+          </p:nvPr>
+        </p:nvSpPr>
+        <p:spPr>
+          <a:xfrm>
+            <a:off x="533400" y="381000"/>
+            <a:ext cx="8382000" cy="838200"/>
+          </a:xfrm>
+        </p:spPr>
+        <p:txBody>
+          <a:bodyPr>
+            <a:normAutofit/>
+          </a:bodyPr>
+          <a:lstStyle/>
+          <a:p>
+            <a:r>
+              <a:rPr lang="en-GB" sz="3600" dirty="0">
+                <a:solidFill>
+                  <a:srgbClr val="0000FF"/>
+                </a:solidFill>
+              </a:rPr>
+              <a:t>Exercise: Dynamic Array and String</a:t>
+            </a:r>
+          </a:p>
+        </p:txBody>
+      </p:sp>
+      <p:sp>
+        <p:nvSpPr>
+          <p:cNvPr id="8" name="Content Placeholder 5">
+            <a:extLst>
+              <a:ext uri="{FF2B5EF4-FFF2-40B4-BE49-F238E27FC236}">
+                <a16:creationId xmlns:a16="http://schemas.microsoft.com/office/drawing/2014/main" id="{E8773C0A-D6C2-4593-4D01-563C21C9F0FF}"/>
+              </a:ext>
+            </a:extLst>
+          </p:cNvPr>
+          <p:cNvSpPr>
+            <a:spLocks noGrp="1"/>
+          </p:cNvSpPr>
+          <p:nvPr>
+            <p:ph idx="1"/>
+          </p:nvPr>
+        </p:nvSpPr>
+        <p:spPr>
+          <a:xfrm>
+            <a:off x="587375" y="1187450"/>
+            <a:ext cx="8292856" cy="5387086"/>
+          </a:xfrm>
+        </p:spPr>
+        <p:txBody>
+          <a:bodyPr>
+            <a:normAutofit/>
+          </a:bodyPr>
+          <a:lstStyle/>
+          <a:p>
+            <a:pPr marL="347663" indent="-347663">
+              <a:spcBef>
+                <a:spcPts val="600"/>
+              </a:spcBef>
+              <a:buClr>
+                <a:schemeClr val="tx1">
+                  <a:lumMod val="90000"/>
+                  <a:lumOff val="10000"/>
+                </a:schemeClr>
+              </a:buClr>
+              <a:buSzPct val="100000"/>
+              <a:buFont typeface="Wingdings" panose="05000000000000000000" pitchFamily="2" charset="2"/>
+              <a:buChar char="§"/>
+              <a:defRPr/>
+            </a:pPr>
+            <a:r>
+              <a:rPr lang="en-US" dirty="0"/>
+              <a:t>Given a lowercase letter, </a:t>
+            </a:r>
+            <a:r>
+              <a:rPr lang="en-US" dirty="0">
+                <a:solidFill>
+                  <a:srgbClr val="0000FF"/>
+                </a:solidFill>
+              </a:rPr>
+              <a:t>dynamically create </a:t>
+            </a:r>
+            <a:r>
+              <a:rPr lang="en-US" dirty="0"/>
+              <a:t>a char array and </a:t>
+            </a:r>
+            <a:r>
+              <a:rPr lang="en-US" dirty="0">
+                <a:solidFill>
+                  <a:srgbClr val="0000FF"/>
+                </a:solidFill>
+              </a:rPr>
+              <a:t>populate it </a:t>
+            </a:r>
+            <a:r>
+              <a:rPr lang="en-US" dirty="0"/>
+              <a:t>with a string consisting of characters from ‘a’ to the given letter in alphabetical order.</a:t>
+            </a:r>
+          </a:p>
+          <a:p>
+            <a:pPr marL="621983" lvl="1" indent="-347663">
+              <a:spcBef>
+                <a:spcPts val="600"/>
+              </a:spcBef>
+              <a:buClr>
+                <a:schemeClr val="tx1">
+                  <a:lumMod val="90000"/>
+                  <a:lumOff val="10000"/>
+                </a:schemeClr>
+              </a:buClr>
+              <a:buSzPct val="100000"/>
+              <a:buFont typeface="Wingdings" panose="05000000000000000000" pitchFamily="2" charset="2"/>
+              <a:buChar char="§"/>
+              <a:defRPr/>
+            </a:pPr>
+            <a:r>
+              <a:rPr lang="en-US" sz="2400" dirty="0"/>
+              <a:t>E.g., Give ‘c’, the array corresponds to the string  “</a:t>
+            </a:r>
+            <a:r>
+              <a:rPr lang="en-US" sz="2400" dirty="0" err="1"/>
+              <a:t>abc</a:t>
+            </a:r>
+            <a:r>
+              <a:rPr lang="en-US" sz="2400" dirty="0"/>
+              <a:t>”.</a:t>
+            </a:r>
+          </a:p>
+          <a:p>
+            <a:pPr marL="621983" lvl="1" indent="-347663">
+              <a:spcBef>
+                <a:spcPts val="600"/>
+              </a:spcBef>
+              <a:buClr>
+                <a:schemeClr val="tx1">
+                  <a:lumMod val="90000"/>
+                  <a:lumOff val="10000"/>
+                </a:schemeClr>
+              </a:buClr>
+              <a:buSzPct val="100000"/>
+              <a:buFont typeface="Wingdings" panose="05000000000000000000" pitchFamily="2" charset="2"/>
+              <a:buChar char="§"/>
+              <a:defRPr/>
+            </a:pPr>
+            <a:endParaRPr lang="en-US" sz="2400" dirty="0"/>
+          </a:p>
+          <a:p>
+            <a:pPr marL="347663" indent="-347663">
+              <a:spcBef>
+                <a:spcPts val="600"/>
+              </a:spcBef>
+              <a:buClr>
+                <a:schemeClr val="tx1">
+                  <a:lumMod val="90000"/>
+                  <a:lumOff val="10000"/>
+                </a:schemeClr>
+              </a:buClr>
+              <a:buSzPct val="100000"/>
+              <a:buFont typeface="Wingdings" panose="05000000000000000000" pitchFamily="2" charset="2"/>
+              <a:buChar char="§"/>
+              <a:defRPr/>
+            </a:pPr>
+            <a:r>
+              <a:rPr lang="en-US" dirty="0"/>
+              <a:t>What are the sub-problems?</a:t>
+            </a:r>
+          </a:p>
+          <a:p>
+            <a:pPr marL="621983" lvl="1" indent="-347663">
+              <a:spcBef>
+                <a:spcPts val="600"/>
+              </a:spcBef>
+              <a:buClr>
+                <a:schemeClr val="tx1">
+                  <a:lumMod val="90000"/>
+                  <a:lumOff val="10000"/>
+                </a:schemeClr>
+              </a:buClr>
+              <a:buSzPct val="100000"/>
+              <a:buFont typeface="Wingdings" panose="05000000000000000000" pitchFamily="2" charset="2"/>
+              <a:buChar char="§"/>
+              <a:defRPr/>
+            </a:pPr>
+            <a:r>
+              <a:rPr lang="en-US" dirty="0"/>
+              <a:t>Determine the size of the array</a:t>
+            </a:r>
+          </a:p>
+          <a:p>
+            <a:pPr marL="621983" lvl="1" indent="-347663">
+              <a:spcBef>
+                <a:spcPts val="600"/>
+              </a:spcBef>
+              <a:buClr>
+                <a:schemeClr val="tx1">
+                  <a:lumMod val="90000"/>
+                  <a:lumOff val="10000"/>
+                </a:schemeClr>
+              </a:buClr>
+              <a:buSzPct val="100000"/>
+              <a:buFont typeface="Wingdings" panose="05000000000000000000" pitchFamily="2" charset="2"/>
+              <a:buChar char="§"/>
+              <a:defRPr/>
+            </a:pPr>
+            <a:endParaRPr lang="en-US" dirty="0"/>
+          </a:p>
+          <a:p>
+            <a:pPr marL="621983" lvl="1" indent="-347663">
+              <a:spcBef>
+                <a:spcPts val="600"/>
+              </a:spcBef>
+              <a:buClr>
+                <a:schemeClr val="tx1">
+                  <a:lumMod val="90000"/>
+                  <a:lumOff val="10000"/>
+                </a:schemeClr>
+              </a:buClr>
+              <a:buSzPct val="100000"/>
+              <a:buFont typeface="Wingdings" panose="05000000000000000000" pitchFamily="2" charset="2"/>
+              <a:buChar char="§"/>
+              <a:defRPr/>
+            </a:pPr>
+            <a:r>
+              <a:rPr lang="en-US" dirty="0"/>
+              <a:t>Create the array dynamically</a:t>
+            </a:r>
+          </a:p>
+          <a:p>
+            <a:pPr marL="621983" lvl="1" indent="-347663">
+              <a:spcBef>
+                <a:spcPts val="600"/>
+              </a:spcBef>
+              <a:buClr>
+                <a:schemeClr val="tx1">
+                  <a:lumMod val="90000"/>
+                  <a:lumOff val="10000"/>
+                </a:schemeClr>
+              </a:buClr>
+              <a:buSzPct val="100000"/>
+              <a:buFont typeface="Wingdings" panose="05000000000000000000" pitchFamily="2" charset="2"/>
+              <a:buChar char="§"/>
+              <a:defRPr/>
+            </a:pPr>
+            <a:endParaRPr lang="en-US" dirty="0"/>
+          </a:p>
+          <a:p>
+            <a:pPr marL="621983" lvl="1" indent="-347663">
+              <a:spcBef>
+                <a:spcPts val="600"/>
+              </a:spcBef>
+              <a:buClr>
+                <a:schemeClr val="tx1">
+                  <a:lumMod val="90000"/>
+                  <a:lumOff val="10000"/>
+                </a:schemeClr>
+              </a:buClr>
+              <a:buSzPct val="100000"/>
+              <a:buFont typeface="Wingdings" panose="05000000000000000000" pitchFamily="2" charset="2"/>
+              <a:buChar char="§"/>
+              <a:defRPr/>
+            </a:pPr>
+            <a:r>
+              <a:rPr lang="en-US" dirty="0"/>
+              <a:t>Populate the characters sequentially</a:t>
+            </a:r>
+          </a:p>
+          <a:p>
+            <a:pPr marL="621983" lvl="1" indent="-347663">
+              <a:spcBef>
+                <a:spcPts val="600"/>
+              </a:spcBef>
+              <a:buClr>
+                <a:schemeClr val="tx1">
+                  <a:lumMod val="90000"/>
+                  <a:lumOff val="10000"/>
+                </a:schemeClr>
+              </a:buClr>
+              <a:buSzPct val="100000"/>
+              <a:buFont typeface="Wingdings" panose="05000000000000000000" pitchFamily="2" charset="2"/>
+              <a:buChar char="§"/>
+              <a:defRPr/>
+            </a:pPr>
+            <a:endParaRPr lang="en-US" dirty="0"/>
+          </a:p>
+          <a:p>
+            <a:pPr marL="621983" lvl="1" indent="-347663">
+              <a:spcBef>
+                <a:spcPts val="600"/>
+              </a:spcBef>
+              <a:buClr>
+                <a:schemeClr val="tx1">
+                  <a:lumMod val="90000"/>
+                  <a:lumOff val="10000"/>
+                </a:schemeClr>
+              </a:buClr>
+              <a:buSzPct val="100000"/>
+              <a:buFont typeface="Wingdings" panose="05000000000000000000" pitchFamily="2" charset="2"/>
+              <a:buChar char="§"/>
+              <a:defRPr/>
+            </a:pPr>
+            <a:r>
+              <a:rPr lang="en-US" dirty="0"/>
+              <a:t>Make the array a string</a:t>
+            </a:r>
+          </a:p>
+        </p:txBody>
+      </p:sp>
+      <p:sp>
+        <p:nvSpPr>
+          <p:cNvPr id="2" name="Footer Placeholder 1">
+            <a:extLst>
+              <a:ext uri="{FF2B5EF4-FFF2-40B4-BE49-F238E27FC236}">
+                <a16:creationId xmlns:a16="http://schemas.microsoft.com/office/drawing/2014/main" id="{07465693-3B2E-16F1-54D2-4A2F8BA7F1B1}"/>
+              </a:ext>
+            </a:extLst>
+          </p:cNvPr>
+          <p:cNvSpPr>
+            <a:spLocks noGrp="1"/>
+          </p:cNvSpPr>
+          <p:nvPr>
+            <p:ph type="ftr" sz="quarter" idx="11"/>
+          </p:nvPr>
+        </p:nvSpPr>
+        <p:spPr/>
+        <p:txBody>
+          <a:bodyPr/>
+          <a:lstStyle/>
+          <a:p>
+            <a:pPr algn="l">
+              <a:defRPr/>
+            </a:pPr>
+            <a:r>
+              <a:rPr lang="en-US"/>
+              <a:t>CS1010: Programming Methodology</a:t>
+            </a:r>
+          </a:p>
+        </p:txBody>
+      </p:sp>
+      <p:sp>
+        <p:nvSpPr>
+          <p:cNvPr id="3" name="Slide Number Placeholder 2">
+            <a:extLst>
+              <a:ext uri="{FF2B5EF4-FFF2-40B4-BE49-F238E27FC236}">
+                <a16:creationId xmlns:a16="http://schemas.microsoft.com/office/drawing/2014/main" id="{22211653-C86C-41E6-48A9-4DECA67C4768}"/>
+              </a:ext>
+            </a:extLst>
+          </p:cNvPr>
+          <p:cNvSpPr>
+            <a:spLocks noGrp="1"/>
+          </p:cNvSpPr>
+          <p:nvPr>
+            <p:ph type="sldNum" sz="quarter" idx="12"/>
+          </p:nvPr>
+        </p:nvSpPr>
+        <p:spPr/>
+        <p:txBody>
+          <a:bodyPr/>
+          <a:lstStyle/>
+          <a:p>
+            <a:pPr>
+              <a:defRPr/>
+            </a:pPr>
+            <a:r>
+              <a:rPr lang="en-US" sz="1100" dirty="0"/>
+              <a:t>Week8R - </a:t>
+            </a:r>
+            <a:fld id="{2E4790E1-2590-4AEE-892D-AB46A7688113}" type="slidenum">
+              <a:rPr lang="en-US" sz="1100" smtClean="0"/>
+              <a:pPr>
+                <a:defRPr/>
+              </a:pPr>
+              <a:t>13</a:t>
+            </a:fld>
+            <a:endParaRPr lang="en-US" sz="1100" dirty="0"/>
+          </a:p>
+        </p:txBody>
+      </p:sp>
+      <p:sp>
+        <p:nvSpPr>
+          <p:cNvPr id="5" name="Date Placeholder 4">
+            <a:extLst>
+              <a:ext uri="{FF2B5EF4-FFF2-40B4-BE49-F238E27FC236}">
+                <a16:creationId xmlns:a16="http://schemas.microsoft.com/office/drawing/2014/main" id="{C63557B0-0D26-68C6-5711-F6F1A42C54DB}"/>
+              </a:ext>
+            </a:extLst>
+          </p:cNvPr>
+          <p:cNvSpPr>
+            <a:spLocks noGrp="1"/>
+          </p:cNvSpPr>
+          <p:nvPr>
+            <p:ph type="dt" sz="half" idx="10"/>
+          </p:nvPr>
+        </p:nvSpPr>
+        <p:spPr/>
+        <p:txBody>
+          <a:bodyPr/>
+          <a:lstStyle/>
+          <a:p>
+            <a:pPr>
+              <a:defRPr/>
+            </a:pPr>
+            <a:r>
+              <a:rPr lang="en-US"/>
+              <a:t>© NUS</a:t>
+            </a:r>
+          </a:p>
+        </p:txBody>
+      </p:sp>
+      <p:sp>
+        <p:nvSpPr>
+          <p:cNvPr id="7" name="TextBox 6">
+            <a:extLst>
+              <a:ext uri="{FF2B5EF4-FFF2-40B4-BE49-F238E27FC236}">
+                <a16:creationId xmlns:a16="http://schemas.microsoft.com/office/drawing/2014/main" id="{53D638EA-CF50-265F-9E28-8A0F64937839}"/>
+              </a:ext>
+            </a:extLst>
+          </p:cNvPr>
+          <p:cNvSpPr txBox="1"/>
+          <p:nvPr/>
+        </p:nvSpPr>
+        <p:spPr>
+          <a:xfrm>
+            <a:off x="5611452" y="3719038"/>
+            <a:ext cx="1932348" cy="369332"/>
+          </a:xfrm>
+          <a:prstGeom prst="rect">
+            <a:avLst/>
+          </a:prstGeom>
+          <a:solidFill>
+            <a:srgbClr val="FFFF99"/>
+          </a:solidFill>
+          <a:ln w="12700"/>
+        </p:spPr>
+        <p:style>
+          <a:lnRef idx="2">
+            <a:schemeClr val="accent4"/>
+          </a:lnRef>
+          <a:fillRef idx="1">
+            <a:schemeClr val="lt1"/>
+          </a:fillRef>
+          <a:effectRef idx="0">
+            <a:schemeClr val="accent4"/>
+          </a:effectRef>
+          <a:fontRef idx="minor">
+            <a:schemeClr val="dk1"/>
+          </a:fontRef>
+        </p:style>
+        <p:txBody>
+          <a:bodyPr wrap="square" rtlCol="0">
+            <a:spAutoFit/>
+          </a:bodyPr>
+          <a:lstStyle/>
+          <a:p>
+            <a:r>
+              <a:rPr lang="en-US" dirty="0"/>
+              <a:t>‘c’ – ‘a’ + 1 + 1</a:t>
+            </a:r>
+          </a:p>
+        </p:txBody>
+      </p:sp>
+      <p:sp>
+        <p:nvSpPr>
+          <p:cNvPr id="9" name="TextBox 8">
+            <a:extLst>
+              <a:ext uri="{FF2B5EF4-FFF2-40B4-BE49-F238E27FC236}">
+                <a16:creationId xmlns:a16="http://schemas.microsoft.com/office/drawing/2014/main" id="{106078D8-557F-B9C5-3ECD-D88AD4999143}"/>
+              </a:ext>
+            </a:extLst>
+          </p:cNvPr>
+          <p:cNvSpPr txBox="1"/>
+          <p:nvPr/>
+        </p:nvSpPr>
+        <p:spPr>
+          <a:xfrm>
+            <a:off x="5611453" y="4479641"/>
+            <a:ext cx="2465748" cy="369332"/>
+          </a:xfrm>
+          <a:prstGeom prst="rect">
+            <a:avLst/>
+          </a:prstGeom>
+          <a:solidFill>
+            <a:srgbClr val="FFFF99"/>
+          </a:solidFill>
+          <a:ln w="12700"/>
+        </p:spPr>
+        <p:style>
+          <a:lnRef idx="2">
+            <a:schemeClr val="accent4"/>
+          </a:lnRef>
+          <a:fillRef idx="1">
+            <a:schemeClr val="lt1"/>
+          </a:fillRef>
+          <a:effectRef idx="0">
+            <a:schemeClr val="accent4"/>
+          </a:effectRef>
+          <a:fontRef idx="minor">
+            <a:schemeClr val="dk1"/>
+          </a:fontRef>
+        </p:style>
+        <p:txBody>
+          <a:bodyPr wrap="square" rtlCol="0">
+            <a:spAutoFit/>
+          </a:bodyPr>
+          <a:lstStyle/>
+          <a:p>
+            <a:r>
+              <a:rPr lang="en-US" dirty="0" err="1"/>
+              <a:t>ptr</a:t>
+            </a:r>
+            <a:r>
+              <a:rPr lang="en-US" dirty="0"/>
+              <a:t> = malloc() / </a:t>
+            </a:r>
+            <a:r>
+              <a:rPr lang="en-US" dirty="0" err="1"/>
+              <a:t>calloc</a:t>
+            </a:r>
+            <a:r>
+              <a:rPr lang="en-US" dirty="0"/>
+              <a:t>()</a:t>
+            </a:r>
+          </a:p>
+        </p:txBody>
+      </p:sp>
+      <p:sp>
+        <p:nvSpPr>
+          <p:cNvPr id="10" name="TextBox 9">
+            <a:extLst>
+              <a:ext uri="{FF2B5EF4-FFF2-40B4-BE49-F238E27FC236}">
+                <a16:creationId xmlns:a16="http://schemas.microsoft.com/office/drawing/2014/main" id="{BB94FB9B-2950-E606-7424-12B9BB1BF847}"/>
+              </a:ext>
+            </a:extLst>
+          </p:cNvPr>
+          <p:cNvSpPr txBox="1"/>
+          <p:nvPr/>
+        </p:nvSpPr>
+        <p:spPr>
+          <a:xfrm>
+            <a:off x="5611452" y="5072604"/>
+            <a:ext cx="2839128" cy="369332"/>
+          </a:xfrm>
+          <a:prstGeom prst="rect">
+            <a:avLst/>
+          </a:prstGeom>
+          <a:solidFill>
+            <a:srgbClr val="FFFF99"/>
+          </a:solidFill>
+          <a:ln w="12700"/>
+        </p:spPr>
+        <p:style>
+          <a:lnRef idx="2">
+            <a:schemeClr val="accent4"/>
+          </a:lnRef>
+          <a:fillRef idx="1">
+            <a:schemeClr val="lt1"/>
+          </a:fillRef>
+          <a:effectRef idx="0">
+            <a:schemeClr val="accent4"/>
+          </a:effectRef>
+          <a:fontRef idx="minor">
+            <a:schemeClr val="dk1"/>
+          </a:fontRef>
+        </p:style>
+        <p:txBody>
+          <a:bodyPr wrap="square" rtlCol="0">
+            <a:spAutoFit/>
+          </a:bodyPr>
+          <a:lstStyle/>
+          <a:p>
+            <a:r>
+              <a:rPr lang="en-US" dirty="0" err="1"/>
+              <a:t>ch</a:t>
+            </a:r>
+            <a:r>
+              <a:rPr lang="en-US" dirty="0"/>
+              <a:t> = ‘a’; </a:t>
+            </a:r>
+            <a:r>
+              <a:rPr lang="en-US" dirty="0" err="1"/>
+              <a:t>ch</a:t>
+            </a:r>
+            <a:r>
+              <a:rPr lang="en-US" dirty="0"/>
+              <a:t> &lt;= ‘c’, </a:t>
+            </a:r>
+            <a:r>
+              <a:rPr lang="en-US" dirty="0" err="1"/>
+              <a:t>ch</a:t>
+            </a:r>
+            <a:r>
+              <a:rPr lang="en-US" dirty="0"/>
+              <a:t> += 1</a:t>
+            </a:r>
+          </a:p>
+        </p:txBody>
+      </p:sp>
+      <p:sp>
+        <p:nvSpPr>
+          <p:cNvPr id="11" name="TextBox 10">
+            <a:extLst>
+              <a:ext uri="{FF2B5EF4-FFF2-40B4-BE49-F238E27FC236}">
+                <a16:creationId xmlns:a16="http://schemas.microsoft.com/office/drawing/2014/main" id="{A73ED033-1C08-85EF-F007-C0CA22865A1F}"/>
+              </a:ext>
+            </a:extLst>
+          </p:cNvPr>
+          <p:cNvSpPr txBox="1"/>
+          <p:nvPr/>
+        </p:nvSpPr>
+        <p:spPr>
+          <a:xfrm>
+            <a:off x="5611452" y="5962775"/>
+            <a:ext cx="2839128" cy="369332"/>
+          </a:xfrm>
+          <a:prstGeom prst="rect">
+            <a:avLst/>
+          </a:prstGeom>
+          <a:solidFill>
+            <a:srgbClr val="FFFF99"/>
+          </a:solidFill>
+          <a:ln w="12700"/>
+        </p:spPr>
+        <p:style>
+          <a:lnRef idx="2">
+            <a:schemeClr val="accent4"/>
+          </a:lnRef>
+          <a:fillRef idx="1">
+            <a:schemeClr val="lt1"/>
+          </a:fillRef>
+          <a:effectRef idx="0">
+            <a:schemeClr val="accent4"/>
+          </a:effectRef>
+          <a:fontRef idx="minor">
+            <a:schemeClr val="dk1"/>
+          </a:fontRef>
+        </p:style>
+        <p:txBody>
+          <a:bodyPr wrap="square" rtlCol="0">
+            <a:spAutoFit/>
+          </a:bodyPr>
+          <a:lstStyle/>
+          <a:p>
+            <a:r>
+              <a:rPr lang="en-US" dirty="0" err="1"/>
+              <a:t>ptr</a:t>
+            </a:r>
+            <a:r>
+              <a:rPr lang="en-US"/>
+              <a:t>[‘c’ </a:t>
+            </a:r>
+            <a:r>
+              <a:rPr lang="en-US" dirty="0"/>
+              <a:t>– ‘</a:t>
+            </a:r>
+            <a:r>
+              <a:rPr lang="en-US"/>
+              <a:t>a’ + 1] </a:t>
+            </a:r>
+            <a:r>
+              <a:rPr lang="en-US" dirty="0"/>
+              <a:t>= ‘\0’;</a:t>
+            </a:r>
+          </a:p>
+        </p:txBody>
+      </p:sp>
+      <p:sp>
+        <p:nvSpPr>
+          <p:cNvPr id="12" name="TextBox 11">
+            <a:extLst>
+              <a:ext uri="{FF2B5EF4-FFF2-40B4-BE49-F238E27FC236}">
+                <a16:creationId xmlns:a16="http://schemas.microsoft.com/office/drawing/2014/main" id="{9785DF0D-7116-144A-D172-BE7B4FFBC25A}"/>
+              </a:ext>
+            </a:extLst>
+          </p:cNvPr>
+          <p:cNvSpPr txBox="1"/>
+          <p:nvPr/>
+        </p:nvSpPr>
+        <p:spPr>
+          <a:xfrm>
+            <a:off x="5613797" y="5433870"/>
+            <a:ext cx="2839128" cy="369332"/>
+          </a:xfrm>
+          <a:prstGeom prst="rect">
+            <a:avLst/>
+          </a:prstGeom>
+          <a:solidFill>
+            <a:srgbClr val="FFFF99"/>
+          </a:solidFill>
+          <a:ln w="12700"/>
+        </p:spPr>
+        <p:style>
+          <a:lnRef idx="2">
+            <a:schemeClr val="accent4"/>
+          </a:lnRef>
+          <a:fillRef idx="1">
+            <a:schemeClr val="lt1"/>
+          </a:fillRef>
+          <a:effectRef idx="0">
+            <a:schemeClr val="accent4"/>
+          </a:effectRef>
+          <a:fontRef idx="minor">
+            <a:schemeClr val="dk1"/>
+          </a:fontRef>
+        </p:style>
+        <p:txBody>
+          <a:bodyPr wrap="square" rtlCol="0">
+            <a:spAutoFit/>
+          </a:bodyPr>
+          <a:lstStyle/>
+          <a:p>
+            <a:r>
+              <a:rPr lang="en-US" dirty="0" err="1"/>
+              <a:t>ptr</a:t>
+            </a:r>
+            <a:r>
+              <a:rPr lang="en-US" dirty="0"/>
+              <a:t>[</a:t>
+            </a:r>
+            <a:r>
+              <a:rPr lang="en-US" dirty="0" err="1"/>
+              <a:t>ch</a:t>
+            </a:r>
+            <a:r>
+              <a:rPr lang="en-US" dirty="0"/>
+              <a:t> – ‘a’] = </a:t>
+            </a:r>
+            <a:r>
+              <a:rPr lang="en-US" dirty="0" err="1"/>
+              <a:t>ch</a:t>
+            </a:r>
+            <a:r>
+              <a:rPr lang="en-US" dirty="0"/>
+              <a:t>;</a:t>
+            </a:r>
+          </a:p>
+        </p:txBody>
+      </p:sp>
+    </p:spTree>
+    <p:extLst>
+      <p:ext uri="{BB962C8B-B14F-4D97-AF65-F5344CB8AC3E}">
+        <p14:creationId xmlns:p14="http://schemas.microsoft.com/office/powerpoint/2010/main" val="758105953"/>
+      </p:ext>
+    </p:extLst>
+  </p:cSld>
+  <p:clrMapOvr>
+    <a:masterClrMapping/>
+  </p:clrMapOvr>
+  <p:transition>
+    <p:fade/>
+  </p:transition>
+  <p:timing>
+    <p:tnLst>
+      <p:par>
+        <p:cTn id="1" dur="indefinite" restart="never" nodeType="tmRoot">
+          <p:childTnLst>
+            <p:seq concurrent="1" nextAc="seek">
+              <p:cTn id="2" dur="indefinite" nodeType="mainSeq">
+                <p:childTnLst>
+                  <p:par>
+                    <p:cTn id="3" fill="hold">
+                      <p:stCondLst>
+                        <p:cond delay="indefinite"/>
+                      </p:stCondLst>
+                      <p:childTnLst>
+                        <p:par>
+                          <p:cTn id="4" fill="hold">
+                            <p:stCondLst>
+                              <p:cond delay="0"/>
+                            </p:stCondLst>
+                            <p:childTnLst>
+                              <p:par>
+                                <p:cTn id="5" presetID="1" presetClass="entr" presetSubtype="0" fill="hold" nodeType="clickEffect">
+                                  <p:stCondLst>
+                                    <p:cond delay="0"/>
+                                  </p:stCondLst>
+                                  <p:childTnLst>
+                                    <p:set>
+                                      <p:cBhvr>
+                                        <p:cTn id="6" dur="1" fill="hold">
+                                          <p:stCondLst>
+                                            <p:cond delay="0"/>
+                                          </p:stCondLst>
+                                        </p:cTn>
+                                        <p:tgtEl>
+                                          <p:spTgt spid="8">
+                                            <p:txEl>
+                                              <p:pRg st="4" end="4"/>
+                                            </p:txEl>
+                                          </p:spTgt>
+                                        </p:tgtEl>
+                                        <p:attrNameLst>
+                                          <p:attrName>style.visibility</p:attrName>
+                                        </p:attrNameLst>
+                                      </p:cBhvr>
+                                      <p:to>
+                                        <p:strVal val="visible"/>
+                                      </p:to>
+                                    </p:set>
+                                  </p:childTnLst>
+                                </p:cTn>
+                              </p:par>
+                            </p:childTnLst>
+                          </p:cTn>
+                        </p:par>
+                      </p:childTnLst>
+                    </p:cTn>
+                  </p:par>
+                  <p:par>
+                    <p:cTn id="7" fill="hold">
+                      <p:stCondLst>
+                        <p:cond delay="indefinite"/>
+                      </p:stCondLst>
+                      <p:childTnLst>
+                        <p:par>
+                          <p:cTn id="8" fill="hold">
+                            <p:stCondLst>
+                              <p:cond delay="0"/>
+                            </p:stCondLst>
+                            <p:childTnLst>
+                              <p:par>
+                                <p:cTn id="9" presetID="1" presetClass="entr" presetSubtype="0" fill="hold" grpId="0" nodeType="clickEffect">
+                                  <p:stCondLst>
+                                    <p:cond delay="0"/>
+                                  </p:stCondLst>
+                                  <p:childTnLst>
+                                    <p:set>
+                                      <p:cBhvr>
+                                        <p:cTn id="10" dur="1" fill="hold">
+                                          <p:stCondLst>
+                                            <p:cond delay="0"/>
+                                          </p:stCondLst>
+                                        </p:cTn>
+                                        <p:tgtEl>
+                                          <p:spTgt spid="7"/>
+                                        </p:tgtEl>
+                                        <p:attrNameLst>
+                                          <p:attrName>style.visibility</p:attrName>
+                                        </p:attrNameLst>
+                                      </p:cBhvr>
+                                      <p:to>
+                                        <p:strVal val="visible"/>
+                                      </p:to>
+                                    </p:set>
+                                  </p:childTnLst>
+                                </p:cTn>
+                              </p:par>
+                            </p:childTnLst>
+                          </p:cTn>
+                        </p:par>
+                      </p:childTnLst>
+                    </p:cTn>
+                  </p:par>
+                  <p:par>
+                    <p:cTn id="11" fill="hold">
+                      <p:stCondLst>
+                        <p:cond delay="indefinite"/>
+                      </p:stCondLst>
+                      <p:childTnLst>
+                        <p:par>
+                          <p:cTn id="12" fill="hold">
+                            <p:stCondLst>
+                              <p:cond delay="0"/>
+                            </p:stCondLst>
+                            <p:childTnLst>
+                              <p:par>
+                                <p:cTn id="13" presetID="1" presetClass="entr" presetSubtype="0" fill="hold" nodeType="clickEffect">
+                                  <p:stCondLst>
+                                    <p:cond delay="0"/>
+                                  </p:stCondLst>
+                                  <p:childTnLst>
+                                    <p:set>
+                                      <p:cBhvr>
+                                        <p:cTn id="14" dur="1" fill="hold">
+                                          <p:stCondLst>
+                                            <p:cond delay="0"/>
+                                          </p:stCondLst>
+                                        </p:cTn>
+                                        <p:tgtEl>
+                                          <p:spTgt spid="8">
+                                            <p:txEl>
+                                              <p:pRg st="6" end="6"/>
+                                            </p:txEl>
+                                          </p:spTgt>
+                                        </p:tgtEl>
+                                        <p:attrNameLst>
+                                          <p:attrName>style.visibility</p:attrName>
+                                        </p:attrNameLst>
+                                      </p:cBhvr>
+                                      <p:to>
+                                        <p:strVal val="visible"/>
+                                      </p:to>
+                                    </p:set>
+                                  </p:childTnLst>
+                                </p:cTn>
+                              </p:par>
+                            </p:childTnLst>
+                          </p:cTn>
+                        </p:par>
+                      </p:childTnLst>
+                    </p:cTn>
+                  </p:par>
+                  <p:par>
+                    <p:cTn id="15" fill="hold">
+                      <p:stCondLst>
+                        <p:cond delay="indefinite"/>
+                      </p:stCondLst>
+                      <p:childTnLst>
+                        <p:par>
+                          <p:cTn id="16" fill="hold">
+                            <p:stCondLst>
+                              <p:cond delay="0"/>
+                            </p:stCondLst>
+                            <p:childTnLst>
+                              <p:par>
+                                <p:cTn id="17" presetID="1" presetClass="entr" presetSubtype="0" fill="hold" grpId="0" nodeType="clickEffect">
+                                  <p:stCondLst>
+                                    <p:cond delay="0"/>
+                                  </p:stCondLst>
+                                  <p:childTnLst>
+                                    <p:set>
+                                      <p:cBhvr>
+                                        <p:cTn id="18" dur="1" fill="hold">
+                                          <p:stCondLst>
+                                            <p:cond delay="0"/>
+                                          </p:stCondLst>
+                                        </p:cTn>
+                                        <p:tgtEl>
+                                          <p:spTgt spid="9"/>
+                                        </p:tgtEl>
+                                        <p:attrNameLst>
+                                          <p:attrName>style.visibility</p:attrName>
+                                        </p:attrNameLst>
+                                      </p:cBhvr>
+                                      <p:to>
+                                        <p:strVal val="visible"/>
+                                      </p:to>
+                                    </p:set>
+                                  </p:childTnLst>
+                                </p:cTn>
+                              </p:par>
+                            </p:childTnLst>
+                          </p:cTn>
+                        </p:par>
+                      </p:childTnLst>
+                    </p:cTn>
+                  </p:par>
+                  <p:par>
+                    <p:cTn id="19" fill="hold">
+                      <p:stCondLst>
+                        <p:cond delay="indefinite"/>
+                      </p:stCondLst>
+                      <p:childTnLst>
+                        <p:par>
+                          <p:cTn id="20" fill="hold">
+                            <p:stCondLst>
+                              <p:cond delay="0"/>
+                            </p:stCondLst>
+                            <p:childTnLst>
+                              <p:par>
+                                <p:cTn id="21" presetID="1" presetClass="entr" presetSubtype="0" fill="hold" nodeType="clickEffect">
+                                  <p:stCondLst>
+                                    <p:cond delay="0"/>
+                                  </p:stCondLst>
+                                  <p:childTnLst>
+                                    <p:set>
+                                      <p:cBhvr>
+                                        <p:cTn id="22" dur="1" fill="hold">
+                                          <p:stCondLst>
+                                            <p:cond delay="0"/>
+                                          </p:stCondLst>
+                                        </p:cTn>
+                                        <p:tgtEl>
+                                          <p:spTgt spid="8">
+                                            <p:txEl>
+                                              <p:pRg st="8" end="8"/>
+                                            </p:txEl>
+                                          </p:spTgt>
+                                        </p:tgtEl>
+                                        <p:attrNameLst>
+                                          <p:attrName>style.visibility</p:attrName>
+                                        </p:attrNameLst>
+                                      </p:cBhvr>
+                                      <p:to>
+                                        <p:strVal val="visible"/>
+                                      </p:to>
+                                    </p:set>
+                                  </p:childTnLst>
+                                </p:cTn>
+                              </p:par>
+                            </p:childTnLst>
+                          </p:cTn>
+                        </p:par>
+                      </p:childTnLst>
+                    </p:cTn>
+                  </p:par>
+                  <p:par>
+                    <p:cTn id="23" fill="hold">
+                      <p:stCondLst>
+                        <p:cond delay="indefinite"/>
+                      </p:stCondLst>
+                      <p:childTnLst>
+                        <p:par>
+                          <p:cTn id="24" fill="hold">
+                            <p:stCondLst>
+                              <p:cond delay="0"/>
+                            </p:stCondLst>
+                            <p:childTnLst>
+                              <p:par>
+                                <p:cTn id="25" presetID="1" presetClass="entr" presetSubtype="0" fill="hold" grpId="0" nodeType="clickEffect">
+                                  <p:stCondLst>
+                                    <p:cond delay="0"/>
+                                  </p:stCondLst>
+                                  <p:childTnLst>
+                                    <p:set>
+                                      <p:cBhvr>
+                                        <p:cTn id="26" dur="1" fill="hold">
+                                          <p:stCondLst>
+                                            <p:cond delay="0"/>
+                                          </p:stCondLst>
+                                        </p:cTn>
+                                        <p:tgtEl>
+                                          <p:spTgt spid="10"/>
+                                        </p:tgtEl>
+                                        <p:attrNameLst>
+                                          <p:attrName>style.visibility</p:attrName>
+                                        </p:attrNameLst>
+                                      </p:cBhvr>
+                                      <p:to>
+                                        <p:strVal val="visible"/>
+                                      </p:to>
+                                    </p:set>
+                                  </p:childTnLst>
+                                </p:cTn>
+                              </p:par>
+                            </p:childTnLst>
+                          </p:cTn>
+                        </p:par>
+                      </p:childTnLst>
+                    </p:cTn>
+                  </p:par>
+                  <p:par>
+                    <p:cTn id="27" fill="hold">
+                      <p:stCondLst>
+                        <p:cond delay="indefinite"/>
+                      </p:stCondLst>
+                      <p:childTnLst>
+                        <p:par>
+                          <p:cTn id="28" fill="hold">
+                            <p:stCondLst>
+                              <p:cond delay="0"/>
+                            </p:stCondLst>
+                            <p:childTnLst>
+                              <p:par>
+                                <p:cTn id="29" presetID="1" presetClass="entr" presetSubtype="0" fill="hold" grpId="0" nodeType="clickEffect">
+                                  <p:stCondLst>
+                                    <p:cond delay="0"/>
+                                  </p:stCondLst>
+                                  <p:childTnLst>
+                                    <p:set>
+                                      <p:cBhvr>
+                                        <p:cTn id="30" dur="1" fill="hold">
+                                          <p:stCondLst>
+                                            <p:cond delay="0"/>
+                                          </p:stCondLst>
+                                        </p:cTn>
+                                        <p:tgtEl>
+                                          <p:spTgt spid="12"/>
+                                        </p:tgtEl>
+                                        <p:attrNameLst>
+                                          <p:attrName>style.visibility</p:attrName>
+                                        </p:attrNameLst>
+                                      </p:cBhvr>
+                                      <p:to>
+                                        <p:strVal val="visible"/>
+                                      </p:to>
+                                    </p:set>
+                                  </p:childTnLst>
+                                </p:cTn>
+                              </p:par>
+                            </p:childTnLst>
+                          </p:cTn>
+                        </p:par>
+                      </p:childTnLst>
+                    </p:cTn>
+                  </p:par>
+                  <p:par>
+                    <p:cTn id="31" fill="hold">
+                      <p:stCondLst>
+                        <p:cond delay="indefinite"/>
+                      </p:stCondLst>
+                      <p:childTnLst>
+                        <p:par>
+                          <p:cTn id="32" fill="hold">
+                            <p:stCondLst>
+                              <p:cond delay="0"/>
+                            </p:stCondLst>
+                            <p:childTnLst>
+                              <p:par>
+                                <p:cTn id="33" presetID="1" presetClass="entr" presetSubtype="0" fill="hold" nodeType="clickEffect">
+                                  <p:stCondLst>
+                                    <p:cond delay="0"/>
+                                  </p:stCondLst>
+                                  <p:childTnLst>
+                                    <p:set>
+                                      <p:cBhvr>
+                                        <p:cTn id="34" dur="1" fill="hold">
+                                          <p:stCondLst>
+                                            <p:cond delay="0"/>
+                                          </p:stCondLst>
+                                        </p:cTn>
+                                        <p:tgtEl>
+                                          <p:spTgt spid="8">
+                                            <p:txEl>
+                                              <p:pRg st="10" end="10"/>
+                                            </p:txEl>
+                                          </p:spTgt>
+                                        </p:tgtEl>
+                                        <p:attrNameLst>
+                                          <p:attrName>style.visibility</p:attrName>
+                                        </p:attrNameLst>
+                                      </p:cBhvr>
+                                      <p:to>
+                                        <p:strVal val="visible"/>
+                                      </p:to>
+                                    </p:set>
+                                  </p:childTnLst>
+                                </p:cTn>
+                              </p:par>
+                            </p:childTnLst>
+                          </p:cTn>
+                        </p:par>
+                      </p:childTnLst>
+                    </p:cTn>
+                  </p:par>
+                  <p:par>
+                    <p:cTn id="35" fill="hold">
+                      <p:stCondLst>
+                        <p:cond delay="indefinite"/>
+                      </p:stCondLst>
+                      <p:childTnLst>
+                        <p:par>
+                          <p:cTn id="36" fill="hold">
+                            <p:stCondLst>
+                              <p:cond delay="0"/>
+                            </p:stCondLst>
+                            <p:childTnLst>
+                              <p:par>
+                                <p:cTn id="37" presetID="1" presetClass="entr" presetSubtype="0" fill="hold" grpId="0" nodeType="clickEffect">
+                                  <p:stCondLst>
+                                    <p:cond delay="0"/>
+                                  </p:stCondLst>
+                                  <p:childTnLst>
+                                    <p:set>
+                                      <p:cBhvr>
+                                        <p:cTn id="38" dur="1" fill="hold">
+                                          <p:stCondLst>
+                                            <p:cond delay="0"/>
+                                          </p:stCondLst>
+                                        </p:cTn>
+                                        <p:tgtEl>
+                                          <p:spTgt spid="11"/>
+                                        </p:tgtEl>
+                                        <p:attrNameLst>
+                                          <p:attrName>style.visibility</p:attrName>
+                                        </p:attrNameLst>
+                                      </p:cBhvr>
+                                      <p:to>
+                                        <p:strVal val="visible"/>
+                                      </p:to>
+                                    </p:set>
+                                  </p:childTnLst>
+                                </p:cTn>
+                              </p:par>
+                            </p:childTnLst>
+                          </p:cTn>
+                        </p:par>
+                      </p:childTnLst>
+                    </p:cTn>
+                  </p:par>
+                </p:childTnLst>
+              </p:cTn>
+              <p:prevCondLst>
+                <p:cond evt="onPrev" delay="0">
+                  <p:tgtEl>
+                    <p:sldTgt/>
+                  </p:tgtEl>
+                </p:cond>
+              </p:prevCondLst>
+              <p:nextCondLst>
+                <p:cond evt="onNext" delay="0">
+                  <p:tgtEl>
+                    <p:sldTgt/>
+                  </p:tgtEl>
+                </p:cond>
+              </p:nextCondLst>
+            </p:seq>
+          </p:childTnLst>
+        </p:cTn>
+      </p:par>
+    </p:tnLst>
+    <p:bldLst>
+      <p:bldP spid="7" grpId="0" animBg="1"/>
+      <p:bldP spid="9" grpId="0" animBg="1"/>
+      <p:bldP spid="10" grpId="0" animBg="1"/>
+      <p:bldP spid="11" grpId="0" animBg="1"/>
+      <p:bldP spid="12" grpId="0" animBg="1"/>
+    </p:bldLst>
+  </p:timing>
+</p:sld>
+</file>
+
+<file path=ppt/slides/slide14.xml><?xml version="1.0" encoding="utf-8"?>
+<p:sld xmlns:a="http://schemas.openxmlformats.org/drawingml/2006/main" xmlns:r="http://schemas.openxmlformats.org/officeDocument/2006/relationships" xmlns:p="http://schemas.openxmlformats.org/presentationml/2006/main">
+  <p:cSld>
+    <p:spTree>
+      <p:nvGrpSpPr>
         <p:cNvPr id="1" name=""/>
         <p:cNvGrpSpPr/>
         <p:nvPr/>
@@ -10990,7 +11727,7 @@
               <a:pPr>
                 <a:defRPr/>
               </a:pPr>
-              <a:t>13</a:t>
+              <a:t>14</a:t>
             </a:fld>
             <a:endParaRPr lang="en-US" sz="1100" dirty="0"/>
           </a:p>
@@ -11060,6 +11797,127 @@
           <a:chExt cx="0" cy="0"/>
         </a:xfrm>
       </p:grpSpPr>
+      <p:grpSp>
+        <p:nvGrpSpPr>
+          <p:cNvPr id="5" name="Group 15">
+            <a:extLst>
+              <a:ext uri="{FF2B5EF4-FFF2-40B4-BE49-F238E27FC236}">
+                <a16:creationId xmlns:a16="http://schemas.microsoft.com/office/drawing/2014/main" id="{A269618B-B690-689D-FED2-5078E43C3B05}"/>
+              </a:ext>
+            </a:extLst>
+          </p:cNvPr>
+          <p:cNvGrpSpPr>
+            <a:grpSpLocks/>
+          </p:cNvGrpSpPr>
+          <p:nvPr/>
+        </p:nvGrpSpPr>
+        <p:grpSpPr bwMode="auto">
+          <a:xfrm>
+            <a:off x="7431005" y="1994525"/>
+            <a:ext cx="1019823" cy="511556"/>
+            <a:chOff x="5806653" y="2023240"/>
+            <a:chExt cx="1019205" cy="511975"/>
+          </a:xfrm>
+        </p:grpSpPr>
+        <p:sp>
+          <p:nvSpPr>
+            <p:cNvPr id="7" name="TextBox 16">
+              <a:extLst>
+                <a:ext uri="{FF2B5EF4-FFF2-40B4-BE49-F238E27FC236}">
+                  <a16:creationId xmlns:a16="http://schemas.microsoft.com/office/drawing/2014/main" id="{5E9693F0-D44F-0D07-7E86-710BD1F0A306}"/>
+                </a:ext>
+              </a:extLst>
+            </p:cNvPr>
+            <p:cNvSpPr txBox="1">
+              <a:spLocks noChangeArrowheads="1"/>
+            </p:cNvSpPr>
+            <p:nvPr/>
+          </p:nvSpPr>
+          <p:spPr bwMode="auto">
+            <a:xfrm>
+              <a:off x="5806653" y="2023240"/>
+              <a:ext cx="557359" cy="338831"/>
+            </a:xfrm>
+            <a:prstGeom prst="rect">
+              <a:avLst/>
+            </a:prstGeom>
+            <a:noFill/>
+            <a:ln w="9525">
+              <a:noFill/>
+              <a:miter lim="800000"/>
+              <a:headEnd/>
+              <a:tailEnd/>
+            </a:ln>
+          </p:spPr>
+          <p:txBody>
+            <a:bodyPr wrap="square">
+              <a:spAutoFit/>
+            </a:bodyPr>
+            <a:lstStyle/>
+            <a:p>
+              <a:r>
+                <a:rPr lang="en-US" sz="1600" dirty="0">
+                  <a:latin typeface="Calibri" pitchFamily="34" charset="0"/>
+                </a:rPr>
+                <a:t>ptr2</a:t>
+              </a:r>
+              <a:endParaRPr lang="en-SG" sz="1600" dirty="0">
+                <a:latin typeface="Calibri" pitchFamily="34" charset="0"/>
+              </a:endParaRPr>
+            </a:p>
+          </p:txBody>
+        </p:sp>
+        <p:sp>
+          <p:nvSpPr>
+            <p:cNvPr id="8" name="TextBox 17">
+              <a:extLst>
+                <a:ext uri="{FF2B5EF4-FFF2-40B4-BE49-F238E27FC236}">
+                  <a16:creationId xmlns:a16="http://schemas.microsoft.com/office/drawing/2014/main" id="{564A1DBB-19CA-BCD9-0044-9F6EA849A769}"/>
+                </a:ext>
+              </a:extLst>
+            </p:cNvPr>
+            <p:cNvSpPr txBox="1">
+              <a:spLocks noChangeArrowheads="1"/>
+            </p:cNvSpPr>
+            <p:nvPr/>
+          </p:nvSpPr>
+          <p:spPr bwMode="auto">
+            <a:xfrm>
+              <a:off x="6295954" y="2196801"/>
+              <a:ext cx="529904" cy="338414"/>
+            </a:xfrm>
+            <a:prstGeom prst="rect">
+              <a:avLst/>
+            </a:prstGeom>
+            <a:solidFill>
+              <a:srgbClr val="9F9FFF"/>
+            </a:solidFill>
+            <a:ln w="9525">
+              <a:solidFill>
+                <a:schemeClr val="tx1"/>
+              </a:solidFill>
+              <a:miter lim="800000"/>
+              <a:headEnd/>
+              <a:tailEnd/>
+            </a:ln>
+          </p:spPr>
+          <p:txBody>
+            <a:bodyPr>
+              <a:spAutoFit/>
+            </a:bodyPr>
+            <a:lstStyle/>
+            <a:p>
+              <a:pPr algn="ctr">
+                <a:defRPr/>
+              </a:pPr>
+              <a:endParaRPr lang="en-SG" sz="1600">
+                <a:latin typeface="Calibri" pitchFamily="34" charset="0"/>
+                <a:cs typeface="Arial" pitchFamily="34" charset="0"/>
+              </a:endParaRPr>
+            </a:p>
+          </p:txBody>
+        </p:sp>
+      </p:grpSp>
       <p:sp>
         <p:nvSpPr>
           <p:cNvPr id="14338" name="Rectangle 2"/>
@@ -11084,14 +11942,14 @@
           <a:p>
             <a:pPr eaLnBrk="1" hangingPunct="1"/>
             <a:r>
-              <a:rPr lang="en-US" altLang="zh-CN" sz="3600">
+              <a:rPr lang="en-US" altLang="zh-CN" sz="3600" dirty="0">
                 <a:solidFill>
                   <a:srgbClr val="0000FF"/>
                 </a:solidFill>
               </a:rPr>
               <a:t>Pointers</a:t>
             </a:r>
-            <a:endParaRPr lang="en-GB" sz="3600">
+            <a:endParaRPr lang="en-GB" sz="3600" dirty="0">
               <a:solidFill>
                 <a:srgbClr val="0000FF"/>
               </a:solidFill>
@@ -11108,7 +11966,7 @@
         <p:spPr>
           <a:xfrm>
             <a:off x="492132" y="1313061"/>
-            <a:ext cx="6453118" cy="707886"/>
+            <a:ext cx="6453118" cy="1323439"/>
           </a:xfrm>
           <a:prstGeom prst="rect">
             <a:avLst/>
@@ -11141,7 +11999,7 @@
               <a:defRPr/>
             </a:pPr>
             <a:r>
-              <a:rPr lang="en-US" sz="2000" b="1">
+              <a:rPr lang="en-US" sz="2000" b="1" dirty="0">
                 <a:solidFill>
                   <a:srgbClr val="0000FF"/>
                 </a:solidFill>
@@ -11151,53 +12009,78 @@
               <a:t>long</a:t>
             </a:r>
             <a:r>
-              <a:rPr lang="en-US" sz="2000" b="1">
+              <a:rPr lang="en-US" sz="2000" b="1" dirty="0">
                 <a:solidFill>
                   <a:srgbClr val="000000"/>
                 </a:solidFill>
                 <a:latin typeface="Courier New" pitchFamily="49" charset="0"/>
                 <a:cs typeface="Courier New" pitchFamily="49" charset="0"/>
               </a:rPr>
-              <a:t> i = </a:t>
-            </a:r>
-            <a:r>
-              <a:rPr lang="en-US" sz="2000" b="1">
-                <a:solidFill>
-                  <a:srgbClr val="008000"/>
+              <a:t> a = </a:t>
+            </a:r>
+            <a:r>
+              <a:rPr lang="en-US" sz="2000" b="1" dirty="0">
+                <a:solidFill>
+                  <a:srgbClr val="C00000"/>
                 </a:solidFill>
                 <a:latin typeface="Courier New" pitchFamily="49" charset="0"/>
                 <a:cs typeface="Courier New" pitchFamily="49" charset="0"/>
               </a:rPr>
-              <a:t>10</a:t>
-            </a:r>
-            <a:r>
-              <a:rPr lang="en-US" sz="2000" b="1">
+              <a:t>2</a:t>
+            </a:r>
+            <a:r>
+              <a:rPr lang="en-US" sz="2000" b="1" dirty="0">
                 <a:solidFill>
                   <a:srgbClr val="000000"/>
                 </a:solidFill>
                 <a:latin typeface="Courier New" pitchFamily="49" charset="0"/>
                 <a:cs typeface="Courier New" pitchFamily="49" charset="0"/>
               </a:rPr>
-              <a:t>, j = </a:t>
-            </a:r>
-            <a:r>
-              <a:rPr lang="en-US" sz="2000" b="1">
-                <a:solidFill>
-                  <a:srgbClr val="008000"/>
+              <a:t>;</a:t>
+            </a:r>
+          </a:p>
+          <a:p>
+            <a:pPr>
+              <a:defRPr/>
+            </a:pPr>
+            <a:r>
+              <a:rPr lang="en-US" sz="2000" b="1" dirty="0">
+                <a:solidFill>
+                  <a:srgbClr val="0000FF"/>
                 </a:solidFill>
                 <a:latin typeface="Courier New" pitchFamily="49" charset="0"/>
                 <a:cs typeface="Courier New" pitchFamily="49" charset="0"/>
               </a:rPr>
-              <a:t>20</a:t>
-            </a:r>
-            <a:r>
-              <a:rPr lang="en-US" sz="2000" b="1">
+              <a:t>long</a:t>
+            </a:r>
+            <a:r>
+              <a:rPr lang="en-US" sz="2000" b="1" dirty="0">
                 <a:solidFill>
                   <a:srgbClr val="000000"/>
                 </a:solidFill>
                 <a:latin typeface="Courier New" pitchFamily="49" charset="0"/>
                 <a:cs typeface="Courier New" pitchFamily="49" charset="0"/>
               </a:rPr>
+              <a:t> b = </a:t>
+            </a:r>
+            <a:r>
+              <a:rPr lang="en-US" sz="2000" b="1" dirty="0">
+                <a:solidFill>
+                  <a:srgbClr val="C00000"/>
+                </a:solidFill>
+                <a:latin typeface="Courier New" pitchFamily="49" charset="0"/>
+                <a:cs typeface="Courier New" pitchFamily="49" charset="0"/>
+              </a:rPr>
+              <a:t>6</a:t>
+            </a:r>
+            <a:r>
+              <a:rPr lang="en-US" sz="2000" b="1" dirty="0">
+                <a:solidFill>
+                  <a:srgbClr val="000000"/>
+                </a:solidFill>
+                <a:latin typeface="Courier New" pitchFamily="49" charset="0"/>
+                <a:cs typeface="Courier New" pitchFamily="49" charset="0"/>
+              </a:rPr>
               <a:t>;</a:t>
             </a:r>
           </a:p>
@@ -11206,7 +12089,7 @@
               <a:defRPr/>
             </a:pPr>
             <a:r>
-              <a:rPr lang="en-US" sz="2000" b="1">
+              <a:rPr lang="en-US" sz="2000" b="1" dirty="0">
                 <a:solidFill>
                   <a:srgbClr val="0000FF"/>
                 </a:solidFill>
@@ -11216,7 +12099,7 @@
               <a:t>long</a:t>
             </a:r>
             <a:r>
-              <a:rPr lang="en-US" sz="2000" b="1">
+              <a:rPr lang="en-US" sz="2000" b="1" dirty="0">
                 <a:solidFill>
                   <a:srgbClr val="000000"/>
                 </a:solidFill>
@@ -11226,42 +12109,40 @@
               <a:t> </a:t>
             </a:r>
             <a:r>
-              <a:rPr lang="en-US" sz="2000" b="1">
+              <a:rPr lang="en-US" sz="2000" b="1" dirty="0">
                 <a:solidFill>
                   <a:schemeClr val="tx1"/>
                 </a:solidFill>
                 <a:latin typeface="Courier New" pitchFamily="49" charset="0"/>
                 <a:cs typeface="Courier New" pitchFamily="49" charset="0"/>
               </a:rPr>
-              <a:t>*p</a:t>
-            </a:r>
-            <a:r>
-              <a:rPr lang="en-US" sz="2000" b="1">
-                <a:solidFill>
-                  <a:srgbClr val="000000"/>
+              <a:t>*ptr1 = &amp;b;</a:t>
+            </a:r>
+          </a:p>
+          <a:p>
+            <a:pPr>
+              <a:defRPr/>
+            </a:pPr>
+            <a:r>
+              <a:rPr lang="en-US" sz="2000" b="1" dirty="0">
+                <a:solidFill>
+                  <a:srgbClr val="0000FF"/>
                 </a:solidFill>
                 <a:latin typeface="Courier New" pitchFamily="49" charset="0"/>
                 <a:cs typeface="Courier New" pitchFamily="49" charset="0"/>
               </a:rPr>
-              <a:t>; </a:t>
-            </a:r>
-            <a:r>
-              <a:rPr lang="en-US" sz="1600" b="1">
-                <a:solidFill>
-                  <a:srgbClr val="800000"/>
+              <a:t>long</a:t>
+            </a:r>
+            <a:r>
+              <a:rPr lang="en-US" sz="2000" b="1" dirty="0">
+                <a:solidFill>
+                  <a:srgbClr val="000000"/>
                 </a:solidFill>
                 <a:latin typeface="Courier New" pitchFamily="49" charset="0"/>
                 <a:cs typeface="Courier New" pitchFamily="49" charset="0"/>
               </a:rPr>
-              <a:t>// p is a pointer to some long variable</a:t>
-            </a:r>
-            <a:endParaRPr lang="en-US" sz="1400" b="1">
-              <a:solidFill>
-                <a:srgbClr val="800000"/>
-              </a:solidFill>
-              <a:latin typeface="Courier New" pitchFamily="49" charset="0"/>
-              <a:cs typeface="Courier New" pitchFamily="49" charset="0"/>
-            </a:endParaRPr>
+              <a:t> *ptr2 = &amp;a;</a:t>
+            </a:r>
           </a:p>
         </p:txBody>
       </p:sp>
@@ -11273,8 +12154,8 @@
         </p:nvSpPr>
         <p:spPr>
           <a:xfrm>
-            <a:off x="492131" y="2246078"/>
-            <a:ext cx="6432865" cy="1323439"/>
+            <a:off x="457201" y="2876632"/>
+            <a:ext cx="2806700" cy="1938992"/>
           </a:xfrm>
           <a:prstGeom prst="rect">
             <a:avLst/>
@@ -11314,65 +12195,8 @@
                 <a:latin typeface="Courier New" pitchFamily="49" charset="0"/>
                 <a:cs typeface="Courier New" pitchFamily="49" charset="0"/>
               </a:rPr>
-              <a:t>p = </a:t>
-            </a:r>
-            <a:r>
-              <a:rPr lang="en-US" sz="2000" b="1" dirty="0">
-                <a:solidFill>
-                  <a:schemeClr val="tx1"/>
-                </a:solidFill>
-                <a:latin typeface="Courier New" pitchFamily="49" charset="0"/>
-                <a:cs typeface="Courier New" pitchFamily="49" charset="0"/>
-              </a:rPr>
-              <a:t>&amp;</a:t>
-            </a:r>
-            <a:r>
-              <a:rPr lang="en-US" sz="2000" b="1" dirty="0" err="1">
-                <a:solidFill>
-                  <a:schemeClr val="tx1"/>
-                </a:solidFill>
-                <a:latin typeface="Courier New" pitchFamily="49" charset="0"/>
-                <a:cs typeface="Courier New" pitchFamily="49" charset="0"/>
-              </a:rPr>
-              <a:t>i</a:t>
-            </a:r>
-            <a:r>
-              <a:rPr lang="en-US" sz="2000" b="1" dirty="0">
-                <a:solidFill>
-                  <a:srgbClr val="000000"/>
-                </a:solidFill>
-                <a:latin typeface="Courier New" pitchFamily="49" charset="0"/>
-                <a:cs typeface="Courier New" pitchFamily="49" charset="0"/>
-              </a:rPr>
-              <a:t>; </a:t>
-            </a:r>
-            <a:r>
-              <a:rPr lang="en-US" sz="1600" b="1" dirty="0">
-                <a:solidFill>
-                  <a:srgbClr val="800000"/>
-                </a:solidFill>
-                <a:latin typeface="Courier New" pitchFamily="49" charset="0"/>
-                <a:cs typeface="Courier New" pitchFamily="49" charset="0"/>
-              </a:rPr>
-              <a:t>// p now stores the address of variable </a:t>
-            </a:r>
-            <a:r>
-              <a:rPr lang="en-US" sz="1600" b="1" dirty="0" err="1">
-                <a:solidFill>
-                  <a:srgbClr val="800000"/>
-                </a:solidFill>
-                <a:latin typeface="Courier New" pitchFamily="49" charset="0"/>
-                <a:cs typeface="Courier New" pitchFamily="49" charset="0"/>
-              </a:rPr>
-              <a:t>i</a:t>
-            </a:r>
-            <a:endParaRPr lang="en-US" sz="1600" b="1" dirty="0">
-              <a:solidFill>
-                <a:srgbClr val="800000"/>
-              </a:solidFill>
-              <a:latin typeface="Courier New" pitchFamily="49" charset="0"/>
-              <a:cs typeface="Courier New" pitchFamily="49" charset="0"/>
-            </a:endParaRPr>
+              <a:t>*ptr1 += *ptr2;</a:t>
+            </a:r>
           </a:p>
           <a:p>
             <a:pPr>
@@ -11390,6 +12214,36 @@
             <a:pPr>
               <a:defRPr/>
             </a:pPr>
+            <a:r>
+              <a:rPr lang="en-US" sz="2000" b="1" dirty="0">
+                <a:solidFill>
+                  <a:srgbClr val="000000"/>
+                </a:solidFill>
+                <a:latin typeface="Courier New" pitchFamily="49" charset="0"/>
+                <a:cs typeface="Courier New" pitchFamily="49" charset="0"/>
+              </a:rPr>
+              <a:t>ptr1 = ptr2;</a:t>
+            </a:r>
+          </a:p>
+          <a:p>
+            <a:pPr>
+              <a:defRPr/>
+            </a:pPr>
+            <a:r>
+              <a:rPr lang="en-US" sz="2000" b="1" dirty="0">
+                <a:solidFill>
+                  <a:srgbClr val="000000"/>
+                </a:solidFill>
+                <a:latin typeface="Courier New" pitchFamily="49" charset="0"/>
+                <a:cs typeface="Courier New" pitchFamily="49" charset="0"/>
+              </a:rPr>
+              <a:t>ptr2 = ptr1;</a:t>
+            </a:r>
+          </a:p>
+          <a:p>
+            <a:pPr>
+              <a:defRPr/>
+            </a:pPr>
             <a:endParaRPr lang="en-US" sz="2000" b="1" dirty="0">
               <a:solidFill>
                 <a:srgbClr val="000000"/>
@@ -11410,15 +12264,8 @@
                 <a:latin typeface="Courier New" pitchFamily="49" charset="0"/>
                 <a:cs typeface="Courier New" pitchFamily="49" charset="0"/>
               </a:rPr>
-              <a:t>cs1010_println_long(*p); </a:t>
-            </a:r>
-            <a:endParaRPr lang="en-US" sz="2000" b="1" dirty="0">
-              <a:solidFill>
-                <a:srgbClr val="800000"/>
-              </a:solidFill>
-              <a:latin typeface="Courier New" pitchFamily="49" charset="0"/>
-              <a:cs typeface="Courier New" pitchFamily="49" charset="0"/>
-            </a:endParaRPr>
+              <a:t>*ptr1 += *ptr2;</a:t>
+            </a:r>
           </a:p>
         </p:txBody>
       </p:sp>
@@ -11446,10 +12293,10 @@
           </p:nvGrpSpPr>
           <p:grpSpPr bwMode="auto">
             <a:xfrm>
-              <a:off x="6391275" y="1253544"/>
-              <a:ext cx="799269" cy="511556"/>
-              <a:chOff x="4834756" y="1996965"/>
-              <a:chExt cx="798785" cy="511975"/>
+              <a:off x="6391275" y="1253546"/>
+              <a:ext cx="799269" cy="511554"/>
+              <a:chOff x="4834756" y="1996967"/>
+              <a:chExt cx="798785" cy="511973"/>
             </a:xfrm>
           </p:grpSpPr>
           <p:sp>
@@ -11462,7 +12309,7 @@
             </p:nvSpPr>
             <p:spPr bwMode="auto">
               <a:xfrm>
-                <a:off x="4834756" y="1996965"/>
+                <a:off x="4834756" y="1996967"/>
                 <a:ext cx="336331" cy="338554"/>
               </a:xfrm>
               <a:prstGeom prst="rect">
@@ -11483,12 +12330,12 @@
               <a:lstStyle/>
               <a:p>
                 <a:r>
-                  <a:rPr lang="en-US" sz="1600">
+                  <a:rPr lang="en-US" sz="1600" dirty="0">
                     <a:latin typeface="Calibri" pitchFamily="34" charset="0"/>
                   </a:rPr>
-                  <a:t>i</a:t>
+                  <a:t>a</a:t>
                 </a:r>
-                <a:endParaRPr lang="en-SG" sz="1600">
+                <a:endParaRPr lang="en-SG" sz="1600" dirty="0">
                   <a:latin typeface="Calibri" pitchFamily="34" charset="0"/>
                 </a:endParaRPr>
               </a:p>
@@ -11530,12 +12377,12 @@
               <a:p>
                 <a:pPr algn="ctr"/>
                 <a:r>
-                  <a:rPr lang="en-US" sz="1600">
+                  <a:rPr lang="en-US" sz="1600" dirty="0">
                     <a:latin typeface="Calibri" pitchFamily="34" charset="0"/>
                   </a:rPr>
-                  <a:t>10</a:t>
+                  <a:t>2</a:t>
                 </a:r>
-                <a:endParaRPr lang="en-SG" sz="1600">
+                <a:endParaRPr lang="en-SG" sz="1600" dirty="0">
                   <a:latin typeface="Calibri" pitchFamily="34" charset="0"/>
                 </a:endParaRPr>
               </a:p>
@@ -11589,12 +12436,12 @@
               <a:lstStyle/>
               <a:p>
                 <a:r>
-                  <a:rPr lang="en-US" sz="1600">
+                  <a:rPr lang="en-US" sz="1600" dirty="0">
                     <a:latin typeface="Calibri" pitchFamily="34" charset="0"/>
                   </a:rPr>
-                  <a:t>j</a:t>
+                  <a:t>b</a:t>
                 </a:r>
-                <a:endParaRPr lang="en-SG" sz="1600">
+                <a:endParaRPr lang="en-SG" sz="1600" dirty="0">
                   <a:latin typeface="Calibri" pitchFamily="34" charset="0"/>
                 </a:endParaRPr>
               </a:p>
@@ -11636,12 +12483,12 @@
               <a:p>
                 <a:pPr algn="ctr"/>
                 <a:r>
-                  <a:rPr lang="en-US" sz="1600">
+                  <a:rPr lang="en-US" sz="1600" dirty="0">
                     <a:latin typeface="Calibri" pitchFamily="34" charset="0"/>
                   </a:rPr>
-                  <a:t>20</a:t>
+                  <a:t>6</a:t>
                 </a:r>
-                <a:endParaRPr lang="en-SG" sz="1600">
+                <a:endParaRPr lang="en-SG" sz="1600" dirty="0">
                   <a:latin typeface="Calibri" pitchFamily="34" charset="0"/>
                 </a:endParaRPr>
               </a:p>
@@ -11659,10 +12506,10 @@
         </p:nvGrpSpPr>
         <p:grpSpPr bwMode="auto">
           <a:xfrm>
-            <a:off x="7032477" y="2019925"/>
-            <a:ext cx="799271" cy="511556"/>
-            <a:chOff x="6027681" y="2023240"/>
-            <a:chExt cx="798787" cy="511975"/>
+            <a:off x="6184491" y="1994525"/>
+            <a:ext cx="998947" cy="511556"/>
+            <a:chOff x="5827516" y="2023240"/>
+            <a:chExt cx="998342" cy="511975"/>
           </a:xfrm>
         </p:grpSpPr>
         <p:sp>
@@ -11675,8 +12522,8 @@
           </p:nvSpPr>
           <p:spPr bwMode="auto">
             <a:xfrm>
-              <a:off x="6027681" y="2023240"/>
-              <a:ext cx="336331" cy="338554"/>
+              <a:off x="5827516" y="2023240"/>
+              <a:ext cx="536497" cy="338831"/>
             </a:xfrm>
             <a:prstGeom prst="rect">
               <a:avLst/>
@@ -11690,18 +12537,18 @@
             </a:ln>
           </p:spPr>
           <p:txBody>
-            <a:bodyPr>
+            <a:bodyPr wrap="square">
               <a:spAutoFit/>
             </a:bodyPr>
             <a:lstStyle/>
             <a:p>
               <a:r>
-                <a:rPr lang="en-US" sz="1600">
+                <a:rPr lang="en-US" sz="1600" dirty="0">
                   <a:latin typeface="Calibri" pitchFamily="34" charset="0"/>
                 </a:rPr>
-                <a:t>p</a:t>
+                <a:t>ptr1</a:t>
               </a:r>
-              <a:endParaRPr lang="en-SG" sz="1600">
+              <a:endParaRPr lang="en-SG" sz="1600" dirty="0">
                 <a:latin typeface="Calibri" pitchFamily="34" charset="0"/>
               </a:endParaRPr>
             </a:p>
@@ -11757,13 +12604,15 @@
           <p:cNvPr id="35" name="Straight Arrow Connector 34"/>
           <p:cNvCxnSpPr>
             <a:cxnSpLocks noChangeShapeType="1"/>
+            <a:stCxn id="8" idx="0"/>
+            <a:endCxn id="34" idx="2"/>
           </p:cNvCxnSpPr>
           <p:nvPr/>
         </p:nvCxnSpPr>
         <p:spPr bwMode="auto">
-          <a:xfrm rot="16200000" flipV="1">
-            <a:off x="7134225" y="1909181"/>
-            <a:ext cx="538163" cy="354013"/>
+          <a:xfrm flipH="1" flipV="1">
+            <a:off x="6924997" y="1765100"/>
+            <a:ext cx="1260719" cy="402844"/>
           </a:xfrm>
           <a:prstGeom prst="straightConnector1">
             <a:avLst/>
@@ -11779,553 +12628,19 @@
           </a:ln>
         </p:spPr>
       </p:cxnSp>
-      <p:sp>
-        <p:nvSpPr>
-          <p:cNvPr id="36" name="TextBox 35"/>
-          <p:cNvSpPr txBox="1"/>
-          <p:nvPr/>
-        </p:nvSpPr>
-        <p:spPr>
-          <a:xfrm>
-            <a:off x="5990897" y="3147537"/>
-            <a:ext cx="568645" cy="400050"/>
-          </a:xfrm>
-          <a:prstGeom prst="rect">
-            <a:avLst/>
-          </a:prstGeom>
-          <a:solidFill>
-            <a:srgbClr val="FFFFCC"/>
-          </a:solidFill>
-          <a:ln/>
-          <a:effectLst>
-            <a:outerShdw blurRad="50800" dist="38100" dir="2700000" algn="tl" rotWithShape="0">
-              <a:prstClr val="black">
-                <a:alpha val="40000"/>
-              </a:prstClr>
-            </a:outerShdw>
-          </a:effectLst>
-        </p:spPr>
-        <p:style>
-          <a:lnRef idx="2">
-            <a:schemeClr val="accent6"/>
-          </a:lnRef>
-          <a:fillRef idx="1">
-            <a:schemeClr val="lt1"/>
-          </a:fillRef>
-          <a:effectRef idx="0">
-            <a:schemeClr val="accent6"/>
-          </a:effectRef>
-          <a:fontRef idx="minor">
-            <a:schemeClr val="dk1"/>
-          </a:fontRef>
-        </p:style>
-        <p:txBody>
-          <a:bodyPr wrap="square">
-            <a:spAutoFit/>
-          </a:bodyPr>
-          <a:lstStyle/>
-          <a:p>
-            <a:pPr>
-              <a:defRPr/>
-            </a:pPr>
-            <a:r>
-              <a:rPr lang="en-US" sz="2000" b="1">
-                <a:latin typeface="Courier New" pitchFamily="49" charset="0"/>
-                <a:cs typeface="Courier New" pitchFamily="49" charset="0"/>
-              </a:rPr>
-              <a:t>10</a:t>
-            </a:r>
-          </a:p>
-        </p:txBody>
-      </p:sp>
-      <p:sp>
-        <p:nvSpPr>
-          <p:cNvPr id="37" name="TextBox 36"/>
-          <p:cNvSpPr txBox="1">
-            <a:spLocks noChangeArrowheads="1"/>
-          </p:cNvSpPr>
-          <p:nvPr/>
-        </p:nvSpPr>
-        <p:spPr bwMode="auto">
-          <a:xfrm>
-            <a:off x="3708400" y="2656845"/>
-            <a:ext cx="2851142" cy="369332"/>
-          </a:xfrm>
-          <a:prstGeom prst="rect">
-            <a:avLst/>
-          </a:prstGeom>
-          <a:noFill/>
-          <a:ln w="9525">
-            <a:noFill/>
-            <a:miter lim="800000"/>
-            <a:headEnd/>
-            <a:tailEnd/>
-          </a:ln>
-        </p:spPr>
-        <p:txBody>
-          <a:bodyPr wrap="square">
-            <a:spAutoFit/>
-          </a:bodyPr>
-          <a:lstStyle/>
-          <a:p>
-            <a:r>
-              <a:rPr lang="en-US"/>
-              <a:t>Now </a:t>
-            </a:r>
-            <a:r>
-              <a:rPr lang="en-US" b="1">
-                <a:latin typeface="Courier New" pitchFamily="49" charset="0"/>
-                <a:cs typeface="Courier New" pitchFamily="49" charset="0"/>
-              </a:rPr>
-              <a:t>*p</a:t>
-            </a:r>
-            <a:r>
-              <a:rPr lang="en-US"/>
-              <a:t> is equivalent to </a:t>
-            </a:r>
-            <a:r>
-              <a:rPr lang="en-US" b="1">
-                <a:latin typeface="Courier New" pitchFamily="49" charset="0"/>
-                <a:cs typeface="Courier New" pitchFamily="49" charset="0"/>
-              </a:rPr>
-              <a:t>i</a:t>
-            </a:r>
-          </a:p>
-        </p:txBody>
-      </p:sp>
-      <p:grpSp>
-        <p:nvGrpSpPr>
-          <p:cNvPr id="40" name="Group 39"/>
-          <p:cNvGrpSpPr/>
-          <p:nvPr/>
-        </p:nvGrpSpPr>
-        <p:grpSpPr>
-          <a:xfrm>
-            <a:off x="2267519" y="2548635"/>
-            <a:ext cx="1348740" cy="519335"/>
-            <a:chOff x="2727960" y="5916003"/>
-            <a:chExt cx="1348740" cy="519335"/>
-          </a:xfrm>
-        </p:grpSpPr>
-        <p:sp>
-          <p:nvSpPr>
-            <p:cNvPr id="41" name="Right Arrow 40"/>
-            <p:cNvSpPr/>
-            <p:nvPr/>
-          </p:nvSpPr>
-          <p:spPr bwMode="auto">
-            <a:xfrm>
-              <a:off x="2727960" y="5916003"/>
-              <a:ext cx="1348740" cy="519335"/>
-            </a:xfrm>
-            <a:prstGeom prst="rightArrow">
-              <a:avLst/>
-            </a:prstGeom>
-            <a:solidFill>
-              <a:srgbClr val="FFC000"/>
-            </a:solidFill>
-            <a:ln w="12700" cap="sq" cmpd="sng" algn="ctr">
-              <a:solidFill>
-                <a:schemeClr val="tx1"/>
-              </a:solidFill>
-              <a:prstDash val="solid"/>
-              <a:round/>
-              <a:headEnd type="none" w="sm" len="sm"/>
-              <a:tailEnd type="none" w="sm" len="sm"/>
-            </a:ln>
-            <a:effectLst/>
-          </p:spPr>
-          <p:txBody>
-            <a:bodyPr vert="horz" wrap="square" lIns="91440" tIns="45720" rIns="91440" bIns="45720" numCol="1" rtlCol="0" anchor="t" anchorCtr="0" compatLnSpc="1">
-              <a:prstTxWarp prst="textNoShape">
-                <a:avLst/>
-              </a:prstTxWarp>
-            </a:bodyPr>
-            <a:lstStyle/>
-            <a:p>
-              <a:pPr marL="0" marR="0" indent="0" algn="l" defTabSz="914400" rtl="0" eaLnBrk="1" fontAlgn="base" latinLnBrk="0" hangingPunct="1">
-                <a:lnSpc>
-                  <a:spcPct val="100000"/>
-                </a:lnSpc>
-                <a:spcBef>
-                  <a:spcPct val="0"/>
-                </a:spcBef>
-                <a:spcAft>
-                  <a:spcPct val="0"/>
-                </a:spcAft>
-                <a:buClrTx/>
-                <a:buSzTx/>
-                <a:buFontTx/>
-                <a:buNone/>
-                <a:tabLst/>
-              </a:pPr>
-              <a:endParaRPr kumimoji="0" lang="en-US" sz="1800" b="0" i="0" u="none" strike="noStrike" cap="none" normalizeH="0" baseline="0">
-                <a:ln>
-                  <a:noFill/>
-                </a:ln>
-                <a:solidFill>
-                  <a:schemeClr val="tx1"/>
-                </a:solidFill>
-                <a:effectLst/>
-                <a:latin typeface="Arial" charset="0"/>
-                <a:cs typeface="Arial" charset="0"/>
-              </a:endParaRPr>
-            </a:p>
-          </p:txBody>
-        </p:sp>
-        <p:sp>
-          <p:nvSpPr>
-            <p:cNvPr id="42" name="TextBox 41"/>
-            <p:cNvSpPr txBox="1"/>
-            <p:nvPr/>
-          </p:nvSpPr>
-          <p:spPr>
-            <a:xfrm>
-              <a:off x="2827020" y="6008616"/>
-              <a:ext cx="1249680" cy="338554"/>
-            </a:xfrm>
-            <a:prstGeom prst="rect">
-              <a:avLst/>
-            </a:prstGeom>
-            <a:noFill/>
-          </p:spPr>
-          <p:txBody>
-            <a:bodyPr wrap="square" rtlCol="0">
-              <a:spAutoFit/>
-            </a:bodyPr>
-            <a:lstStyle/>
-            <a:p>
-              <a:r>
-                <a:rPr lang="en-US" sz="1600"/>
-                <a:t>Important!</a:t>
-              </a:r>
-            </a:p>
-          </p:txBody>
-        </p:sp>
-      </p:grpSp>
-      <p:sp>
-        <p:nvSpPr>
-          <p:cNvPr id="43" name="TextBox 42"/>
-          <p:cNvSpPr txBox="1"/>
-          <p:nvPr/>
-        </p:nvSpPr>
-        <p:spPr>
-          <a:xfrm>
-            <a:off x="492131" y="3697288"/>
-            <a:ext cx="7073894" cy="892552"/>
-          </a:xfrm>
-          <a:prstGeom prst="rect">
-            <a:avLst/>
-          </a:prstGeom>
-          <a:ln>
-            <a:noFill/>
-          </a:ln>
-        </p:spPr>
-        <p:style>
-          <a:lnRef idx="2">
-            <a:schemeClr val="accent6"/>
-          </a:lnRef>
-          <a:fillRef idx="1">
-            <a:schemeClr val="lt1"/>
-          </a:fillRef>
-          <a:effectRef idx="0">
-            <a:schemeClr val="accent6"/>
-          </a:effectRef>
-          <a:fontRef idx="minor">
-            <a:schemeClr val="dk1"/>
-          </a:fontRef>
-        </p:style>
-        <p:txBody>
-          <a:bodyPr wrap="square">
-            <a:spAutoFit/>
-          </a:bodyPr>
-          <a:lstStyle/>
-          <a:p>
-            <a:pPr>
-              <a:tabLst>
-                <a:tab pos="1889125" algn="l"/>
-              </a:tabLst>
-              <a:defRPr/>
-            </a:pPr>
-            <a:r>
-              <a:rPr lang="en-US" sz="1600" b="1">
-                <a:solidFill>
-                  <a:srgbClr val="800000"/>
-                </a:solidFill>
-                <a:latin typeface="Courier New" pitchFamily="49" charset="0"/>
-                <a:cs typeface="Courier New" pitchFamily="49" charset="0"/>
-              </a:rPr>
-              <a:t>// *p accesses the value of pointed/referred variable </a:t>
-            </a:r>
-          </a:p>
-          <a:p>
-            <a:pPr>
-              <a:tabLst>
-                <a:tab pos="1939925" algn="l"/>
-              </a:tabLst>
-              <a:defRPr/>
-            </a:pPr>
-            <a:r>
-              <a:rPr lang="en-US" sz="2000" b="1">
-                <a:solidFill>
-                  <a:srgbClr val="000000"/>
-                </a:solidFill>
-                <a:latin typeface="Courier New" pitchFamily="49" charset="0"/>
-                <a:cs typeface="Courier New" pitchFamily="49" charset="0"/>
-              </a:rPr>
-              <a:t>*p = *p + </a:t>
-            </a:r>
-            <a:r>
-              <a:rPr lang="en-US" sz="2000" b="1">
-                <a:solidFill>
-                  <a:srgbClr val="006600"/>
-                </a:solidFill>
-                <a:latin typeface="Courier New" pitchFamily="49" charset="0"/>
-                <a:cs typeface="Courier New" pitchFamily="49" charset="0"/>
-              </a:rPr>
-              <a:t>2</a:t>
-            </a:r>
-            <a:r>
-              <a:rPr lang="en-US" sz="2000" b="1">
-                <a:solidFill>
-                  <a:srgbClr val="000000"/>
-                </a:solidFill>
-                <a:latin typeface="Courier New" pitchFamily="49" charset="0"/>
-                <a:cs typeface="Courier New" pitchFamily="49" charset="0"/>
-              </a:rPr>
-              <a:t>; </a:t>
-            </a:r>
-            <a:r>
-              <a:rPr lang="en-US" sz="1600" b="1">
-                <a:solidFill>
-                  <a:srgbClr val="800000"/>
-                </a:solidFill>
-                <a:latin typeface="Courier New" pitchFamily="49" charset="0"/>
-                <a:cs typeface="Courier New" pitchFamily="49" charset="0"/>
-              </a:rPr>
-              <a:t>// increment *p (which is i) by 2</a:t>
-            </a:r>
-            <a:endParaRPr lang="en-US" sz="1400" b="1">
-              <a:solidFill>
-                <a:srgbClr val="800000"/>
-              </a:solidFill>
-              <a:latin typeface="Courier New" pitchFamily="49" charset="0"/>
-              <a:cs typeface="Courier New" pitchFamily="49" charset="0"/>
-            </a:endParaRPr>
-          </a:p>
-          <a:p>
-            <a:pPr>
-              <a:tabLst>
-                <a:tab pos="1939925" algn="l"/>
-              </a:tabLst>
-              <a:defRPr/>
-            </a:pPr>
-            <a:r>
-              <a:rPr lang="en-US" sz="1600" b="1">
-                <a:solidFill>
-                  <a:srgbClr val="800000"/>
-                </a:solidFill>
-                <a:latin typeface="Courier New" pitchFamily="49" charset="0"/>
-                <a:cs typeface="Courier New" pitchFamily="49" charset="0"/>
-              </a:rPr>
-              <a:t>	// same effect as: </a:t>
-            </a:r>
-            <a:r>
-              <a:rPr lang="en-US" sz="1600" b="1">
-                <a:solidFill>
-                  <a:schemeClr val="tx1"/>
-                </a:solidFill>
-                <a:latin typeface="Courier New" pitchFamily="49" charset="0"/>
-                <a:cs typeface="Courier New" pitchFamily="49" charset="0"/>
-              </a:rPr>
-              <a:t>i = i + </a:t>
-            </a:r>
-            <a:r>
-              <a:rPr lang="en-US" sz="1600" b="1">
-                <a:solidFill>
-                  <a:srgbClr val="006600"/>
-                </a:solidFill>
-                <a:latin typeface="Courier New" pitchFamily="49" charset="0"/>
-                <a:cs typeface="Courier New" pitchFamily="49" charset="0"/>
-              </a:rPr>
-              <a:t>2</a:t>
-            </a:r>
-            <a:r>
-              <a:rPr lang="en-US" sz="1600" b="1">
-                <a:solidFill>
-                  <a:schemeClr val="tx1"/>
-                </a:solidFill>
-                <a:latin typeface="Courier New" pitchFamily="49" charset="0"/>
-                <a:cs typeface="Courier New" pitchFamily="49" charset="0"/>
-              </a:rPr>
-              <a:t>;</a:t>
-            </a:r>
-          </a:p>
-        </p:txBody>
-      </p:sp>
-      <p:grpSp>
-        <p:nvGrpSpPr>
-          <p:cNvPr id="45" name="Group 23"/>
-          <p:cNvGrpSpPr>
-            <a:grpSpLocks/>
-          </p:cNvGrpSpPr>
-          <p:nvPr/>
-        </p:nvGrpSpPr>
-        <p:grpSpPr bwMode="auto">
-          <a:xfrm>
-            <a:off x="6769894" y="1119316"/>
-            <a:ext cx="633412" cy="547688"/>
-            <a:chOff x="6903720" y="1785098"/>
-            <a:chExt cx="633680" cy="546622"/>
-          </a:xfrm>
-        </p:grpSpPr>
-        <p:cxnSp>
-          <p:nvCxnSpPr>
-            <p:cNvPr id="46" name="Straight Connector 21"/>
-            <p:cNvCxnSpPr>
-              <a:cxnSpLocks noChangeShapeType="1"/>
-            </p:cNvCxnSpPr>
-            <p:nvPr/>
-          </p:nvCxnSpPr>
-          <p:spPr bwMode="auto">
-            <a:xfrm rot="10800000" flipV="1">
-              <a:off x="6903720" y="2137410"/>
-              <a:ext cx="297180" cy="194310"/>
-            </a:xfrm>
-            <a:prstGeom prst="line">
-              <a:avLst/>
-            </a:prstGeom>
-            <a:noFill/>
-            <a:ln w="19050" cap="sq" algn="ctr">
-              <a:solidFill>
-                <a:srgbClr val="FF0000"/>
-              </a:solidFill>
-              <a:round/>
-              <a:headEnd type="none" w="sm" len="sm"/>
-              <a:tailEnd type="none" w="sm" len="sm"/>
-            </a:ln>
-          </p:spPr>
-        </p:cxnSp>
-        <p:sp>
-          <p:nvSpPr>
-            <p:cNvPr id="47" name="TextBox 12"/>
-            <p:cNvSpPr txBox="1">
-              <a:spLocks noChangeArrowheads="1"/>
-            </p:cNvSpPr>
-            <p:nvPr/>
-          </p:nvSpPr>
-          <p:spPr bwMode="auto">
-            <a:xfrm>
-              <a:off x="7006648" y="1785098"/>
-              <a:ext cx="530752" cy="338025"/>
-            </a:xfrm>
-            <a:prstGeom prst="rect">
-              <a:avLst/>
-            </a:prstGeom>
-            <a:noFill/>
-            <a:ln w="9525">
-              <a:noFill/>
-              <a:miter lim="800000"/>
-              <a:headEnd/>
-              <a:tailEnd/>
-            </a:ln>
-          </p:spPr>
-          <p:txBody>
-            <a:bodyPr>
-              <a:spAutoFit/>
-            </a:bodyPr>
-            <a:lstStyle/>
-            <a:p>
-              <a:pPr algn="ctr"/>
-              <a:r>
-                <a:rPr lang="en-US" sz="1600">
-                  <a:latin typeface="Calibri" pitchFamily="34" charset="0"/>
-                </a:rPr>
-                <a:t>12</a:t>
-              </a:r>
-              <a:endParaRPr lang="en-SG" sz="1600">
-                <a:latin typeface="Calibri" pitchFamily="34" charset="0"/>
-              </a:endParaRPr>
-            </a:p>
-          </p:txBody>
-        </p:sp>
-      </p:grpSp>
-      <p:sp>
-        <p:nvSpPr>
-          <p:cNvPr id="48" name="TextBox 47"/>
-          <p:cNvSpPr txBox="1"/>
-          <p:nvPr/>
-        </p:nvSpPr>
-        <p:spPr>
-          <a:xfrm>
-            <a:off x="504824" y="4535488"/>
-            <a:ext cx="6864188" cy="400110"/>
-          </a:xfrm>
-          <a:prstGeom prst="rect">
-            <a:avLst/>
-          </a:prstGeom>
-          <a:ln>
-            <a:noFill/>
-          </a:ln>
-        </p:spPr>
-        <p:style>
-          <a:lnRef idx="2">
-            <a:schemeClr val="accent6"/>
-          </a:lnRef>
-          <a:fillRef idx="1">
-            <a:schemeClr val="lt1"/>
-          </a:fillRef>
-          <a:effectRef idx="0">
-            <a:schemeClr val="accent6"/>
-          </a:effectRef>
-          <a:fontRef idx="minor">
-            <a:schemeClr val="dk1"/>
-          </a:fontRef>
-        </p:style>
-        <p:txBody>
-          <a:bodyPr wrap="square">
-            <a:spAutoFit/>
-          </a:bodyPr>
-          <a:lstStyle/>
-          <a:p>
-            <a:pPr>
-              <a:defRPr/>
-            </a:pPr>
-            <a:r>
-              <a:rPr lang="en-US" sz="2000" b="1">
-                <a:solidFill>
-                  <a:srgbClr val="000000"/>
-                </a:solidFill>
-                <a:latin typeface="Courier New" pitchFamily="49" charset="0"/>
-                <a:cs typeface="Courier New" pitchFamily="49" charset="0"/>
-              </a:rPr>
-              <a:t>p = &amp;j; </a:t>
-            </a:r>
-            <a:r>
-              <a:rPr lang="en-US" sz="1600" b="1">
-                <a:solidFill>
-                  <a:srgbClr val="800000"/>
-                </a:solidFill>
-                <a:latin typeface="Courier New" pitchFamily="49" charset="0"/>
-                <a:cs typeface="Courier New" pitchFamily="49" charset="0"/>
-              </a:rPr>
-              <a:t>// p now stores the address of variable j</a:t>
-            </a:r>
-          </a:p>
-        </p:txBody>
-      </p:sp>
       <p:cxnSp>
         <p:nvCxnSpPr>
           <p:cNvPr id="49" name="Straight Arrow Connector 48"/>
           <p:cNvCxnSpPr>
             <a:cxnSpLocks noChangeShapeType="1"/>
+            <a:endCxn id="32" idx="2"/>
           </p:cNvCxnSpPr>
           <p:nvPr/>
         </p:nvCxnSpPr>
         <p:spPr bwMode="auto">
           <a:xfrm flipV="1">
-            <a:off x="7639881" y="1844024"/>
-            <a:ext cx="442667" cy="518388"/>
+            <a:off x="6913241" y="1765100"/>
+            <a:ext cx="1260362" cy="387117"/>
           </a:xfrm>
           <a:prstGeom prst="straightConnector1">
             <a:avLst/>
@@ -12341,266 +12656,6 @@
           </a:ln>
         </p:spPr>
       </p:cxnSp>
-      <p:sp>
-        <p:nvSpPr>
-          <p:cNvPr id="52" name="TextBox 51"/>
-          <p:cNvSpPr txBox="1">
-            <a:spLocks noChangeArrowheads="1"/>
-          </p:cNvSpPr>
-          <p:nvPr/>
-        </p:nvSpPr>
-        <p:spPr bwMode="auto">
-          <a:xfrm>
-            <a:off x="3708400" y="4960766"/>
-            <a:ext cx="2851142" cy="369332"/>
-          </a:xfrm>
-          <a:prstGeom prst="rect">
-            <a:avLst/>
-          </a:prstGeom>
-          <a:noFill/>
-          <a:ln w="9525">
-            <a:noFill/>
-            <a:miter lim="800000"/>
-            <a:headEnd/>
-            <a:tailEnd/>
-          </a:ln>
-        </p:spPr>
-        <p:txBody>
-          <a:bodyPr wrap="square">
-            <a:spAutoFit/>
-          </a:bodyPr>
-          <a:lstStyle/>
-          <a:p>
-            <a:r>
-              <a:rPr lang="en-US"/>
-              <a:t>Now </a:t>
-            </a:r>
-            <a:r>
-              <a:rPr lang="en-US" b="1">
-                <a:latin typeface="Courier New" pitchFamily="49" charset="0"/>
-                <a:cs typeface="Courier New" pitchFamily="49" charset="0"/>
-              </a:rPr>
-              <a:t>*p</a:t>
-            </a:r>
-            <a:r>
-              <a:rPr lang="en-US"/>
-              <a:t> is equivalent to </a:t>
-            </a:r>
-            <a:r>
-              <a:rPr lang="en-US" b="1">
-                <a:latin typeface="Courier New" pitchFamily="49" charset="0"/>
-                <a:cs typeface="Courier New" pitchFamily="49" charset="0"/>
-              </a:rPr>
-              <a:t>j</a:t>
-            </a:r>
-          </a:p>
-        </p:txBody>
-      </p:sp>
-      <p:grpSp>
-        <p:nvGrpSpPr>
-          <p:cNvPr id="53" name="Group 52"/>
-          <p:cNvGrpSpPr/>
-          <p:nvPr/>
-        </p:nvGrpSpPr>
-        <p:grpSpPr>
-          <a:xfrm>
-            <a:off x="2267519" y="4852556"/>
-            <a:ext cx="1348740" cy="519335"/>
-            <a:chOff x="2727960" y="5916003"/>
-            <a:chExt cx="1348740" cy="519335"/>
-          </a:xfrm>
-        </p:grpSpPr>
-        <p:sp>
-          <p:nvSpPr>
-            <p:cNvPr id="54" name="Right Arrow 53"/>
-            <p:cNvSpPr/>
-            <p:nvPr/>
-          </p:nvSpPr>
-          <p:spPr bwMode="auto">
-            <a:xfrm>
-              <a:off x="2727960" y="5916003"/>
-              <a:ext cx="1348740" cy="519335"/>
-            </a:xfrm>
-            <a:prstGeom prst="rightArrow">
-              <a:avLst/>
-            </a:prstGeom>
-            <a:solidFill>
-              <a:srgbClr val="FFC000"/>
-            </a:solidFill>
-            <a:ln w="12700" cap="sq" cmpd="sng" algn="ctr">
-              <a:solidFill>
-                <a:schemeClr val="tx1"/>
-              </a:solidFill>
-              <a:prstDash val="solid"/>
-              <a:round/>
-              <a:headEnd type="none" w="sm" len="sm"/>
-              <a:tailEnd type="none" w="sm" len="sm"/>
-            </a:ln>
-            <a:effectLst/>
-          </p:spPr>
-          <p:txBody>
-            <a:bodyPr vert="horz" wrap="square" lIns="91440" tIns="45720" rIns="91440" bIns="45720" numCol="1" rtlCol="0" anchor="t" anchorCtr="0" compatLnSpc="1">
-              <a:prstTxWarp prst="textNoShape">
-                <a:avLst/>
-              </a:prstTxWarp>
-            </a:bodyPr>
-            <a:lstStyle/>
-            <a:p>
-              <a:pPr marL="0" marR="0" indent="0" algn="l" defTabSz="914400" rtl="0" eaLnBrk="1" fontAlgn="base" latinLnBrk="0" hangingPunct="1">
-                <a:lnSpc>
-                  <a:spcPct val="100000"/>
-                </a:lnSpc>
-                <a:spcBef>
-                  <a:spcPct val="0"/>
-                </a:spcBef>
-                <a:spcAft>
-                  <a:spcPct val="0"/>
-                </a:spcAft>
-                <a:buClrTx/>
-                <a:buSzTx/>
-                <a:buFontTx/>
-                <a:buNone/>
-                <a:tabLst/>
-              </a:pPr>
-              <a:endParaRPr kumimoji="0" lang="en-US" sz="1800" b="0" i="0" u="none" strike="noStrike" cap="none" normalizeH="0" baseline="0">
-                <a:ln>
-                  <a:noFill/>
-                </a:ln>
-                <a:solidFill>
-                  <a:schemeClr val="tx1"/>
-                </a:solidFill>
-                <a:effectLst/>
-                <a:latin typeface="Arial" charset="0"/>
-                <a:cs typeface="Arial" charset="0"/>
-              </a:endParaRPr>
-            </a:p>
-          </p:txBody>
-        </p:sp>
-        <p:sp>
-          <p:nvSpPr>
-            <p:cNvPr id="55" name="TextBox 54"/>
-            <p:cNvSpPr txBox="1"/>
-            <p:nvPr/>
-          </p:nvSpPr>
-          <p:spPr>
-            <a:xfrm>
-              <a:off x="2827020" y="6008616"/>
-              <a:ext cx="1249680" cy="338554"/>
-            </a:xfrm>
-            <a:prstGeom prst="rect">
-              <a:avLst/>
-            </a:prstGeom>
-            <a:noFill/>
-          </p:spPr>
-          <p:txBody>
-            <a:bodyPr wrap="square" rtlCol="0">
-              <a:spAutoFit/>
-            </a:bodyPr>
-            <a:lstStyle/>
-            <a:p>
-              <a:r>
-                <a:rPr lang="en-US" sz="1600"/>
-                <a:t>Important!</a:t>
-              </a:r>
-            </a:p>
-          </p:txBody>
-        </p:sp>
-      </p:grpSp>
-      <p:sp>
-        <p:nvSpPr>
-          <p:cNvPr id="56" name="TextBox 55"/>
-          <p:cNvSpPr txBox="1"/>
-          <p:nvPr/>
-        </p:nvSpPr>
-        <p:spPr>
-          <a:xfrm>
-            <a:off x="504824" y="5368145"/>
-            <a:ext cx="6710363" cy="646331"/>
-          </a:xfrm>
-          <a:prstGeom prst="rect">
-            <a:avLst/>
-          </a:prstGeom>
-          <a:ln>
-            <a:noFill/>
-          </a:ln>
-        </p:spPr>
-        <p:style>
-          <a:lnRef idx="2">
-            <a:schemeClr val="accent6"/>
-          </a:lnRef>
-          <a:fillRef idx="1">
-            <a:schemeClr val="lt1"/>
-          </a:fillRef>
-          <a:effectRef idx="0">
-            <a:schemeClr val="accent6"/>
-          </a:effectRef>
-          <a:fontRef idx="minor">
-            <a:schemeClr val="dk1"/>
-          </a:fontRef>
-        </p:style>
-        <p:txBody>
-          <a:bodyPr>
-            <a:spAutoFit/>
-          </a:bodyPr>
-          <a:lstStyle/>
-          <a:p>
-            <a:pPr>
-              <a:tabLst>
-                <a:tab pos="1260475" algn="l"/>
-              </a:tabLst>
-              <a:defRPr/>
-            </a:pPr>
-            <a:r>
-              <a:rPr lang="en-US" sz="2000" b="1">
-                <a:solidFill>
-                  <a:srgbClr val="000000"/>
-                </a:solidFill>
-                <a:latin typeface="Courier New" pitchFamily="49" charset="0"/>
-                <a:cs typeface="Courier New" pitchFamily="49" charset="0"/>
-              </a:rPr>
-              <a:t>*p = i;	</a:t>
-            </a:r>
-            <a:r>
-              <a:rPr lang="en-US" sz="1600" b="1">
-                <a:solidFill>
-                  <a:srgbClr val="800000"/>
-                </a:solidFill>
-                <a:latin typeface="Courier New" pitchFamily="49" charset="0"/>
-                <a:cs typeface="Courier New" pitchFamily="49" charset="0"/>
-              </a:rPr>
-              <a:t>// value of *p (which is j now) becomes 12</a:t>
-            </a:r>
-          </a:p>
-          <a:p>
-            <a:pPr>
-              <a:tabLst>
-                <a:tab pos="1260475" algn="l"/>
-              </a:tabLst>
-              <a:defRPr/>
-            </a:pPr>
-            <a:r>
-              <a:rPr lang="en-US" sz="1600" b="1">
-                <a:solidFill>
-                  <a:srgbClr val="800000"/>
-                </a:solidFill>
-                <a:latin typeface="Courier New" pitchFamily="49" charset="0"/>
-                <a:cs typeface="Courier New" pitchFamily="49" charset="0"/>
-              </a:rPr>
-              <a:t>	// same effect as: </a:t>
-            </a:r>
-            <a:r>
-              <a:rPr lang="en-US" sz="1600" b="1">
-                <a:solidFill>
-                  <a:schemeClr val="tx1"/>
-                </a:solidFill>
-                <a:latin typeface="Courier New" pitchFamily="49" charset="0"/>
-                <a:cs typeface="Courier New" pitchFamily="49" charset="0"/>
-              </a:rPr>
-              <a:t>j = i;</a:t>
-            </a:r>
-          </a:p>
-        </p:txBody>
-      </p:sp>
       <p:grpSp>
         <p:nvGrpSpPr>
           <p:cNvPr id="57" name="Group 33"/>
@@ -12611,7 +12666,7 @@
         </p:nvGrpSpPr>
         <p:grpSpPr bwMode="auto">
           <a:xfrm>
-            <a:off x="8011589" y="1120904"/>
+            <a:off x="8073914" y="1115189"/>
             <a:ext cx="633412" cy="546100"/>
             <a:chOff x="6903720" y="1785098"/>
             <a:chExt cx="633680" cy="546622"/>
@@ -12676,12 +12731,12 @@
             <a:p>
               <a:pPr algn="ctr"/>
               <a:r>
-                <a:rPr lang="en-US" sz="1600">
+                <a:rPr lang="en-US" sz="1600" dirty="0">
                   <a:latin typeface="Calibri" pitchFamily="34" charset="0"/>
                 </a:rPr>
-                <a:t>12</a:t>
+                <a:t>8</a:t>
               </a:r>
-              <a:endParaRPr lang="en-SG" sz="1600">
+              <a:endParaRPr lang="en-SG" sz="1600" dirty="0">
                 <a:latin typeface="Calibri" pitchFamily="34" charset="0"/>
               </a:endParaRPr>
             </a:p>
@@ -12789,6 +12844,1532 @@
           </a:p>
         </p:txBody>
       </p:sp>
+      <p:grpSp>
+        <p:nvGrpSpPr>
+          <p:cNvPr id="21" name="Group 15">
+            <a:extLst>
+              <a:ext uri="{FF2B5EF4-FFF2-40B4-BE49-F238E27FC236}">
+                <a16:creationId xmlns:a16="http://schemas.microsoft.com/office/drawing/2014/main" id="{E4168B44-75E3-3D81-5F08-64FD48350161}"/>
+              </a:ext>
+            </a:extLst>
+          </p:cNvPr>
+          <p:cNvGrpSpPr>
+            <a:grpSpLocks/>
+          </p:cNvGrpSpPr>
+          <p:nvPr/>
+        </p:nvGrpSpPr>
+        <p:grpSpPr bwMode="auto">
+          <a:xfrm>
+            <a:off x="7442229" y="3742509"/>
+            <a:ext cx="1019823" cy="511556"/>
+            <a:chOff x="5806653" y="2023240"/>
+            <a:chExt cx="1019205" cy="511975"/>
+          </a:xfrm>
+        </p:grpSpPr>
+        <p:sp>
+          <p:nvSpPr>
+            <p:cNvPr id="22" name="TextBox 16">
+              <a:extLst>
+                <a:ext uri="{FF2B5EF4-FFF2-40B4-BE49-F238E27FC236}">
+                  <a16:creationId xmlns:a16="http://schemas.microsoft.com/office/drawing/2014/main" id="{FD499887-5E59-C01C-B228-5E0E91035C02}"/>
+                </a:ext>
+              </a:extLst>
+            </p:cNvPr>
+            <p:cNvSpPr txBox="1">
+              <a:spLocks noChangeArrowheads="1"/>
+            </p:cNvSpPr>
+            <p:nvPr/>
+          </p:nvSpPr>
+          <p:spPr bwMode="auto">
+            <a:xfrm>
+              <a:off x="5806653" y="2023240"/>
+              <a:ext cx="557359" cy="338831"/>
+            </a:xfrm>
+            <a:prstGeom prst="rect">
+              <a:avLst/>
+            </a:prstGeom>
+            <a:noFill/>
+            <a:ln w="9525">
+              <a:noFill/>
+              <a:miter lim="800000"/>
+              <a:headEnd/>
+              <a:tailEnd/>
+            </a:ln>
+          </p:spPr>
+          <p:txBody>
+            <a:bodyPr wrap="square">
+              <a:spAutoFit/>
+            </a:bodyPr>
+            <a:lstStyle/>
+            <a:p>
+              <a:r>
+                <a:rPr lang="en-US" sz="1600" dirty="0">
+                  <a:latin typeface="Calibri" pitchFamily="34" charset="0"/>
+                </a:rPr>
+                <a:t>ptr2</a:t>
+              </a:r>
+              <a:endParaRPr lang="en-SG" sz="1600" dirty="0">
+                <a:latin typeface="Calibri" pitchFamily="34" charset="0"/>
+              </a:endParaRPr>
+            </a:p>
+          </p:txBody>
+        </p:sp>
+        <p:sp>
+          <p:nvSpPr>
+            <p:cNvPr id="25" name="TextBox 17">
+              <a:extLst>
+                <a:ext uri="{FF2B5EF4-FFF2-40B4-BE49-F238E27FC236}">
+                  <a16:creationId xmlns:a16="http://schemas.microsoft.com/office/drawing/2014/main" id="{501F7A7A-47AD-131E-81E8-60A2360681C8}"/>
+                </a:ext>
+              </a:extLst>
+            </p:cNvPr>
+            <p:cNvSpPr txBox="1">
+              <a:spLocks noChangeArrowheads="1"/>
+            </p:cNvSpPr>
+            <p:nvPr/>
+          </p:nvSpPr>
+          <p:spPr bwMode="auto">
+            <a:xfrm>
+              <a:off x="6295954" y="2196801"/>
+              <a:ext cx="529904" cy="338414"/>
+            </a:xfrm>
+            <a:prstGeom prst="rect">
+              <a:avLst/>
+            </a:prstGeom>
+            <a:solidFill>
+              <a:srgbClr val="9F9FFF"/>
+            </a:solidFill>
+            <a:ln w="9525">
+              <a:solidFill>
+                <a:schemeClr val="tx1"/>
+              </a:solidFill>
+              <a:miter lim="800000"/>
+              <a:headEnd/>
+              <a:tailEnd/>
+            </a:ln>
+          </p:spPr>
+          <p:txBody>
+            <a:bodyPr>
+              <a:spAutoFit/>
+            </a:bodyPr>
+            <a:lstStyle/>
+            <a:p>
+              <a:pPr algn="ctr">
+                <a:defRPr/>
+              </a:pPr>
+              <a:endParaRPr lang="en-SG" sz="1600">
+                <a:latin typeface="Calibri" pitchFamily="34" charset="0"/>
+                <a:cs typeface="Arial" pitchFamily="34" charset="0"/>
+              </a:endParaRPr>
+            </a:p>
+          </p:txBody>
+        </p:sp>
+      </p:grpSp>
+      <p:grpSp>
+        <p:nvGrpSpPr>
+          <p:cNvPr id="38" name="Group 37">
+            <a:extLst>
+              <a:ext uri="{FF2B5EF4-FFF2-40B4-BE49-F238E27FC236}">
+                <a16:creationId xmlns:a16="http://schemas.microsoft.com/office/drawing/2014/main" id="{ED3CE4A6-F1A8-5C44-9BDD-89B0DB98B332}"/>
+              </a:ext>
+            </a:extLst>
+          </p:cNvPr>
+          <p:cNvGrpSpPr/>
+          <p:nvPr/>
+        </p:nvGrpSpPr>
+        <p:grpSpPr>
+          <a:xfrm>
+            <a:off x="6402499" y="3001528"/>
+            <a:ext cx="2047875" cy="511556"/>
+            <a:chOff x="6391275" y="1253544"/>
+            <a:chExt cx="2047875" cy="511556"/>
+          </a:xfrm>
+        </p:grpSpPr>
+        <p:grpSp>
+          <p:nvGrpSpPr>
+            <p:cNvPr id="39" name="Group 13">
+              <a:extLst>
+                <a:ext uri="{FF2B5EF4-FFF2-40B4-BE49-F238E27FC236}">
+                  <a16:creationId xmlns:a16="http://schemas.microsoft.com/office/drawing/2014/main" id="{B9637A76-330F-333B-0A99-7406BA9C7255}"/>
+                </a:ext>
+              </a:extLst>
+            </p:cNvPr>
+            <p:cNvGrpSpPr>
+              <a:grpSpLocks/>
+            </p:cNvGrpSpPr>
+            <p:nvPr/>
+          </p:nvGrpSpPr>
+          <p:grpSpPr bwMode="auto">
+            <a:xfrm>
+              <a:off x="6391275" y="1253546"/>
+              <a:ext cx="799269" cy="511554"/>
+              <a:chOff x="4834756" y="1996967"/>
+              <a:chExt cx="798785" cy="511973"/>
+            </a:xfrm>
+          </p:grpSpPr>
+          <p:sp>
+            <p:nvSpPr>
+              <p:cNvPr id="60" name="TextBox 9">
+                <a:extLst>
+                  <a:ext uri="{FF2B5EF4-FFF2-40B4-BE49-F238E27FC236}">
+                    <a16:creationId xmlns:a16="http://schemas.microsoft.com/office/drawing/2014/main" id="{B965FDA3-31A1-A7C5-5932-E4BC29FDD96F}"/>
+                  </a:ext>
+                </a:extLst>
+              </p:cNvPr>
+              <p:cNvSpPr txBox="1">
+                <a:spLocks noChangeArrowheads="1"/>
+              </p:cNvSpPr>
+              <p:nvPr/>
+            </p:nvSpPr>
+            <p:spPr bwMode="auto">
+              <a:xfrm>
+                <a:off x="4834756" y="1996967"/>
+                <a:ext cx="336331" cy="338554"/>
+              </a:xfrm>
+              <a:prstGeom prst="rect">
+                <a:avLst/>
+              </a:prstGeom>
+              <a:noFill/>
+              <a:ln w="9525">
+                <a:noFill/>
+                <a:miter lim="800000"/>
+                <a:headEnd/>
+                <a:tailEnd/>
+              </a:ln>
+            </p:spPr>
+            <p:txBody>
+              <a:bodyPr>
+                <a:spAutoFit/>
+              </a:bodyPr>
+              <a:lstStyle/>
+              <a:p>
+                <a:r>
+                  <a:rPr lang="en-US" sz="1600" dirty="0">
+                    <a:latin typeface="Calibri" pitchFamily="34" charset="0"/>
+                  </a:rPr>
+                  <a:t>a</a:t>
+                </a:r>
+                <a:endParaRPr lang="en-SG" sz="1600" dirty="0">
+                  <a:latin typeface="Calibri" pitchFamily="34" charset="0"/>
+                </a:endParaRPr>
+              </a:p>
+            </p:txBody>
+          </p:sp>
+          <p:sp>
+            <p:nvSpPr>
+              <p:cNvPr id="61" name="TextBox 10">
+                <a:extLst>
+                  <a:ext uri="{FF2B5EF4-FFF2-40B4-BE49-F238E27FC236}">
+                    <a16:creationId xmlns:a16="http://schemas.microsoft.com/office/drawing/2014/main" id="{0FEAF86B-5562-3BC6-185C-A6CDCEA5C6D8}"/>
+                  </a:ext>
+                </a:extLst>
+              </p:cNvPr>
+              <p:cNvSpPr txBox="1">
+                <a:spLocks noChangeArrowheads="1"/>
+              </p:cNvSpPr>
+              <p:nvPr/>
+            </p:nvSpPr>
+            <p:spPr bwMode="auto">
+              <a:xfrm>
+                <a:off x="5102769" y="2170386"/>
+                <a:ext cx="530772" cy="338554"/>
+              </a:xfrm>
+              <a:prstGeom prst="rect">
+                <a:avLst/>
+              </a:prstGeom>
+              <a:solidFill>
+                <a:srgbClr val="FFCC66"/>
+              </a:solidFill>
+              <a:ln w="9525">
+                <a:solidFill>
+                  <a:schemeClr val="tx1"/>
+                </a:solidFill>
+                <a:miter lim="800000"/>
+                <a:headEnd/>
+                <a:tailEnd/>
+              </a:ln>
+            </p:spPr>
+            <p:txBody>
+              <a:bodyPr>
+                <a:spAutoFit/>
+              </a:bodyPr>
+              <a:lstStyle/>
+              <a:p>
+                <a:pPr algn="ctr"/>
+                <a:r>
+                  <a:rPr lang="en-US" sz="1600" dirty="0">
+                    <a:latin typeface="Calibri" pitchFamily="34" charset="0"/>
+                  </a:rPr>
+                  <a:t>2</a:t>
+                </a:r>
+                <a:endParaRPr lang="en-SG" sz="1600" dirty="0">
+                  <a:latin typeface="Calibri" pitchFamily="34" charset="0"/>
+                </a:endParaRPr>
+              </a:p>
+            </p:txBody>
+          </p:sp>
+        </p:grpSp>
+        <p:grpSp>
+          <p:nvGrpSpPr>
+            <p:cNvPr id="44" name="Group 14">
+              <a:extLst>
+                <a:ext uri="{FF2B5EF4-FFF2-40B4-BE49-F238E27FC236}">
+                  <a16:creationId xmlns:a16="http://schemas.microsoft.com/office/drawing/2014/main" id="{AD9B65F9-8425-43E6-30E1-079E2B13246E}"/>
+                </a:ext>
+              </a:extLst>
+            </p:cNvPr>
+            <p:cNvGrpSpPr>
+              <a:grpSpLocks/>
+            </p:cNvGrpSpPr>
+            <p:nvPr/>
+          </p:nvGrpSpPr>
+          <p:grpSpPr bwMode="auto">
+            <a:xfrm>
+              <a:off x="7639879" y="1253544"/>
+              <a:ext cx="799271" cy="511556"/>
+              <a:chOff x="6027681" y="2023240"/>
+              <a:chExt cx="798787" cy="511975"/>
+            </a:xfrm>
+          </p:grpSpPr>
+          <p:sp>
+            <p:nvSpPr>
+              <p:cNvPr id="50" name="TextBox 11">
+                <a:extLst>
+                  <a:ext uri="{FF2B5EF4-FFF2-40B4-BE49-F238E27FC236}">
+                    <a16:creationId xmlns:a16="http://schemas.microsoft.com/office/drawing/2014/main" id="{B476E792-CCEB-AFA9-3FA4-A832E2E11D96}"/>
+                  </a:ext>
+                </a:extLst>
+              </p:cNvPr>
+              <p:cNvSpPr txBox="1">
+                <a:spLocks noChangeArrowheads="1"/>
+              </p:cNvSpPr>
+              <p:nvPr/>
+            </p:nvSpPr>
+            <p:spPr bwMode="auto">
+              <a:xfrm>
+                <a:off x="6027681" y="2023240"/>
+                <a:ext cx="336331" cy="338554"/>
+              </a:xfrm>
+              <a:prstGeom prst="rect">
+                <a:avLst/>
+              </a:prstGeom>
+              <a:noFill/>
+              <a:ln w="9525">
+                <a:noFill/>
+                <a:miter lim="800000"/>
+                <a:headEnd/>
+                <a:tailEnd/>
+              </a:ln>
+            </p:spPr>
+            <p:txBody>
+              <a:bodyPr>
+                <a:spAutoFit/>
+              </a:bodyPr>
+              <a:lstStyle/>
+              <a:p>
+                <a:r>
+                  <a:rPr lang="en-US" sz="1600" dirty="0">
+                    <a:latin typeface="Calibri" pitchFamily="34" charset="0"/>
+                  </a:rPr>
+                  <a:t>b</a:t>
+                </a:r>
+                <a:endParaRPr lang="en-SG" sz="1600" dirty="0">
+                  <a:latin typeface="Calibri" pitchFamily="34" charset="0"/>
+                </a:endParaRPr>
+              </a:p>
+            </p:txBody>
+          </p:sp>
+          <p:sp>
+            <p:nvSpPr>
+              <p:cNvPr id="51" name="TextBox 12">
+                <a:extLst>
+                  <a:ext uri="{FF2B5EF4-FFF2-40B4-BE49-F238E27FC236}">
+                    <a16:creationId xmlns:a16="http://schemas.microsoft.com/office/drawing/2014/main" id="{229C8D69-58B2-25D6-5B86-97F0B667532C}"/>
+                  </a:ext>
+                </a:extLst>
+              </p:cNvPr>
+              <p:cNvSpPr txBox="1">
+                <a:spLocks noChangeArrowheads="1"/>
+              </p:cNvSpPr>
+              <p:nvPr/>
+            </p:nvSpPr>
+            <p:spPr bwMode="auto">
+              <a:xfrm>
+                <a:off x="6295695" y="2196661"/>
+                <a:ext cx="530773" cy="338554"/>
+              </a:xfrm>
+              <a:prstGeom prst="rect">
+                <a:avLst/>
+              </a:prstGeom>
+              <a:solidFill>
+                <a:srgbClr val="FFCC66"/>
+              </a:solidFill>
+              <a:ln w="9525">
+                <a:solidFill>
+                  <a:schemeClr val="tx1"/>
+                </a:solidFill>
+                <a:miter lim="800000"/>
+                <a:headEnd/>
+                <a:tailEnd/>
+              </a:ln>
+            </p:spPr>
+            <p:txBody>
+              <a:bodyPr>
+                <a:spAutoFit/>
+              </a:bodyPr>
+              <a:lstStyle/>
+              <a:p>
+                <a:pPr algn="ctr"/>
+                <a:r>
+                  <a:rPr lang="en-US" sz="1600" dirty="0">
+                    <a:latin typeface="Calibri" pitchFamily="34" charset="0"/>
+                  </a:rPr>
+                  <a:t>8</a:t>
+                </a:r>
+                <a:endParaRPr lang="en-SG" sz="1600" dirty="0">
+                  <a:latin typeface="Calibri" pitchFamily="34" charset="0"/>
+                </a:endParaRPr>
+              </a:p>
+            </p:txBody>
+          </p:sp>
+        </p:grpSp>
+      </p:grpSp>
+      <p:grpSp>
+        <p:nvGrpSpPr>
+          <p:cNvPr id="62" name="Group 15">
+            <a:extLst>
+              <a:ext uri="{FF2B5EF4-FFF2-40B4-BE49-F238E27FC236}">
+                <a16:creationId xmlns:a16="http://schemas.microsoft.com/office/drawing/2014/main" id="{DC355F01-E83A-3CEF-1F13-28C865BC3166}"/>
+              </a:ext>
+            </a:extLst>
+          </p:cNvPr>
+          <p:cNvGrpSpPr>
+            <a:grpSpLocks/>
+          </p:cNvGrpSpPr>
+          <p:nvPr/>
+        </p:nvGrpSpPr>
+        <p:grpSpPr bwMode="auto">
+          <a:xfrm>
+            <a:off x="6195715" y="3742509"/>
+            <a:ext cx="998947" cy="511556"/>
+            <a:chOff x="5827516" y="2023240"/>
+            <a:chExt cx="998342" cy="511975"/>
+          </a:xfrm>
+        </p:grpSpPr>
+        <p:sp>
+          <p:nvSpPr>
+            <p:cNvPr id="63" name="TextBox 16">
+              <a:extLst>
+                <a:ext uri="{FF2B5EF4-FFF2-40B4-BE49-F238E27FC236}">
+                  <a16:creationId xmlns:a16="http://schemas.microsoft.com/office/drawing/2014/main" id="{6C686AD4-9FAD-1830-DF74-7229F7BE8D39}"/>
+                </a:ext>
+              </a:extLst>
+            </p:cNvPr>
+            <p:cNvSpPr txBox="1">
+              <a:spLocks noChangeArrowheads="1"/>
+            </p:cNvSpPr>
+            <p:nvPr/>
+          </p:nvSpPr>
+          <p:spPr bwMode="auto">
+            <a:xfrm>
+              <a:off x="5827516" y="2023240"/>
+              <a:ext cx="536497" cy="338831"/>
+            </a:xfrm>
+            <a:prstGeom prst="rect">
+              <a:avLst/>
+            </a:prstGeom>
+            <a:noFill/>
+            <a:ln w="9525">
+              <a:noFill/>
+              <a:miter lim="800000"/>
+              <a:headEnd/>
+              <a:tailEnd/>
+            </a:ln>
+          </p:spPr>
+          <p:txBody>
+            <a:bodyPr wrap="square">
+              <a:spAutoFit/>
+            </a:bodyPr>
+            <a:lstStyle/>
+            <a:p>
+              <a:r>
+                <a:rPr lang="en-US" sz="1600" dirty="0">
+                  <a:latin typeface="Calibri" pitchFamily="34" charset="0"/>
+                </a:rPr>
+                <a:t>ptr1</a:t>
+              </a:r>
+              <a:endParaRPr lang="en-SG" sz="1600" dirty="0">
+                <a:latin typeface="Calibri" pitchFamily="34" charset="0"/>
+              </a:endParaRPr>
+            </a:p>
+          </p:txBody>
+        </p:sp>
+        <p:sp>
+          <p:nvSpPr>
+            <p:cNvPr id="14336" name="TextBox 17">
+              <a:extLst>
+                <a:ext uri="{FF2B5EF4-FFF2-40B4-BE49-F238E27FC236}">
+                  <a16:creationId xmlns:a16="http://schemas.microsoft.com/office/drawing/2014/main" id="{EDC67F6B-1817-0D2E-12B6-4E59C3E51B70}"/>
+                </a:ext>
+              </a:extLst>
+            </p:cNvPr>
+            <p:cNvSpPr txBox="1">
+              <a:spLocks noChangeArrowheads="1"/>
+            </p:cNvSpPr>
+            <p:nvPr/>
+          </p:nvSpPr>
+          <p:spPr bwMode="auto">
+            <a:xfrm>
+              <a:off x="6295954" y="2196801"/>
+              <a:ext cx="529904" cy="338414"/>
+            </a:xfrm>
+            <a:prstGeom prst="rect">
+              <a:avLst/>
+            </a:prstGeom>
+            <a:solidFill>
+              <a:srgbClr val="9F9FFF"/>
+            </a:solidFill>
+            <a:ln w="9525">
+              <a:solidFill>
+                <a:schemeClr val="tx1"/>
+              </a:solidFill>
+              <a:miter lim="800000"/>
+              <a:headEnd/>
+              <a:tailEnd/>
+            </a:ln>
+          </p:spPr>
+          <p:txBody>
+            <a:bodyPr>
+              <a:spAutoFit/>
+            </a:bodyPr>
+            <a:lstStyle/>
+            <a:p>
+              <a:pPr algn="ctr">
+                <a:defRPr/>
+              </a:pPr>
+              <a:endParaRPr lang="en-SG" sz="1600">
+                <a:latin typeface="Calibri" pitchFamily="34" charset="0"/>
+                <a:cs typeface="Arial" pitchFamily="34" charset="0"/>
+              </a:endParaRPr>
+            </a:p>
+          </p:txBody>
+        </p:sp>
+      </p:grpSp>
+      <p:cxnSp>
+        <p:nvCxnSpPr>
+          <p:cNvPr id="14337" name="Straight Arrow Connector 14336">
+            <a:extLst>
+              <a:ext uri="{FF2B5EF4-FFF2-40B4-BE49-F238E27FC236}">
+                <a16:creationId xmlns:a16="http://schemas.microsoft.com/office/drawing/2014/main" id="{45D6BEF7-469E-3A49-C23F-58F66AA9A6BE}"/>
+              </a:ext>
+            </a:extLst>
+          </p:cNvPr>
+          <p:cNvCxnSpPr>
+            <a:cxnSpLocks noChangeShapeType="1"/>
+            <a:stCxn id="25" idx="0"/>
+            <a:endCxn id="61" idx="2"/>
+          </p:cNvCxnSpPr>
+          <p:nvPr/>
+        </p:nvCxnSpPr>
+        <p:spPr bwMode="auto">
+          <a:xfrm flipH="1" flipV="1">
+            <a:off x="6936221" y="3513084"/>
+            <a:ext cx="1260719" cy="402844"/>
+          </a:xfrm>
+          <a:prstGeom prst="straightConnector1">
+            <a:avLst/>
+          </a:prstGeom>
+          <a:noFill/>
+          <a:ln w="19050" cap="sq" algn="ctr">
+            <a:solidFill>
+              <a:srgbClr val="0000FF"/>
+            </a:solidFill>
+            <a:round/>
+            <a:headEnd/>
+            <a:tailEnd type="triangle" w="med" len="med"/>
+          </a:ln>
+        </p:spPr>
+      </p:cxnSp>
+      <p:cxnSp>
+        <p:nvCxnSpPr>
+          <p:cNvPr id="14339" name="Straight Arrow Connector 14338">
+            <a:extLst>
+              <a:ext uri="{FF2B5EF4-FFF2-40B4-BE49-F238E27FC236}">
+                <a16:creationId xmlns:a16="http://schemas.microsoft.com/office/drawing/2014/main" id="{F42B4CE7-4729-98BF-8BC2-F5DDFA50CB98}"/>
+              </a:ext>
+            </a:extLst>
+          </p:cNvPr>
+          <p:cNvCxnSpPr>
+            <a:cxnSpLocks noChangeShapeType="1"/>
+            <a:endCxn id="61" idx="2"/>
+          </p:cNvCxnSpPr>
+          <p:nvPr/>
+        </p:nvCxnSpPr>
+        <p:spPr bwMode="auto">
+          <a:xfrm flipV="1">
+            <a:off x="6924465" y="3513084"/>
+            <a:ext cx="11756" cy="387117"/>
+          </a:xfrm>
+          <a:prstGeom prst="straightConnector1">
+            <a:avLst/>
+          </a:prstGeom>
+          <a:noFill/>
+          <a:ln w="19050" cap="sq" algn="ctr">
+            <a:solidFill>
+              <a:srgbClr val="0000FF"/>
+            </a:solidFill>
+            <a:round/>
+            <a:headEnd/>
+            <a:tailEnd type="triangle" w="med" len="med"/>
+          </a:ln>
+        </p:spPr>
+      </p:cxnSp>
+      <p:grpSp>
+        <p:nvGrpSpPr>
+          <p:cNvPr id="14340" name="Group 33">
+            <a:extLst>
+              <a:ext uri="{FF2B5EF4-FFF2-40B4-BE49-F238E27FC236}">
+                <a16:creationId xmlns:a16="http://schemas.microsoft.com/office/drawing/2014/main" id="{3D501C43-A815-1BE4-F1E2-049596CF55B6}"/>
+              </a:ext>
+            </a:extLst>
+          </p:cNvPr>
+          <p:cNvGrpSpPr>
+            <a:grpSpLocks/>
+          </p:cNvGrpSpPr>
+          <p:nvPr/>
+        </p:nvGrpSpPr>
+        <p:grpSpPr bwMode="auto">
+          <a:xfrm>
+            <a:off x="6841534" y="2844123"/>
+            <a:ext cx="633412" cy="546100"/>
+            <a:chOff x="6903720" y="1785098"/>
+            <a:chExt cx="633680" cy="546622"/>
+          </a:xfrm>
+        </p:grpSpPr>
+        <p:cxnSp>
+          <p:nvCxnSpPr>
+            <p:cNvPr id="14341" name="Straight Connector 34">
+              <a:extLst>
+                <a:ext uri="{FF2B5EF4-FFF2-40B4-BE49-F238E27FC236}">
+                  <a16:creationId xmlns:a16="http://schemas.microsoft.com/office/drawing/2014/main" id="{C66F51BA-47B4-99FC-A8F7-59977D7A760F}"/>
+                </a:ext>
+              </a:extLst>
+            </p:cNvPr>
+            <p:cNvCxnSpPr>
+              <a:cxnSpLocks noChangeShapeType="1"/>
+            </p:cNvCxnSpPr>
+            <p:nvPr/>
+          </p:nvCxnSpPr>
+          <p:spPr bwMode="auto">
+            <a:xfrm rot="10800000" flipV="1">
+              <a:off x="6903720" y="2137410"/>
+              <a:ext cx="297180" cy="194310"/>
+            </a:xfrm>
+            <a:prstGeom prst="line">
+              <a:avLst/>
+            </a:prstGeom>
+            <a:noFill/>
+            <a:ln w="19050" cap="sq" algn="ctr">
+              <a:solidFill>
+                <a:srgbClr val="FF0000"/>
+              </a:solidFill>
+              <a:round/>
+              <a:headEnd type="none" w="sm" len="sm"/>
+              <a:tailEnd type="none" w="sm" len="sm"/>
+            </a:ln>
+          </p:spPr>
+        </p:cxnSp>
+        <p:sp>
+          <p:nvSpPr>
+            <p:cNvPr id="14342" name="TextBox 12">
+              <a:extLst>
+                <a:ext uri="{FF2B5EF4-FFF2-40B4-BE49-F238E27FC236}">
+                  <a16:creationId xmlns:a16="http://schemas.microsoft.com/office/drawing/2014/main" id="{EB41C8B5-5D32-8ACD-F58D-A9BD4E8341EE}"/>
+                </a:ext>
+              </a:extLst>
+            </p:cNvPr>
+            <p:cNvSpPr txBox="1">
+              <a:spLocks noChangeArrowheads="1"/>
+            </p:cNvSpPr>
+            <p:nvPr/>
+          </p:nvSpPr>
+          <p:spPr bwMode="auto">
+            <a:xfrm>
+              <a:off x="7006648" y="1785098"/>
+              <a:ext cx="530752" cy="338025"/>
+            </a:xfrm>
+            <a:prstGeom prst="rect">
+              <a:avLst/>
+            </a:prstGeom>
+            <a:noFill/>
+            <a:ln w="9525">
+              <a:noFill/>
+              <a:miter lim="800000"/>
+              <a:headEnd/>
+              <a:tailEnd/>
+            </a:ln>
+          </p:spPr>
+          <p:txBody>
+            <a:bodyPr>
+              <a:spAutoFit/>
+            </a:bodyPr>
+            <a:lstStyle/>
+            <a:p>
+              <a:pPr algn="ctr"/>
+              <a:r>
+                <a:rPr lang="en-US" sz="1600" dirty="0">
+                  <a:latin typeface="Calibri" pitchFamily="34" charset="0"/>
+                </a:rPr>
+                <a:t>4</a:t>
+              </a:r>
+              <a:endParaRPr lang="en-SG" sz="1600" dirty="0">
+                <a:latin typeface="Calibri" pitchFamily="34" charset="0"/>
+              </a:endParaRPr>
+            </a:p>
+          </p:txBody>
+        </p:sp>
+      </p:grpSp>
+      <p:grpSp>
+        <p:nvGrpSpPr>
+          <p:cNvPr id="14344" name="Group 14343">
+            <a:extLst>
+              <a:ext uri="{FF2B5EF4-FFF2-40B4-BE49-F238E27FC236}">
+                <a16:creationId xmlns:a16="http://schemas.microsoft.com/office/drawing/2014/main" id="{AC7A4C55-499B-80F4-FD37-32D027CA700D}"/>
+              </a:ext>
+            </a:extLst>
+          </p:cNvPr>
+          <p:cNvGrpSpPr/>
+          <p:nvPr/>
+        </p:nvGrpSpPr>
+        <p:grpSpPr>
+          <a:xfrm>
+            <a:off x="6184491" y="4722545"/>
+            <a:ext cx="1468966" cy="511554"/>
+            <a:chOff x="6252673" y="1253546"/>
+            <a:chExt cx="1468966" cy="511554"/>
+          </a:xfrm>
+        </p:grpSpPr>
+        <p:grpSp>
+          <p:nvGrpSpPr>
+            <p:cNvPr id="14345" name="Group 13">
+              <a:extLst>
+                <a:ext uri="{FF2B5EF4-FFF2-40B4-BE49-F238E27FC236}">
+                  <a16:creationId xmlns:a16="http://schemas.microsoft.com/office/drawing/2014/main" id="{DD5FB169-40DB-968D-AA75-7F8C0E80F3D0}"/>
+                </a:ext>
+              </a:extLst>
+            </p:cNvPr>
+            <p:cNvGrpSpPr>
+              <a:grpSpLocks/>
+            </p:cNvGrpSpPr>
+            <p:nvPr/>
+          </p:nvGrpSpPr>
+          <p:grpSpPr bwMode="auto">
+            <a:xfrm>
+              <a:off x="6252673" y="1253546"/>
+              <a:ext cx="937871" cy="511554"/>
+              <a:chOff x="4696238" y="1996967"/>
+              <a:chExt cx="937303" cy="511973"/>
+            </a:xfrm>
+          </p:grpSpPr>
+          <p:sp>
+            <p:nvSpPr>
+              <p:cNvPr id="14349" name="TextBox 9">
+                <a:extLst>
+                  <a:ext uri="{FF2B5EF4-FFF2-40B4-BE49-F238E27FC236}">
+                    <a16:creationId xmlns:a16="http://schemas.microsoft.com/office/drawing/2014/main" id="{16D7DB35-3485-7027-61B0-4A2CF7559AA0}"/>
+                  </a:ext>
+                </a:extLst>
+              </p:cNvPr>
+              <p:cNvSpPr txBox="1">
+                <a:spLocks noChangeArrowheads="1"/>
+              </p:cNvSpPr>
+              <p:nvPr/>
+            </p:nvSpPr>
+            <p:spPr bwMode="auto">
+              <a:xfrm>
+                <a:off x="4696238" y="1996967"/>
+                <a:ext cx="474849" cy="338831"/>
+              </a:xfrm>
+              <a:prstGeom prst="rect">
+                <a:avLst/>
+              </a:prstGeom>
+              <a:noFill/>
+              <a:ln w="9525">
+                <a:noFill/>
+                <a:miter lim="800000"/>
+                <a:headEnd/>
+                <a:tailEnd/>
+              </a:ln>
+            </p:spPr>
+            <p:txBody>
+              <a:bodyPr wrap="square">
+                <a:spAutoFit/>
+              </a:bodyPr>
+              <a:lstStyle/>
+              <a:p>
+                <a:r>
+                  <a:rPr lang="en-US" sz="1600" dirty="0" err="1">
+                    <a:latin typeface="Calibri" pitchFamily="34" charset="0"/>
+                  </a:rPr>
+                  <a:t>arr</a:t>
+                </a:r>
+                <a:endParaRPr lang="en-SG" sz="1600" dirty="0">
+                  <a:latin typeface="Calibri" pitchFamily="34" charset="0"/>
+                </a:endParaRPr>
+              </a:p>
+            </p:txBody>
+          </p:sp>
+          <p:sp>
+            <p:nvSpPr>
+              <p:cNvPr id="14350" name="TextBox 10">
+                <a:extLst>
+                  <a:ext uri="{FF2B5EF4-FFF2-40B4-BE49-F238E27FC236}">
+                    <a16:creationId xmlns:a16="http://schemas.microsoft.com/office/drawing/2014/main" id="{2CCB8156-FB8D-85EC-F85E-633179708445}"/>
+                  </a:ext>
+                </a:extLst>
+              </p:cNvPr>
+              <p:cNvSpPr txBox="1">
+                <a:spLocks noChangeArrowheads="1"/>
+              </p:cNvSpPr>
+              <p:nvPr/>
+            </p:nvSpPr>
+            <p:spPr bwMode="auto">
+              <a:xfrm>
+                <a:off x="5102769" y="2170386"/>
+                <a:ext cx="530772" cy="338554"/>
+              </a:xfrm>
+              <a:prstGeom prst="rect">
+                <a:avLst/>
+              </a:prstGeom>
+              <a:solidFill>
+                <a:srgbClr val="FFCC66"/>
+              </a:solidFill>
+              <a:ln w="9525">
+                <a:solidFill>
+                  <a:schemeClr val="tx1"/>
+                </a:solidFill>
+                <a:miter lim="800000"/>
+                <a:headEnd/>
+                <a:tailEnd/>
+              </a:ln>
+            </p:spPr>
+            <p:txBody>
+              <a:bodyPr>
+                <a:spAutoFit/>
+              </a:bodyPr>
+              <a:lstStyle/>
+              <a:p>
+                <a:pPr algn="ctr"/>
+                <a:r>
+                  <a:rPr lang="en-US" sz="1600" dirty="0">
+                    <a:latin typeface="Calibri" pitchFamily="34" charset="0"/>
+                  </a:rPr>
+                  <a:t>2</a:t>
+                </a:r>
+                <a:endParaRPr lang="en-SG" sz="1600" dirty="0">
+                  <a:latin typeface="Calibri" pitchFamily="34" charset="0"/>
+                </a:endParaRPr>
+              </a:p>
+            </p:txBody>
+          </p:sp>
+        </p:grpSp>
+        <p:sp>
+          <p:nvSpPr>
+            <p:cNvPr id="14348" name="TextBox 12">
+              <a:extLst>
+                <a:ext uri="{FF2B5EF4-FFF2-40B4-BE49-F238E27FC236}">
+                  <a16:creationId xmlns:a16="http://schemas.microsoft.com/office/drawing/2014/main" id="{4E084167-3C00-8800-8276-C604D44AFCB3}"/>
+                </a:ext>
+              </a:extLst>
+            </p:cNvPr>
+            <p:cNvSpPr txBox="1">
+              <a:spLocks noChangeArrowheads="1"/>
+            </p:cNvSpPr>
+            <p:nvPr/>
+          </p:nvSpPr>
+          <p:spPr bwMode="auto">
+            <a:xfrm>
+              <a:off x="7190544" y="1426633"/>
+              <a:ext cx="531095" cy="338277"/>
+            </a:xfrm>
+            <a:prstGeom prst="rect">
+              <a:avLst/>
+            </a:prstGeom>
+            <a:solidFill>
+              <a:srgbClr val="FFCC66"/>
+            </a:solidFill>
+            <a:ln w="9525">
+              <a:solidFill>
+                <a:schemeClr val="tx1"/>
+              </a:solidFill>
+              <a:miter lim="800000"/>
+              <a:headEnd/>
+              <a:tailEnd/>
+            </a:ln>
+          </p:spPr>
+          <p:txBody>
+            <a:bodyPr>
+              <a:spAutoFit/>
+            </a:bodyPr>
+            <a:lstStyle/>
+            <a:p>
+              <a:pPr algn="ctr"/>
+              <a:r>
+                <a:rPr lang="en-US" sz="1600" dirty="0">
+                  <a:latin typeface="Calibri" pitchFamily="34" charset="0"/>
+                </a:rPr>
+                <a:t>6</a:t>
+              </a:r>
+              <a:endParaRPr lang="en-SG" sz="1600" dirty="0">
+                <a:latin typeface="Calibri" pitchFamily="34" charset="0"/>
+              </a:endParaRPr>
+            </a:p>
+          </p:txBody>
+        </p:sp>
+      </p:grpSp>
+      <p:grpSp>
+        <p:nvGrpSpPr>
+          <p:cNvPr id="14354" name="Group 15">
+            <a:extLst>
+              <a:ext uri="{FF2B5EF4-FFF2-40B4-BE49-F238E27FC236}">
+                <a16:creationId xmlns:a16="http://schemas.microsoft.com/office/drawing/2014/main" id="{2C9DA6EE-191D-612F-0DFE-CB1CEA55E827}"/>
+              </a:ext>
+            </a:extLst>
+          </p:cNvPr>
+          <p:cNvGrpSpPr>
+            <a:grpSpLocks/>
+          </p:cNvGrpSpPr>
+          <p:nvPr/>
+        </p:nvGrpSpPr>
+        <p:grpSpPr bwMode="auto">
+          <a:xfrm>
+            <a:off x="7442229" y="5619698"/>
+            <a:ext cx="1019823" cy="511556"/>
+            <a:chOff x="5806653" y="2023240"/>
+            <a:chExt cx="1019205" cy="511975"/>
+          </a:xfrm>
+        </p:grpSpPr>
+        <p:sp>
+          <p:nvSpPr>
+            <p:cNvPr id="14355" name="TextBox 16">
+              <a:extLst>
+                <a:ext uri="{FF2B5EF4-FFF2-40B4-BE49-F238E27FC236}">
+                  <a16:creationId xmlns:a16="http://schemas.microsoft.com/office/drawing/2014/main" id="{010F2B22-20DE-E3EE-CF50-438BD8350929}"/>
+                </a:ext>
+              </a:extLst>
+            </p:cNvPr>
+            <p:cNvSpPr txBox="1">
+              <a:spLocks noChangeArrowheads="1"/>
+            </p:cNvSpPr>
+            <p:nvPr/>
+          </p:nvSpPr>
+          <p:spPr bwMode="auto">
+            <a:xfrm>
+              <a:off x="5806653" y="2023240"/>
+              <a:ext cx="557359" cy="338831"/>
+            </a:xfrm>
+            <a:prstGeom prst="rect">
+              <a:avLst/>
+            </a:prstGeom>
+            <a:noFill/>
+            <a:ln w="9525">
+              <a:noFill/>
+              <a:miter lim="800000"/>
+              <a:headEnd/>
+              <a:tailEnd/>
+            </a:ln>
+          </p:spPr>
+          <p:txBody>
+            <a:bodyPr wrap="square">
+              <a:spAutoFit/>
+            </a:bodyPr>
+            <a:lstStyle/>
+            <a:p>
+              <a:r>
+                <a:rPr lang="en-US" sz="1600" dirty="0">
+                  <a:latin typeface="Calibri" pitchFamily="34" charset="0"/>
+                </a:rPr>
+                <a:t>ptr2</a:t>
+              </a:r>
+              <a:endParaRPr lang="en-SG" sz="1600" dirty="0">
+                <a:latin typeface="Calibri" pitchFamily="34" charset="0"/>
+              </a:endParaRPr>
+            </a:p>
+          </p:txBody>
+        </p:sp>
+        <p:sp>
+          <p:nvSpPr>
+            <p:cNvPr id="14356" name="TextBox 17">
+              <a:extLst>
+                <a:ext uri="{FF2B5EF4-FFF2-40B4-BE49-F238E27FC236}">
+                  <a16:creationId xmlns:a16="http://schemas.microsoft.com/office/drawing/2014/main" id="{FD61A1C0-6DAF-F390-D291-EAD8FE3227A8}"/>
+                </a:ext>
+              </a:extLst>
+            </p:cNvPr>
+            <p:cNvSpPr txBox="1">
+              <a:spLocks noChangeArrowheads="1"/>
+            </p:cNvSpPr>
+            <p:nvPr/>
+          </p:nvSpPr>
+          <p:spPr bwMode="auto">
+            <a:xfrm>
+              <a:off x="6295954" y="2196801"/>
+              <a:ext cx="529904" cy="338414"/>
+            </a:xfrm>
+            <a:prstGeom prst="rect">
+              <a:avLst/>
+            </a:prstGeom>
+            <a:solidFill>
+              <a:srgbClr val="9F9FFF"/>
+            </a:solidFill>
+            <a:ln w="9525">
+              <a:solidFill>
+                <a:schemeClr val="tx1"/>
+              </a:solidFill>
+              <a:miter lim="800000"/>
+              <a:headEnd/>
+              <a:tailEnd/>
+            </a:ln>
+          </p:spPr>
+          <p:txBody>
+            <a:bodyPr>
+              <a:spAutoFit/>
+            </a:bodyPr>
+            <a:lstStyle/>
+            <a:p>
+              <a:pPr algn="ctr">
+                <a:defRPr/>
+              </a:pPr>
+              <a:endParaRPr lang="en-SG" sz="1600">
+                <a:latin typeface="Calibri" pitchFamily="34" charset="0"/>
+                <a:cs typeface="Arial" pitchFamily="34" charset="0"/>
+              </a:endParaRPr>
+            </a:p>
+          </p:txBody>
+        </p:sp>
+      </p:grpSp>
+      <p:grpSp>
+        <p:nvGrpSpPr>
+          <p:cNvPr id="14357" name="Group 15">
+            <a:extLst>
+              <a:ext uri="{FF2B5EF4-FFF2-40B4-BE49-F238E27FC236}">
+                <a16:creationId xmlns:a16="http://schemas.microsoft.com/office/drawing/2014/main" id="{E9BA403E-D151-C8FF-1FA4-80D740D6AB9D}"/>
+              </a:ext>
+            </a:extLst>
+          </p:cNvPr>
+          <p:cNvGrpSpPr>
+            <a:grpSpLocks/>
+          </p:cNvGrpSpPr>
+          <p:nvPr/>
+        </p:nvGrpSpPr>
+        <p:grpSpPr bwMode="auto">
+          <a:xfrm>
+            <a:off x="6195715" y="5619698"/>
+            <a:ext cx="998947" cy="511556"/>
+            <a:chOff x="5827516" y="2023240"/>
+            <a:chExt cx="998342" cy="511975"/>
+          </a:xfrm>
+        </p:grpSpPr>
+        <p:sp>
+          <p:nvSpPr>
+            <p:cNvPr id="14358" name="TextBox 16">
+              <a:extLst>
+                <a:ext uri="{FF2B5EF4-FFF2-40B4-BE49-F238E27FC236}">
+                  <a16:creationId xmlns:a16="http://schemas.microsoft.com/office/drawing/2014/main" id="{810F8D22-6EBF-82B8-8A0E-07883EB7AD50}"/>
+                </a:ext>
+              </a:extLst>
+            </p:cNvPr>
+            <p:cNvSpPr txBox="1">
+              <a:spLocks noChangeArrowheads="1"/>
+            </p:cNvSpPr>
+            <p:nvPr/>
+          </p:nvSpPr>
+          <p:spPr bwMode="auto">
+            <a:xfrm>
+              <a:off x="5827516" y="2023240"/>
+              <a:ext cx="536497" cy="338831"/>
+            </a:xfrm>
+            <a:prstGeom prst="rect">
+              <a:avLst/>
+            </a:prstGeom>
+            <a:noFill/>
+            <a:ln w="9525">
+              <a:noFill/>
+              <a:miter lim="800000"/>
+              <a:headEnd/>
+              <a:tailEnd/>
+            </a:ln>
+          </p:spPr>
+          <p:txBody>
+            <a:bodyPr wrap="square">
+              <a:spAutoFit/>
+            </a:bodyPr>
+            <a:lstStyle/>
+            <a:p>
+              <a:r>
+                <a:rPr lang="en-US" sz="1600" dirty="0">
+                  <a:latin typeface="Calibri" pitchFamily="34" charset="0"/>
+                </a:rPr>
+                <a:t>ptr1</a:t>
+              </a:r>
+              <a:endParaRPr lang="en-SG" sz="1600" dirty="0">
+                <a:latin typeface="Calibri" pitchFamily="34" charset="0"/>
+              </a:endParaRPr>
+            </a:p>
+          </p:txBody>
+        </p:sp>
+        <p:sp>
+          <p:nvSpPr>
+            <p:cNvPr id="14359" name="TextBox 17">
+              <a:extLst>
+                <a:ext uri="{FF2B5EF4-FFF2-40B4-BE49-F238E27FC236}">
+                  <a16:creationId xmlns:a16="http://schemas.microsoft.com/office/drawing/2014/main" id="{36ED3FAE-E8AA-5C1D-19FD-68E02473B278}"/>
+                </a:ext>
+              </a:extLst>
+            </p:cNvPr>
+            <p:cNvSpPr txBox="1">
+              <a:spLocks noChangeArrowheads="1"/>
+            </p:cNvSpPr>
+            <p:nvPr/>
+          </p:nvSpPr>
+          <p:spPr bwMode="auto">
+            <a:xfrm>
+              <a:off x="6295954" y="2196801"/>
+              <a:ext cx="529904" cy="338414"/>
+            </a:xfrm>
+            <a:prstGeom prst="rect">
+              <a:avLst/>
+            </a:prstGeom>
+            <a:solidFill>
+              <a:srgbClr val="9F9FFF"/>
+            </a:solidFill>
+            <a:ln w="9525">
+              <a:solidFill>
+                <a:schemeClr val="tx1"/>
+              </a:solidFill>
+              <a:miter lim="800000"/>
+              <a:headEnd/>
+              <a:tailEnd/>
+            </a:ln>
+          </p:spPr>
+          <p:txBody>
+            <a:bodyPr>
+              <a:spAutoFit/>
+            </a:bodyPr>
+            <a:lstStyle/>
+            <a:p>
+              <a:pPr algn="ctr">
+                <a:defRPr/>
+              </a:pPr>
+              <a:endParaRPr lang="en-SG" sz="1600">
+                <a:latin typeface="Calibri" pitchFamily="34" charset="0"/>
+                <a:cs typeface="Arial" pitchFamily="34" charset="0"/>
+              </a:endParaRPr>
+            </a:p>
+          </p:txBody>
+        </p:sp>
+      </p:grpSp>
+      <p:cxnSp>
+        <p:nvCxnSpPr>
+          <p:cNvPr id="14360" name="Straight Arrow Connector 14359">
+            <a:extLst>
+              <a:ext uri="{FF2B5EF4-FFF2-40B4-BE49-F238E27FC236}">
+                <a16:creationId xmlns:a16="http://schemas.microsoft.com/office/drawing/2014/main" id="{36FBC77A-66A8-0277-9D94-FAF9F886EFD9}"/>
+              </a:ext>
+            </a:extLst>
+          </p:cNvPr>
+          <p:cNvCxnSpPr>
+            <a:cxnSpLocks noChangeShapeType="1"/>
+            <a:stCxn id="14356" idx="0"/>
+            <a:endCxn id="14350" idx="2"/>
+          </p:cNvCxnSpPr>
+          <p:nvPr/>
+        </p:nvCxnSpPr>
+        <p:spPr bwMode="auto">
+          <a:xfrm flipH="1" flipV="1">
+            <a:off x="6856815" y="5234099"/>
+            <a:ext cx="1340125" cy="559018"/>
+          </a:xfrm>
+          <a:prstGeom prst="straightConnector1">
+            <a:avLst/>
+          </a:prstGeom>
+          <a:noFill/>
+          <a:ln w="19050" cap="sq" algn="ctr">
+            <a:solidFill>
+              <a:srgbClr val="0000FF"/>
+            </a:solidFill>
+            <a:round/>
+            <a:headEnd/>
+            <a:tailEnd type="triangle" w="med" len="med"/>
+          </a:ln>
+        </p:spPr>
+      </p:cxnSp>
+      <p:cxnSp>
+        <p:nvCxnSpPr>
+          <p:cNvPr id="14361" name="Straight Arrow Connector 14360">
+            <a:extLst>
+              <a:ext uri="{FF2B5EF4-FFF2-40B4-BE49-F238E27FC236}">
+                <a16:creationId xmlns:a16="http://schemas.microsoft.com/office/drawing/2014/main" id="{406DFD73-86FE-B08C-FA18-EE9DBA693BC1}"/>
+              </a:ext>
+            </a:extLst>
+          </p:cNvPr>
+          <p:cNvCxnSpPr>
+            <a:cxnSpLocks noChangeShapeType="1"/>
+            <a:endCxn id="14348" idx="2"/>
+          </p:cNvCxnSpPr>
+          <p:nvPr/>
+        </p:nvCxnSpPr>
+        <p:spPr bwMode="auto">
+          <a:xfrm flipV="1">
+            <a:off x="6880379" y="5233909"/>
+            <a:ext cx="507531" cy="543481"/>
+          </a:xfrm>
+          <a:prstGeom prst="straightConnector1">
+            <a:avLst/>
+          </a:prstGeom>
+          <a:noFill/>
+          <a:ln w="19050" cap="sq" algn="ctr">
+            <a:solidFill>
+              <a:srgbClr val="0000FF"/>
+            </a:solidFill>
+            <a:round/>
+            <a:headEnd/>
+            <a:tailEnd type="triangle" w="med" len="med"/>
+          </a:ln>
+        </p:spPr>
+      </p:cxnSp>
+      <p:sp>
+        <p:nvSpPr>
+          <p:cNvPr id="14364" name="TextBox 14363">
+            <a:extLst>
+              <a:ext uri="{FF2B5EF4-FFF2-40B4-BE49-F238E27FC236}">
+                <a16:creationId xmlns:a16="http://schemas.microsoft.com/office/drawing/2014/main" id="{AF7B2363-7F88-F3DD-4581-5E387B046DD9}"/>
+              </a:ext>
+            </a:extLst>
+          </p:cNvPr>
+          <p:cNvSpPr txBox="1"/>
+          <p:nvPr/>
+        </p:nvSpPr>
+        <p:spPr>
+          <a:xfrm>
+            <a:off x="457200" y="4961782"/>
+            <a:ext cx="4419600" cy="1631216"/>
+          </a:xfrm>
+          <a:prstGeom prst="rect">
+            <a:avLst/>
+          </a:prstGeom>
+          <a:ln>
+            <a:noFill/>
+          </a:ln>
+        </p:spPr>
+        <p:style>
+          <a:lnRef idx="2">
+            <a:schemeClr val="accent6"/>
+          </a:lnRef>
+          <a:fillRef idx="1">
+            <a:schemeClr val="lt1"/>
+          </a:fillRef>
+          <a:effectRef idx="0">
+            <a:schemeClr val="accent6"/>
+          </a:effectRef>
+          <a:fontRef idx="minor">
+            <a:schemeClr val="dk1"/>
+          </a:fontRef>
+        </p:style>
+        <p:txBody>
+          <a:bodyPr wrap="square">
+            <a:spAutoFit/>
+          </a:bodyPr>
+          <a:lstStyle/>
+          <a:p>
+            <a:pPr>
+              <a:defRPr/>
+            </a:pPr>
+            <a:r>
+              <a:rPr lang="en-US" sz="2000" b="1" dirty="0">
+                <a:solidFill>
+                  <a:srgbClr val="0000FF"/>
+                </a:solidFill>
+                <a:latin typeface="Courier New" pitchFamily="49" charset="0"/>
+                <a:cs typeface="Courier New" pitchFamily="49" charset="0"/>
+              </a:rPr>
+              <a:t>long</a:t>
+            </a:r>
+            <a:r>
+              <a:rPr lang="en-US" sz="2000" b="1" dirty="0">
+                <a:solidFill>
+                  <a:srgbClr val="000000"/>
+                </a:solidFill>
+                <a:latin typeface="Courier New" pitchFamily="49" charset="0"/>
+                <a:cs typeface="Courier New" pitchFamily="49" charset="0"/>
+              </a:rPr>
+              <a:t> </a:t>
+            </a:r>
+            <a:r>
+              <a:rPr lang="en-US" sz="2000" b="1" dirty="0" err="1">
+                <a:solidFill>
+                  <a:srgbClr val="000000"/>
+                </a:solidFill>
+                <a:latin typeface="Courier New" pitchFamily="49" charset="0"/>
+                <a:cs typeface="Courier New" pitchFamily="49" charset="0"/>
+              </a:rPr>
+              <a:t>arr</a:t>
+            </a:r>
+            <a:r>
+              <a:rPr lang="en-US" sz="2000" b="1" dirty="0">
+                <a:solidFill>
+                  <a:srgbClr val="000000"/>
+                </a:solidFill>
+                <a:latin typeface="Courier New" pitchFamily="49" charset="0"/>
+                <a:cs typeface="Courier New" pitchFamily="49" charset="0"/>
+              </a:rPr>
+              <a:t>[] = {</a:t>
+            </a:r>
+            <a:r>
+              <a:rPr lang="en-US" sz="2000" b="1" dirty="0">
+                <a:solidFill>
+                  <a:srgbClr val="C00000"/>
+                </a:solidFill>
+                <a:latin typeface="Courier New" pitchFamily="49" charset="0"/>
+                <a:cs typeface="Courier New" pitchFamily="49" charset="0"/>
+              </a:rPr>
+              <a:t>2</a:t>
+            </a:r>
+            <a:r>
+              <a:rPr lang="en-US" sz="2000" b="1" dirty="0">
+                <a:solidFill>
+                  <a:srgbClr val="000000"/>
+                </a:solidFill>
+                <a:latin typeface="Courier New" pitchFamily="49" charset="0"/>
+                <a:cs typeface="Courier New" pitchFamily="49" charset="0"/>
+              </a:rPr>
+              <a:t>, </a:t>
+            </a:r>
+            <a:r>
+              <a:rPr lang="en-US" sz="2000" b="1" dirty="0">
+                <a:solidFill>
+                  <a:srgbClr val="C00000"/>
+                </a:solidFill>
+                <a:latin typeface="Courier New" pitchFamily="49" charset="0"/>
+                <a:cs typeface="Courier New" pitchFamily="49" charset="0"/>
+              </a:rPr>
+              <a:t>6</a:t>
+            </a:r>
+            <a:r>
+              <a:rPr lang="en-US" sz="2000" b="1" dirty="0">
+                <a:solidFill>
+                  <a:srgbClr val="000000"/>
+                </a:solidFill>
+                <a:latin typeface="Courier New" pitchFamily="49" charset="0"/>
+                <a:cs typeface="Courier New" pitchFamily="49" charset="0"/>
+              </a:rPr>
+              <a:t>};</a:t>
+            </a:r>
+          </a:p>
+          <a:p>
+            <a:pPr>
+              <a:defRPr/>
+            </a:pPr>
+            <a:r>
+              <a:rPr lang="en-US" sz="2000" b="1" dirty="0">
+                <a:solidFill>
+                  <a:srgbClr val="000000"/>
+                </a:solidFill>
+                <a:latin typeface="Courier New" pitchFamily="49" charset="0"/>
+                <a:cs typeface="Courier New" pitchFamily="49" charset="0"/>
+              </a:rPr>
+              <a:t>ptr1 = &amp;</a:t>
+            </a:r>
+            <a:r>
+              <a:rPr lang="en-US" sz="2000" b="1" dirty="0" err="1">
+                <a:solidFill>
+                  <a:srgbClr val="000000"/>
+                </a:solidFill>
+                <a:latin typeface="Courier New" pitchFamily="49" charset="0"/>
+                <a:cs typeface="Courier New" pitchFamily="49" charset="0"/>
+              </a:rPr>
+              <a:t>arr</a:t>
+            </a:r>
+            <a:r>
+              <a:rPr lang="en-US" sz="2000" b="1" dirty="0">
+                <a:solidFill>
+                  <a:srgbClr val="000000"/>
+                </a:solidFill>
+                <a:latin typeface="Courier New" pitchFamily="49" charset="0"/>
+                <a:cs typeface="Courier New" pitchFamily="49" charset="0"/>
+              </a:rPr>
+              <a:t>[1];</a:t>
+            </a:r>
+          </a:p>
+          <a:p>
+            <a:pPr>
+              <a:defRPr/>
+            </a:pPr>
+            <a:r>
+              <a:rPr lang="en-US" sz="2000" b="1" dirty="0">
+                <a:solidFill>
+                  <a:srgbClr val="000000"/>
+                </a:solidFill>
+                <a:latin typeface="Courier New" pitchFamily="49" charset="0"/>
+                <a:cs typeface="Courier New" pitchFamily="49" charset="0"/>
+              </a:rPr>
+              <a:t>ptr2 = ptr1 - </a:t>
+            </a:r>
+            <a:r>
+              <a:rPr lang="en-US" sz="2000" b="1" dirty="0">
+                <a:solidFill>
+                  <a:srgbClr val="C00000"/>
+                </a:solidFill>
+                <a:latin typeface="Courier New" pitchFamily="49" charset="0"/>
+                <a:cs typeface="Courier New" pitchFamily="49" charset="0"/>
+              </a:rPr>
+              <a:t>1</a:t>
+            </a:r>
+            <a:r>
+              <a:rPr lang="en-US" sz="2000" b="1" dirty="0">
+                <a:solidFill>
+                  <a:srgbClr val="000000"/>
+                </a:solidFill>
+                <a:latin typeface="Courier New" pitchFamily="49" charset="0"/>
+                <a:cs typeface="Courier New" pitchFamily="49" charset="0"/>
+              </a:rPr>
+              <a:t>;</a:t>
+            </a:r>
+          </a:p>
+          <a:p>
+            <a:pPr>
+              <a:defRPr/>
+            </a:pPr>
+            <a:endParaRPr lang="en-US" sz="2000" b="1" dirty="0">
+              <a:solidFill>
+                <a:srgbClr val="000000"/>
+              </a:solidFill>
+              <a:latin typeface="Courier New" pitchFamily="49" charset="0"/>
+              <a:cs typeface="Courier New" pitchFamily="49" charset="0"/>
+            </a:endParaRPr>
+          </a:p>
+          <a:p>
+            <a:pPr>
+              <a:defRPr/>
+            </a:pPr>
+            <a:r>
+              <a:rPr lang="en-US" sz="2000" b="1" dirty="0">
+                <a:solidFill>
+                  <a:srgbClr val="000000"/>
+                </a:solidFill>
+                <a:latin typeface="Courier New" pitchFamily="49" charset="0"/>
+                <a:cs typeface="Courier New" pitchFamily="49" charset="0"/>
+              </a:rPr>
+              <a:t>*ptr1 += *ptr2;</a:t>
+            </a:r>
+          </a:p>
+        </p:txBody>
+      </p:sp>
+      <p:grpSp>
+        <p:nvGrpSpPr>
+          <p:cNvPr id="14367" name="Group 33">
+            <a:extLst>
+              <a:ext uri="{FF2B5EF4-FFF2-40B4-BE49-F238E27FC236}">
+                <a16:creationId xmlns:a16="http://schemas.microsoft.com/office/drawing/2014/main" id="{BA59F521-B00E-9F3A-169B-EE12F362C01E}"/>
+              </a:ext>
+            </a:extLst>
+          </p:cNvPr>
+          <p:cNvGrpSpPr>
+            <a:grpSpLocks/>
+          </p:cNvGrpSpPr>
+          <p:nvPr/>
+        </p:nvGrpSpPr>
+        <p:grpSpPr bwMode="auto">
+          <a:xfrm>
+            <a:off x="7274643" y="4583828"/>
+            <a:ext cx="633412" cy="546100"/>
+            <a:chOff x="6903720" y="1785098"/>
+            <a:chExt cx="633680" cy="546622"/>
+          </a:xfrm>
+        </p:grpSpPr>
+        <p:cxnSp>
+          <p:nvCxnSpPr>
+            <p:cNvPr id="14368" name="Straight Connector 34">
+              <a:extLst>
+                <a:ext uri="{FF2B5EF4-FFF2-40B4-BE49-F238E27FC236}">
+                  <a16:creationId xmlns:a16="http://schemas.microsoft.com/office/drawing/2014/main" id="{7D2DC098-1C5C-65B0-17CB-3AE5E8C61CF1}"/>
+                </a:ext>
+              </a:extLst>
+            </p:cNvPr>
+            <p:cNvCxnSpPr>
+              <a:cxnSpLocks noChangeShapeType="1"/>
+            </p:cNvCxnSpPr>
+            <p:nvPr/>
+          </p:nvCxnSpPr>
+          <p:spPr bwMode="auto">
+            <a:xfrm rot="10800000" flipV="1">
+              <a:off x="6903720" y="2137410"/>
+              <a:ext cx="297180" cy="194310"/>
+            </a:xfrm>
+            <a:prstGeom prst="line">
+              <a:avLst/>
+            </a:prstGeom>
+            <a:noFill/>
+            <a:ln w="19050" cap="sq" algn="ctr">
+              <a:solidFill>
+                <a:srgbClr val="FF0000"/>
+              </a:solidFill>
+              <a:round/>
+              <a:headEnd type="none" w="sm" len="sm"/>
+              <a:tailEnd type="none" w="sm" len="sm"/>
+            </a:ln>
+          </p:spPr>
+        </p:cxnSp>
+        <p:sp>
+          <p:nvSpPr>
+            <p:cNvPr id="14369" name="TextBox 12">
+              <a:extLst>
+                <a:ext uri="{FF2B5EF4-FFF2-40B4-BE49-F238E27FC236}">
+                  <a16:creationId xmlns:a16="http://schemas.microsoft.com/office/drawing/2014/main" id="{B1FCD55F-0DC4-A467-16D7-481F9D474DF2}"/>
+                </a:ext>
+              </a:extLst>
+            </p:cNvPr>
+            <p:cNvSpPr txBox="1">
+              <a:spLocks noChangeArrowheads="1"/>
+            </p:cNvSpPr>
+            <p:nvPr/>
+          </p:nvSpPr>
+          <p:spPr bwMode="auto">
+            <a:xfrm>
+              <a:off x="7006648" y="1785098"/>
+              <a:ext cx="530752" cy="338025"/>
+            </a:xfrm>
+            <a:prstGeom prst="rect">
+              <a:avLst/>
+            </a:prstGeom>
+            <a:noFill/>
+            <a:ln w="9525">
+              <a:noFill/>
+              <a:miter lim="800000"/>
+              <a:headEnd/>
+              <a:tailEnd/>
+            </a:ln>
+          </p:spPr>
+          <p:txBody>
+            <a:bodyPr>
+              <a:spAutoFit/>
+            </a:bodyPr>
+            <a:lstStyle/>
+            <a:p>
+              <a:pPr algn="ctr"/>
+              <a:r>
+                <a:rPr lang="en-US" sz="1600" dirty="0">
+                  <a:latin typeface="Calibri" pitchFamily="34" charset="0"/>
+                </a:rPr>
+                <a:t>8</a:t>
+              </a:r>
+              <a:endParaRPr lang="en-SG" sz="1600" dirty="0">
+                <a:latin typeface="Calibri" pitchFamily="34" charset="0"/>
+              </a:endParaRPr>
+            </a:p>
+          </p:txBody>
+        </p:sp>
+      </p:grpSp>
     </p:spTree>
     <p:extLst>
       <p:ext uri="{BB962C8B-B14F-4D97-AF65-F5344CB8AC3E}">
@@ -12802,10 +14383,1876 @@
   <p:transition>
     <p:fade/>
   </p:transition>
+  <p:timing>
+    <p:tnLst>
+      <p:par>
+        <p:cTn id="1" dur="indefinite" restart="never" nodeType="tmRoot">
+          <p:childTnLst>
+            <p:seq concurrent="1" nextAc="seek">
+              <p:cTn id="2" dur="indefinite" nodeType="mainSeq">
+                <p:childTnLst>
+                  <p:par>
+                    <p:cTn id="3" fill="hold">
+                      <p:stCondLst>
+                        <p:cond delay="indefinite"/>
+                      </p:stCondLst>
+                      <p:childTnLst>
+                        <p:par>
+                          <p:cTn id="4" fill="hold">
+                            <p:stCondLst>
+                              <p:cond delay="0"/>
+                            </p:stCondLst>
+                            <p:childTnLst>
+                              <p:par>
+                                <p:cTn id="5" presetID="1" presetClass="entr" presetSubtype="0" fill="hold" nodeType="clickEffect">
+                                  <p:stCondLst>
+                                    <p:cond delay="0"/>
+                                  </p:stCondLst>
+                                  <p:childTnLst>
+                                    <p:set>
+                                      <p:cBhvr>
+                                        <p:cTn id="6" dur="1" fill="hold">
+                                          <p:stCondLst>
+                                            <p:cond delay="0"/>
+                                          </p:stCondLst>
+                                        </p:cTn>
+                                        <p:tgtEl>
+                                          <p:spTgt spid="49"/>
+                                        </p:tgtEl>
+                                        <p:attrNameLst>
+                                          <p:attrName>style.visibility</p:attrName>
+                                        </p:attrNameLst>
+                                      </p:cBhvr>
+                                      <p:to>
+                                        <p:strVal val="visible"/>
+                                      </p:to>
+                                    </p:set>
+                                  </p:childTnLst>
+                                </p:cTn>
+                              </p:par>
+                            </p:childTnLst>
+                          </p:cTn>
+                        </p:par>
+                      </p:childTnLst>
+                    </p:cTn>
+                  </p:par>
+                  <p:par>
+                    <p:cTn id="7" fill="hold">
+                      <p:stCondLst>
+                        <p:cond delay="indefinite"/>
+                      </p:stCondLst>
+                      <p:childTnLst>
+                        <p:par>
+                          <p:cTn id="8" fill="hold">
+                            <p:stCondLst>
+                              <p:cond delay="0"/>
+                            </p:stCondLst>
+                            <p:childTnLst>
+                              <p:par>
+                                <p:cTn id="9" presetID="1" presetClass="entr" presetSubtype="0" fill="hold" nodeType="clickEffect">
+                                  <p:stCondLst>
+                                    <p:cond delay="0"/>
+                                  </p:stCondLst>
+                                  <p:childTnLst>
+                                    <p:set>
+                                      <p:cBhvr>
+                                        <p:cTn id="10" dur="1" fill="hold">
+                                          <p:stCondLst>
+                                            <p:cond delay="0"/>
+                                          </p:stCondLst>
+                                        </p:cTn>
+                                        <p:tgtEl>
+                                          <p:spTgt spid="35"/>
+                                        </p:tgtEl>
+                                        <p:attrNameLst>
+                                          <p:attrName>style.visibility</p:attrName>
+                                        </p:attrNameLst>
+                                      </p:cBhvr>
+                                      <p:to>
+                                        <p:strVal val="visible"/>
+                                      </p:to>
+                                    </p:set>
+                                  </p:childTnLst>
+                                </p:cTn>
+                              </p:par>
+                            </p:childTnLst>
+                          </p:cTn>
+                        </p:par>
+                      </p:childTnLst>
+                    </p:cTn>
+                  </p:par>
+                  <p:par>
+                    <p:cTn id="11" fill="hold">
+                      <p:stCondLst>
+                        <p:cond delay="indefinite"/>
+                      </p:stCondLst>
+                      <p:childTnLst>
+                        <p:par>
+                          <p:cTn id="12" fill="hold">
+                            <p:stCondLst>
+                              <p:cond delay="0"/>
+                            </p:stCondLst>
+                            <p:childTnLst>
+                              <p:par>
+                                <p:cTn id="13" presetID="1" presetClass="entr" presetSubtype="0" fill="hold" nodeType="clickEffect">
+                                  <p:stCondLst>
+                                    <p:cond delay="0"/>
+                                  </p:stCondLst>
+                                  <p:childTnLst>
+                                    <p:set>
+                                      <p:cBhvr>
+                                        <p:cTn id="14" dur="1" fill="hold">
+                                          <p:stCondLst>
+                                            <p:cond delay="0"/>
+                                          </p:stCondLst>
+                                        </p:cTn>
+                                        <p:tgtEl>
+                                          <p:spTgt spid="57"/>
+                                        </p:tgtEl>
+                                        <p:attrNameLst>
+                                          <p:attrName>style.visibility</p:attrName>
+                                        </p:attrNameLst>
+                                      </p:cBhvr>
+                                      <p:to>
+                                        <p:strVal val="visible"/>
+                                      </p:to>
+                                    </p:set>
+                                  </p:childTnLst>
+                                </p:cTn>
+                              </p:par>
+                            </p:childTnLst>
+                          </p:cTn>
+                        </p:par>
+                      </p:childTnLst>
+                    </p:cTn>
+                  </p:par>
+                  <p:par>
+                    <p:cTn id="15" fill="hold">
+                      <p:stCondLst>
+                        <p:cond delay="indefinite"/>
+                      </p:stCondLst>
+                      <p:childTnLst>
+                        <p:par>
+                          <p:cTn id="16" fill="hold">
+                            <p:stCondLst>
+                              <p:cond delay="0"/>
+                            </p:stCondLst>
+                            <p:childTnLst>
+                              <p:par>
+                                <p:cTn id="17" presetID="1" presetClass="entr" presetSubtype="0" fill="hold" nodeType="clickEffect">
+                                  <p:stCondLst>
+                                    <p:cond delay="0"/>
+                                  </p:stCondLst>
+                                  <p:childTnLst>
+                                    <p:set>
+                                      <p:cBhvr>
+                                        <p:cTn id="18" dur="1" fill="hold">
+                                          <p:stCondLst>
+                                            <p:cond delay="0"/>
+                                          </p:stCondLst>
+                                        </p:cTn>
+                                        <p:tgtEl>
+                                          <p:spTgt spid="24">
+                                            <p:txEl>
+                                              <p:pRg st="0" end="0"/>
+                                            </p:txEl>
+                                          </p:spTgt>
+                                        </p:tgtEl>
+                                        <p:attrNameLst>
+                                          <p:attrName>style.visibility</p:attrName>
+                                        </p:attrNameLst>
+                                      </p:cBhvr>
+                                      <p:to>
+                                        <p:strVal val="visible"/>
+                                      </p:to>
+                                    </p:set>
+                                  </p:childTnLst>
+                                </p:cTn>
+                              </p:par>
+                            </p:childTnLst>
+                          </p:cTn>
+                        </p:par>
+                      </p:childTnLst>
+                    </p:cTn>
+                  </p:par>
+                  <p:par>
+                    <p:cTn id="19" fill="hold">
+                      <p:stCondLst>
+                        <p:cond delay="indefinite"/>
+                      </p:stCondLst>
+                      <p:childTnLst>
+                        <p:par>
+                          <p:cTn id="20" fill="hold">
+                            <p:stCondLst>
+                              <p:cond delay="0"/>
+                            </p:stCondLst>
+                            <p:childTnLst>
+                              <p:par>
+                                <p:cTn id="21" presetID="1" presetClass="entr" presetSubtype="0" fill="hold" nodeType="clickEffect">
+                                  <p:stCondLst>
+                                    <p:cond delay="0"/>
+                                  </p:stCondLst>
+                                  <p:childTnLst>
+                                    <p:set>
+                                      <p:cBhvr>
+                                        <p:cTn id="22" dur="1" fill="hold">
+                                          <p:stCondLst>
+                                            <p:cond delay="0"/>
+                                          </p:stCondLst>
+                                        </p:cTn>
+                                        <p:tgtEl>
+                                          <p:spTgt spid="24">
+                                            <p:txEl>
+                                              <p:pRg st="2" end="2"/>
+                                            </p:txEl>
+                                          </p:spTgt>
+                                        </p:tgtEl>
+                                        <p:attrNameLst>
+                                          <p:attrName>style.visibility</p:attrName>
+                                        </p:attrNameLst>
+                                      </p:cBhvr>
+                                      <p:to>
+                                        <p:strVal val="visible"/>
+                                      </p:to>
+                                    </p:set>
+                                  </p:childTnLst>
+                                </p:cTn>
+                              </p:par>
+                              <p:par>
+                                <p:cTn id="23" presetID="1" presetClass="entr" presetSubtype="0" fill="hold" nodeType="withEffect">
+                                  <p:stCondLst>
+                                    <p:cond delay="0"/>
+                                  </p:stCondLst>
+                                  <p:childTnLst>
+                                    <p:set>
+                                      <p:cBhvr>
+                                        <p:cTn id="24" dur="1" fill="hold">
+                                          <p:stCondLst>
+                                            <p:cond delay="0"/>
+                                          </p:stCondLst>
+                                        </p:cTn>
+                                        <p:tgtEl>
+                                          <p:spTgt spid="24">
+                                            <p:txEl>
+                                              <p:pRg st="3" end="3"/>
+                                            </p:txEl>
+                                          </p:spTgt>
+                                        </p:tgtEl>
+                                        <p:attrNameLst>
+                                          <p:attrName>style.visibility</p:attrName>
+                                        </p:attrNameLst>
+                                      </p:cBhvr>
+                                      <p:to>
+                                        <p:strVal val="visible"/>
+                                      </p:to>
+                                    </p:set>
+                                  </p:childTnLst>
+                                </p:cTn>
+                              </p:par>
+                              <p:par>
+                                <p:cTn id="25" presetID="1" presetClass="entr" presetSubtype="0" fill="hold" nodeType="withEffect">
+                                  <p:stCondLst>
+                                    <p:cond delay="0"/>
+                                  </p:stCondLst>
+                                  <p:childTnLst>
+                                    <p:set>
+                                      <p:cBhvr>
+                                        <p:cTn id="26" dur="1" fill="hold">
+                                          <p:stCondLst>
+                                            <p:cond delay="0"/>
+                                          </p:stCondLst>
+                                        </p:cTn>
+                                        <p:tgtEl>
+                                          <p:spTgt spid="62"/>
+                                        </p:tgtEl>
+                                        <p:attrNameLst>
+                                          <p:attrName>style.visibility</p:attrName>
+                                        </p:attrNameLst>
+                                      </p:cBhvr>
+                                      <p:to>
+                                        <p:strVal val="visible"/>
+                                      </p:to>
+                                    </p:set>
+                                  </p:childTnLst>
+                                </p:cTn>
+                              </p:par>
+                              <p:par>
+                                <p:cTn id="27" presetID="1" presetClass="entr" presetSubtype="0" fill="hold" nodeType="withEffect">
+                                  <p:stCondLst>
+                                    <p:cond delay="0"/>
+                                  </p:stCondLst>
+                                  <p:childTnLst>
+                                    <p:set>
+                                      <p:cBhvr>
+                                        <p:cTn id="28" dur="1" fill="hold">
+                                          <p:stCondLst>
+                                            <p:cond delay="0"/>
+                                          </p:stCondLst>
+                                        </p:cTn>
+                                        <p:tgtEl>
+                                          <p:spTgt spid="21"/>
+                                        </p:tgtEl>
+                                        <p:attrNameLst>
+                                          <p:attrName>style.visibility</p:attrName>
+                                        </p:attrNameLst>
+                                      </p:cBhvr>
+                                      <p:to>
+                                        <p:strVal val="visible"/>
+                                      </p:to>
+                                    </p:set>
+                                  </p:childTnLst>
+                                </p:cTn>
+                              </p:par>
+                              <p:par>
+                                <p:cTn id="29" presetID="1" presetClass="entr" presetSubtype="0" fill="hold" nodeType="withEffect">
+                                  <p:stCondLst>
+                                    <p:cond delay="0"/>
+                                  </p:stCondLst>
+                                  <p:childTnLst>
+                                    <p:set>
+                                      <p:cBhvr>
+                                        <p:cTn id="30" dur="1" fill="hold">
+                                          <p:stCondLst>
+                                            <p:cond delay="0"/>
+                                          </p:stCondLst>
+                                        </p:cTn>
+                                        <p:tgtEl>
+                                          <p:spTgt spid="38"/>
+                                        </p:tgtEl>
+                                        <p:attrNameLst>
+                                          <p:attrName>style.visibility</p:attrName>
+                                        </p:attrNameLst>
+                                      </p:cBhvr>
+                                      <p:to>
+                                        <p:strVal val="visible"/>
+                                      </p:to>
+                                    </p:set>
+                                  </p:childTnLst>
+                                </p:cTn>
+                              </p:par>
+                            </p:childTnLst>
+                          </p:cTn>
+                        </p:par>
+                      </p:childTnLst>
+                    </p:cTn>
+                  </p:par>
+                  <p:par>
+                    <p:cTn id="31" fill="hold">
+                      <p:stCondLst>
+                        <p:cond delay="indefinite"/>
+                      </p:stCondLst>
+                      <p:childTnLst>
+                        <p:par>
+                          <p:cTn id="32" fill="hold">
+                            <p:stCondLst>
+                              <p:cond delay="0"/>
+                            </p:stCondLst>
+                            <p:childTnLst>
+                              <p:par>
+                                <p:cTn id="33" presetID="1" presetClass="entr" presetSubtype="0" fill="hold" nodeType="clickEffect">
+                                  <p:stCondLst>
+                                    <p:cond delay="0"/>
+                                  </p:stCondLst>
+                                  <p:childTnLst>
+                                    <p:set>
+                                      <p:cBhvr>
+                                        <p:cTn id="34" dur="1" fill="hold">
+                                          <p:stCondLst>
+                                            <p:cond delay="0"/>
+                                          </p:stCondLst>
+                                        </p:cTn>
+                                        <p:tgtEl>
+                                          <p:spTgt spid="14339"/>
+                                        </p:tgtEl>
+                                        <p:attrNameLst>
+                                          <p:attrName>style.visibility</p:attrName>
+                                        </p:attrNameLst>
+                                      </p:cBhvr>
+                                      <p:to>
+                                        <p:strVal val="visible"/>
+                                      </p:to>
+                                    </p:set>
+                                  </p:childTnLst>
+                                </p:cTn>
+                              </p:par>
+                            </p:childTnLst>
+                          </p:cTn>
+                        </p:par>
+                      </p:childTnLst>
+                    </p:cTn>
+                  </p:par>
+                  <p:par>
+                    <p:cTn id="35" fill="hold">
+                      <p:stCondLst>
+                        <p:cond delay="indefinite"/>
+                      </p:stCondLst>
+                      <p:childTnLst>
+                        <p:par>
+                          <p:cTn id="36" fill="hold">
+                            <p:stCondLst>
+                              <p:cond delay="0"/>
+                            </p:stCondLst>
+                            <p:childTnLst>
+                              <p:par>
+                                <p:cTn id="37" presetID="1" presetClass="entr" presetSubtype="0" fill="hold" nodeType="clickEffect">
+                                  <p:stCondLst>
+                                    <p:cond delay="0"/>
+                                  </p:stCondLst>
+                                  <p:childTnLst>
+                                    <p:set>
+                                      <p:cBhvr>
+                                        <p:cTn id="38" dur="1" fill="hold">
+                                          <p:stCondLst>
+                                            <p:cond delay="0"/>
+                                          </p:stCondLst>
+                                        </p:cTn>
+                                        <p:tgtEl>
+                                          <p:spTgt spid="14337"/>
+                                        </p:tgtEl>
+                                        <p:attrNameLst>
+                                          <p:attrName>style.visibility</p:attrName>
+                                        </p:attrNameLst>
+                                      </p:cBhvr>
+                                      <p:to>
+                                        <p:strVal val="visible"/>
+                                      </p:to>
+                                    </p:set>
+                                  </p:childTnLst>
+                                </p:cTn>
+                              </p:par>
+                            </p:childTnLst>
+                          </p:cTn>
+                        </p:par>
+                      </p:childTnLst>
+                    </p:cTn>
+                  </p:par>
+                  <p:par>
+                    <p:cTn id="39" fill="hold">
+                      <p:stCondLst>
+                        <p:cond delay="indefinite"/>
+                      </p:stCondLst>
+                      <p:childTnLst>
+                        <p:par>
+                          <p:cTn id="40" fill="hold">
+                            <p:stCondLst>
+                              <p:cond delay="0"/>
+                            </p:stCondLst>
+                            <p:childTnLst>
+                              <p:par>
+                                <p:cTn id="41" presetID="1" presetClass="entr" presetSubtype="0" fill="hold" nodeType="clickEffect">
+                                  <p:stCondLst>
+                                    <p:cond delay="0"/>
+                                  </p:stCondLst>
+                                  <p:childTnLst>
+                                    <p:set>
+                                      <p:cBhvr>
+                                        <p:cTn id="42" dur="1" fill="hold">
+                                          <p:stCondLst>
+                                            <p:cond delay="0"/>
+                                          </p:stCondLst>
+                                        </p:cTn>
+                                        <p:tgtEl>
+                                          <p:spTgt spid="24">
+                                            <p:txEl>
+                                              <p:pRg st="5" end="5"/>
+                                            </p:txEl>
+                                          </p:spTgt>
+                                        </p:tgtEl>
+                                        <p:attrNameLst>
+                                          <p:attrName>style.visibility</p:attrName>
+                                        </p:attrNameLst>
+                                      </p:cBhvr>
+                                      <p:to>
+                                        <p:strVal val="visible"/>
+                                      </p:to>
+                                    </p:set>
+                                  </p:childTnLst>
+                                </p:cTn>
+                              </p:par>
+                            </p:childTnLst>
+                          </p:cTn>
+                        </p:par>
+                      </p:childTnLst>
+                    </p:cTn>
+                  </p:par>
+                  <p:par>
+                    <p:cTn id="43" fill="hold">
+                      <p:stCondLst>
+                        <p:cond delay="indefinite"/>
+                      </p:stCondLst>
+                      <p:childTnLst>
+                        <p:par>
+                          <p:cTn id="44" fill="hold">
+                            <p:stCondLst>
+                              <p:cond delay="0"/>
+                            </p:stCondLst>
+                            <p:childTnLst>
+                              <p:par>
+                                <p:cTn id="45" presetID="1" presetClass="entr" presetSubtype="0" fill="hold" nodeType="clickEffect">
+                                  <p:stCondLst>
+                                    <p:cond delay="0"/>
+                                  </p:stCondLst>
+                                  <p:childTnLst>
+                                    <p:set>
+                                      <p:cBhvr>
+                                        <p:cTn id="46" dur="1" fill="hold">
+                                          <p:stCondLst>
+                                            <p:cond delay="0"/>
+                                          </p:stCondLst>
+                                        </p:cTn>
+                                        <p:tgtEl>
+                                          <p:spTgt spid="14340"/>
+                                        </p:tgtEl>
+                                        <p:attrNameLst>
+                                          <p:attrName>style.visibility</p:attrName>
+                                        </p:attrNameLst>
+                                      </p:cBhvr>
+                                      <p:to>
+                                        <p:strVal val="visible"/>
+                                      </p:to>
+                                    </p:set>
+                                  </p:childTnLst>
+                                </p:cTn>
+                              </p:par>
+                            </p:childTnLst>
+                          </p:cTn>
+                        </p:par>
+                      </p:childTnLst>
+                    </p:cTn>
+                  </p:par>
+                  <p:par>
+                    <p:cTn id="47" fill="hold">
+                      <p:stCondLst>
+                        <p:cond delay="indefinite"/>
+                      </p:stCondLst>
+                      <p:childTnLst>
+                        <p:par>
+                          <p:cTn id="48" fill="hold">
+                            <p:stCondLst>
+                              <p:cond delay="0"/>
+                            </p:stCondLst>
+                            <p:childTnLst>
+                              <p:par>
+                                <p:cTn id="49" presetID="1" presetClass="entr" presetSubtype="0" fill="hold" nodeType="clickEffect">
+                                  <p:stCondLst>
+                                    <p:cond delay="0"/>
+                                  </p:stCondLst>
+                                  <p:childTnLst>
+                                    <p:set>
+                                      <p:cBhvr>
+                                        <p:cTn id="50" dur="1" fill="hold">
+                                          <p:stCondLst>
+                                            <p:cond delay="0"/>
+                                          </p:stCondLst>
+                                        </p:cTn>
+                                        <p:tgtEl>
+                                          <p:spTgt spid="14364">
+                                            <p:txEl>
+                                              <p:pRg st="0" end="0"/>
+                                            </p:txEl>
+                                          </p:spTgt>
+                                        </p:tgtEl>
+                                        <p:attrNameLst>
+                                          <p:attrName>style.visibility</p:attrName>
+                                        </p:attrNameLst>
+                                      </p:cBhvr>
+                                      <p:to>
+                                        <p:strVal val="visible"/>
+                                      </p:to>
+                                    </p:set>
+                                  </p:childTnLst>
+                                </p:cTn>
+                              </p:par>
+                              <p:par>
+                                <p:cTn id="51" presetID="1" presetClass="entr" presetSubtype="0" fill="hold" nodeType="withEffect">
+                                  <p:stCondLst>
+                                    <p:cond delay="0"/>
+                                  </p:stCondLst>
+                                  <p:childTnLst>
+                                    <p:set>
+                                      <p:cBhvr>
+                                        <p:cTn id="52" dur="1" fill="hold">
+                                          <p:stCondLst>
+                                            <p:cond delay="0"/>
+                                          </p:stCondLst>
+                                        </p:cTn>
+                                        <p:tgtEl>
+                                          <p:spTgt spid="14364">
+                                            <p:txEl>
+                                              <p:pRg st="1" end="1"/>
+                                            </p:txEl>
+                                          </p:spTgt>
+                                        </p:tgtEl>
+                                        <p:attrNameLst>
+                                          <p:attrName>style.visibility</p:attrName>
+                                        </p:attrNameLst>
+                                      </p:cBhvr>
+                                      <p:to>
+                                        <p:strVal val="visible"/>
+                                      </p:to>
+                                    </p:set>
+                                  </p:childTnLst>
+                                </p:cTn>
+                              </p:par>
+                              <p:par>
+                                <p:cTn id="53" presetID="1" presetClass="entr" presetSubtype="0" fill="hold" nodeType="withEffect">
+                                  <p:stCondLst>
+                                    <p:cond delay="0"/>
+                                  </p:stCondLst>
+                                  <p:childTnLst>
+                                    <p:set>
+                                      <p:cBhvr>
+                                        <p:cTn id="54" dur="1" fill="hold">
+                                          <p:stCondLst>
+                                            <p:cond delay="0"/>
+                                          </p:stCondLst>
+                                        </p:cTn>
+                                        <p:tgtEl>
+                                          <p:spTgt spid="14364">
+                                            <p:txEl>
+                                              <p:pRg st="2" end="2"/>
+                                            </p:txEl>
+                                          </p:spTgt>
+                                        </p:tgtEl>
+                                        <p:attrNameLst>
+                                          <p:attrName>style.visibility</p:attrName>
+                                        </p:attrNameLst>
+                                      </p:cBhvr>
+                                      <p:to>
+                                        <p:strVal val="visible"/>
+                                      </p:to>
+                                    </p:set>
+                                  </p:childTnLst>
+                                </p:cTn>
+                              </p:par>
+                              <p:par>
+                                <p:cTn id="55" presetID="1" presetClass="entr" presetSubtype="0" fill="hold" nodeType="withEffect">
+                                  <p:stCondLst>
+                                    <p:cond delay="0"/>
+                                  </p:stCondLst>
+                                  <p:childTnLst>
+                                    <p:set>
+                                      <p:cBhvr>
+                                        <p:cTn id="56" dur="1" fill="hold">
+                                          <p:stCondLst>
+                                            <p:cond delay="0"/>
+                                          </p:stCondLst>
+                                        </p:cTn>
+                                        <p:tgtEl>
+                                          <p:spTgt spid="14354"/>
+                                        </p:tgtEl>
+                                        <p:attrNameLst>
+                                          <p:attrName>style.visibility</p:attrName>
+                                        </p:attrNameLst>
+                                      </p:cBhvr>
+                                      <p:to>
+                                        <p:strVal val="visible"/>
+                                      </p:to>
+                                    </p:set>
+                                  </p:childTnLst>
+                                </p:cTn>
+                              </p:par>
+                              <p:par>
+                                <p:cTn id="57" presetID="1" presetClass="entr" presetSubtype="0" fill="hold" nodeType="withEffect">
+                                  <p:stCondLst>
+                                    <p:cond delay="0"/>
+                                  </p:stCondLst>
+                                  <p:childTnLst>
+                                    <p:set>
+                                      <p:cBhvr>
+                                        <p:cTn id="58" dur="1" fill="hold">
+                                          <p:stCondLst>
+                                            <p:cond delay="0"/>
+                                          </p:stCondLst>
+                                        </p:cTn>
+                                        <p:tgtEl>
+                                          <p:spTgt spid="14357"/>
+                                        </p:tgtEl>
+                                        <p:attrNameLst>
+                                          <p:attrName>style.visibility</p:attrName>
+                                        </p:attrNameLst>
+                                      </p:cBhvr>
+                                      <p:to>
+                                        <p:strVal val="visible"/>
+                                      </p:to>
+                                    </p:set>
+                                  </p:childTnLst>
+                                </p:cTn>
+                              </p:par>
+                              <p:par>
+                                <p:cTn id="59" presetID="1" presetClass="entr" presetSubtype="0" fill="hold" nodeType="withEffect">
+                                  <p:stCondLst>
+                                    <p:cond delay="0"/>
+                                  </p:stCondLst>
+                                  <p:childTnLst>
+                                    <p:set>
+                                      <p:cBhvr>
+                                        <p:cTn id="60" dur="1" fill="hold">
+                                          <p:stCondLst>
+                                            <p:cond delay="0"/>
+                                          </p:stCondLst>
+                                        </p:cTn>
+                                        <p:tgtEl>
+                                          <p:spTgt spid="14344"/>
+                                        </p:tgtEl>
+                                        <p:attrNameLst>
+                                          <p:attrName>style.visibility</p:attrName>
+                                        </p:attrNameLst>
+                                      </p:cBhvr>
+                                      <p:to>
+                                        <p:strVal val="visible"/>
+                                      </p:to>
+                                    </p:set>
+                                  </p:childTnLst>
+                                </p:cTn>
+                              </p:par>
+                            </p:childTnLst>
+                          </p:cTn>
+                        </p:par>
+                      </p:childTnLst>
+                    </p:cTn>
+                  </p:par>
+                  <p:par>
+                    <p:cTn id="61" fill="hold">
+                      <p:stCondLst>
+                        <p:cond delay="indefinite"/>
+                      </p:stCondLst>
+                      <p:childTnLst>
+                        <p:par>
+                          <p:cTn id="62" fill="hold">
+                            <p:stCondLst>
+                              <p:cond delay="0"/>
+                            </p:stCondLst>
+                            <p:childTnLst>
+                              <p:par>
+                                <p:cTn id="63" presetID="1" presetClass="entr" presetSubtype="0" fill="hold" nodeType="clickEffect">
+                                  <p:stCondLst>
+                                    <p:cond delay="0"/>
+                                  </p:stCondLst>
+                                  <p:childTnLst>
+                                    <p:set>
+                                      <p:cBhvr>
+                                        <p:cTn id="64" dur="1" fill="hold">
+                                          <p:stCondLst>
+                                            <p:cond delay="0"/>
+                                          </p:stCondLst>
+                                        </p:cTn>
+                                        <p:tgtEl>
+                                          <p:spTgt spid="14361"/>
+                                        </p:tgtEl>
+                                        <p:attrNameLst>
+                                          <p:attrName>style.visibility</p:attrName>
+                                        </p:attrNameLst>
+                                      </p:cBhvr>
+                                      <p:to>
+                                        <p:strVal val="visible"/>
+                                      </p:to>
+                                    </p:set>
+                                  </p:childTnLst>
+                                </p:cTn>
+                              </p:par>
+                            </p:childTnLst>
+                          </p:cTn>
+                        </p:par>
+                      </p:childTnLst>
+                    </p:cTn>
+                  </p:par>
+                  <p:par>
+                    <p:cTn id="65" fill="hold">
+                      <p:stCondLst>
+                        <p:cond delay="indefinite"/>
+                      </p:stCondLst>
+                      <p:childTnLst>
+                        <p:par>
+                          <p:cTn id="66" fill="hold">
+                            <p:stCondLst>
+                              <p:cond delay="0"/>
+                            </p:stCondLst>
+                            <p:childTnLst>
+                              <p:par>
+                                <p:cTn id="67" presetID="1" presetClass="entr" presetSubtype="0" fill="hold" nodeType="clickEffect">
+                                  <p:stCondLst>
+                                    <p:cond delay="0"/>
+                                  </p:stCondLst>
+                                  <p:childTnLst>
+                                    <p:set>
+                                      <p:cBhvr>
+                                        <p:cTn id="68" dur="1" fill="hold">
+                                          <p:stCondLst>
+                                            <p:cond delay="0"/>
+                                          </p:stCondLst>
+                                        </p:cTn>
+                                        <p:tgtEl>
+                                          <p:spTgt spid="14360"/>
+                                        </p:tgtEl>
+                                        <p:attrNameLst>
+                                          <p:attrName>style.visibility</p:attrName>
+                                        </p:attrNameLst>
+                                      </p:cBhvr>
+                                      <p:to>
+                                        <p:strVal val="visible"/>
+                                      </p:to>
+                                    </p:set>
+                                  </p:childTnLst>
+                                </p:cTn>
+                              </p:par>
+                            </p:childTnLst>
+                          </p:cTn>
+                        </p:par>
+                      </p:childTnLst>
+                    </p:cTn>
+                  </p:par>
+                  <p:par>
+                    <p:cTn id="69" fill="hold">
+                      <p:stCondLst>
+                        <p:cond delay="indefinite"/>
+                      </p:stCondLst>
+                      <p:childTnLst>
+                        <p:par>
+                          <p:cTn id="70" fill="hold">
+                            <p:stCondLst>
+                              <p:cond delay="0"/>
+                            </p:stCondLst>
+                            <p:childTnLst>
+                              <p:par>
+                                <p:cTn id="71" presetID="1" presetClass="entr" presetSubtype="0" fill="hold" nodeType="clickEffect">
+                                  <p:stCondLst>
+                                    <p:cond delay="0"/>
+                                  </p:stCondLst>
+                                  <p:childTnLst>
+                                    <p:set>
+                                      <p:cBhvr>
+                                        <p:cTn id="72" dur="1" fill="hold">
+                                          <p:stCondLst>
+                                            <p:cond delay="0"/>
+                                          </p:stCondLst>
+                                        </p:cTn>
+                                        <p:tgtEl>
+                                          <p:spTgt spid="14364">
+                                            <p:txEl>
+                                              <p:pRg st="4" end="4"/>
+                                            </p:txEl>
+                                          </p:spTgt>
+                                        </p:tgtEl>
+                                        <p:attrNameLst>
+                                          <p:attrName>style.visibility</p:attrName>
+                                        </p:attrNameLst>
+                                      </p:cBhvr>
+                                      <p:to>
+                                        <p:strVal val="visible"/>
+                                      </p:to>
+                                    </p:set>
+                                  </p:childTnLst>
+                                </p:cTn>
+                              </p:par>
+                            </p:childTnLst>
+                          </p:cTn>
+                        </p:par>
+                      </p:childTnLst>
+                    </p:cTn>
+                  </p:par>
+                  <p:par>
+                    <p:cTn id="73" fill="hold">
+                      <p:stCondLst>
+                        <p:cond delay="indefinite"/>
+                      </p:stCondLst>
+                      <p:childTnLst>
+                        <p:par>
+                          <p:cTn id="74" fill="hold">
+                            <p:stCondLst>
+                              <p:cond delay="0"/>
+                            </p:stCondLst>
+                            <p:childTnLst>
+                              <p:par>
+                                <p:cTn id="75" presetID="1" presetClass="entr" presetSubtype="0" fill="hold" nodeType="clickEffect">
+                                  <p:stCondLst>
+                                    <p:cond delay="0"/>
+                                  </p:stCondLst>
+                                  <p:childTnLst>
+                                    <p:set>
+                                      <p:cBhvr>
+                                        <p:cTn id="76" dur="1" fill="hold">
+                                          <p:stCondLst>
+                                            <p:cond delay="0"/>
+                                          </p:stCondLst>
+                                        </p:cTn>
+                                        <p:tgtEl>
+                                          <p:spTgt spid="14367"/>
+                                        </p:tgtEl>
+                                        <p:attrNameLst>
+                                          <p:attrName>style.visibility</p:attrName>
+                                        </p:attrNameLst>
+                                      </p:cBhvr>
+                                      <p:to>
+                                        <p:strVal val="visible"/>
+                                      </p:to>
+                                    </p:set>
+                                  </p:childTnLst>
+                                </p:cTn>
+                              </p:par>
+                            </p:childTnLst>
+                          </p:cTn>
+                        </p:par>
+                      </p:childTnLst>
+                    </p:cTn>
+                  </p:par>
+                </p:childTnLst>
+              </p:cTn>
+              <p:prevCondLst>
+                <p:cond evt="onPrev" delay="0">
+                  <p:tgtEl>
+                    <p:sldTgt/>
+                  </p:tgtEl>
+                </p:cond>
+              </p:prevCondLst>
+              <p:nextCondLst>
+                <p:cond evt="onNext" delay="0">
+                  <p:tgtEl>
+                    <p:sldTgt/>
+                  </p:tgtEl>
+                </p:cond>
+              </p:nextCondLst>
+            </p:seq>
+          </p:childTnLst>
+        </p:cTn>
+      </p:par>
+    </p:tnLst>
+  </p:timing>
 </p:sld>
 </file>
 
 <file path=ppt/slides/slide3.xml><?xml version="1.0" encoding="utf-8"?>
+<p:sld xmlns:a="http://schemas.openxmlformats.org/drawingml/2006/main" xmlns:r="http://schemas.openxmlformats.org/officeDocument/2006/relationships" xmlns:p="http://schemas.openxmlformats.org/presentationml/2006/main">
+  <p:cSld>
+    <p:spTree>
+      <p:nvGrpSpPr>
+        <p:cNvPr id="1" name=""/>
+        <p:cNvGrpSpPr/>
+        <p:nvPr/>
+      </p:nvGrpSpPr>
+      <p:grpSpPr>
+        <a:xfrm>
+          <a:off x="0" y="0"/>
+          <a:ext cx="0" cy="0"/>
+          <a:chOff x="0" y="0"/>
+          <a:chExt cx="0" cy="0"/>
+        </a:xfrm>
+      </p:grpSpPr>
+      <p:sp>
+        <p:nvSpPr>
+          <p:cNvPr id="14338" name="Rectangle 2"/>
+          <p:cNvSpPr>
+            <a:spLocks noGrp="1" noChangeArrowheads="1"/>
+          </p:cNvSpPr>
+          <p:nvPr>
+            <p:ph type="title"/>
+          </p:nvPr>
+        </p:nvSpPr>
+        <p:spPr>
+          <a:xfrm>
+            <a:off x="533400" y="381000"/>
+            <a:ext cx="8382000" cy="838200"/>
+          </a:xfrm>
+        </p:spPr>
+        <p:txBody>
+          <a:bodyPr>
+            <a:normAutofit/>
+          </a:bodyPr>
+          <a:lstStyle/>
+          <a:p>
+            <a:pPr eaLnBrk="1" hangingPunct="1"/>
+            <a:r>
+              <a:rPr lang="en-US" altLang="zh-CN" sz="3600" dirty="0">
+                <a:solidFill>
+                  <a:srgbClr val="0000FF"/>
+                </a:solidFill>
+              </a:rPr>
+              <a:t>Pointers and Arrays</a:t>
+            </a:r>
+            <a:endParaRPr lang="en-GB" sz="3600" dirty="0">
+              <a:solidFill>
+                <a:srgbClr val="0000FF"/>
+              </a:solidFill>
+            </a:endParaRPr>
+          </a:p>
+        </p:txBody>
+      </p:sp>
+      <p:sp>
+        <p:nvSpPr>
+          <p:cNvPr id="2" name="Footer Placeholder 1">
+            <a:extLst>
+              <a:ext uri="{FF2B5EF4-FFF2-40B4-BE49-F238E27FC236}">
+                <a16:creationId xmlns:a16="http://schemas.microsoft.com/office/drawing/2014/main" id="{2C730D45-31EF-F82A-B4A6-311999C339B8}"/>
+              </a:ext>
+            </a:extLst>
+          </p:cNvPr>
+          <p:cNvSpPr>
+            <a:spLocks noGrp="1"/>
+          </p:cNvSpPr>
+          <p:nvPr>
+            <p:ph type="ftr" sz="quarter" idx="11"/>
+          </p:nvPr>
+        </p:nvSpPr>
+        <p:spPr/>
+        <p:txBody>
+          <a:bodyPr/>
+          <a:lstStyle/>
+          <a:p>
+            <a:pPr algn="l">
+              <a:defRPr/>
+            </a:pPr>
+            <a:r>
+              <a:rPr lang="en-US"/>
+              <a:t>CS1010: Programming Methodology</a:t>
+            </a:r>
+          </a:p>
+        </p:txBody>
+      </p:sp>
+      <p:sp>
+        <p:nvSpPr>
+          <p:cNvPr id="3" name="Slide Number Placeholder 2">
+            <a:extLst>
+              <a:ext uri="{FF2B5EF4-FFF2-40B4-BE49-F238E27FC236}">
+                <a16:creationId xmlns:a16="http://schemas.microsoft.com/office/drawing/2014/main" id="{431E835B-B30C-9E87-9DB8-70B6CDEE9704}"/>
+              </a:ext>
+            </a:extLst>
+          </p:cNvPr>
+          <p:cNvSpPr>
+            <a:spLocks noGrp="1"/>
+          </p:cNvSpPr>
+          <p:nvPr>
+            <p:ph type="sldNum" sz="quarter" idx="12"/>
+          </p:nvPr>
+        </p:nvSpPr>
+        <p:spPr/>
+        <p:txBody>
+          <a:bodyPr/>
+          <a:lstStyle/>
+          <a:p>
+            <a:pPr>
+              <a:defRPr/>
+            </a:pPr>
+            <a:r>
+              <a:rPr lang="en-US" dirty="0"/>
+              <a:t>Week8R - </a:t>
+            </a:r>
+            <a:fld id="{2E4790E1-2590-4AEE-892D-AB46A7688113}" type="slidenum">
+              <a:rPr lang="en-US" smtClean="0"/>
+              <a:pPr>
+                <a:defRPr/>
+              </a:pPr>
+              <a:t>3</a:t>
+            </a:fld>
+            <a:endParaRPr lang="en-US" dirty="0"/>
+          </a:p>
+        </p:txBody>
+      </p:sp>
+      <p:sp>
+        <p:nvSpPr>
+          <p:cNvPr id="4" name="Content Placeholder 5">
+            <a:extLst>
+              <a:ext uri="{FF2B5EF4-FFF2-40B4-BE49-F238E27FC236}">
+                <a16:creationId xmlns:a16="http://schemas.microsoft.com/office/drawing/2014/main" id="{E1783DF5-5055-11C4-2722-992E62E81F11}"/>
+              </a:ext>
+            </a:extLst>
+          </p:cNvPr>
+          <p:cNvSpPr>
+            <a:spLocks noGrp="1"/>
+          </p:cNvSpPr>
+          <p:nvPr>
+            <p:ph idx="1"/>
+          </p:nvPr>
+        </p:nvSpPr>
+        <p:spPr>
+          <a:xfrm>
+            <a:off x="587375" y="1187450"/>
+            <a:ext cx="8292856" cy="5449656"/>
+          </a:xfrm>
+        </p:spPr>
+        <p:txBody>
+          <a:bodyPr>
+            <a:noAutofit/>
+          </a:bodyPr>
+          <a:lstStyle/>
+          <a:p>
+            <a:pPr marL="347663" indent="-347663">
+              <a:spcBef>
+                <a:spcPts val="600"/>
+              </a:spcBef>
+              <a:buClr>
+                <a:schemeClr val="tx1">
+                  <a:lumMod val="90000"/>
+                  <a:lumOff val="10000"/>
+                </a:schemeClr>
+              </a:buClr>
+              <a:buSzPct val="100000"/>
+              <a:buFont typeface="Wingdings" panose="05000000000000000000" pitchFamily="2" charset="2"/>
+              <a:buChar char="§"/>
+              <a:defRPr/>
+            </a:pPr>
+            <a:r>
+              <a:rPr lang="en-US" sz="2800" dirty="0"/>
+              <a:t>Pointers can often be interpreted as arrays.</a:t>
+            </a:r>
+          </a:p>
+          <a:p>
+            <a:pPr marL="347663" indent="-347663">
+              <a:spcBef>
+                <a:spcPts val="600"/>
+              </a:spcBef>
+              <a:buClr>
+                <a:schemeClr val="tx1">
+                  <a:lumMod val="90000"/>
+                  <a:lumOff val="10000"/>
+                </a:schemeClr>
+              </a:buClr>
+              <a:buSzPct val="100000"/>
+              <a:buFont typeface="Wingdings" panose="05000000000000000000" pitchFamily="2" charset="2"/>
+              <a:buChar char="§"/>
+              <a:defRPr/>
+            </a:pPr>
+            <a:endParaRPr lang="en-US" sz="2800" dirty="0"/>
+          </a:p>
+          <a:p>
+            <a:pPr marL="347663" indent="-347663">
+              <a:spcBef>
+                <a:spcPts val="600"/>
+              </a:spcBef>
+              <a:buClr>
+                <a:schemeClr val="tx1">
+                  <a:lumMod val="90000"/>
+                  <a:lumOff val="10000"/>
+                </a:schemeClr>
+              </a:buClr>
+              <a:buSzPct val="100000"/>
+              <a:buFont typeface="Wingdings" panose="05000000000000000000" pitchFamily="2" charset="2"/>
+              <a:buChar char="§"/>
+              <a:defRPr/>
+            </a:pPr>
+            <a:endParaRPr lang="en-US" sz="2800" dirty="0"/>
+          </a:p>
+          <a:p>
+            <a:pPr marL="0" indent="0">
+              <a:spcBef>
+                <a:spcPts val="600"/>
+              </a:spcBef>
+              <a:buClr>
+                <a:schemeClr val="tx1">
+                  <a:lumMod val="90000"/>
+                  <a:lumOff val="10000"/>
+                </a:schemeClr>
+              </a:buClr>
+              <a:buSzPct val="100000"/>
+              <a:buNone/>
+              <a:defRPr/>
+            </a:pPr>
+            <a:endParaRPr lang="en-US" sz="1200" dirty="0"/>
+          </a:p>
+          <a:p>
+            <a:pPr marL="0" indent="0">
+              <a:spcBef>
+                <a:spcPts val="600"/>
+              </a:spcBef>
+              <a:buClr>
+                <a:schemeClr val="tx1">
+                  <a:lumMod val="90000"/>
+                  <a:lumOff val="10000"/>
+                </a:schemeClr>
+              </a:buClr>
+              <a:buSzPct val="100000"/>
+              <a:buNone/>
+              <a:defRPr/>
+            </a:pPr>
+            <a:endParaRPr lang="en-US" sz="1200" dirty="0"/>
+          </a:p>
+          <a:p>
+            <a:pPr marL="0" indent="0">
+              <a:spcBef>
+                <a:spcPts val="600"/>
+              </a:spcBef>
+              <a:buClr>
+                <a:schemeClr val="tx1">
+                  <a:lumMod val="90000"/>
+                  <a:lumOff val="10000"/>
+                </a:schemeClr>
+              </a:buClr>
+              <a:buSzPct val="100000"/>
+              <a:buNone/>
+              <a:defRPr/>
+            </a:pPr>
+            <a:endParaRPr lang="en-US" sz="1200" dirty="0"/>
+          </a:p>
+          <a:p>
+            <a:pPr marL="0" indent="0">
+              <a:spcBef>
+                <a:spcPts val="600"/>
+              </a:spcBef>
+              <a:buClr>
+                <a:schemeClr val="tx1">
+                  <a:lumMod val="90000"/>
+                  <a:lumOff val="10000"/>
+                </a:schemeClr>
+              </a:buClr>
+              <a:buSzPct val="100000"/>
+              <a:buNone/>
+              <a:defRPr/>
+            </a:pPr>
+            <a:endParaRPr lang="en-US" sz="1200" dirty="0"/>
+          </a:p>
+          <a:p>
+            <a:pPr marL="0" indent="0">
+              <a:spcBef>
+                <a:spcPts val="600"/>
+              </a:spcBef>
+              <a:buClr>
+                <a:schemeClr val="tx1">
+                  <a:lumMod val="90000"/>
+                  <a:lumOff val="10000"/>
+                </a:schemeClr>
+              </a:buClr>
+              <a:buSzPct val="100000"/>
+              <a:buNone/>
+              <a:defRPr/>
+            </a:pPr>
+            <a:endParaRPr lang="en-US" sz="1200" dirty="0"/>
+          </a:p>
+          <a:p>
+            <a:pPr marL="621983" lvl="1" indent="-347663">
+              <a:spcBef>
+                <a:spcPts val="600"/>
+              </a:spcBef>
+              <a:buClr>
+                <a:schemeClr val="tx1">
+                  <a:lumMod val="90000"/>
+                  <a:lumOff val="10000"/>
+                </a:schemeClr>
+              </a:buClr>
+              <a:buSzPct val="100000"/>
+              <a:buFont typeface="Wingdings" panose="05000000000000000000" pitchFamily="2" charset="2"/>
+              <a:buChar char="§"/>
+              <a:defRPr/>
+            </a:pPr>
+            <a:endParaRPr lang="en-US" sz="2400" dirty="0"/>
+          </a:p>
+          <a:p>
+            <a:pPr marL="621983" lvl="1" indent="-347663">
+              <a:spcBef>
+                <a:spcPts val="600"/>
+              </a:spcBef>
+              <a:buClr>
+                <a:schemeClr val="tx1">
+                  <a:lumMod val="90000"/>
+                  <a:lumOff val="10000"/>
+                </a:schemeClr>
+              </a:buClr>
+              <a:buSzPct val="100000"/>
+              <a:buFont typeface="Wingdings" panose="05000000000000000000" pitchFamily="2" charset="2"/>
+              <a:buChar char="§"/>
+              <a:defRPr/>
+            </a:pPr>
+            <a:endParaRPr lang="en-US" sz="2400" dirty="0"/>
+          </a:p>
+          <a:p>
+            <a:pPr marL="621983" lvl="1" indent="-347663">
+              <a:spcBef>
+                <a:spcPts val="600"/>
+              </a:spcBef>
+              <a:buClr>
+                <a:schemeClr val="tx1">
+                  <a:lumMod val="90000"/>
+                  <a:lumOff val="10000"/>
+                </a:schemeClr>
+              </a:buClr>
+              <a:buSzPct val="100000"/>
+              <a:buFont typeface="Wingdings" panose="05000000000000000000" pitchFamily="2" charset="2"/>
+              <a:buChar char="§"/>
+              <a:defRPr/>
+            </a:pPr>
+            <a:endParaRPr lang="en-US" sz="2400" dirty="0"/>
+          </a:p>
+          <a:p>
+            <a:pPr marL="347663" indent="-347663">
+              <a:spcBef>
+                <a:spcPts val="600"/>
+              </a:spcBef>
+              <a:buClr>
+                <a:schemeClr val="tx1">
+                  <a:lumMod val="90000"/>
+                  <a:lumOff val="10000"/>
+                </a:schemeClr>
+              </a:buClr>
+              <a:buSzPct val="100000"/>
+              <a:buFont typeface="Wingdings" panose="05000000000000000000" pitchFamily="2" charset="2"/>
+              <a:buChar char="§"/>
+              <a:defRPr/>
+            </a:pPr>
+            <a:r>
+              <a:rPr lang="en-US" sz="2800" dirty="0"/>
+              <a:t>For problem solving with arrays, it is fine to stick to the array notation in general.</a:t>
+            </a:r>
+          </a:p>
+          <a:p>
+            <a:pPr marL="621983" lvl="1" indent="-347663">
+              <a:spcBef>
+                <a:spcPts val="600"/>
+              </a:spcBef>
+              <a:buClr>
+                <a:schemeClr val="tx1">
+                  <a:lumMod val="90000"/>
+                  <a:lumOff val="10000"/>
+                </a:schemeClr>
+              </a:buClr>
+              <a:buSzPct val="100000"/>
+              <a:buFont typeface="Wingdings" panose="05000000000000000000" pitchFamily="2" charset="2"/>
+              <a:buChar char="§"/>
+              <a:defRPr/>
+            </a:pPr>
+            <a:endParaRPr lang="en-US" sz="2400" dirty="0"/>
+          </a:p>
+          <a:p>
+            <a:pPr marL="347663" indent="-347663">
+              <a:spcBef>
+                <a:spcPts val="600"/>
+              </a:spcBef>
+              <a:buClr>
+                <a:schemeClr val="tx1">
+                  <a:lumMod val="90000"/>
+                  <a:lumOff val="10000"/>
+                </a:schemeClr>
+              </a:buClr>
+              <a:buSzPct val="100000"/>
+              <a:buFont typeface="Wingdings" panose="05000000000000000000" pitchFamily="2" charset="2"/>
+              <a:buChar char="§"/>
+              <a:defRPr/>
+            </a:pPr>
+            <a:endParaRPr lang="en-US" dirty="0"/>
+          </a:p>
+          <a:p>
+            <a:pPr marL="621983" lvl="1" indent="-347663">
+              <a:spcBef>
+                <a:spcPts val="600"/>
+              </a:spcBef>
+              <a:buClr>
+                <a:schemeClr val="tx1">
+                  <a:lumMod val="90000"/>
+                  <a:lumOff val="10000"/>
+                </a:schemeClr>
+              </a:buClr>
+              <a:buSzPct val="100000"/>
+              <a:buFont typeface="Wingdings" panose="05000000000000000000" pitchFamily="2" charset="2"/>
+              <a:buChar char="§"/>
+              <a:defRPr/>
+            </a:pPr>
+            <a:endParaRPr lang="en-US" dirty="0"/>
+          </a:p>
+        </p:txBody>
+      </p:sp>
+      <p:sp>
+        <p:nvSpPr>
+          <p:cNvPr id="5" name="TextBox 4">
+            <a:extLst>
+              <a:ext uri="{FF2B5EF4-FFF2-40B4-BE49-F238E27FC236}">
+                <a16:creationId xmlns:a16="http://schemas.microsoft.com/office/drawing/2014/main" id="{1F335067-2DF1-C857-A247-B290D4559EF7}"/>
+              </a:ext>
+            </a:extLst>
+          </p:cNvPr>
+          <p:cNvSpPr txBox="1"/>
+          <p:nvPr/>
+        </p:nvSpPr>
+        <p:spPr>
+          <a:xfrm>
+            <a:off x="1014816" y="1749859"/>
+            <a:ext cx="6368964" cy="3139321"/>
+          </a:xfrm>
+          <a:prstGeom prst="rect">
+            <a:avLst/>
+          </a:prstGeom>
+          <a:solidFill>
+            <a:schemeClr val="bg1"/>
+          </a:solidFill>
+          <a:ln w="19050">
+            <a:solidFill>
+              <a:schemeClr val="tx1"/>
+            </a:solidFill>
+          </a:ln>
+        </p:spPr>
+        <p:style>
+          <a:lnRef idx="2">
+            <a:schemeClr val="accent6"/>
+          </a:lnRef>
+          <a:fillRef idx="1">
+            <a:schemeClr val="lt1"/>
+          </a:fillRef>
+          <a:effectRef idx="0">
+            <a:schemeClr val="accent6"/>
+          </a:effectRef>
+          <a:fontRef idx="minor">
+            <a:schemeClr val="dk1"/>
+          </a:fontRef>
+        </p:style>
+        <p:txBody>
+          <a:bodyPr wrap="square" lIns="91440" tIns="45720" rIns="91440" bIns="45720" rtlCol="0" anchor="t">
+            <a:spAutoFit/>
+          </a:bodyPr>
+          <a:lstStyle/>
+          <a:p>
+            <a:pPr>
+              <a:tabLst>
+                <a:tab pos="347663" algn="l"/>
+                <a:tab pos="682625" algn="l"/>
+                <a:tab pos="1087438" algn="l"/>
+                <a:tab pos="1377950" algn="l"/>
+                <a:tab pos="1712913" algn="l"/>
+              </a:tabLst>
+            </a:pPr>
+            <a:r>
+              <a:rPr lang="en-US" b="1" dirty="0">
+                <a:solidFill>
+                  <a:srgbClr val="0000FF"/>
+                </a:solidFill>
+                <a:latin typeface="Courier New" panose="02070309020205020404" pitchFamily="49" charset="0"/>
+                <a:cs typeface="Courier New" panose="02070309020205020404" pitchFamily="49" charset="0"/>
+              </a:rPr>
+              <a:t>long</a:t>
+            </a:r>
+            <a:r>
+              <a:rPr lang="en-US" b="1" dirty="0">
+                <a:solidFill>
+                  <a:schemeClr val="tx1"/>
+                </a:solidFill>
+                <a:latin typeface="Courier New" panose="02070309020205020404" pitchFamily="49" charset="0"/>
+                <a:cs typeface="Courier New" panose="02070309020205020404" pitchFamily="49" charset="0"/>
+              </a:rPr>
+              <a:t> </a:t>
+            </a:r>
+            <a:r>
+              <a:rPr lang="en-US" b="1" dirty="0" err="1">
+                <a:solidFill>
+                  <a:schemeClr val="tx1"/>
+                </a:solidFill>
+                <a:latin typeface="Courier New" panose="02070309020205020404" pitchFamily="49" charset="0"/>
+                <a:cs typeface="Courier New" panose="02070309020205020404" pitchFamily="49" charset="0"/>
+              </a:rPr>
+              <a:t>sum_array</a:t>
+            </a:r>
+            <a:r>
+              <a:rPr lang="en-US" b="1" dirty="0">
+                <a:solidFill>
+                  <a:schemeClr val="tx1"/>
+                </a:solidFill>
+                <a:latin typeface="Courier New" panose="02070309020205020404" pitchFamily="49" charset="0"/>
+                <a:cs typeface="Courier New" panose="02070309020205020404" pitchFamily="49" charset="0"/>
+              </a:rPr>
+              <a:t>(</a:t>
+            </a:r>
+            <a:r>
+              <a:rPr lang="en-US" b="1" dirty="0">
+                <a:solidFill>
+                  <a:srgbClr val="0000FF"/>
+                </a:solidFill>
+                <a:latin typeface="Courier New" panose="02070309020205020404" pitchFamily="49" charset="0"/>
+                <a:cs typeface="Courier New" panose="02070309020205020404" pitchFamily="49" charset="0"/>
+              </a:rPr>
+              <a:t>long</a:t>
+            </a:r>
+            <a:r>
+              <a:rPr lang="en-US" b="1" dirty="0">
+                <a:solidFill>
+                  <a:schemeClr val="tx1"/>
+                </a:solidFill>
+                <a:latin typeface="Courier New" panose="02070309020205020404" pitchFamily="49" charset="0"/>
+                <a:cs typeface="Courier New" panose="02070309020205020404" pitchFamily="49" charset="0"/>
+              </a:rPr>
+              <a:t> array[], </a:t>
+            </a:r>
+            <a:r>
+              <a:rPr lang="en-US" b="1" dirty="0">
+                <a:solidFill>
+                  <a:srgbClr val="0000FF"/>
+                </a:solidFill>
+                <a:latin typeface="Courier New" panose="02070309020205020404" pitchFamily="49" charset="0"/>
+                <a:cs typeface="Courier New" panose="02070309020205020404" pitchFamily="49" charset="0"/>
+              </a:rPr>
+              <a:t>long </a:t>
+            </a:r>
+            <a:r>
+              <a:rPr lang="en-US" b="1" dirty="0">
+                <a:solidFill>
+                  <a:schemeClr val="tx1"/>
+                </a:solidFill>
+                <a:latin typeface="Courier New" panose="02070309020205020404" pitchFamily="49" charset="0"/>
+                <a:cs typeface="Courier New" panose="02070309020205020404" pitchFamily="49" charset="0"/>
+              </a:rPr>
+              <a:t>length){</a:t>
+            </a:r>
+          </a:p>
+          <a:p>
+            <a:pPr>
+              <a:tabLst>
+                <a:tab pos="347663" algn="l"/>
+                <a:tab pos="682625" algn="l"/>
+                <a:tab pos="1087438" algn="l"/>
+                <a:tab pos="1377950" algn="l"/>
+                <a:tab pos="1712913" algn="l"/>
+              </a:tabLst>
+            </a:pPr>
+            <a:r>
+              <a:rPr lang="en-US" b="1" dirty="0">
+                <a:solidFill>
+                  <a:schemeClr val="tx1"/>
+                </a:solidFill>
+                <a:latin typeface="Courier New" panose="02070309020205020404" pitchFamily="49" charset="0"/>
+                <a:cs typeface="Courier New" panose="02070309020205020404" pitchFamily="49" charset="0"/>
+              </a:rPr>
+              <a:t>  …</a:t>
+            </a:r>
+          </a:p>
+          <a:p>
+            <a:pPr>
+              <a:tabLst>
+                <a:tab pos="347663" algn="l"/>
+                <a:tab pos="682625" algn="l"/>
+                <a:tab pos="1087438" algn="l"/>
+                <a:tab pos="1377950" algn="l"/>
+                <a:tab pos="1712913" algn="l"/>
+              </a:tabLst>
+            </a:pPr>
+            <a:r>
+              <a:rPr lang="en-US" b="1" dirty="0">
+                <a:solidFill>
+                  <a:schemeClr val="tx1"/>
+                </a:solidFill>
+                <a:latin typeface="Courier New" panose="02070309020205020404" pitchFamily="49" charset="0"/>
+                <a:cs typeface="Courier New" panose="02070309020205020404" pitchFamily="49" charset="0"/>
+              </a:rPr>
+              <a:t>  array[</a:t>
+            </a:r>
+            <a:r>
+              <a:rPr lang="en-US" b="1" dirty="0" err="1">
+                <a:solidFill>
+                  <a:schemeClr val="tx1"/>
+                </a:solidFill>
+                <a:latin typeface="Courier New" panose="02070309020205020404" pitchFamily="49" charset="0"/>
+                <a:cs typeface="Courier New" panose="02070309020205020404" pitchFamily="49" charset="0"/>
+              </a:rPr>
+              <a:t>i</a:t>
+            </a:r>
+            <a:r>
+              <a:rPr lang="en-US" b="1" dirty="0">
+                <a:solidFill>
+                  <a:schemeClr val="tx1"/>
+                </a:solidFill>
+                <a:latin typeface="Courier New" panose="02070309020205020404" pitchFamily="49" charset="0"/>
+                <a:cs typeface="Courier New" panose="02070309020205020404" pitchFamily="49" charset="0"/>
+              </a:rPr>
+              <a:t>] = …;</a:t>
+            </a:r>
+          </a:p>
+          <a:p>
+            <a:pPr>
+              <a:tabLst>
+                <a:tab pos="347663" algn="l"/>
+                <a:tab pos="682625" algn="l"/>
+                <a:tab pos="1087438" algn="l"/>
+                <a:tab pos="1377950" algn="l"/>
+                <a:tab pos="1712913" algn="l"/>
+              </a:tabLst>
+            </a:pPr>
+            <a:r>
+              <a:rPr lang="en-US" b="1" dirty="0">
+                <a:solidFill>
+                  <a:schemeClr val="tx1"/>
+                </a:solidFill>
+                <a:latin typeface="Courier New" panose="02070309020205020404" pitchFamily="49" charset="0"/>
+                <a:cs typeface="Courier New" panose="02070309020205020404" pitchFamily="49" charset="0"/>
+              </a:rPr>
+              <a:t>  …</a:t>
+            </a:r>
+          </a:p>
+          <a:p>
+            <a:pPr>
+              <a:tabLst>
+                <a:tab pos="347663" algn="l"/>
+                <a:tab pos="682625" algn="l"/>
+                <a:tab pos="1087438" algn="l"/>
+                <a:tab pos="1377950" algn="l"/>
+                <a:tab pos="1712913" algn="l"/>
+              </a:tabLst>
+            </a:pPr>
+            <a:r>
+              <a:rPr lang="en-US" b="1" dirty="0">
+                <a:solidFill>
+                  <a:schemeClr val="tx1"/>
+                </a:solidFill>
+                <a:latin typeface="Courier New" panose="02070309020205020404" pitchFamily="49" charset="0"/>
+                <a:cs typeface="Courier New" panose="02070309020205020404" pitchFamily="49" charset="0"/>
+              </a:rPr>
+              <a:t>} </a:t>
+            </a:r>
+          </a:p>
+          <a:p>
+            <a:pPr>
+              <a:tabLst>
+                <a:tab pos="347663" algn="l"/>
+                <a:tab pos="682625" algn="l"/>
+                <a:tab pos="1087438" algn="l"/>
+                <a:tab pos="1377950" algn="l"/>
+                <a:tab pos="1712913" algn="l"/>
+              </a:tabLst>
+            </a:pPr>
+            <a:endParaRPr lang="en-US" b="1" dirty="0">
+              <a:solidFill>
+                <a:schemeClr val="tx1"/>
+              </a:solidFill>
+              <a:latin typeface="Courier New" panose="02070309020205020404" pitchFamily="49" charset="0"/>
+              <a:cs typeface="Courier New" panose="02070309020205020404" pitchFamily="49" charset="0"/>
+            </a:endParaRPr>
+          </a:p>
+          <a:p>
+            <a:pPr>
+              <a:tabLst>
+                <a:tab pos="347663" algn="l"/>
+                <a:tab pos="682625" algn="l"/>
+                <a:tab pos="1087438" algn="l"/>
+                <a:tab pos="1377950" algn="l"/>
+                <a:tab pos="1712913" algn="l"/>
+              </a:tabLst>
+            </a:pPr>
+            <a:r>
+              <a:rPr lang="en-US" b="1" dirty="0">
+                <a:solidFill>
+                  <a:srgbClr val="0000FF"/>
+                </a:solidFill>
+                <a:latin typeface="Courier New" panose="02070309020205020404" pitchFamily="49" charset="0"/>
+                <a:cs typeface="Courier New" panose="02070309020205020404" pitchFamily="49" charset="0"/>
+              </a:rPr>
+              <a:t>long</a:t>
+            </a:r>
+            <a:r>
+              <a:rPr lang="en-US" b="1" dirty="0">
+                <a:solidFill>
+                  <a:schemeClr val="tx1"/>
+                </a:solidFill>
+                <a:latin typeface="Courier New" panose="02070309020205020404" pitchFamily="49" charset="0"/>
+                <a:cs typeface="Courier New" panose="02070309020205020404" pitchFamily="49" charset="0"/>
+              </a:rPr>
+              <a:t> </a:t>
+            </a:r>
+            <a:r>
+              <a:rPr lang="en-US" b="1" dirty="0" err="1">
+                <a:solidFill>
+                  <a:schemeClr val="tx1"/>
+                </a:solidFill>
+                <a:latin typeface="Courier New" panose="02070309020205020404" pitchFamily="49" charset="0"/>
+                <a:cs typeface="Courier New" panose="02070309020205020404" pitchFamily="49" charset="0"/>
+              </a:rPr>
+              <a:t>sum_array</a:t>
+            </a:r>
+            <a:r>
+              <a:rPr lang="en-US" b="1" dirty="0">
+                <a:solidFill>
+                  <a:schemeClr val="tx1"/>
+                </a:solidFill>
+                <a:latin typeface="Courier New" panose="02070309020205020404" pitchFamily="49" charset="0"/>
+                <a:cs typeface="Courier New" panose="02070309020205020404" pitchFamily="49" charset="0"/>
+              </a:rPr>
+              <a:t>(</a:t>
+            </a:r>
+            <a:r>
+              <a:rPr lang="en-US" b="1" dirty="0">
+                <a:solidFill>
+                  <a:srgbClr val="0000FF"/>
+                </a:solidFill>
+                <a:latin typeface="Courier New" panose="02070309020205020404" pitchFamily="49" charset="0"/>
+                <a:cs typeface="Courier New" panose="02070309020205020404" pitchFamily="49" charset="0"/>
+              </a:rPr>
+              <a:t>long</a:t>
+            </a:r>
+            <a:r>
+              <a:rPr lang="en-US" b="1" dirty="0">
+                <a:solidFill>
+                  <a:schemeClr val="tx1"/>
+                </a:solidFill>
+                <a:latin typeface="Courier New" panose="02070309020205020404" pitchFamily="49" charset="0"/>
+                <a:cs typeface="Courier New" panose="02070309020205020404" pitchFamily="49" charset="0"/>
+              </a:rPr>
+              <a:t> *array, </a:t>
+            </a:r>
+            <a:r>
+              <a:rPr lang="en-US" b="1" dirty="0">
+                <a:solidFill>
+                  <a:srgbClr val="0000FF"/>
+                </a:solidFill>
+                <a:latin typeface="Courier New" panose="02070309020205020404" pitchFamily="49" charset="0"/>
+                <a:cs typeface="Courier New" panose="02070309020205020404" pitchFamily="49" charset="0"/>
+              </a:rPr>
+              <a:t>long </a:t>
+            </a:r>
+            <a:r>
+              <a:rPr lang="en-US" b="1" dirty="0">
+                <a:solidFill>
+                  <a:schemeClr val="tx1"/>
+                </a:solidFill>
+                <a:latin typeface="Courier New" panose="02070309020205020404" pitchFamily="49" charset="0"/>
+                <a:cs typeface="Courier New" panose="02070309020205020404" pitchFamily="49" charset="0"/>
+              </a:rPr>
+              <a:t>length){</a:t>
+            </a:r>
+          </a:p>
+          <a:p>
+            <a:pPr>
+              <a:tabLst>
+                <a:tab pos="347663" algn="l"/>
+                <a:tab pos="682625" algn="l"/>
+                <a:tab pos="1087438" algn="l"/>
+                <a:tab pos="1377950" algn="l"/>
+                <a:tab pos="1712913" algn="l"/>
+              </a:tabLst>
+            </a:pPr>
+            <a:r>
+              <a:rPr lang="en-US" b="1" dirty="0">
+                <a:solidFill>
+                  <a:schemeClr val="tx1"/>
+                </a:solidFill>
+                <a:latin typeface="Courier New" panose="02070309020205020404" pitchFamily="49" charset="0"/>
+                <a:cs typeface="Courier New" panose="02070309020205020404" pitchFamily="49" charset="0"/>
+              </a:rPr>
+              <a:t>  …</a:t>
+            </a:r>
+          </a:p>
+          <a:p>
+            <a:pPr>
+              <a:tabLst>
+                <a:tab pos="347663" algn="l"/>
+                <a:tab pos="682625" algn="l"/>
+                <a:tab pos="1087438" algn="l"/>
+                <a:tab pos="1377950" algn="l"/>
+                <a:tab pos="1712913" algn="l"/>
+              </a:tabLst>
+            </a:pPr>
+            <a:r>
+              <a:rPr lang="en-US" b="1" dirty="0">
+                <a:solidFill>
+                  <a:schemeClr val="tx1"/>
+                </a:solidFill>
+                <a:latin typeface="Courier New" panose="02070309020205020404" pitchFamily="49" charset="0"/>
+                <a:cs typeface="Courier New" panose="02070309020205020404" pitchFamily="49" charset="0"/>
+              </a:rPr>
+              <a:t>  array[</a:t>
+            </a:r>
+            <a:r>
+              <a:rPr lang="en-US" b="1" dirty="0" err="1">
+                <a:solidFill>
+                  <a:schemeClr val="tx1"/>
+                </a:solidFill>
+                <a:latin typeface="Courier New" panose="02070309020205020404" pitchFamily="49" charset="0"/>
+                <a:cs typeface="Courier New" panose="02070309020205020404" pitchFamily="49" charset="0"/>
+              </a:rPr>
+              <a:t>i</a:t>
+            </a:r>
+            <a:r>
+              <a:rPr lang="en-US" b="1" dirty="0">
+                <a:solidFill>
+                  <a:schemeClr val="tx1"/>
+                </a:solidFill>
+                <a:latin typeface="Courier New" panose="02070309020205020404" pitchFamily="49" charset="0"/>
+                <a:cs typeface="Courier New" panose="02070309020205020404" pitchFamily="49" charset="0"/>
+              </a:rPr>
+              <a:t>] = …;</a:t>
+            </a:r>
+          </a:p>
+          <a:p>
+            <a:pPr>
+              <a:tabLst>
+                <a:tab pos="347663" algn="l"/>
+                <a:tab pos="682625" algn="l"/>
+                <a:tab pos="1087438" algn="l"/>
+                <a:tab pos="1377950" algn="l"/>
+                <a:tab pos="1712913" algn="l"/>
+              </a:tabLst>
+            </a:pPr>
+            <a:r>
+              <a:rPr lang="en-US" b="1" dirty="0">
+                <a:solidFill>
+                  <a:schemeClr val="tx1"/>
+                </a:solidFill>
+                <a:latin typeface="Courier New" panose="02070309020205020404" pitchFamily="49" charset="0"/>
+                <a:cs typeface="Courier New" panose="02070309020205020404" pitchFamily="49" charset="0"/>
+              </a:rPr>
+              <a:t>  …</a:t>
+            </a:r>
+          </a:p>
+          <a:p>
+            <a:pPr>
+              <a:tabLst>
+                <a:tab pos="347663" algn="l"/>
+                <a:tab pos="682625" algn="l"/>
+                <a:tab pos="1087438" algn="l"/>
+                <a:tab pos="1377950" algn="l"/>
+                <a:tab pos="1712913" algn="l"/>
+              </a:tabLst>
+            </a:pPr>
+            <a:r>
+              <a:rPr lang="en-US" b="1" dirty="0">
+                <a:solidFill>
+                  <a:schemeClr val="tx1"/>
+                </a:solidFill>
+                <a:latin typeface="Courier New" panose="02070309020205020404" pitchFamily="49" charset="0"/>
+                <a:cs typeface="Courier New" panose="02070309020205020404" pitchFamily="49" charset="0"/>
+              </a:rPr>
+              <a:t>}</a:t>
+            </a:r>
+          </a:p>
+        </p:txBody>
+      </p:sp>
+      <p:sp>
+        <p:nvSpPr>
+          <p:cNvPr id="6" name="Date Placeholder 5">
+            <a:extLst>
+              <a:ext uri="{FF2B5EF4-FFF2-40B4-BE49-F238E27FC236}">
+                <a16:creationId xmlns:a16="http://schemas.microsoft.com/office/drawing/2014/main" id="{FE571DCD-2AA8-6E1D-0132-D5358DB54D8B}"/>
+              </a:ext>
+            </a:extLst>
+          </p:cNvPr>
+          <p:cNvSpPr>
+            <a:spLocks noGrp="1"/>
+          </p:cNvSpPr>
+          <p:nvPr>
+            <p:ph type="dt" sz="half" idx="10"/>
+          </p:nvPr>
+        </p:nvSpPr>
+        <p:spPr/>
+        <p:txBody>
+          <a:bodyPr/>
+          <a:lstStyle/>
+          <a:p>
+            <a:pPr>
+              <a:defRPr/>
+            </a:pPr>
+            <a:r>
+              <a:rPr lang="en-US"/>
+              <a:t>© NUS</a:t>
+            </a:r>
+          </a:p>
+        </p:txBody>
+      </p:sp>
+    </p:spTree>
+    <p:extLst>
+      <p:ext uri="{BB962C8B-B14F-4D97-AF65-F5344CB8AC3E}">
+        <p14:creationId xmlns:p14="http://schemas.microsoft.com/office/powerpoint/2010/main" val="3150831465"/>
+      </p:ext>
+    </p:extLst>
+  </p:cSld>
+  <p:clrMapOvr>
+    <a:masterClrMapping/>
+  </p:clrMapOvr>
+  <p:transition>
+    <p:fade/>
+  </p:transition>
+</p:sld>
+</file>
+
+<file path=ppt/slides/slide4.xml><?xml version="1.0" encoding="utf-8"?>
 <p:sld xmlns:a="http://schemas.openxmlformats.org/drawingml/2006/main" xmlns:r="http://schemas.openxmlformats.org/officeDocument/2006/relationships" xmlns:p="http://schemas.openxmlformats.org/presentationml/2006/main">
   <p:cSld>
     <p:spTree>
@@ -13594,7 +17041,7 @@
               <a:pPr>
                 <a:defRPr/>
               </a:pPr>
-              <a:t>3</a:t>
+              <a:t>4</a:t>
             </a:fld>
             <a:endParaRPr lang="en-US" dirty="0"/>
           </a:p>
@@ -13950,7 +17397,7 @@
 </p:sld>
 </file>
 
-<file path=ppt/slides/slide4.xml><?xml version="1.0" encoding="utf-8"?>
+<file path=ppt/slides/slide5.xml><?xml version="1.0" encoding="utf-8"?>
 <p:sld xmlns:a="http://schemas.openxmlformats.org/drawingml/2006/main" xmlns:r="http://schemas.openxmlformats.org/officeDocument/2006/relationships" xmlns:p="http://schemas.openxmlformats.org/presentationml/2006/main">
   <p:cSld>
     <p:spTree>
@@ -14945,7 +18392,7 @@
               <a:pPr>
                 <a:defRPr/>
               </a:pPr>
-              <a:t>4</a:t>
+              <a:t>5</a:t>
             </a:fld>
             <a:endParaRPr lang="en-US" dirty="0"/>
           </a:p>
@@ -15913,710 +19360,6 @@
     <p:extLst>
       <p:ext uri="{BB962C8B-B14F-4D97-AF65-F5344CB8AC3E}">
         <p14:creationId xmlns:p14="http://schemas.microsoft.com/office/powerpoint/2010/main" val="649273319"/>
-      </p:ext>
-    </p:extLst>
-  </p:cSld>
-  <p:clrMapOvr>
-    <a:masterClrMapping/>
-  </p:clrMapOvr>
-  <p:transition>
-    <p:fade/>
-  </p:transition>
-</p:sld>
-</file>
-
-<file path=ppt/slides/slide5.xml><?xml version="1.0" encoding="utf-8"?>
-<p:sld xmlns:a="http://schemas.openxmlformats.org/drawingml/2006/main" xmlns:r="http://schemas.openxmlformats.org/officeDocument/2006/relationships" xmlns:p="http://schemas.openxmlformats.org/presentationml/2006/main">
-  <p:cSld>
-    <p:spTree>
-      <p:nvGrpSpPr>
-        <p:cNvPr id="1" name=""/>
-        <p:cNvGrpSpPr/>
-        <p:nvPr/>
-      </p:nvGrpSpPr>
-      <p:grpSpPr>
-        <a:xfrm>
-          <a:off x="0" y="0"/>
-          <a:ext cx="0" cy="0"/>
-          <a:chOff x="0" y="0"/>
-          <a:chExt cx="0" cy="0"/>
-        </a:xfrm>
-      </p:grpSpPr>
-      <p:sp>
-        <p:nvSpPr>
-          <p:cNvPr id="14338" name="Rectangle 2"/>
-          <p:cNvSpPr>
-            <a:spLocks noGrp="1" noChangeArrowheads="1"/>
-          </p:cNvSpPr>
-          <p:nvPr>
-            <p:ph type="title"/>
-          </p:nvPr>
-        </p:nvSpPr>
-        <p:spPr>
-          <a:xfrm>
-            <a:off x="533400" y="381000"/>
-            <a:ext cx="8382000" cy="838200"/>
-          </a:xfrm>
-        </p:spPr>
-        <p:txBody>
-          <a:bodyPr>
-            <a:normAutofit/>
-          </a:bodyPr>
-          <a:lstStyle/>
-          <a:p>
-            <a:pPr eaLnBrk="1" hangingPunct="1"/>
-            <a:r>
-              <a:rPr lang="en-US" altLang="zh-CN" sz="3600" dirty="0">
-                <a:solidFill>
-                  <a:srgbClr val="0000FF"/>
-                </a:solidFill>
-              </a:rPr>
-              <a:t>Pointers and Arrays</a:t>
-            </a:r>
-            <a:endParaRPr lang="en-GB" sz="3600" dirty="0">
-              <a:solidFill>
-                <a:srgbClr val="0000FF"/>
-              </a:solidFill>
-            </a:endParaRPr>
-          </a:p>
-        </p:txBody>
-      </p:sp>
-      <p:sp>
-        <p:nvSpPr>
-          <p:cNvPr id="2" name="Footer Placeholder 1">
-            <a:extLst>
-              <a:ext uri="{FF2B5EF4-FFF2-40B4-BE49-F238E27FC236}">
-                <a16:creationId xmlns:a16="http://schemas.microsoft.com/office/drawing/2014/main" id="{2C730D45-31EF-F82A-B4A6-311999C339B8}"/>
-              </a:ext>
-            </a:extLst>
-          </p:cNvPr>
-          <p:cNvSpPr>
-            <a:spLocks noGrp="1"/>
-          </p:cNvSpPr>
-          <p:nvPr>
-            <p:ph type="ftr" sz="quarter" idx="11"/>
-          </p:nvPr>
-        </p:nvSpPr>
-        <p:spPr/>
-        <p:txBody>
-          <a:bodyPr/>
-          <a:lstStyle/>
-          <a:p>
-            <a:pPr algn="l">
-              <a:defRPr/>
-            </a:pPr>
-            <a:r>
-              <a:rPr lang="en-US"/>
-              <a:t>CS1010: Programming Methodology</a:t>
-            </a:r>
-          </a:p>
-        </p:txBody>
-      </p:sp>
-      <p:sp>
-        <p:nvSpPr>
-          <p:cNvPr id="3" name="Slide Number Placeholder 2">
-            <a:extLst>
-              <a:ext uri="{FF2B5EF4-FFF2-40B4-BE49-F238E27FC236}">
-                <a16:creationId xmlns:a16="http://schemas.microsoft.com/office/drawing/2014/main" id="{431E835B-B30C-9E87-9DB8-70B6CDEE9704}"/>
-              </a:ext>
-            </a:extLst>
-          </p:cNvPr>
-          <p:cNvSpPr>
-            <a:spLocks noGrp="1"/>
-          </p:cNvSpPr>
-          <p:nvPr>
-            <p:ph type="sldNum" sz="quarter" idx="12"/>
-          </p:nvPr>
-        </p:nvSpPr>
-        <p:spPr/>
-        <p:txBody>
-          <a:bodyPr/>
-          <a:lstStyle/>
-          <a:p>
-            <a:pPr>
-              <a:defRPr/>
-            </a:pPr>
-            <a:r>
-              <a:rPr lang="en-US" dirty="0"/>
-              <a:t>Week8R - </a:t>
-            </a:r>
-            <a:fld id="{2E4790E1-2590-4AEE-892D-AB46A7688113}" type="slidenum">
-              <a:rPr lang="en-US" smtClean="0"/>
-              <a:pPr>
-                <a:defRPr/>
-              </a:pPr>
-              <a:t>5</a:t>
-            </a:fld>
-            <a:endParaRPr lang="en-US" dirty="0"/>
-          </a:p>
-        </p:txBody>
-      </p:sp>
-      <p:sp>
-        <p:nvSpPr>
-          <p:cNvPr id="4" name="Content Placeholder 5">
-            <a:extLst>
-              <a:ext uri="{FF2B5EF4-FFF2-40B4-BE49-F238E27FC236}">
-                <a16:creationId xmlns:a16="http://schemas.microsoft.com/office/drawing/2014/main" id="{E1783DF5-5055-11C4-2722-992E62E81F11}"/>
-              </a:ext>
-            </a:extLst>
-          </p:cNvPr>
-          <p:cNvSpPr>
-            <a:spLocks noGrp="1"/>
-          </p:cNvSpPr>
-          <p:nvPr>
-            <p:ph idx="1"/>
-          </p:nvPr>
-        </p:nvSpPr>
-        <p:spPr>
-          <a:xfrm>
-            <a:off x="587375" y="1187450"/>
-            <a:ext cx="8292856" cy="5449656"/>
-          </a:xfrm>
-        </p:spPr>
-        <p:txBody>
-          <a:bodyPr>
-            <a:noAutofit/>
-          </a:bodyPr>
-          <a:lstStyle/>
-          <a:p>
-            <a:pPr marL="347663" indent="-347663">
-              <a:spcBef>
-                <a:spcPts val="600"/>
-              </a:spcBef>
-              <a:buClr>
-                <a:schemeClr val="tx1">
-                  <a:lumMod val="90000"/>
-                  <a:lumOff val="10000"/>
-                </a:schemeClr>
-              </a:buClr>
-              <a:buSzPct val="100000"/>
-              <a:buFont typeface="Wingdings" panose="05000000000000000000" pitchFamily="2" charset="2"/>
-              <a:buChar char="§"/>
-              <a:defRPr/>
-            </a:pPr>
-            <a:r>
-              <a:rPr lang="en-US" sz="2800" dirty="0"/>
-              <a:t>They are closely related and often equivalent.</a:t>
-            </a:r>
-          </a:p>
-          <a:p>
-            <a:pPr marL="347663" indent="-347663">
-              <a:spcBef>
-                <a:spcPts val="600"/>
-              </a:spcBef>
-              <a:buClr>
-                <a:schemeClr val="tx1">
-                  <a:lumMod val="90000"/>
-                  <a:lumOff val="10000"/>
-                </a:schemeClr>
-              </a:buClr>
-              <a:buSzPct val="100000"/>
-              <a:buFont typeface="Wingdings" panose="05000000000000000000" pitchFamily="2" charset="2"/>
-              <a:buChar char="§"/>
-              <a:defRPr/>
-            </a:pPr>
-            <a:endParaRPr lang="en-US" sz="2800" dirty="0"/>
-          </a:p>
-          <a:p>
-            <a:pPr marL="347663" indent="-347663">
-              <a:spcBef>
-                <a:spcPts val="600"/>
-              </a:spcBef>
-              <a:buClr>
-                <a:schemeClr val="tx1">
-                  <a:lumMod val="90000"/>
-                  <a:lumOff val="10000"/>
-                </a:schemeClr>
-              </a:buClr>
-              <a:buSzPct val="100000"/>
-              <a:buFont typeface="Wingdings" panose="05000000000000000000" pitchFamily="2" charset="2"/>
-              <a:buChar char="§"/>
-              <a:defRPr/>
-            </a:pPr>
-            <a:endParaRPr lang="en-US" sz="2800" dirty="0"/>
-          </a:p>
-          <a:p>
-            <a:pPr marL="0" indent="0">
-              <a:spcBef>
-                <a:spcPts val="600"/>
-              </a:spcBef>
-              <a:buClr>
-                <a:schemeClr val="tx1">
-                  <a:lumMod val="90000"/>
-                  <a:lumOff val="10000"/>
-                </a:schemeClr>
-              </a:buClr>
-              <a:buSzPct val="100000"/>
-              <a:buNone/>
-              <a:defRPr/>
-            </a:pPr>
-            <a:endParaRPr lang="en-US" sz="1200" dirty="0"/>
-          </a:p>
-          <a:p>
-            <a:pPr marL="621983" lvl="1" indent="-347663">
-              <a:spcBef>
-                <a:spcPts val="600"/>
-              </a:spcBef>
-              <a:buClr>
-                <a:schemeClr val="tx1">
-                  <a:lumMod val="90000"/>
-                  <a:lumOff val="10000"/>
-                </a:schemeClr>
-              </a:buClr>
-              <a:buSzPct val="100000"/>
-              <a:buFont typeface="Wingdings" panose="05000000000000000000" pitchFamily="2" charset="2"/>
-              <a:buChar char="§"/>
-              <a:defRPr/>
-            </a:pPr>
-            <a:r>
-              <a:rPr lang="en-US" sz="2400" dirty="0" err="1"/>
-              <a:t>ptr</a:t>
-            </a:r>
-            <a:r>
-              <a:rPr lang="en-US" sz="2400" dirty="0"/>
-              <a:t> is the same as &amp;a[0], *</a:t>
-            </a:r>
-            <a:r>
-              <a:rPr lang="en-US" sz="2400" dirty="0" err="1"/>
-              <a:t>ptr</a:t>
-            </a:r>
-            <a:r>
-              <a:rPr lang="en-US" sz="2400" dirty="0"/>
-              <a:t> is equivalent to a[0]</a:t>
-            </a:r>
-          </a:p>
-          <a:p>
-            <a:pPr marL="621983" lvl="1" indent="-347663">
-              <a:spcBef>
-                <a:spcPts val="600"/>
-              </a:spcBef>
-              <a:buClr>
-                <a:schemeClr val="tx1">
-                  <a:lumMod val="90000"/>
-                  <a:lumOff val="10000"/>
-                </a:schemeClr>
-              </a:buClr>
-              <a:buSzPct val="100000"/>
-              <a:buFont typeface="Wingdings" panose="05000000000000000000" pitchFamily="2" charset="2"/>
-              <a:buChar char="§"/>
-              <a:defRPr/>
-            </a:pPr>
-            <a:r>
-              <a:rPr lang="en-US" sz="2400" dirty="0" err="1"/>
-              <a:t>ptr</a:t>
-            </a:r>
-            <a:r>
-              <a:rPr lang="en-US" sz="2400" dirty="0"/>
-              <a:t> + 1 is the same &amp;a[1], *(</a:t>
-            </a:r>
-            <a:r>
-              <a:rPr lang="en-US" sz="2400" dirty="0" err="1"/>
-              <a:t>ptr</a:t>
-            </a:r>
-            <a:r>
-              <a:rPr lang="en-US" sz="2400" dirty="0"/>
-              <a:t> + 1) is equivalent to a[1]</a:t>
-            </a:r>
-          </a:p>
-          <a:p>
-            <a:pPr marL="621983" lvl="1" indent="-347663">
-              <a:spcBef>
-                <a:spcPts val="600"/>
-              </a:spcBef>
-              <a:buClr>
-                <a:schemeClr val="tx1">
-                  <a:lumMod val="90000"/>
-                  <a:lumOff val="10000"/>
-                </a:schemeClr>
-              </a:buClr>
-              <a:buSzPct val="100000"/>
-              <a:buFont typeface="Wingdings" panose="05000000000000000000" pitchFamily="2" charset="2"/>
-              <a:buChar char="§"/>
-              <a:defRPr/>
-            </a:pPr>
-            <a:r>
-              <a:rPr lang="en-US" sz="2400" dirty="0"/>
-              <a:t>…</a:t>
-            </a:r>
-          </a:p>
-          <a:p>
-            <a:pPr marL="621983" lvl="1" indent="-347663">
-              <a:spcBef>
-                <a:spcPts val="600"/>
-              </a:spcBef>
-              <a:buClr>
-                <a:schemeClr val="tx1">
-                  <a:lumMod val="90000"/>
-                  <a:lumOff val="10000"/>
-                </a:schemeClr>
-              </a:buClr>
-              <a:buSzPct val="100000"/>
-              <a:buFont typeface="Wingdings" panose="05000000000000000000" pitchFamily="2" charset="2"/>
-              <a:buChar char="§"/>
-              <a:defRPr/>
-            </a:pPr>
-            <a:r>
-              <a:rPr lang="en-US" sz="2400" dirty="0" err="1"/>
-              <a:t>ptr</a:t>
-            </a:r>
-            <a:r>
-              <a:rPr lang="en-US" sz="2400" dirty="0"/>
-              <a:t> + </a:t>
-            </a:r>
-            <a:r>
-              <a:rPr lang="en-US" sz="2400" dirty="0" err="1"/>
-              <a:t>i</a:t>
-            </a:r>
-            <a:r>
-              <a:rPr lang="en-US" sz="2400" dirty="0"/>
-              <a:t> is the same as &amp;a[</a:t>
-            </a:r>
-            <a:r>
-              <a:rPr lang="en-US" sz="2400" dirty="0" err="1"/>
-              <a:t>i</a:t>
-            </a:r>
-            <a:r>
-              <a:rPr lang="en-US" sz="2400" dirty="0"/>
-              <a:t>], *(</a:t>
-            </a:r>
-            <a:r>
-              <a:rPr lang="en-US" sz="2400" dirty="0" err="1"/>
-              <a:t>ptr</a:t>
-            </a:r>
-            <a:r>
-              <a:rPr lang="en-US" sz="2400" dirty="0"/>
-              <a:t> + </a:t>
-            </a:r>
-            <a:r>
-              <a:rPr lang="en-US" sz="2400" dirty="0" err="1"/>
-              <a:t>i</a:t>
-            </a:r>
-            <a:r>
-              <a:rPr lang="en-US" sz="2400" dirty="0"/>
-              <a:t>) is equivalent to a[</a:t>
-            </a:r>
-            <a:r>
-              <a:rPr lang="en-US" sz="2400" dirty="0" err="1"/>
-              <a:t>i</a:t>
-            </a:r>
-            <a:r>
-              <a:rPr lang="en-US" sz="2400" dirty="0"/>
-              <a:t>]</a:t>
-            </a:r>
-          </a:p>
-          <a:p>
-            <a:pPr marL="621983" lvl="1" indent="-347663">
-              <a:spcBef>
-                <a:spcPts val="600"/>
-              </a:spcBef>
-              <a:buClr>
-                <a:schemeClr val="tx1">
-                  <a:lumMod val="90000"/>
-                  <a:lumOff val="10000"/>
-                </a:schemeClr>
-              </a:buClr>
-              <a:buSzPct val="100000"/>
-              <a:buFont typeface="Wingdings" panose="05000000000000000000" pitchFamily="2" charset="2"/>
-              <a:buChar char="§"/>
-              <a:defRPr/>
-            </a:pPr>
-            <a:endParaRPr lang="en-US" sz="2400" dirty="0"/>
-          </a:p>
-          <a:p>
-            <a:pPr marL="347663" indent="-347663">
-              <a:spcBef>
-                <a:spcPts val="600"/>
-              </a:spcBef>
-              <a:buClr>
-                <a:schemeClr val="tx1">
-                  <a:lumMod val="90000"/>
-                  <a:lumOff val="10000"/>
-                </a:schemeClr>
-              </a:buClr>
-              <a:buSzPct val="100000"/>
-              <a:buFont typeface="Wingdings" panose="05000000000000000000" pitchFamily="2" charset="2"/>
-              <a:buChar char="§"/>
-              <a:defRPr/>
-            </a:pPr>
-            <a:r>
-              <a:rPr lang="en-US" sz="2800" dirty="0"/>
-              <a:t>For problem solving with arrays, it is fine to stick to the array notation in general.</a:t>
-            </a:r>
-          </a:p>
-          <a:p>
-            <a:pPr marL="621983" lvl="1" indent="-347663">
-              <a:spcBef>
-                <a:spcPts val="600"/>
-              </a:spcBef>
-              <a:buClr>
-                <a:schemeClr val="tx1">
-                  <a:lumMod val="90000"/>
-                  <a:lumOff val="10000"/>
-                </a:schemeClr>
-              </a:buClr>
-              <a:buSzPct val="100000"/>
-              <a:buFont typeface="Wingdings" panose="05000000000000000000" pitchFamily="2" charset="2"/>
-              <a:buChar char="§"/>
-              <a:defRPr/>
-            </a:pPr>
-            <a:endParaRPr lang="en-US" sz="2400" dirty="0"/>
-          </a:p>
-          <a:p>
-            <a:pPr marL="347663" indent="-347663">
-              <a:spcBef>
-                <a:spcPts val="600"/>
-              </a:spcBef>
-              <a:buClr>
-                <a:schemeClr val="tx1">
-                  <a:lumMod val="90000"/>
-                  <a:lumOff val="10000"/>
-                </a:schemeClr>
-              </a:buClr>
-              <a:buSzPct val="100000"/>
-              <a:buFont typeface="Wingdings" panose="05000000000000000000" pitchFamily="2" charset="2"/>
-              <a:buChar char="§"/>
-              <a:defRPr/>
-            </a:pPr>
-            <a:endParaRPr lang="en-US" dirty="0"/>
-          </a:p>
-          <a:p>
-            <a:pPr marL="621983" lvl="1" indent="-347663">
-              <a:spcBef>
-                <a:spcPts val="600"/>
-              </a:spcBef>
-              <a:buClr>
-                <a:schemeClr val="tx1">
-                  <a:lumMod val="90000"/>
-                  <a:lumOff val="10000"/>
-                </a:schemeClr>
-              </a:buClr>
-              <a:buSzPct val="100000"/>
-              <a:buFont typeface="Wingdings" panose="05000000000000000000" pitchFamily="2" charset="2"/>
-              <a:buChar char="§"/>
-              <a:defRPr/>
-            </a:pPr>
-            <a:endParaRPr lang="en-US" dirty="0"/>
-          </a:p>
-        </p:txBody>
-      </p:sp>
-      <p:sp>
-        <p:nvSpPr>
-          <p:cNvPr id="5" name="TextBox 4">
-            <a:extLst>
-              <a:ext uri="{FF2B5EF4-FFF2-40B4-BE49-F238E27FC236}">
-                <a16:creationId xmlns:a16="http://schemas.microsoft.com/office/drawing/2014/main" id="{1F335067-2DF1-C857-A247-B290D4559EF7}"/>
-              </a:ext>
-            </a:extLst>
-          </p:cNvPr>
-          <p:cNvSpPr txBox="1"/>
-          <p:nvPr/>
-        </p:nvSpPr>
-        <p:spPr>
-          <a:xfrm>
-            <a:off x="1083396" y="1795579"/>
-            <a:ext cx="1706103" cy="923330"/>
-          </a:xfrm>
-          <a:prstGeom prst="rect">
-            <a:avLst/>
-          </a:prstGeom>
-          <a:solidFill>
-            <a:schemeClr val="bg1"/>
-          </a:solidFill>
-          <a:ln w="19050">
-            <a:solidFill>
-              <a:schemeClr val="tx1"/>
-            </a:solidFill>
-          </a:ln>
-        </p:spPr>
-        <p:style>
-          <a:lnRef idx="2">
-            <a:schemeClr val="accent6"/>
-          </a:lnRef>
-          <a:fillRef idx="1">
-            <a:schemeClr val="lt1"/>
-          </a:fillRef>
-          <a:effectRef idx="0">
-            <a:schemeClr val="accent6"/>
-          </a:effectRef>
-          <a:fontRef idx="minor">
-            <a:schemeClr val="dk1"/>
-          </a:fontRef>
-        </p:style>
-        <p:txBody>
-          <a:bodyPr wrap="square" lIns="91440" tIns="45720" rIns="91440" bIns="45720" rtlCol="0" anchor="t">
-            <a:spAutoFit/>
-          </a:bodyPr>
-          <a:lstStyle/>
-          <a:p>
-            <a:pPr>
-              <a:tabLst>
-                <a:tab pos="347663" algn="l"/>
-                <a:tab pos="682625" algn="l"/>
-                <a:tab pos="1087438" algn="l"/>
-                <a:tab pos="1377950" algn="l"/>
-                <a:tab pos="1712913" algn="l"/>
-              </a:tabLst>
-            </a:pPr>
-            <a:r>
-              <a:rPr lang="en-US" b="1" dirty="0">
-                <a:solidFill>
-                  <a:srgbClr val="0000FF"/>
-                </a:solidFill>
-                <a:latin typeface="Courier New" panose="02070309020205020404" pitchFamily="49" charset="0"/>
-                <a:cs typeface="Courier New" panose="02070309020205020404" pitchFamily="49" charset="0"/>
-              </a:rPr>
-              <a:t>long</a:t>
-            </a:r>
-            <a:r>
-              <a:rPr lang="en-US" b="1" dirty="0">
-                <a:solidFill>
-                  <a:schemeClr val="tx1"/>
-                </a:solidFill>
-                <a:latin typeface="Courier New" panose="02070309020205020404" pitchFamily="49" charset="0"/>
-                <a:cs typeface="Courier New" panose="02070309020205020404" pitchFamily="49" charset="0"/>
-              </a:rPr>
-              <a:t> a[</a:t>
-            </a:r>
-            <a:r>
-              <a:rPr lang="en-US" b="1" dirty="0">
-                <a:solidFill>
-                  <a:srgbClr val="C00000"/>
-                </a:solidFill>
-                <a:latin typeface="Courier New" panose="02070309020205020404" pitchFamily="49" charset="0"/>
-                <a:cs typeface="Courier New" panose="02070309020205020404" pitchFamily="49" charset="0"/>
-              </a:rPr>
-              <a:t>10</a:t>
-            </a:r>
-            <a:r>
-              <a:rPr lang="en-US" b="1" dirty="0">
-                <a:solidFill>
-                  <a:schemeClr val="tx1"/>
-                </a:solidFill>
-                <a:latin typeface="Courier New" panose="02070309020205020404" pitchFamily="49" charset="0"/>
-                <a:cs typeface="Courier New" panose="02070309020205020404" pitchFamily="49" charset="0"/>
-              </a:rPr>
-              <a:t>];</a:t>
-            </a:r>
-          </a:p>
-          <a:p>
-            <a:pPr>
-              <a:tabLst>
-                <a:tab pos="347663" algn="l"/>
-                <a:tab pos="682625" algn="l"/>
-                <a:tab pos="1087438" algn="l"/>
-                <a:tab pos="1377950" algn="l"/>
-                <a:tab pos="1712913" algn="l"/>
-              </a:tabLst>
-            </a:pPr>
-            <a:r>
-              <a:rPr lang="en-US" b="1" dirty="0">
-                <a:solidFill>
-                  <a:srgbClr val="0000FF"/>
-                </a:solidFill>
-                <a:latin typeface="Courier New" panose="02070309020205020404" pitchFamily="49" charset="0"/>
-                <a:cs typeface="Courier New" panose="02070309020205020404" pitchFamily="49" charset="0"/>
-              </a:rPr>
-              <a:t>long</a:t>
-            </a:r>
-            <a:r>
-              <a:rPr lang="en-US" b="1" dirty="0">
-                <a:solidFill>
-                  <a:schemeClr val="tx1"/>
-                </a:solidFill>
-                <a:latin typeface="Courier New" panose="02070309020205020404" pitchFamily="49" charset="0"/>
-                <a:cs typeface="Courier New" panose="02070309020205020404" pitchFamily="49" charset="0"/>
-              </a:rPr>
-              <a:t> *</a:t>
-            </a:r>
-            <a:r>
-              <a:rPr lang="en-US" b="1" dirty="0" err="1">
-                <a:solidFill>
-                  <a:schemeClr val="tx1"/>
-                </a:solidFill>
-                <a:latin typeface="Courier New" panose="02070309020205020404" pitchFamily="49" charset="0"/>
-                <a:cs typeface="Courier New" panose="02070309020205020404" pitchFamily="49" charset="0"/>
-              </a:rPr>
-              <a:t>ptr</a:t>
-            </a:r>
-            <a:r>
-              <a:rPr lang="en-US" b="1" dirty="0">
-                <a:solidFill>
-                  <a:schemeClr val="tx1"/>
-                </a:solidFill>
-                <a:latin typeface="Courier New" panose="02070309020205020404" pitchFamily="49" charset="0"/>
-                <a:cs typeface="Courier New" panose="02070309020205020404" pitchFamily="49" charset="0"/>
-              </a:rPr>
-              <a:t>;</a:t>
-            </a:r>
-          </a:p>
-          <a:p>
-            <a:pPr>
-              <a:tabLst>
-                <a:tab pos="347663" algn="l"/>
-                <a:tab pos="682625" algn="l"/>
-                <a:tab pos="1087438" algn="l"/>
-                <a:tab pos="1377950" algn="l"/>
-                <a:tab pos="1712913" algn="l"/>
-              </a:tabLst>
-            </a:pPr>
-            <a:r>
-              <a:rPr lang="en-US" b="1" dirty="0" err="1">
-                <a:solidFill>
-                  <a:schemeClr val="tx1"/>
-                </a:solidFill>
-                <a:latin typeface="Courier New" panose="02070309020205020404" pitchFamily="49" charset="0"/>
-                <a:cs typeface="Courier New" panose="02070309020205020404" pitchFamily="49" charset="0"/>
-              </a:rPr>
-              <a:t>ptr</a:t>
-            </a:r>
-            <a:r>
-              <a:rPr lang="en-US" b="1" dirty="0">
-                <a:solidFill>
-                  <a:schemeClr val="tx1"/>
-                </a:solidFill>
-                <a:latin typeface="Courier New" panose="02070309020205020404" pitchFamily="49" charset="0"/>
-                <a:cs typeface="Courier New" panose="02070309020205020404" pitchFamily="49" charset="0"/>
-              </a:rPr>
-              <a:t> = a;</a:t>
-            </a:r>
-          </a:p>
-        </p:txBody>
-      </p:sp>
-      <p:sp>
-        <p:nvSpPr>
-          <p:cNvPr id="6" name="Date Placeholder 5">
-            <a:extLst>
-              <a:ext uri="{FF2B5EF4-FFF2-40B4-BE49-F238E27FC236}">
-                <a16:creationId xmlns:a16="http://schemas.microsoft.com/office/drawing/2014/main" id="{FE571DCD-2AA8-6E1D-0132-D5358DB54D8B}"/>
-              </a:ext>
-            </a:extLst>
-          </p:cNvPr>
-          <p:cNvSpPr>
-            <a:spLocks noGrp="1"/>
-          </p:cNvSpPr>
-          <p:nvPr>
-            <p:ph type="dt" sz="half" idx="10"/>
-          </p:nvPr>
-        </p:nvSpPr>
-        <p:spPr/>
-        <p:txBody>
-          <a:bodyPr/>
-          <a:lstStyle/>
-          <a:p>
-            <a:pPr>
-              <a:defRPr/>
-            </a:pPr>
-            <a:r>
-              <a:rPr lang="en-US"/>
-              <a:t>© NUS</a:t>
-            </a:r>
-          </a:p>
-        </p:txBody>
-      </p:sp>
-    </p:spTree>
-    <p:extLst>
-      <p:ext uri="{BB962C8B-B14F-4D97-AF65-F5344CB8AC3E}">
-        <p14:creationId xmlns:p14="http://schemas.microsoft.com/office/powerpoint/2010/main" val="3150831465"/>
       </p:ext>
     </p:extLst>
   </p:cSld>
